--- a/Data_Analysis_Project_Report.pptx
+++ b/Data_Analysis_Project_Report.pptx
@@ -5,20 +5,19 @@
     <p:sldMasterId id="2147483648" r:id="rId1"/>
   </p:sldMasterIdLst>
   <p:notesMasterIdLst>
-    <p:notesMasterId r:id="rId13"/>
+    <p:notesMasterId r:id="rId12"/>
   </p:notesMasterIdLst>
   <p:sldIdLst>
     <p:sldId id="256" r:id="rId2"/>
     <p:sldId id="258" r:id="rId3"/>
     <p:sldId id="257" r:id="rId4"/>
-    <p:sldId id="259" r:id="rId5"/>
-    <p:sldId id="260" r:id="rId6"/>
-    <p:sldId id="261" r:id="rId7"/>
-    <p:sldId id="262" r:id="rId8"/>
-    <p:sldId id="263" r:id="rId9"/>
-    <p:sldId id="264" r:id="rId10"/>
-    <p:sldId id="265" r:id="rId11"/>
-    <p:sldId id="266" r:id="rId12"/>
+    <p:sldId id="260" r:id="rId5"/>
+    <p:sldId id="261" r:id="rId6"/>
+    <p:sldId id="262" r:id="rId7"/>
+    <p:sldId id="263" r:id="rId8"/>
+    <p:sldId id="264" r:id="rId9"/>
+    <p:sldId id="265" r:id="rId10"/>
+    <p:sldId id="266" r:id="rId11"/>
   </p:sldIdLst>
   <p:sldSz cx="9144000" cy="5143500" type="screen16x9"/>
   <p:notesSz cx="5143500" cy="9144000"/>
@@ -126,7 +125,6 @@
           <p14:sldIdLst>
             <p14:sldId id="258"/>
             <p14:sldId id="257"/>
-            <p14:sldId id="259"/>
             <p14:sldId id="260"/>
             <p14:sldId id="261"/>
             <p14:sldId id="262"/>
@@ -442,90 +440,6 @@
 </p:notes>
 </file>
 
-<file path=ppt/notesSlides/notesSlide11.xml><?xml version="1.0" encoding="utf-8"?>
-<p:notes xmlns:a="http://schemas.openxmlformats.org/drawingml/2006/main" xmlns:r="http://schemas.openxmlformats.org/officeDocument/2006/relationships" xmlns:p="http://schemas.openxmlformats.org/presentationml/2006/main">
-  <p:cSld>
-    <p:spTree>
-      <p:nvGrpSpPr>
-        <p:cNvPr id="1" name=""/>
-        <p:cNvGrpSpPr/>
-        <p:nvPr/>
-      </p:nvGrpSpPr>
-      <p:grpSpPr>
-        <a:xfrm>
-          <a:off x="0" y="0"/>
-          <a:ext cx="0" cy="0"/>
-          <a:chOff x="0" y="0"/>
-          <a:chExt cx="0" cy="0"/>
-        </a:xfrm>
-      </p:grpSpPr>
-      <p:sp>
-        <p:nvSpPr>
-          <p:cNvPr id="2" name="Slide Image Placeholder 1"/>
-          <p:cNvSpPr>
-            <a:spLocks noGrp="1" noRot="1" noChangeAspect="1"/>
-          </p:cNvSpPr>
-          <p:nvPr>
-            <p:ph type="sldImg"/>
-          </p:nvPr>
-        </p:nvSpPr>
-        <p:spPr/>
-      </p:sp>
-      <p:sp>
-        <p:nvSpPr>
-          <p:cNvPr id="3" name="Notes Placeholder 2"/>
-          <p:cNvSpPr>
-            <a:spLocks noGrp="1"/>
-          </p:cNvSpPr>
-          <p:nvPr>
-            <p:ph type="body" idx="1"/>
-          </p:nvPr>
-        </p:nvSpPr>
-        <p:spPr/>
-        <p:txBody>
-          <a:bodyPr/>
-          <a:lstStyle/>
-          <a:p>
-            <a:endParaRPr lang="en-US" dirty="0"/>
-          </a:p>
-        </p:txBody>
-      </p:sp>
-      <p:sp>
-        <p:nvSpPr>
-          <p:cNvPr id="4" name="Slide Number Placeholder 3"/>
-          <p:cNvSpPr>
-            <a:spLocks noGrp="1"/>
-          </p:cNvSpPr>
-          <p:nvPr>
-            <p:ph type="sldNum" sz="quarter" idx="10"/>
-          </p:nvPr>
-        </p:nvSpPr>
-        <p:spPr/>
-        <p:txBody>
-          <a:bodyPr/>
-          <a:lstStyle/>
-          <a:p>
-            <a:fld id="{F7021451-1387-4CA6-816F-3879F97B5CBC}" type="slidenum">
-              <a:rPr lang="en-US"/>
-              <a:t>11</a:t>
-            </a:fld>
-            <a:endParaRPr lang="en-US"/>
-          </a:p>
-        </p:txBody>
-      </p:sp>
-    </p:spTree>
-    <p:extLst>
-      <p:ext uri="{BB962C8B-B14F-4D97-AF65-F5344CB8AC3E}">
-        <p14:creationId xmlns:p14="http://schemas.microsoft.com/office/powerpoint/2010/main" val="1024086991"/>
-      </p:ext>
-    </p:extLst>
-  </p:cSld>
-  <p:clrMapOvr>
-    <a:masterClrMapping/>
-  </p:clrMapOvr>
-</p:notes>
-</file>
-
 <file path=ppt/notesSlides/notesSlide2.xml><?xml version="1.0" encoding="utf-8"?>
 <p:notes xmlns:a="http://schemas.openxmlformats.org/drawingml/2006/main" xmlns:r="http://schemas.openxmlformats.org/officeDocument/2006/relationships" xmlns:p="http://schemas.openxmlformats.org/presentationml/2006/main">
   <p:cSld>
@@ -1359,7 +1273,7 @@
           </a:prstGeom>
           <a:extLst>
             <a:ext uri="{C572A759-6A51-4108-AA02-DFA0A04FC94B}">
-              <ma14:wrappingTextBoxFlag xmlns:ma14="http://schemas.microsoft.com/office/mac/drawingml/2011/main" xmlns="" val="0"/>
+              <ma14:wrappingTextBoxFlag xmlns="" xmlns:ma14="http://schemas.microsoft.com/office/mac/drawingml/2011/main" val="0"/>
             </a:ext>
           </a:extLst>
         </p:spPr>
@@ -1523,7 +1437,7 @@
           </a:prstGeom>
           <a:extLst>
             <a:ext uri="{C572A759-6A51-4108-AA02-DFA0A04FC94B}">
-              <ma14:wrappingTextBoxFlag xmlns:ma14="http://schemas.microsoft.com/office/mac/drawingml/2011/main" xmlns="" val="0"/>
+              <ma14:wrappingTextBoxFlag xmlns="" xmlns:ma14="http://schemas.microsoft.com/office/mac/drawingml/2011/main" val="0"/>
             </a:ext>
           </a:extLst>
         </p:spPr>
@@ -1598,7 +1512,7 @@
           </a:prstGeom>
           <a:extLst>
             <a:ext uri="{C572A759-6A51-4108-AA02-DFA0A04FC94B}">
-              <ma14:wrappingTextBoxFlag xmlns:ma14="http://schemas.microsoft.com/office/mac/drawingml/2011/main" xmlns="" val="0"/>
+              <ma14:wrappingTextBoxFlag xmlns="" xmlns:ma14="http://schemas.microsoft.com/office/mac/drawingml/2011/main" val="0"/>
             </a:ext>
           </a:extLst>
         </p:spPr>
@@ -2520,7 +2434,7 @@
           </a:prstGeom>
           <a:extLst>
             <a:ext uri="{C572A759-6A51-4108-AA02-DFA0A04FC94B}">
-              <ma14:wrappingTextBoxFlag xmlns:ma14="http://schemas.microsoft.com/office/mac/drawingml/2011/main" xmlns="" val="0"/>
+              <ma14:wrappingTextBoxFlag xmlns="" xmlns:ma14="http://schemas.microsoft.com/office/mac/drawingml/2011/main" val="0"/>
             </a:ext>
           </a:extLst>
         </p:spPr>
@@ -3273,3069 +3187,6 @@
 
 <file path=ppt/slides/slide10.xml><?xml version="1.0" encoding="utf-8"?>
 <p:sld xmlns:a="http://schemas.openxmlformats.org/drawingml/2006/main" xmlns:r="http://schemas.openxmlformats.org/officeDocument/2006/relationships" xmlns:p="http://schemas.openxmlformats.org/presentationml/2006/main">
-  <p:cSld name="Slide 10">
-    <p:spTree>
-      <p:nvGrpSpPr>
-        <p:cNvPr id="1" name=""/>
-        <p:cNvGrpSpPr/>
-        <p:nvPr/>
-      </p:nvGrpSpPr>
-      <p:grpSpPr>
-        <a:xfrm>
-          <a:off x="0" y="0"/>
-          <a:ext cx="0" cy="0"/>
-          <a:chOff x="0" y="0"/>
-          <a:chExt cx="0" cy="0"/>
-        </a:xfrm>
-      </p:grpSpPr>
-      <p:sp>
-        <p:nvSpPr>
-          <p:cNvPr id="2" name="Text 0"/>
-          <p:cNvSpPr>
-            <a:spLocks noGrp="1"/>
-          </p:cNvSpPr>
-          <p:nvPr>
-            <p:ph type="title" idx="100" hasCustomPrompt="1"/>
-          </p:nvPr>
-        </p:nvSpPr>
-        <p:spPr>
-          <a:xfrm>
-            <a:off x="457200" y="274320"/>
-            <a:ext cx="8229600" cy="731520"/>
-          </a:xfrm>
-          <a:prstGeom prst="rect">
-            <a:avLst/>
-          </a:prstGeom>
-          <a:noFill/>
-          <a:ln/>
-        </p:spPr>
-        <p:txBody>
-          <a:bodyPr wrap="square" lIns="0" tIns="0" rIns="0" bIns="0" rtlCol="0" anchor="ctr"/>
-          <a:lstStyle/>
-          <a:p>
-            <a:pPr marL="0" indent="0" algn="l">
-              <a:buNone/>
-            </a:pPr>
-            <a:r>
-              <a:rPr lang="en-US" sz="3400" b="1" dirty="0">
-                <a:solidFill>
-                  <a:schemeClr val="tx1"/>
-                </a:solidFill>
-                <a:latin typeface="Cambria" pitchFamily="34" charset="0"/>
-                <a:ea typeface="Cambria" pitchFamily="34" charset="-122"/>
-                <a:cs typeface="Cambria" pitchFamily="34" charset="-120"/>
-              </a:rPr>
-              <a:t>Discount chart: the numbers</a:t>
-            </a:r>
-            <a:endParaRPr lang="en-US" sz="3400" dirty="0"/>
-          </a:p>
-        </p:txBody>
-      </p:sp>
-      <p:graphicFrame>
-        <p:nvGraphicFramePr>
-          <p:cNvPr id="11" name="g1_table"/>
-          <p:cNvGraphicFramePr>
-            <a:graphicFrameLocks noGrp="1"/>
-          </p:cNvGraphicFramePr>
-          <p:nvPr>
-            <p:extLst>
-              <p:ext uri="{D42A27DB-BD31-4B8C-83A1-F6EECF244321}">
-                <p14:modId xmlns:p14="http://schemas.microsoft.com/office/powerpoint/2010/main" val="1579011935"/>
-              </p:ext>
-            </p:extLst>
-          </p:nvPr>
-        </p:nvGraphicFramePr>
-        <p:xfrm>
-          <a:off x="457200" y="1143000"/>
-          <a:ext cx="4023360" cy="3291840"/>
-        </p:xfrm>
-        <a:graphic>
-          <a:graphicData uri="http://schemas.openxmlformats.org/drawingml/2006/table">
-            <a:tbl>
-              <a:tblPr/>
-              <a:tblGrid>
-                <a:gridCol w="1188720">
-                  <a:extLst>
-                    <a:ext uri="{9D8B030D-6E8A-4147-A177-3AD203B41FA5}">
-                      <a16:colId xmlns:a16="http://schemas.microsoft.com/office/drawing/2014/main" val="20000"/>
-                    </a:ext>
-                  </a:extLst>
-                </a:gridCol>
-                <a:gridCol w="1554480">
-                  <a:extLst>
-                    <a:ext uri="{9D8B030D-6E8A-4147-A177-3AD203B41FA5}">
-                      <a16:colId xmlns:a16="http://schemas.microsoft.com/office/drawing/2014/main" val="20001"/>
-                    </a:ext>
-                  </a:extLst>
-                </a:gridCol>
-                <a:gridCol w="1280160">
-                  <a:extLst>
-                    <a:ext uri="{9D8B030D-6E8A-4147-A177-3AD203B41FA5}">
-                      <a16:colId xmlns:a16="http://schemas.microsoft.com/office/drawing/2014/main" val="20002"/>
-                    </a:ext>
-                  </a:extLst>
-                </a:gridCol>
-              </a:tblGrid>
-              <a:tr h="329184">
-                <a:tc>
-                  <a:txBody>
-                    <a:bodyPr/>
-                    <a:lstStyle/>
-                    <a:p>
-                      <a:pPr marL="0" indent="0" algn="l">
-                        <a:buNone/>
-                      </a:pPr>
-                      <a:r>
-                        <a:rPr lang="en-US" sz="1400" b="1" dirty="0">
-                          <a:solidFill>
-                            <a:srgbClr val="FFFFFF"/>
-                          </a:solidFill>
-                          <a:latin typeface="+mn-lt" pitchFamily="34" charset="0"/>
-                          <a:ea typeface="+mn-lt" pitchFamily="34" charset="-122"/>
-                          <a:cs typeface="+mn-lt" pitchFamily="34" charset="-120"/>
-                        </a:rPr>
-                        <a:t>Discount</a:t>
-                      </a:r>
-                      <a:endParaRPr lang="en-US" sz="1400" dirty="0">
-                        <a:latin typeface="+mn-lt" charset="0"/>
-                        <a:ea typeface="+mn-lt" charset="0"/>
-                        <a:cs typeface="+mn-lt" charset="0"/>
-                      </a:endParaRPr>
-                    </a:p>
-                  </a:txBody>
-                  <a:tcPr anchor="ctr">
-                    <a:lnL w="9525" cap="flat" cmpd="sng" algn="ctr">
-                      <a:solidFill>
-                        <a:srgbClr val="D5E3E0"/>
-                      </a:solidFill>
-                      <a:prstDash val="solid"/>
-                      <a:round/>
-                      <a:headEnd type="none" w="med" len="med"/>
-                      <a:tailEnd type="none" w="med" len="med"/>
-                    </a:lnL>
-                    <a:lnR w="9525" cap="flat" cmpd="sng" algn="ctr">
-                      <a:solidFill>
-                        <a:srgbClr val="D5E3E0"/>
-                      </a:solidFill>
-                      <a:prstDash val="solid"/>
-                      <a:round/>
-                      <a:headEnd type="none" w="med" len="med"/>
-                      <a:tailEnd type="none" w="med" len="med"/>
-                    </a:lnR>
-                    <a:lnT w="9525" cap="flat" cmpd="sng" algn="ctr">
-                      <a:solidFill>
-                        <a:srgbClr val="D5E3E0"/>
-                      </a:solidFill>
-                      <a:prstDash val="solid"/>
-                      <a:round/>
-                      <a:headEnd type="none" w="med" len="med"/>
-                      <a:tailEnd type="none" w="med" len="med"/>
-                    </a:lnT>
-                    <a:lnB w="9525" cap="flat" cmpd="sng" algn="ctr">
-                      <a:solidFill>
-                        <a:srgbClr val="D5E3E0"/>
-                      </a:solidFill>
-                      <a:prstDash val="solid"/>
-                      <a:round/>
-                      <a:headEnd type="none" w="med" len="med"/>
-                      <a:tailEnd type="none" w="med" len="med"/>
-                    </a:lnB>
-                    <a:solidFill>
-                      <a:srgbClr val="0F766E"/>
-                    </a:solidFill>
-                  </a:tcPr>
-                </a:tc>
-                <a:tc>
-                  <a:txBody>
-                    <a:bodyPr/>
-                    <a:lstStyle/>
-                    <a:p>
-                      <a:pPr marL="0" indent="0" algn="l">
-                        <a:buNone/>
-                      </a:pPr>
-                      <a:r>
-                        <a:rPr lang="en-US" sz="1400" b="1" dirty="0">
-                          <a:solidFill>
-                            <a:srgbClr val="FFFFFF"/>
-                          </a:solidFill>
-                          <a:latin typeface="+mn-lt" pitchFamily="34" charset="0"/>
-                          <a:ea typeface="+mn-lt" pitchFamily="34" charset="-122"/>
-                          <a:cs typeface="+mn-lt" pitchFamily="34" charset="-120"/>
-                        </a:rPr>
-                        <a:t>Profit</a:t>
-                      </a:r>
-                      <a:endParaRPr lang="en-US" sz="1400" dirty="0">
-                        <a:latin typeface="+mn-lt" charset="0"/>
-                        <a:ea typeface="+mn-lt" charset="0"/>
-                        <a:cs typeface="+mn-lt" charset="0"/>
-                      </a:endParaRPr>
-                    </a:p>
-                  </a:txBody>
-                  <a:tcPr anchor="ctr">
-                    <a:lnL w="9525" cap="flat" cmpd="sng" algn="ctr">
-                      <a:solidFill>
-                        <a:srgbClr val="D5E3E0"/>
-                      </a:solidFill>
-                      <a:prstDash val="solid"/>
-                      <a:round/>
-                      <a:headEnd type="none" w="med" len="med"/>
-                      <a:tailEnd type="none" w="med" len="med"/>
-                    </a:lnL>
-                    <a:lnR w="9525" cap="flat" cmpd="sng" algn="ctr">
-                      <a:solidFill>
-                        <a:srgbClr val="D5E3E0"/>
-                      </a:solidFill>
-                      <a:prstDash val="solid"/>
-                      <a:round/>
-                      <a:headEnd type="none" w="med" len="med"/>
-                      <a:tailEnd type="none" w="med" len="med"/>
-                    </a:lnR>
-                    <a:lnT w="9525" cap="flat" cmpd="sng" algn="ctr">
-                      <a:solidFill>
-                        <a:srgbClr val="D5E3E0"/>
-                      </a:solidFill>
-                      <a:prstDash val="solid"/>
-                      <a:round/>
-                      <a:headEnd type="none" w="med" len="med"/>
-                      <a:tailEnd type="none" w="med" len="med"/>
-                    </a:lnT>
-                    <a:lnB w="9525" cap="flat" cmpd="sng" algn="ctr">
-                      <a:solidFill>
-                        <a:srgbClr val="D5E3E0"/>
-                      </a:solidFill>
-                      <a:prstDash val="solid"/>
-                      <a:round/>
-                      <a:headEnd type="none" w="med" len="med"/>
-                      <a:tailEnd type="none" w="med" len="med"/>
-                    </a:lnB>
-                    <a:solidFill>
-                      <a:srgbClr val="0F766E"/>
-                    </a:solidFill>
-                  </a:tcPr>
-                </a:tc>
-                <a:tc>
-                  <a:txBody>
-                    <a:bodyPr/>
-                    <a:lstStyle/>
-                    <a:p>
-                      <a:pPr marL="0" indent="0" algn="l">
-                        <a:buNone/>
-                      </a:pPr>
-                      <a:r>
-                        <a:rPr lang="en-US" sz="1400" b="1" dirty="0">
-                          <a:solidFill>
-                            <a:srgbClr val="FFFFFF"/>
-                          </a:solidFill>
-                          <a:latin typeface="+mn-lt" pitchFamily="34" charset="0"/>
-                          <a:ea typeface="+mn-lt" pitchFamily="34" charset="-122"/>
-                          <a:cs typeface="+mn-lt" pitchFamily="34" charset="-120"/>
-                        </a:rPr>
-                        <a:t>Result</a:t>
-                      </a:r>
-                      <a:endParaRPr lang="en-US" sz="1400" dirty="0">
-                        <a:latin typeface="+mn-lt" charset="0"/>
-                        <a:ea typeface="+mn-lt" charset="0"/>
-                        <a:cs typeface="+mn-lt" charset="0"/>
-                      </a:endParaRPr>
-                    </a:p>
-                  </a:txBody>
-                  <a:tcPr anchor="ctr">
-                    <a:lnL w="9525" cap="flat" cmpd="sng" algn="ctr">
-                      <a:solidFill>
-                        <a:srgbClr val="D5E3E0"/>
-                      </a:solidFill>
-                      <a:prstDash val="solid"/>
-                      <a:round/>
-                      <a:headEnd type="none" w="med" len="med"/>
-                      <a:tailEnd type="none" w="med" len="med"/>
-                    </a:lnL>
-                    <a:lnR w="9525" cap="flat" cmpd="sng" algn="ctr">
-                      <a:solidFill>
-                        <a:srgbClr val="D5E3E0"/>
-                      </a:solidFill>
-                      <a:prstDash val="solid"/>
-                      <a:round/>
-                      <a:headEnd type="none" w="med" len="med"/>
-                      <a:tailEnd type="none" w="med" len="med"/>
-                    </a:lnR>
-                    <a:lnT w="9525" cap="flat" cmpd="sng" algn="ctr">
-                      <a:solidFill>
-                        <a:srgbClr val="D5E3E0"/>
-                      </a:solidFill>
-                      <a:prstDash val="solid"/>
-                      <a:round/>
-                      <a:headEnd type="none" w="med" len="med"/>
-                      <a:tailEnd type="none" w="med" len="med"/>
-                    </a:lnT>
-                    <a:lnB w="9525" cap="flat" cmpd="sng" algn="ctr">
-                      <a:solidFill>
-                        <a:srgbClr val="D5E3E0"/>
-                      </a:solidFill>
-                      <a:prstDash val="solid"/>
-                      <a:round/>
-                      <a:headEnd type="none" w="med" len="med"/>
-                      <a:tailEnd type="none" w="med" len="med"/>
-                    </a:lnB>
-                    <a:solidFill>
-                      <a:srgbClr val="0F766E"/>
-                    </a:solidFill>
-                  </a:tcPr>
-                </a:tc>
-                <a:extLst>
-                  <a:ext uri="{0D108BD9-81ED-4DB2-BD59-A6C34878D82A}">
-                    <a16:rowId xmlns:a16="http://schemas.microsoft.com/office/drawing/2014/main" val="10000"/>
-                  </a:ext>
-                </a:extLst>
-              </a:tr>
-              <a:tr h="329184">
-                <a:tc>
-                  <a:txBody>
-                    <a:bodyPr/>
-                    <a:lstStyle/>
-                    <a:p>
-                      <a:pPr marL="0" indent="0" algn="l">
-                        <a:buNone/>
-                      </a:pPr>
-                      <a:r>
-                        <a:rPr lang="en-US" sz="1400" dirty="0">
-                          <a:solidFill>
-                            <a:srgbClr val="10222B"/>
-                          </a:solidFill>
-                          <a:latin typeface="+mn-lt" pitchFamily="34" charset="0"/>
-                          <a:ea typeface="+mn-lt" pitchFamily="34" charset="-122"/>
-                          <a:cs typeface="+mn-lt" pitchFamily="34" charset="-120"/>
-                        </a:rPr>
-                        <a:t>0%</a:t>
-                      </a:r>
-                      <a:endParaRPr lang="en-US" sz="1400" dirty="0">
-                        <a:latin typeface="+mn-lt" charset="0"/>
-                        <a:ea typeface="+mn-lt" charset="0"/>
-                        <a:cs typeface="+mn-lt" charset="0"/>
-                      </a:endParaRPr>
-                    </a:p>
-                  </a:txBody>
-                  <a:tcPr anchor="ctr">
-                    <a:lnL w="9525" cap="flat" cmpd="sng" algn="ctr">
-                      <a:solidFill>
-                        <a:srgbClr val="D5E3E0"/>
-                      </a:solidFill>
-                      <a:prstDash val="solid"/>
-                      <a:round/>
-                      <a:headEnd type="none" w="med" len="med"/>
-                      <a:tailEnd type="none" w="med" len="med"/>
-                    </a:lnL>
-                    <a:lnR w="9525" cap="flat" cmpd="sng" algn="ctr">
-                      <a:solidFill>
-                        <a:srgbClr val="D5E3E0"/>
-                      </a:solidFill>
-                      <a:prstDash val="solid"/>
-                      <a:round/>
-                      <a:headEnd type="none" w="med" len="med"/>
-                      <a:tailEnd type="none" w="med" len="med"/>
-                    </a:lnR>
-                    <a:lnT w="9525" cap="flat" cmpd="sng" algn="ctr">
-                      <a:solidFill>
-                        <a:srgbClr val="D5E3E0"/>
-                      </a:solidFill>
-                      <a:prstDash val="solid"/>
-                      <a:round/>
-                      <a:headEnd type="none" w="med" len="med"/>
-                      <a:tailEnd type="none" w="med" len="med"/>
-                    </a:lnT>
-                    <a:lnB w="9525" cap="flat" cmpd="sng" algn="ctr">
-                      <a:solidFill>
-                        <a:srgbClr val="D5E3E0"/>
-                      </a:solidFill>
-                      <a:prstDash val="solid"/>
-                      <a:round/>
-                      <a:headEnd type="none" w="med" len="med"/>
-                      <a:tailEnd type="none" w="med" len="med"/>
-                    </a:lnB>
-                    <a:solidFill>
-                      <a:srgbClr val="FFFFFF"/>
-                    </a:solidFill>
-                  </a:tcPr>
-                </a:tc>
-                <a:tc>
-                  <a:txBody>
-                    <a:bodyPr/>
-                    <a:lstStyle/>
-                    <a:p>
-                      <a:pPr marL="0" indent="0" algn="l">
-                        <a:buNone/>
-                      </a:pPr>
-                      <a:r>
-                        <a:rPr lang="en-US" sz="1400" b="1" dirty="0">
-                          <a:solidFill>
-                            <a:srgbClr val="16A34A"/>
-                          </a:solidFill>
-                          <a:latin typeface="+mn-lt" pitchFamily="34" charset="0"/>
-                          <a:ea typeface="+mn-lt" pitchFamily="34" charset="-122"/>
-                          <a:cs typeface="+mn-lt" pitchFamily="34" charset="-120"/>
-                        </a:rPr>
-                        <a:t>$617.55</a:t>
-                      </a:r>
-                      <a:endParaRPr lang="en-US" sz="1400" dirty="0">
-                        <a:latin typeface="+mn-lt" charset="0"/>
-                        <a:ea typeface="+mn-lt" charset="0"/>
-                        <a:cs typeface="+mn-lt" charset="0"/>
-                      </a:endParaRPr>
-                    </a:p>
-                  </a:txBody>
-                  <a:tcPr anchor="ctr">
-                    <a:lnL w="9525" cap="flat" cmpd="sng" algn="ctr">
-                      <a:solidFill>
-                        <a:srgbClr val="D5E3E0"/>
-                      </a:solidFill>
-                      <a:prstDash val="solid"/>
-                      <a:round/>
-                      <a:headEnd type="none" w="med" len="med"/>
-                      <a:tailEnd type="none" w="med" len="med"/>
-                    </a:lnL>
-                    <a:lnR w="9525" cap="flat" cmpd="sng" algn="ctr">
-                      <a:solidFill>
-                        <a:srgbClr val="D5E3E0"/>
-                      </a:solidFill>
-                      <a:prstDash val="solid"/>
-                      <a:round/>
-                      <a:headEnd type="none" w="med" len="med"/>
-                      <a:tailEnd type="none" w="med" len="med"/>
-                    </a:lnR>
-                    <a:lnT w="9525" cap="flat" cmpd="sng" algn="ctr">
-                      <a:solidFill>
-                        <a:srgbClr val="D5E3E0"/>
-                      </a:solidFill>
-                      <a:prstDash val="solid"/>
-                      <a:round/>
-                      <a:headEnd type="none" w="med" len="med"/>
-                      <a:tailEnd type="none" w="med" len="med"/>
-                    </a:lnT>
-                    <a:lnB w="9525" cap="flat" cmpd="sng" algn="ctr">
-                      <a:solidFill>
-                        <a:srgbClr val="D5E3E0"/>
-                      </a:solidFill>
-                      <a:prstDash val="solid"/>
-                      <a:round/>
-                      <a:headEnd type="none" w="med" len="med"/>
-                      <a:tailEnd type="none" w="med" len="med"/>
-                    </a:lnB>
-                    <a:solidFill>
-                      <a:srgbClr val="FFFFFF"/>
-                    </a:solidFill>
-                  </a:tcPr>
-                </a:tc>
-                <a:tc>
-                  <a:txBody>
-                    <a:bodyPr/>
-                    <a:lstStyle/>
-                    <a:p>
-                      <a:pPr marL="0" indent="0" algn="l">
-                        <a:buNone/>
-                      </a:pPr>
-                      <a:r>
-                        <a:rPr lang="en-US" sz="1400" dirty="0">
-                          <a:solidFill>
-                            <a:srgbClr val="16A34A"/>
-                          </a:solidFill>
-                          <a:latin typeface="+mn-lt" pitchFamily="34" charset="0"/>
-                          <a:ea typeface="+mn-lt" pitchFamily="34" charset="-122"/>
-                          <a:cs typeface="+mn-lt" pitchFamily="34" charset="-120"/>
-                        </a:rPr>
-                        <a:t>Profit</a:t>
-                      </a:r>
-                      <a:endParaRPr lang="en-US" sz="1400" dirty="0">
-                        <a:latin typeface="+mn-lt" charset="0"/>
-                        <a:ea typeface="+mn-lt" charset="0"/>
-                        <a:cs typeface="+mn-lt" charset="0"/>
-                      </a:endParaRPr>
-                    </a:p>
-                  </a:txBody>
-                  <a:tcPr anchor="ctr">
-                    <a:lnL w="9525" cap="flat" cmpd="sng" algn="ctr">
-                      <a:solidFill>
-                        <a:srgbClr val="D5E3E0"/>
-                      </a:solidFill>
-                      <a:prstDash val="solid"/>
-                      <a:round/>
-                      <a:headEnd type="none" w="med" len="med"/>
-                      <a:tailEnd type="none" w="med" len="med"/>
-                    </a:lnL>
-                    <a:lnR w="9525" cap="flat" cmpd="sng" algn="ctr">
-                      <a:solidFill>
-                        <a:srgbClr val="D5E3E0"/>
-                      </a:solidFill>
-                      <a:prstDash val="solid"/>
-                      <a:round/>
-                      <a:headEnd type="none" w="med" len="med"/>
-                      <a:tailEnd type="none" w="med" len="med"/>
-                    </a:lnR>
-                    <a:lnT w="9525" cap="flat" cmpd="sng" algn="ctr">
-                      <a:solidFill>
-                        <a:srgbClr val="D5E3E0"/>
-                      </a:solidFill>
-                      <a:prstDash val="solid"/>
-                      <a:round/>
-                      <a:headEnd type="none" w="med" len="med"/>
-                      <a:tailEnd type="none" w="med" len="med"/>
-                    </a:lnT>
-                    <a:lnB w="9525" cap="flat" cmpd="sng" algn="ctr">
-                      <a:solidFill>
-                        <a:srgbClr val="D5E3E0"/>
-                      </a:solidFill>
-                      <a:prstDash val="solid"/>
-                      <a:round/>
-                      <a:headEnd type="none" w="med" len="med"/>
-                      <a:tailEnd type="none" w="med" len="med"/>
-                    </a:lnB>
-                    <a:solidFill>
-                      <a:srgbClr val="FFFFFF"/>
-                    </a:solidFill>
-                  </a:tcPr>
-                </a:tc>
-                <a:extLst>
-                  <a:ext uri="{0D108BD9-81ED-4DB2-BD59-A6C34878D82A}">
-                    <a16:rowId xmlns:a16="http://schemas.microsoft.com/office/drawing/2014/main" val="10001"/>
-                  </a:ext>
-                </a:extLst>
-              </a:tr>
-              <a:tr h="329184">
-                <a:tc>
-                  <a:txBody>
-                    <a:bodyPr/>
-                    <a:lstStyle/>
-                    <a:p>
-                      <a:pPr marL="0" indent="0" algn="l">
-                        <a:buNone/>
-                      </a:pPr>
-                      <a:r>
-                        <a:rPr lang="en-US" sz="1400" dirty="0">
-                          <a:solidFill>
-                            <a:srgbClr val="10222B"/>
-                          </a:solidFill>
-                          <a:latin typeface="+mn-lt" pitchFamily="34" charset="0"/>
-                          <a:ea typeface="+mn-lt" pitchFamily="34" charset="-122"/>
-                          <a:cs typeface="+mn-lt" pitchFamily="34" charset="-120"/>
-                        </a:rPr>
-                        <a:t>20%</a:t>
-                      </a:r>
-                      <a:endParaRPr lang="en-US" sz="1400" dirty="0">
-                        <a:latin typeface="+mn-lt" charset="0"/>
-                        <a:ea typeface="+mn-lt" charset="0"/>
-                        <a:cs typeface="+mn-lt" charset="0"/>
-                      </a:endParaRPr>
-                    </a:p>
-                  </a:txBody>
-                  <a:tcPr anchor="ctr">
-                    <a:lnL w="9525" cap="flat" cmpd="sng" algn="ctr">
-                      <a:solidFill>
-                        <a:srgbClr val="D5E3E0"/>
-                      </a:solidFill>
-                      <a:prstDash val="solid"/>
-                      <a:round/>
-                      <a:headEnd type="none" w="med" len="med"/>
-                      <a:tailEnd type="none" w="med" len="med"/>
-                    </a:lnL>
-                    <a:lnR w="9525" cap="flat" cmpd="sng" algn="ctr">
-                      <a:solidFill>
-                        <a:srgbClr val="D5E3E0"/>
-                      </a:solidFill>
-                      <a:prstDash val="solid"/>
-                      <a:round/>
-                      <a:headEnd type="none" w="med" len="med"/>
-                      <a:tailEnd type="none" w="med" len="med"/>
-                    </a:lnR>
-                    <a:lnT w="9525" cap="flat" cmpd="sng" algn="ctr">
-                      <a:solidFill>
-                        <a:srgbClr val="D5E3E0"/>
-                      </a:solidFill>
-                      <a:prstDash val="solid"/>
-                      <a:round/>
-                      <a:headEnd type="none" w="med" len="med"/>
-                      <a:tailEnd type="none" w="med" len="med"/>
-                    </a:lnT>
-                    <a:lnB w="9525" cap="flat" cmpd="sng" algn="ctr">
-                      <a:solidFill>
-                        <a:srgbClr val="D5E3E0"/>
-                      </a:solidFill>
-                      <a:prstDash val="solid"/>
-                      <a:round/>
-                      <a:headEnd type="none" w="med" len="med"/>
-                      <a:tailEnd type="none" w="med" len="med"/>
-                    </a:lnB>
-                    <a:solidFill>
-                      <a:srgbClr val="EAF2F1"/>
-                    </a:solidFill>
-                  </a:tcPr>
-                </a:tc>
-                <a:tc>
-                  <a:txBody>
-                    <a:bodyPr/>
-                    <a:lstStyle/>
-                    <a:p>
-                      <a:pPr marL="0" indent="0" algn="l">
-                        <a:buNone/>
-                      </a:pPr>
-                      <a:r>
-                        <a:rPr lang="en-US" sz="1400" b="1" dirty="0">
-                          <a:solidFill>
-                            <a:srgbClr val="16A34A"/>
-                          </a:solidFill>
-                          <a:latin typeface="+mn-lt" pitchFamily="34" charset="0"/>
-                          <a:ea typeface="+mn-lt" pitchFamily="34" charset="-122"/>
-                          <a:cs typeface="+mn-lt" pitchFamily="34" charset="-120"/>
-                        </a:rPr>
-                        <a:t>$617.05</a:t>
-                      </a:r>
-                      <a:endParaRPr lang="en-US" sz="1400" dirty="0">
-                        <a:latin typeface="+mn-lt" charset="0"/>
-                        <a:ea typeface="+mn-lt" charset="0"/>
-                        <a:cs typeface="+mn-lt" charset="0"/>
-                      </a:endParaRPr>
-                    </a:p>
-                  </a:txBody>
-                  <a:tcPr anchor="ctr">
-                    <a:lnL w="9525" cap="flat" cmpd="sng" algn="ctr">
-                      <a:solidFill>
-                        <a:srgbClr val="D5E3E0"/>
-                      </a:solidFill>
-                      <a:prstDash val="solid"/>
-                      <a:round/>
-                      <a:headEnd type="none" w="med" len="med"/>
-                      <a:tailEnd type="none" w="med" len="med"/>
-                    </a:lnL>
-                    <a:lnR w="9525" cap="flat" cmpd="sng" algn="ctr">
-                      <a:solidFill>
-                        <a:srgbClr val="D5E3E0"/>
-                      </a:solidFill>
-                      <a:prstDash val="solid"/>
-                      <a:round/>
-                      <a:headEnd type="none" w="med" len="med"/>
-                      <a:tailEnd type="none" w="med" len="med"/>
-                    </a:lnR>
-                    <a:lnT w="9525" cap="flat" cmpd="sng" algn="ctr">
-                      <a:solidFill>
-                        <a:srgbClr val="D5E3E0"/>
-                      </a:solidFill>
-                      <a:prstDash val="solid"/>
-                      <a:round/>
-                      <a:headEnd type="none" w="med" len="med"/>
-                      <a:tailEnd type="none" w="med" len="med"/>
-                    </a:lnT>
-                    <a:lnB w="9525" cap="flat" cmpd="sng" algn="ctr">
-                      <a:solidFill>
-                        <a:srgbClr val="D5E3E0"/>
-                      </a:solidFill>
-                      <a:prstDash val="solid"/>
-                      <a:round/>
-                      <a:headEnd type="none" w="med" len="med"/>
-                      <a:tailEnd type="none" w="med" len="med"/>
-                    </a:lnB>
-                    <a:solidFill>
-                      <a:srgbClr val="EAF2F1"/>
-                    </a:solidFill>
-                  </a:tcPr>
-                </a:tc>
-                <a:tc>
-                  <a:txBody>
-                    <a:bodyPr/>
-                    <a:lstStyle/>
-                    <a:p>
-                      <a:pPr marL="0" indent="0" algn="l">
-                        <a:buNone/>
-                      </a:pPr>
-                      <a:r>
-                        <a:rPr lang="en-US" sz="1400" dirty="0">
-                          <a:solidFill>
-                            <a:srgbClr val="16A34A"/>
-                          </a:solidFill>
-                          <a:latin typeface="+mn-lt" pitchFamily="34" charset="0"/>
-                          <a:ea typeface="+mn-lt" pitchFamily="34" charset="-122"/>
-                          <a:cs typeface="+mn-lt" pitchFamily="34" charset="-120"/>
-                        </a:rPr>
-                        <a:t>Profit</a:t>
-                      </a:r>
-                      <a:endParaRPr lang="en-US" sz="1400" dirty="0">
-                        <a:latin typeface="+mn-lt" charset="0"/>
-                        <a:ea typeface="+mn-lt" charset="0"/>
-                        <a:cs typeface="+mn-lt" charset="0"/>
-                      </a:endParaRPr>
-                    </a:p>
-                  </a:txBody>
-                  <a:tcPr anchor="ctr">
-                    <a:lnL w="9525" cap="flat" cmpd="sng" algn="ctr">
-                      <a:solidFill>
-                        <a:srgbClr val="D5E3E0"/>
-                      </a:solidFill>
-                      <a:prstDash val="solid"/>
-                      <a:round/>
-                      <a:headEnd type="none" w="med" len="med"/>
-                      <a:tailEnd type="none" w="med" len="med"/>
-                    </a:lnL>
-                    <a:lnR w="9525" cap="flat" cmpd="sng" algn="ctr">
-                      <a:solidFill>
-                        <a:srgbClr val="D5E3E0"/>
-                      </a:solidFill>
-                      <a:prstDash val="solid"/>
-                      <a:round/>
-                      <a:headEnd type="none" w="med" len="med"/>
-                      <a:tailEnd type="none" w="med" len="med"/>
-                    </a:lnR>
-                    <a:lnT w="9525" cap="flat" cmpd="sng" algn="ctr">
-                      <a:solidFill>
-                        <a:srgbClr val="D5E3E0"/>
-                      </a:solidFill>
-                      <a:prstDash val="solid"/>
-                      <a:round/>
-                      <a:headEnd type="none" w="med" len="med"/>
-                      <a:tailEnd type="none" w="med" len="med"/>
-                    </a:lnT>
-                    <a:lnB w="9525" cap="flat" cmpd="sng" algn="ctr">
-                      <a:solidFill>
-                        <a:srgbClr val="D5E3E0"/>
-                      </a:solidFill>
-                      <a:prstDash val="solid"/>
-                      <a:round/>
-                      <a:headEnd type="none" w="med" len="med"/>
-                      <a:tailEnd type="none" w="med" len="med"/>
-                    </a:lnB>
-                    <a:solidFill>
-                      <a:srgbClr val="EAF2F1"/>
-                    </a:solidFill>
-                  </a:tcPr>
-                </a:tc>
-                <a:extLst>
-                  <a:ext uri="{0D108BD9-81ED-4DB2-BD59-A6C34878D82A}">
-                    <a16:rowId xmlns:a16="http://schemas.microsoft.com/office/drawing/2014/main" val="10002"/>
-                  </a:ext>
-                </a:extLst>
-              </a:tr>
-              <a:tr h="329184">
-                <a:tc>
-                  <a:txBody>
-                    <a:bodyPr/>
-                    <a:lstStyle/>
-                    <a:p>
-                      <a:pPr marL="0" indent="0" algn="l">
-                        <a:buNone/>
-                      </a:pPr>
-                      <a:r>
-                        <a:rPr lang="en-US" sz="1400" dirty="0">
-                          <a:solidFill>
-                            <a:srgbClr val="10222B"/>
-                          </a:solidFill>
-                          <a:latin typeface="+mn-lt" pitchFamily="34" charset="0"/>
-                          <a:ea typeface="+mn-lt" pitchFamily="34" charset="-122"/>
-                          <a:cs typeface="+mn-lt" pitchFamily="34" charset="-120"/>
-                        </a:rPr>
-                        <a:t>30%</a:t>
-                      </a:r>
-                      <a:endParaRPr lang="en-US" sz="1400" dirty="0">
-                        <a:latin typeface="+mn-lt" charset="0"/>
-                        <a:ea typeface="+mn-lt" charset="0"/>
-                        <a:cs typeface="+mn-lt" charset="0"/>
-                      </a:endParaRPr>
-                    </a:p>
-                  </a:txBody>
-                  <a:tcPr anchor="ctr">
-                    <a:lnL w="9525" cap="flat" cmpd="sng" algn="ctr">
-                      <a:solidFill>
-                        <a:srgbClr val="D5E3E0"/>
-                      </a:solidFill>
-                      <a:prstDash val="solid"/>
-                      <a:round/>
-                      <a:headEnd type="none" w="med" len="med"/>
-                      <a:tailEnd type="none" w="med" len="med"/>
-                    </a:lnL>
-                    <a:lnR w="9525" cap="flat" cmpd="sng" algn="ctr">
-                      <a:solidFill>
-                        <a:srgbClr val="D5E3E0"/>
-                      </a:solidFill>
-                      <a:prstDash val="solid"/>
-                      <a:round/>
-                      <a:headEnd type="none" w="med" len="med"/>
-                      <a:tailEnd type="none" w="med" len="med"/>
-                    </a:lnR>
-                    <a:lnT w="9525" cap="flat" cmpd="sng" algn="ctr">
-                      <a:solidFill>
-                        <a:srgbClr val="D5E3E0"/>
-                      </a:solidFill>
-                      <a:prstDash val="solid"/>
-                      <a:round/>
-                      <a:headEnd type="none" w="med" len="med"/>
-                      <a:tailEnd type="none" w="med" len="med"/>
-                    </a:lnT>
-                    <a:lnB w="9525" cap="flat" cmpd="sng" algn="ctr">
-                      <a:solidFill>
-                        <a:srgbClr val="D5E3E0"/>
-                      </a:solidFill>
-                      <a:prstDash val="solid"/>
-                      <a:round/>
-                      <a:headEnd type="none" w="med" len="med"/>
-                      <a:tailEnd type="none" w="med" len="med"/>
-                    </a:lnB>
-                    <a:solidFill>
-                      <a:srgbClr val="FFFFFF"/>
-                    </a:solidFill>
-                  </a:tcPr>
-                </a:tc>
-                <a:tc>
-                  <a:txBody>
-                    <a:bodyPr/>
-                    <a:lstStyle/>
-                    <a:p>
-                      <a:pPr marL="0" indent="0" algn="l">
-                        <a:buNone/>
-                      </a:pPr>
-                      <a:r>
-                        <a:rPr lang="en-US" sz="1400" b="1" dirty="0">
-                          <a:solidFill>
-                            <a:srgbClr val="DC2626"/>
-                          </a:solidFill>
-                          <a:latin typeface="+mn-lt" pitchFamily="34" charset="0"/>
-                          <a:ea typeface="+mn-lt" pitchFamily="34" charset="-122"/>
-                          <a:cs typeface="+mn-lt" pitchFamily="34" charset="-120"/>
-                        </a:rPr>
-                        <a:t>−$16.17</a:t>
-                      </a:r>
-                      <a:endParaRPr lang="en-US" sz="1400" dirty="0">
-                        <a:latin typeface="+mn-lt" charset="0"/>
-                        <a:ea typeface="+mn-lt" charset="0"/>
-                        <a:cs typeface="+mn-lt" charset="0"/>
-                      </a:endParaRPr>
-                    </a:p>
-                  </a:txBody>
-                  <a:tcPr anchor="ctr">
-                    <a:lnL w="9525" cap="flat" cmpd="sng" algn="ctr">
-                      <a:solidFill>
-                        <a:srgbClr val="D5E3E0"/>
-                      </a:solidFill>
-                      <a:prstDash val="solid"/>
-                      <a:round/>
-                      <a:headEnd type="none" w="med" len="med"/>
-                      <a:tailEnd type="none" w="med" len="med"/>
-                    </a:lnL>
-                    <a:lnR w="9525" cap="flat" cmpd="sng" algn="ctr">
-                      <a:solidFill>
-                        <a:srgbClr val="D5E3E0"/>
-                      </a:solidFill>
-                      <a:prstDash val="solid"/>
-                      <a:round/>
-                      <a:headEnd type="none" w="med" len="med"/>
-                      <a:tailEnd type="none" w="med" len="med"/>
-                    </a:lnR>
-                    <a:lnT w="9525" cap="flat" cmpd="sng" algn="ctr">
-                      <a:solidFill>
-                        <a:srgbClr val="D5E3E0"/>
-                      </a:solidFill>
-                      <a:prstDash val="solid"/>
-                      <a:round/>
-                      <a:headEnd type="none" w="med" len="med"/>
-                      <a:tailEnd type="none" w="med" len="med"/>
-                    </a:lnT>
-                    <a:lnB w="9525" cap="flat" cmpd="sng" algn="ctr">
-                      <a:solidFill>
-                        <a:srgbClr val="D5E3E0"/>
-                      </a:solidFill>
-                      <a:prstDash val="solid"/>
-                      <a:round/>
-                      <a:headEnd type="none" w="med" len="med"/>
-                      <a:tailEnd type="none" w="med" len="med"/>
-                    </a:lnB>
-                    <a:solidFill>
-                      <a:srgbClr val="FFFFFF"/>
-                    </a:solidFill>
-                  </a:tcPr>
-                </a:tc>
-                <a:tc>
-                  <a:txBody>
-                    <a:bodyPr/>
-                    <a:lstStyle/>
-                    <a:p>
-                      <a:pPr marL="0" indent="0" algn="l">
-                        <a:buNone/>
-                      </a:pPr>
-                      <a:r>
-                        <a:rPr lang="en-US" sz="1400" dirty="0">
-                          <a:solidFill>
-                            <a:srgbClr val="DC2626"/>
-                          </a:solidFill>
-                          <a:latin typeface="+mn-lt" pitchFamily="34" charset="0"/>
-                          <a:ea typeface="+mn-lt" pitchFamily="34" charset="-122"/>
-                          <a:cs typeface="+mn-lt" pitchFamily="34" charset="-120"/>
-                        </a:rPr>
-                        <a:t>Loss</a:t>
-                      </a:r>
-                      <a:endParaRPr lang="en-US" sz="1400" dirty="0">
-                        <a:latin typeface="+mn-lt" charset="0"/>
-                        <a:ea typeface="+mn-lt" charset="0"/>
-                        <a:cs typeface="+mn-lt" charset="0"/>
-                      </a:endParaRPr>
-                    </a:p>
-                  </a:txBody>
-                  <a:tcPr anchor="ctr">
-                    <a:lnL w="9525" cap="flat" cmpd="sng" algn="ctr">
-                      <a:solidFill>
-                        <a:srgbClr val="D5E3E0"/>
-                      </a:solidFill>
-                      <a:prstDash val="solid"/>
-                      <a:round/>
-                      <a:headEnd type="none" w="med" len="med"/>
-                      <a:tailEnd type="none" w="med" len="med"/>
-                    </a:lnL>
-                    <a:lnR w="9525" cap="flat" cmpd="sng" algn="ctr">
-                      <a:solidFill>
-                        <a:srgbClr val="D5E3E0"/>
-                      </a:solidFill>
-                      <a:prstDash val="solid"/>
-                      <a:round/>
-                      <a:headEnd type="none" w="med" len="med"/>
-                      <a:tailEnd type="none" w="med" len="med"/>
-                    </a:lnR>
-                    <a:lnT w="9525" cap="flat" cmpd="sng" algn="ctr">
-                      <a:solidFill>
-                        <a:srgbClr val="D5E3E0"/>
-                      </a:solidFill>
-                      <a:prstDash val="solid"/>
-                      <a:round/>
-                      <a:headEnd type="none" w="med" len="med"/>
-                      <a:tailEnd type="none" w="med" len="med"/>
-                    </a:lnT>
-                    <a:lnB w="9525" cap="flat" cmpd="sng" algn="ctr">
-                      <a:solidFill>
-                        <a:srgbClr val="D5E3E0"/>
-                      </a:solidFill>
-                      <a:prstDash val="solid"/>
-                      <a:round/>
-                      <a:headEnd type="none" w="med" len="med"/>
-                      <a:tailEnd type="none" w="med" len="med"/>
-                    </a:lnB>
-                    <a:solidFill>
-                      <a:srgbClr val="FFFFFF"/>
-                    </a:solidFill>
-                  </a:tcPr>
-                </a:tc>
-                <a:extLst>
-                  <a:ext uri="{0D108BD9-81ED-4DB2-BD59-A6C34878D82A}">
-                    <a16:rowId xmlns:a16="http://schemas.microsoft.com/office/drawing/2014/main" val="10003"/>
-                  </a:ext>
-                </a:extLst>
-              </a:tr>
-              <a:tr h="329184">
-                <a:tc>
-                  <a:txBody>
-                    <a:bodyPr/>
-                    <a:lstStyle/>
-                    <a:p>
-                      <a:pPr marL="0" indent="0" algn="l">
-                        <a:buNone/>
-                      </a:pPr>
-                      <a:r>
-                        <a:rPr lang="en-US" sz="1400" dirty="0">
-                          <a:solidFill>
-                            <a:srgbClr val="10222B"/>
-                          </a:solidFill>
-                          <a:latin typeface="+mn-lt" pitchFamily="34" charset="0"/>
-                          <a:ea typeface="+mn-lt" pitchFamily="34" charset="-122"/>
-                          <a:cs typeface="+mn-lt" pitchFamily="34" charset="-120"/>
-                        </a:rPr>
-                        <a:t>32%</a:t>
-                      </a:r>
-                      <a:endParaRPr lang="en-US" sz="1400" dirty="0">
-                        <a:latin typeface="+mn-lt" charset="0"/>
-                        <a:ea typeface="+mn-lt" charset="0"/>
-                        <a:cs typeface="+mn-lt" charset="0"/>
-                      </a:endParaRPr>
-                    </a:p>
-                  </a:txBody>
-                  <a:tcPr anchor="ctr">
-                    <a:lnL w="9525" cap="flat" cmpd="sng" algn="ctr">
-                      <a:solidFill>
-                        <a:srgbClr val="D5E3E0"/>
-                      </a:solidFill>
-                      <a:prstDash val="solid"/>
-                      <a:round/>
-                      <a:headEnd type="none" w="med" len="med"/>
-                      <a:tailEnd type="none" w="med" len="med"/>
-                    </a:lnL>
-                    <a:lnR w="9525" cap="flat" cmpd="sng" algn="ctr">
-                      <a:solidFill>
-                        <a:srgbClr val="D5E3E0"/>
-                      </a:solidFill>
-                      <a:prstDash val="solid"/>
-                      <a:round/>
-                      <a:headEnd type="none" w="med" len="med"/>
-                      <a:tailEnd type="none" w="med" len="med"/>
-                    </a:lnR>
-                    <a:lnT w="9525" cap="flat" cmpd="sng" algn="ctr">
-                      <a:solidFill>
-                        <a:srgbClr val="D5E3E0"/>
-                      </a:solidFill>
-                      <a:prstDash val="solid"/>
-                      <a:round/>
-                      <a:headEnd type="none" w="med" len="med"/>
-                      <a:tailEnd type="none" w="med" len="med"/>
-                    </a:lnT>
-                    <a:lnB w="9525" cap="flat" cmpd="sng" algn="ctr">
-                      <a:solidFill>
-                        <a:srgbClr val="D5E3E0"/>
-                      </a:solidFill>
-                      <a:prstDash val="solid"/>
-                      <a:round/>
-                      <a:headEnd type="none" w="med" len="med"/>
-                      <a:tailEnd type="none" w="med" len="med"/>
-                    </a:lnB>
-                    <a:solidFill>
-                      <a:srgbClr val="EAF2F1"/>
-                    </a:solidFill>
-                  </a:tcPr>
-                </a:tc>
-                <a:tc>
-                  <a:txBody>
-                    <a:bodyPr/>
-                    <a:lstStyle/>
-                    <a:p>
-                      <a:pPr marL="0" indent="0" algn="l">
-                        <a:buNone/>
-                      </a:pPr>
-                      <a:r>
-                        <a:rPr lang="en-US" sz="1400" b="1" dirty="0">
-                          <a:solidFill>
-                            <a:srgbClr val="DC2626"/>
-                          </a:solidFill>
-                          <a:latin typeface="+mn-lt" pitchFamily="34" charset="0"/>
-                          <a:ea typeface="+mn-lt" pitchFamily="34" charset="-122"/>
-                          <a:cs typeface="+mn-lt" pitchFamily="34" charset="-120"/>
-                        </a:rPr>
-                        <a:t>−$46.98</a:t>
-                      </a:r>
-                      <a:endParaRPr lang="en-US" sz="1400" dirty="0">
-                        <a:latin typeface="+mn-lt" charset="0"/>
-                        <a:ea typeface="+mn-lt" charset="0"/>
-                        <a:cs typeface="+mn-lt" charset="0"/>
-                      </a:endParaRPr>
-                    </a:p>
-                  </a:txBody>
-                  <a:tcPr anchor="ctr">
-                    <a:lnL w="9525" cap="flat" cmpd="sng" algn="ctr">
-                      <a:solidFill>
-                        <a:srgbClr val="D5E3E0"/>
-                      </a:solidFill>
-                      <a:prstDash val="solid"/>
-                      <a:round/>
-                      <a:headEnd type="none" w="med" len="med"/>
-                      <a:tailEnd type="none" w="med" len="med"/>
-                    </a:lnL>
-                    <a:lnR w="9525" cap="flat" cmpd="sng" algn="ctr">
-                      <a:solidFill>
-                        <a:srgbClr val="D5E3E0"/>
-                      </a:solidFill>
-                      <a:prstDash val="solid"/>
-                      <a:round/>
-                      <a:headEnd type="none" w="med" len="med"/>
-                      <a:tailEnd type="none" w="med" len="med"/>
-                    </a:lnR>
-                    <a:lnT w="9525" cap="flat" cmpd="sng" algn="ctr">
-                      <a:solidFill>
-                        <a:srgbClr val="D5E3E0"/>
-                      </a:solidFill>
-                      <a:prstDash val="solid"/>
-                      <a:round/>
-                      <a:headEnd type="none" w="med" len="med"/>
-                      <a:tailEnd type="none" w="med" len="med"/>
-                    </a:lnT>
-                    <a:lnB w="9525" cap="flat" cmpd="sng" algn="ctr">
-                      <a:solidFill>
-                        <a:srgbClr val="D5E3E0"/>
-                      </a:solidFill>
-                      <a:prstDash val="solid"/>
-                      <a:round/>
-                      <a:headEnd type="none" w="med" len="med"/>
-                      <a:tailEnd type="none" w="med" len="med"/>
-                    </a:lnB>
-                    <a:solidFill>
-                      <a:srgbClr val="EAF2F1"/>
-                    </a:solidFill>
-                  </a:tcPr>
-                </a:tc>
-                <a:tc>
-                  <a:txBody>
-                    <a:bodyPr/>
-                    <a:lstStyle/>
-                    <a:p>
-                      <a:pPr marL="0" indent="0" algn="l">
-                        <a:buNone/>
-                      </a:pPr>
-                      <a:r>
-                        <a:rPr lang="en-US" sz="1400" dirty="0">
-                          <a:solidFill>
-                            <a:srgbClr val="DC2626"/>
-                          </a:solidFill>
-                          <a:latin typeface="+mn-lt" pitchFamily="34" charset="0"/>
-                          <a:ea typeface="+mn-lt" pitchFamily="34" charset="-122"/>
-                          <a:cs typeface="+mn-lt" pitchFamily="34" charset="-120"/>
-                        </a:rPr>
-                        <a:t>Loss</a:t>
-                      </a:r>
-                      <a:endParaRPr lang="en-US" sz="1400" dirty="0">
-                        <a:latin typeface="+mn-lt" charset="0"/>
-                        <a:ea typeface="+mn-lt" charset="0"/>
-                        <a:cs typeface="+mn-lt" charset="0"/>
-                      </a:endParaRPr>
-                    </a:p>
-                  </a:txBody>
-                  <a:tcPr anchor="ctr">
-                    <a:lnL w="9525" cap="flat" cmpd="sng" algn="ctr">
-                      <a:solidFill>
-                        <a:srgbClr val="D5E3E0"/>
-                      </a:solidFill>
-                      <a:prstDash val="solid"/>
-                      <a:round/>
-                      <a:headEnd type="none" w="med" len="med"/>
-                      <a:tailEnd type="none" w="med" len="med"/>
-                    </a:lnL>
-                    <a:lnR w="9525" cap="flat" cmpd="sng" algn="ctr">
-                      <a:solidFill>
-                        <a:srgbClr val="D5E3E0"/>
-                      </a:solidFill>
-                      <a:prstDash val="solid"/>
-                      <a:round/>
-                      <a:headEnd type="none" w="med" len="med"/>
-                      <a:tailEnd type="none" w="med" len="med"/>
-                    </a:lnR>
-                    <a:lnT w="9525" cap="flat" cmpd="sng" algn="ctr">
-                      <a:solidFill>
-                        <a:srgbClr val="D5E3E0"/>
-                      </a:solidFill>
-                      <a:prstDash val="solid"/>
-                      <a:round/>
-                      <a:headEnd type="none" w="med" len="med"/>
-                      <a:tailEnd type="none" w="med" len="med"/>
-                    </a:lnT>
-                    <a:lnB w="9525" cap="flat" cmpd="sng" algn="ctr">
-                      <a:solidFill>
-                        <a:srgbClr val="D5E3E0"/>
-                      </a:solidFill>
-                      <a:prstDash val="solid"/>
-                      <a:round/>
-                      <a:headEnd type="none" w="med" len="med"/>
-                      <a:tailEnd type="none" w="med" len="med"/>
-                    </a:lnB>
-                    <a:solidFill>
-                      <a:srgbClr val="EAF2F1"/>
-                    </a:solidFill>
-                  </a:tcPr>
-                </a:tc>
-                <a:extLst>
-                  <a:ext uri="{0D108BD9-81ED-4DB2-BD59-A6C34878D82A}">
-                    <a16:rowId xmlns:a16="http://schemas.microsoft.com/office/drawing/2014/main" val="10004"/>
-                  </a:ext>
-                </a:extLst>
-              </a:tr>
-              <a:tr h="329184">
-                <a:tc>
-                  <a:txBody>
-                    <a:bodyPr/>
-                    <a:lstStyle/>
-                    <a:p>
-                      <a:pPr marL="0" indent="0" algn="l">
-                        <a:buNone/>
-                      </a:pPr>
-                      <a:r>
-                        <a:rPr lang="en-US" sz="1400" dirty="0">
-                          <a:solidFill>
-                            <a:srgbClr val="10222B"/>
-                          </a:solidFill>
-                          <a:latin typeface="+mn-lt" pitchFamily="34" charset="0"/>
-                          <a:ea typeface="+mn-lt" pitchFamily="34" charset="-122"/>
-                          <a:cs typeface="+mn-lt" pitchFamily="34" charset="-120"/>
-                        </a:rPr>
-                        <a:t>45%</a:t>
-                      </a:r>
-                      <a:endParaRPr lang="en-US" sz="1400" dirty="0">
-                        <a:latin typeface="+mn-lt" charset="0"/>
-                        <a:ea typeface="+mn-lt" charset="0"/>
-                        <a:cs typeface="+mn-lt" charset="0"/>
-                      </a:endParaRPr>
-                    </a:p>
-                  </a:txBody>
-                  <a:tcPr anchor="ctr">
-                    <a:lnL w="9525" cap="flat" cmpd="sng" algn="ctr">
-                      <a:solidFill>
-                        <a:srgbClr val="D5E3E0"/>
-                      </a:solidFill>
-                      <a:prstDash val="solid"/>
-                      <a:round/>
-                      <a:headEnd type="none" w="med" len="med"/>
-                      <a:tailEnd type="none" w="med" len="med"/>
-                    </a:lnL>
-                    <a:lnR w="9525" cap="flat" cmpd="sng" algn="ctr">
-                      <a:solidFill>
-                        <a:srgbClr val="D5E3E0"/>
-                      </a:solidFill>
-                      <a:prstDash val="solid"/>
-                      <a:round/>
-                      <a:headEnd type="none" w="med" len="med"/>
-                      <a:tailEnd type="none" w="med" len="med"/>
-                    </a:lnR>
-                    <a:lnT w="9525" cap="flat" cmpd="sng" algn="ctr">
-                      <a:solidFill>
-                        <a:srgbClr val="D5E3E0"/>
-                      </a:solidFill>
-                      <a:prstDash val="solid"/>
-                      <a:round/>
-                      <a:headEnd type="none" w="med" len="med"/>
-                      <a:tailEnd type="none" w="med" len="med"/>
-                    </a:lnT>
-                    <a:lnB w="9525" cap="flat" cmpd="sng" algn="ctr">
-                      <a:solidFill>
-                        <a:srgbClr val="D5E3E0"/>
-                      </a:solidFill>
-                      <a:prstDash val="solid"/>
-                      <a:round/>
-                      <a:headEnd type="none" w="med" len="med"/>
-                      <a:tailEnd type="none" w="med" len="med"/>
-                    </a:lnB>
-                    <a:solidFill>
-                      <a:srgbClr val="FFFFFF"/>
-                    </a:solidFill>
-                  </a:tcPr>
-                </a:tc>
-                <a:tc>
-                  <a:txBody>
-                    <a:bodyPr/>
-                    <a:lstStyle/>
-                    <a:p>
-                      <a:pPr marL="0" indent="0" algn="l">
-                        <a:buNone/>
-                      </a:pPr>
-                      <a:r>
-                        <a:rPr lang="en-US" sz="1400" b="1" dirty="0">
-                          <a:solidFill>
-                            <a:srgbClr val="DC2626"/>
-                          </a:solidFill>
-                          <a:latin typeface="+mn-lt" pitchFamily="34" charset="0"/>
-                          <a:ea typeface="+mn-lt" pitchFamily="34" charset="-122"/>
-                          <a:cs typeface="+mn-lt" pitchFamily="34" charset="-120"/>
-                        </a:rPr>
-                        <a:t>−$383.03</a:t>
-                      </a:r>
-                      <a:endParaRPr lang="en-US" sz="1400" dirty="0">
-                        <a:latin typeface="+mn-lt" charset="0"/>
-                        <a:ea typeface="+mn-lt" charset="0"/>
-                        <a:cs typeface="+mn-lt" charset="0"/>
-                      </a:endParaRPr>
-                    </a:p>
-                  </a:txBody>
-                  <a:tcPr anchor="ctr">
-                    <a:lnL w="9525" cap="flat" cmpd="sng" algn="ctr">
-                      <a:solidFill>
-                        <a:srgbClr val="D5E3E0"/>
-                      </a:solidFill>
-                      <a:prstDash val="solid"/>
-                      <a:round/>
-                      <a:headEnd type="none" w="med" len="med"/>
-                      <a:tailEnd type="none" w="med" len="med"/>
-                    </a:lnL>
-                    <a:lnR w="9525" cap="flat" cmpd="sng" algn="ctr">
-                      <a:solidFill>
-                        <a:srgbClr val="D5E3E0"/>
-                      </a:solidFill>
-                      <a:prstDash val="solid"/>
-                      <a:round/>
-                      <a:headEnd type="none" w="med" len="med"/>
-                      <a:tailEnd type="none" w="med" len="med"/>
-                    </a:lnR>
-                    <a:lnT w="9525" cap="flat" cmpd="sng" algn="ctr">
-                      <a:solidFill>
-                        <a:srgbClr val="D5E3E0"/>
-                      </a:solidFill>
-                      <a:prstDash val="solid"/>
-                      <a:round/>
-                      <a:headEnd type="none" w="med" len="med"/>
-                      <a:tailEnd type="none" w="med" len="med"/>
-                    </a:lnT>
-                    <a:lnB w="9525" cap="flat" cmpd="sng" algn="ctr">
-                      <a:solidFill>
-                        <a:srgbClr val="D5E3E0"/>
-                      </a:solidFill>
-                      <a:prstDash val="solid"/>
-                      <a:round/>
-                      <a:headEnd type="none" w="med" len="med"/>
-                      <a:tailEnd type="none" w="med" len="med"/>
-                    </a:lnB>
-                    <a:solidFill>
-                      <a:srgbClr val="FFFFFF"/>
-                    </a:solidFill>
-                  </a:tcPr>
-                </a:tc>
-                <a:tc>
-                  <a:txBody>
-                    <a:bodyPr/>
-                    <a:lstStyle/>
-                    <a:p>
-                      <a:pPr marL="0" indent="0" algn="l">
-                        <a:buNone/>
-                      </a:pPr>
-                      <a:r>
-                        <a:rPr lang="en-US" sz="1400" dirty="0">
-                          <a:solidFill>
-                            <a:srgbClr val="DC2626"/>
-                          </a:solidFill>
-                          <a:latin typeface="+mn-lt" pitchFamily="34" charset="0"/>
-                          <a:ea typeface="+mn-lt" pitchFamily="34" charset="-122"/>
-                          <a:cs typeface="+mn-lt" pitchFamily="34" charset="-120"/>
-                        </a:rPr>
-                        <a:t>Loss</a:t>
-                      </a:r>
-                      <a:endParaRPr lang="en-US" sz="1400" dirty="0">
-                        <a:latin typeface="+mn-lt" charset="0"/>
-                        <a:ea typeface="+mn-lt" charset="0"/>
-                        <a:cs typeface="+mn-lt" charset="0"/>
-                      </a:endParaRPr>
-                    </a:p>
-                  </a:txBody>
-                  <a:tcPr anchor="ctr">
-                    <a:lnL w="9525" cap="flat" cmpd="sng" algn="ctr">
-                      <a:solidFill>
-                        <a:srgbClr val="D5E3E0"/>
-                      </a:solidFill>
-                      <a:prstDash val="solid"/>
-                      <a:round/>
-                      <a:headEnd type="none" w="med" len="med"/>
-                      <a:tailEnd type="none" w="med" len="med"/>
-                    </a:lnL>
-                    <a:lnR w="9525" cap="flat" cmpd="sng" algn="ctr">
-                      <a:solidFill>
-                        <a:srgbClr val="D5E3E0"/>
-                      </a:solidFill>
-                      <a:prstDash val="solid"/>
-                      <a:round/>
-                      <a:headEnd type="none" w="med" len="med"/>
-                      <a:tailEnd type="none" w="med" len="med"/>
-                    </a:lnR>
-                    <a:lnT w="9525" cap="flat" cmpd="sng" algn="ctr">
-                      <a:solidFill>
-                        <a:srgbClr val="D5E3E0"/>
-                      </a:solidFill>
-                      <a:prstDash val="solid"/>
-                      <a:round/>
-                      <a:headEnd type="none" w="med" len="med"/>
-                      <a:tailEnd type="none" w="med" len="med"/>
-                    </a:lnT>
-                    <a:lnB w="9525" cap="flat" cmpd="sng" algn="ctr">
-                      <a:solidFill>
-                        <a:srgbClr val="D5E3E0"/>
-                      </a:solidFill>
-                      <a:prstDash val="solid"/>
-                      <a:round/>
-                      <a:headEnd type="none" w="med" len="med"/>
-                      <a:tailEnd type="none" w="med" len="med"/>
-                    </a:lnB>
-                    <a:solidFill>
-                      <a:srgbClr val="FFFFFF"/>
-                    </a:solidFill>
-                  </a:tcPr>
-                </a:tc>
-                <a:extLst>
-                  <a:ext uri="{0D108BD9-81ED-4DB2-BD59-A6C34878D82A}">
-                    <a16:rowId xmlns:a16="http://schemas.microsoft.com/office/drawing/2014/main" val="10005"/>
-                  </a:ext>
-                </a:extLst>
-              </a:tr>
-              <a:tr h="329184">
-                <a:tc>
-                  <a:txBody>
-                    <a:bodyPr/>
-                    <a:lstStyle/>
-                    <a:p>
-                      <a:pPr marL="0" indent="0" algn="l">
-                        <a:buNone/>
-                      </a:pPr>
-                      <a:r>
-                        <a:rPr lang="en-US" sz="1400" dirty="0">
-                          <a:solidFill>
-                            <a:srgbClr val="10222B"/>
-                          </a:solidFill>
-                          <a:latin typeface="+mn-lt" pitchFamily="34" charset="0"/>
-                          <a:ea typeface="+mn-lt" pitchFamily="34" charset="-122"/>
-                          <a:cs typeface="+mn-lt" pitchFamily="34" charset="-120"/>
-                        </a:rPr>
-                        <a:t>50%</a:t>
-                      </a:r>
-                      <a:endParaRPr lang="en-US" sz="1400" dirty="0">
-                        <a:latin typeface="+mn-lt" charset="0"/>
-                        <a:ea typeface="+mn-lt" charset="0"/>
-                        <a:cs typeface="+mn-lt" charset="0"/>
-                      </a:endParaRPr>
-                    </a:p>
-                  </a:txBody>
-                  <a:tcPr anchor="ctr">
-                    <a:lnL w="9525" cap="flat" cmpd="sng" algn="ctr">
-                      <a:solidFill>
-                        <a:srgbClr val="D5E3E0"/>
-                      </a:solidFill>
-                      <a:prstDash val="solid"/>
-                      <a:round/>
-                      <a:headEnd type="none" w="med" len="med"/>
-                      <a:tailEnd type="none" w="med" len="med"/>
-                    </a:lnL>
-                    <a:lnR w="9525" cap="flat" cmpd="sng" algn="ctr">
-                      <a:solidFill>
-                        <a:srgbClr val="D5E3E0"/>
-                      </a:solidFill>
-                      <a:prstDash val="solid"/>
-                      <a:round/>
-                      <a:headEnd type="none" w="med" len="med"/>
-                      <a:tailEnd type="none" w="med" len="med"/>
-                    </a:lnR>
-                    <a:lnT w="9525" cap="flat" cmpd="sng" algn="ctr">
-                      <a:solidFill>
-                        <a:srgbClr val="D5E3E0"/>
-                      </a:solidFill>
-                      <a:prstDash val="solid"/>
-                      <a:round/>
-                      <a:headEnd type="none" w="med" len="med"/>
-                      <a:tailEnd type="none" w="med" len="med"/>
-                    </a:lnT>
-                    <a:lnB w="9525" cap="flat" cmpd="sng" algn="ctr">
-                      <a:solidFill>
-                        <a:srgbClr val="D5E3E0"/>
-                      </a:solidFill>
-                      <a:prstDash val="solid"/>
-                      <a:round/>
-                      <a:headEnd type="none" w="med" len="med"/>
-                      <a:tailEnd type="none" w="med" len="med"/>
-                    </a:lnB>
-                    <a:solidFill>
-                      <a:srgbClr val="EAF2F1"/>
-                    </a:solidFill>
-                  </a:tcPr>
-                </a:tc>
-                <a:tc>
-                  <a:txBody>
-                    <a:bodyPr/>
-                    <a:lstStyle/>
-                    <a:p>
-                      <a:pPr marL="0" indent="0" algn="l">
-                        <a:buNone/>
-                      </a:pPr>
-                      <a:r>
-                        <a:rPr lang="en-US" sz="1400" b="1" dirty="0">
-                          <a:solidFill>
-                            <a:srgbClr val="DC2626"/>
-                          </a:solidFill>
-                          <a:latin typeface="+mn-lt" pitchFamily="34" charset="0"/>
-                          <a:ea typeface="+mn-lt" pitchFamily="34" charset="-122"/>
-                          <a:cs typeface="+mn-lt" pitchFamily="34" charset="-120"/>
-                        </a:rPr>
-                        <a:t>−$1,665.05</a:t>
-                      </a:r>
-                      <a:endParaRPr lang="en-US" sz="1400" dirty="0">
-                        <a:latin typeface="+mn-lt" charset="0"/>
-                        <a:ea typeface="+mn-lt" charset="0"/>
-                        <a:cs typeface="+mn-lt" charset="0"/>
-                      </a:endParaRPr>
-                    </a:p>
-                  </a:txBody>
-                  <a:tcPr anchor="ctr">
-                    <a:lnL w="9525" cap="flat" cmpd="sng" algn="ctr">
-                      <a:solidFill>
-                        <a:srgbClr val="D5E3E0"/>
-                      </a:solidFill>
-                      <a:prstDash val="solid"/>
-                      <a:round/>
-                      <a:headEnd type="none" w="med" len="med"/>
-                      <a:tailEnd type="none" w="med" len="med"/>
-                    </a:lnL>
-                    <a:lnR w="9525" cap="flat" cmpd="sng" algn="ctr">
-                      <a:solidFill>
-                        <a:srgbClr val="D5E3E0"/>
-                      </a:solidFill>
-                      <a:prstDash val="solid"/>
-                      <a:round/>
-                      <a:headEnd type="none" w="med" len="med"/>
-                      <a:tailEnd type="none" w="med" len="med"/>
-                    </a:lnR>
-                    <a:lnT w="9525" cap="flat" cmpd="sng" algn="ctr">
-                      <a:solidFill>
-                        <a:srgbClr val="D5E3E0"/>
-                      </a:solidFill>
-                      <a:prstDash val="solid"/>
-                      <a:round/>
-                      <a:headEnd type="none" w="med" len="med"/>
-                      <a:tailEnd type="none" w="med" len="med"/>
-                    </a:lnT>
-                    <a:lnB w="9525" cap="flat" cmpd="sng" algn="ctr">
-                      <a:solidFill>
-                        <a:srgbClr val="D5E3E0"/>
-                      </a:solidFill>
-                      <a:prstDash val="solid"/>
-                      <a:round/>
-                      <a:headEnd type="none" w="med" len="med"/>
-                      <a:tailEnd type="none" w="med" len="med"/>
-                    </a:lnB>
-                    <a:solidFill>
-                      <a:srgbClr val="EAF2F1"/>
-                    </a:solidFill>
-                  </a:tcPr>
-                </a:tc>
-                <a:tc>
-                  <a:txBody>
-                    <a:bodyPr/>
-                    <a:lstStyle/>
-                    <a:p>
-                      <a:pPr marL="0" indent="0" algn="l">
-                        <a:buNone/>
-                      </a:pPr>
-                      <a:r>
-                        <a:rPr lang="en-US" sz="1400" dirty="0">
-                          <a:solidFill>
-                            <a:srgbClr val="DC2626"/>
-                          </a:solidFill>
-                          <a:latin typeface="+mn-lt" pitchFamily="34" charset="0"/>
-                          <a:ea typeface="+mn-lt" pitchFamily="34" charset="-122"/>
-                          <a:cs typeface="+mn-lt" pitchFamily="34" charset="-120"/>
-                        </a:rPr>
-                        <a:t>Loss</a:t>
-                      </a:r>
-                      <a:endParaRPr lang="en-US" sz="1400" dirty="0">
-                        <a:latin typeface="+mn-lt" charset="0"/>
-                        <a:ea typeface="+mn-lt" charset="0"/>
-                        <a:cs typeface="+mn-lt" charset="0"/>
-                      </a:endParaRPr>
-                    </a:p>
-                  </a:txBody>
-                  <a:tcPr anchor="ctr">
-                    <a:lnL w="9525" cap="flat" cmpd="sng" algn="ctr">
-                      <a:solidFill>
-                        <a:srgbClr val="D5E3E0"/>
-                      </a:solidFill>
-                      <a:prstDash val="solid"/>
-                      <a:round/>
-                      <a:headEnd type="none" w="med" len="med"/>
-                      <a:tailEnd type="none" w="med" len="med"/>
-                    </a:lnL>
-                    <a:lnR w="9525" cap="flat" cmpd="sng" algn="ctr">
-                      <a:solidFill>
-                        <a:srgbClr val="D5E3E0"/>
-                      </a:solidFill>
-                      <a:prstDash val="solid"/>
-                      <a:round/>
-                      <a:headEnd type="none" w="med" len="med"/>
-                      <a:tailEnd type="none" w="med" len="med"/>
-                    </a:lnR>
-                    <a:lnT w="9525" cap="flat" cmpd="sng" algn="ctr">
-                      <a:solidFill>
-                        <a:srgbClr val="D5E3E0"/>
-                      </a:solidFill>
-                      <a:prstDash val="solid"/>
-                      <a:round/>
-                      <a:headEnd type="none" w="med" len="med"/>
-                      <a:tailEnd type="none" w="med" len="med"/>
-                    </a:lnT>
-                    <a:lnB w="9525" cap="flat" cmpd="sng" algn="ctr">
-                      <a:solidFill>
-                        <a:srgbClr val="D5E3E0"/>
-                      </a:solidFill>
-                      <a:prstDash val="solid"/>
-                      <a:round/>
-                      <a:headEnd type="none" w="med" len="med"/>
-                      <a:tailEnd type="none" w="med" len="med"/>
-                    </a:lnB>
-                    <a:solidFill>
-                      <a:srgbClr val="EAF2F1"/>
-                    </a:solidFill>
-                  </a:tcPr>
-                </a:tc>
-                <a:extLst>
-                  <a:ext uri="{0D108BD9-81ED-4DB2-BD59-A6C34878D82A}">
-                    <a16:rowId xmlns:a16="http://schemas.microsoft.com/office/drawing/2014/main" val="10006"/>
-                  </a:ext>
-                </a:extLst>
-              </a:tr>
-              <a:tr h="329184">
-                <a:tc>
-                  <a:txBody>
-                    <a:bodyPr/>
-                    <a:lstStyle/>
-                    <a:p>
-                      <a:pPr marL="0" indent="0" algn="l">
-                        <a:buNone/>
-                      </a:pPr>
-                      <a:r>
-                        <a:rPr lang="en-US" sz="1400" dirty="0">
-                          <a:solidFill>
-                            <a:srgbClr val="10222B"/>
-                          </a:solidFill>
-                          <a:latin typeface="+mn-lt" pitchFamily="34" charset="0"/>
-                          <a:ea typeface="+mn-lt" pitchFamily="34" charset="-122"/>
-                          <a:cs typeface="+mn-lt" pitchFamily="34" charset="-120"/>
-                        </a:rPr>
-                        <a:t>60%</a:t>
-                      </a:r>
-                      <a:endParaRPr lang="en-US" sz="1400" dirty="0">
-                        <a:latin typeface="+mn-lt" charset="0"/>
-                        <a:ea typeface="+mn-lt" charset="0"/>
-                        <a:cs typeface="+mn-lt" charset="0"/>
-                      </a:endParaRPr>
-                    </a:p>
-                  </a:txBody>
-                  <a:tcPr anchor="ctr">
-                    <a:lnL w="9525" cap="flat" cmpd="sng" algn="ctr">
-                      <a:solidFill>
-                        <a:srgbClr val="D5E3E0"/>
-                      </a:solidFill>
-                      <a:prstDash val="solid"/>
-                      <a:round/>
-                      <a:headEnd type="none" w="med" len="med"/>
-                      <a:tailEnd type="none" w="med" len="med"/>
-                    </a:lnL>
-                    <a:lnR w="9525" cap="flat" cmpd="sng" algn="ctr">
-                      <a:solidFill>
-                        <a:srgbClr val="D5E3E0"/>
-                      </a:solidFill>
-                      <a:prstDash val="solid"/>
-                      <a:round/>
-                      <a:headEnd type="none" w="med" len="med"/>
-                      <a:tailEnd type="none" w="med" len="med"/>
-                    </a:lnR>
-                    <a:lnT w="9525" cap="flat" cmpd="sng" algn="ctr">
-                      <a:solidFill>
-                        <a:srgbClr val="D5E3E0"/>
-                      </a:solidFill>
-                      <a:prstDash val="solid"/>
-                      <a:round/>
-                      <a:headEnd type="none" w="med" len="med"/>
-                      <a:tailEnd type="none" w="med" len="med"/>
-                    </a:lnT>
-                    <a:lnB w="9525" cap="flat" cmpd="sng" algn="ctr">
-                      <a:solidFill>
-                        <a:srgbClr val="D5E3E0"/>
-                      </a:solidFill>
-                      <a:prstDash val="solid"/>
-                      <a:round/>
-                      <a:headEnd type="none" w="med" len="med"/>
-                      <a:tailEnd type="none" w="med" len="med"/>
-                    </a:lnB>
-                    <a:solidFill>
-                      <a:srgbClr val="FFFFFF"/>
-                    </a:solidFill>
-                  </a:tcPr>
-                </a:tc>
-                <a:tc>
-                  <a:txBody>
-                    <a:bodyPr/>
-                    <a:lstStyle/>
-                    <a:p>
-                      <a:pPr marL="0" indent="0" algn="l">
-                        <a:buNone/>
-                      </a:pPr>
-                      <a:r>
-                        <a:rPr lang="en-US" sz="1400" b="1" dirty="0">
-                          <a:solidFill>
-                            <a:srgbClr val="DC2626"/>
-                          </a:solidFill>
-                          <a:latin typeface="+mn-lt" pitchFamily="34" charset="0"/>
-                          <a:ea typeface="+mn-lt" pitchFamily="34" charset="-122"/>
-                          <a:cs typeface="+mn-lt" pitchFamily="34" charset="-120"/>
-                        </a:rPr>
-                        <a:t>−$147.96</a:t>
-                      </a:r>
-                      <a:endParaRPr lang="en-US" sz="1400" dirty="0">
-                        <a:latin typeface="+mn-lt" charset="0"/>
-                        <a:ea typeface="+mn-lt" charset="0"/>
-                        <a:cs typeface="+mn-lt" charset="0"/>
-                      </a:endParaRPr>
-                    </a:p>
-                  </a:txBody>
-                  <a:tcPr anchor="ctr">
-                    <a:lnL w="9525" cap="flat" cmpd="sng" algn="ctr">
-                      <a:solidFill>
-                        <a:srgbClr val="D5E3E0"/>
-                      </a:solidFill>
-                      <a:prstDash val="solid"/>
-                      <a:round/>
-                      <a:headEnd type="none" w="med" len="med"/>
-                      <a:tailEnd type="none" w="med" len="med"/>
-                    </a:lnL>
-                    <a:lnR w="9525" cap="flat" cmpd="sng" algn="ctr">
-                      <a:solidFill>
-                        <a:srgbClr val="D5E3E0"/>
-                      </a:solidFill>
-                      <a:prstDash val="solid"/>
-                      <a:round/>
-                      <a:headEnd type="none" w="med" len="med"/>
-                      <a:tailEnd type="none" w="med" len="med"/>
-                    </a:lnR>
-                    <a:lnT w="9525" cap="flat" cmpd="sng" algn="ctr">
-                      <a:solidFill>
-                        <a:srgbClr val="D5E3E0"/>
-                      </a:solidFill>
-                      <a:prstDash val="solid"/>
-                      <a:round/>
-                      <a:headEnd type="none" w="med" len="med"/>
-                      <a:tailEnd type="none" w="med" len="med"/>
-                    </a:lnT>
-                    <a:lnB w="9525" cap="flat" cmpd="sng" algn="ctr">
-                      <a:solidFill>
-                        <a:srgbClr val="D5E3E0"/>
-                      </a:solidFill>
-                      <a:prstDash val="solid"/>
-                      <a:round/>
-                      <a:headEnd type="none" w="med" len="med"/>
-                      <a:tailEnd type="none" w="med" len="med"/>
-                    </a:lnB>
-                    <a:solidFill>
-                      <a:srgbClr val="FFFFFF"/>
-                    </a:solidFill>
-                  </a:tcPr>
-                </a:tc>
-                <a:tc>
-                  <a:txBody>
-                    <a:bodyPr/>
-                    <a:lstStyle/>
-                    <a:p>
-                      <a:pPr marL="0" indent="0" algn="l">
-                        <a:buNone/>
-                      </a:pPr>
-                      <a:r>
-                        <a:rPr lang="en-US" sz="1400" dirty="0">
-                          <a:solidFill>
-                            <a:srgbClr val="DC2626"/>
-                          </a:solidFill>
-                          <a:latin typeface="+mn-lt" pitchFamily="34" charset="0"/>
-                          <a:ea typeface="+mn-lt" pitchFamily="34" charset="-122"/>
-                          <a:cs typeface="+mn-lt" pitchFamily="34" charset="-120"/>
-                        </a:rPr>
-                        <a:t>Loss</a:t>
-                      </a:r>
-                      <a:endParaRPr lang="en-US" sz="1400" dirty="0">
-                        <a:latin typeface="+mn-lt" charset="0"/>
-                        <a:ea typeface="+mn-lt" charset="0"/>
-                        <a:cs typeface="+mn-lt" charset="0"/>
-                      </a:endParaRPr>
-                    </a:p>
-                  </a:txBody>
-                  <a:tcPr anchor="ctr">
-                    <a:lnL w="9525" cap="flat" cmpd="sng" algn="ctr">
-                      <a:solidFill>
-                        <a:srgbClr val="D5E3E0"/>
-                      </a:solidFill>
-                      <a:prstDash val="solid"/>
-                      <a:round/>
-                      <a:headEnd type="none" w="med" len="med"/>
-                      <a:tailEnd type="none" w="med" len="med"/>
-                    </a:lnL>
-                    <a:lnR w="9525" cap="flat" cmpd="sng" algn="ctr">
-                      <a:solidFill>
-                        <a:srgbClr val="D5E3E0"/>
-                      </a:solidFill>
-                      <a:prstDash val="solid"/>
-                      <a:round/>
-                      <a:headEnd type="none" w="med" len="med"/>
-                      <a:tailEnd type="none" w="med" len="med"/>
-                    </a:lnR>
-                    <a:lnT w="9525" cap="flat" cmpd="sng" algn="ctr">
-                      <a:solidFill>
-                        <a:srgbClr val="D5E3E0"/>
-                      </a:solidFill>
-                      <a:prstDash val="solid"/>
-                      <a:round/>
-                      <a:headEnd type="none" w="med" len="med"/>
-                      <a:tailEnd type="none" w="med" len="med"/>
-                    </a:lnT>
-                    <a:lnB w="9525" cap="flat" cmpd="sng" algn="ctr">
-                      <a:solidFill>
-                        <a:srgbClr val="D5E3E0"/>
-                      </a:solidFill>
-                      <a:prstDash val="solid"/>
-                      <a:round/>
-                      <a:headEnd type="none" w="med" len="med"/>
-                      <a:tailEnd type="none" w="med" len="med"/>
-                    </a:lnB>
-                    <a:solidFill>
-                      <a:srgbClr val="FFFFFF"/>
-                    </a:solidFill>
-                  </a:tcPr>
-                </a:tc>
-                <a:extLst>
-                  <a:ext uri="{0D108BD9-81ED-4DB2-BD59-A6C34878D82A}">
-                    <a16:rowId xmlns:a16="http://schemas.microsoft.com/office/drawing/2014/main" val="10007"/>
-                  </a:ext>
-                </a:extLst>
-              </a:tr>
-              <a:tr h="329184">
-                <a:tc>
-                  <a:txBody>
-                    <a:bodyPr/>
-                    <a:lstStyle/>
-                    <a:p>
-                      <a:pPr marL="0" indent="0" algn="l">
-                        <a:buNone/>
-                      </a:pPr>
-                      <a:r>
-                        <a:rPr lang="en-US" sz="1400" dirty="0">
-                          <a:solidFill>
-                            <a:srgbClr val="10222B"/>
-                          </a:solidFill>
-                          <a:latin typeface="+mn-lt" pitchFamily="34" charset="0"/>
-                          <a:ea typeface="+mn-lt" pitchFamily="34" charset="-122"/>
-                          <a:cs typeface="+mn-lt" pitchFamily="34" charset="-120"/>
-                        </a:rPr>
-                        <a:t>70%</a:t>
-                      </a:r>
-                      <a:endParaRPr lang="en-US" sz="1400" dirty="0">
-                        <a:latin typeface="+mn-lt" charset="0"/>
-                        <a:ea typeface="+mn-lt" charset="0"/>
-                        <a:cs typeface="+mn-lt" charset="0"/>
-                      </a:endParaRPr>
-                    </a:p>
-                  </a:txBody>
-                  <a:tcPr anchor="ctr">
-                    <a:lnL w="9525" cap="flat" cmpd="sng" algn="ctr">
-                      <a:solidFill>
-                        <a:srgbClr val="D5E3E0"/>
-                      </a:solidFill>
-                      <a:prstDash val="solid"/>
-                      <a:round/>
-                      <a:headEnd type="none" w="med" len="med"/>
-                      <a:tailEnd type="none" w="med" len="med"/>
-                    </a:lnL>
-                    <a:lnR w="9525" cap="flat" cmpd="sng" algn="ctr">
-                      <a:solidFill>
-                        <a:srgbClr val="D5E3E0"/>
-                      </a:solidFill>
-                      <a:prstDash val="solid"/>
-                      <a:round/>
-                      <a:headEnd type="none" w="med" len="med"/>
-                      <a:tailEnd type="none" w="med" len="med"/>
-                    </a:lnR>
-                    <a:lnT w="9525" cap="flat" cmpd="sng" algn="ctr">
-                      <a:solidFill>
-                        <a:srgbClr val="D5E3E0"/>
-                      </a:solidFill>
-                      <a:prstDash val="solid"/>
-                      <a:round/>
-                      <a:headEnd type="none" w="med" len="med"/>
-                      <a:tailEnd type="none" w="med" len="med"/>
-                    </a:lnT>
-                    <a:lnB w="9525" cap="flat" cmpd="sng" algn="ctr">
-                      <a:solidFill>
-                        <a:srgbClr val="D5E3E0"/>
-                      </a:solidFill>
-                      <a:prstDash val="solid"/>
-                      <a:round/>
-                      <a:headEnd type="none" w="med" len="med"/>
-                      <a:tailEnd type="none" w="med" len="med"/>
-                    </a:lnB>
-                    <a:solidFill>
-                      <a:srgbClr val="EAF2F1"/>
-                    </a:solidFill>
-                  </a:tcPr>
-                </a:tc>
-                <a:tc>
-                  <a:txBody>
-                    <a:bodyPr/>
-                    <a:lstStyle/>
-                    <a:p>
-                      <a:pPr marL="0" indent="0" algn="l">
-                        <a:buNone/>
-                      </a:pPr>
-                      <a:r>
-                        <a:rPr lang="en-US" sz="1400" b="1" dirty="0">
-                          <a:solidFill>
-                            <a:srgbClr val="DC2626"/>
-                          </a:solidFill>
-                          <a:latin typeface="+mn-lt" pitchFamily="34" charset="0"/>
-                          <a:ea typeface="+mn-lt" pitchFamily="34" charset="-122"/>
-                          <a:cs typeface="+mn-lt" pitchFamily="34" charset="-120"/>
-                        </a:rPr>
-                        <a:t>−$12.77</a:t>
-                      </a:r>
-                      <a:endParaRPr lang="en-US" sz="1400" dirty="0">
-                        <a:latin typeface="+mn-lt" charset="0"/>
-                        <a:ea typeface="+mn-lt" charset="0"/>
-                        <a:cs typeface="+mn-lt" charset="0"/>
-                      </a:endParaRPr>
-                    </a:p>
-                  </a:txBody>
-                  <a:tcPr anchor="ctr">
-                    <a:lnL w="9525" cap="flat" cmpd="sng" algn="ctr">
-                      <a:solidFill>
-                        <a:srgbClr val="D5E3E0"/>
-                      </a:solidFill>
-                      <a:prstDash val="solid"/>
-                      <a:round/>
-                      <a:headEnd type="none" w="med" len="med"/>
-                      <a:tailEnd type="none" w="med" len="med"/>
-                    </a:lnL>
-                    <a:lnR w="9525" cap="flat" cmpd="sng" algn="ctr">
-                      <a:solidFill>
-                        <a:srgbClr val="D5E3E0"/>
-                      </a:solidFill>
-                      <a:prstDash val="solid"/>
-                      <a:round/>
-                      <a:headEnd type="none" w="med" len="med"/>
-                      <a:tailEnd type="none" w="med" len="med"/>
-                    </a:lnR>
-                    <a:lnT w="9525" cap="flat" cmpd="sng" algn="ctr">
-                      <a:solidFill>
-                        <a:srgbClr val="D5E3E0"/>
-                      </a:solidFill>
-                      <a:prstDash val="solid"/>
-                      <a:round/>
-                      <a:headEnd type="none" w="med" len="med"/>
-                      <a:tailEnd type="none" w="med" len="med"/>
-                    </a:lnT>
-                    <a:lnB w="9525" cap="flat" cmpd="sng" algn="ctr">
-                      <a:solidFill>
-                        <a:srgbClr val="D5E3E0"/>
-                      </a:solidFill>
-                      <a:prstDash val="solid"/>
-                      <a:round/>
-                      <a:headEnd type="none" w="med" len="med"/>
-                      <a:tailEnd type="none" w="med" len="med"/>
-                    </a:lnB>
-                    <a:solidFill>
-                      <a:srgbClr val="EAF2F1"/>
-                    </a:solidFill>
-                  </a:tcPr>
-                </a:tc>
-                <a:tc>
-                  <a:txBody>
-                    <a:bodyPr/>
-                    <a:lstStyle/>
-                    <a:p>
-                      <a:pPr marL="0" indent="0" algn="l">
-                        <a:buNone/>
-                      </a:pPr>
-                      <a:r>
-                        <a:rPr lang="en-US" sz="1400" dirty="0">
-                          <a:solidFill>
-                            <a:srgbClr val="DC2626"/>
-                          </a:solidFill>
-                          <a:latin typeface="+mn-lt" pitchFamily="34" charset="0"/>
-                          <a:ea typeface="+mn-lt" pitchFamily="34" charset="-122"/>
-                          <a:cs typeface="+mn-lt" pitchFamily="34" charset="-120"/>
-                        </a:rPr>
-                        <a:t>Loss</a:t>
-                      </a:r>
-                      <a:endParaRPr lang="en-US" sz="1400" dirty="0">
-                        <a:latin typeface="+mn-lt" charset="0"/>
-                        <a:ea typeface="+mn-lt" charset="0"/>
-                        <a:cs typeface="+mn-lt" charset="0"/>
-                      </a:endParaRPr>
-                    </a:p>
-                  </a:txBody>
-                  <a:tcPr anchor="ctr">
-                    <a:lnL w="9525" cap="flat" cmpd="sng" algn="ctr">
-                      <a:solidFill>
-                        <a:srgbClr val="D5E3E0"/>
-                      </a:solidFill>
-                      <a:prstDash val="solid"/>
-                      <a:round/>
-                      <a:headEnd type="none" w="med" len="med"/>
-                      <a:tailEnd type="none" w="med" len="med"/>
-                    </a:lnL>
-                    <a:lnR w="9525" cap="flat" cmpd="sng" algn="ctr">
-                      <a:solidFill>
-                        <a:srgbClr val="D5E3E0"/>
-                      </a:solidFill>
-                      <a:prstDash val="solid"/>
-                      <a:round/>
-                      <a:headEnd type="none" w="med" len="med"/>
-                      <a:tailEnd type="none" w="med" len="med"/>
-                    </a:lnR>
-                    <a:lnT w="9525" cap="flat" cmpd="sng" algn="ctr">
-                      <a:solidFill>
-                        <a:srgbClr val="D5E3E0"/>
-                      </a:solidFill>
-                      <a:prstDash val="solid"/>
-                      <a:round/>
-                      <a:headEnd type="none" w="med" len="med"/>
-                      <a:tailEnd type="none" w="med" len="med"/>
-                    </a:lnT>
-                    <a:lnB w="9525" cap="flat" cmpd="sng" algn="ctr">
-                      <a:solidFill>
-                        <a:srgbClr val="D5E3E0"/>
-                      </a:solidFill>
-                      <a:prstDash val="solid"/>
-                      <a:round/>
-                      <a:headEnd type="none" w="med" len="med"/>
-                      <a:tailEnd type="none" w="med" len="med"/>
-                    </a:lnB>
-                    <a:solidFill>
-                      <a:srgbClr val="EAF2F1"/>
-                    </a:solidFill>
-                  </a:tcPr>
-                </a:tc>
-                <a:extLst>
-                  <a:ext uri="{0D108BD9-81ED-4DB2-BD59-A6C34878D82A}">
-                    <a16:rowId xmlns:a16="http://schemas.microsoft.com/office/drawing/2014/main" val="10008"/>
-                  </a:ext>
-                </a:extLst>
-              </a:tr>
-              <a:tr h="329184">
-                <a:tc>
-                  <a:txBody>
-                    <a:bodyPr/>
-                    <a:lstStyle/>
-                    <a:p>
-                      <a:pPr marL="0" indent="0" algn="l">
-                        <a:buNone/>
-                      </a:pPr>
-                      <a:r>
-                        <a:rPr lang="en-US" sz="1400" dirty="0">
-                          <a:solidFill>
-                            <a:srgbClr val="10222B"/>
-                          </a:solidFill>
-                          <a:latin typeface="+mn-lt" pitchFamily="34" charset="0"/>
-                          <a:ea typeface="+mn-lt" pitchFamily="34" charset="-122"/>
-                          <a:cs typeface="+mn-lt" pitchFamily="34" charset="-120"/>
-                        </a:rPr>
-                        <a:t>80%</a:t>
-                      </a:r>
-                      <a:endParaRPr lang="en-US" sz="1400" dirty="0">
-                        <a:latin typeface="+mn-lt" charset="0"/>
-                        <a:ea typeface="+mn-lt" charset="0"/>
-                        <a:cs typeface="+mn-lt" charset="0"/>
-                      </a:endParaRPr>
-                    </a:p>
-                  </a:txBody>
-                  <a:tcPr anchor="ctr">
-                    <a:lnL w="9525" cap="flat" cmpd="sng" algn="ctr">
-                      <a:solidFill>
-                        <a:srgbClr val="D5E3E0"/>
-                      </a:solidFill>
-                      <a:prstDash val="solid"/>
-                      <a:round/>
-                      <a:headEnd type="none" w="med" len="med"/>
-                      <a:tailEnd type="none" w="med" len="med"/>
-                    </a:lnL>
-                    <a:lnR w="9525" cap="flat" cmpd="sng" algn="ctr">
-                      <a:solidFill>
-                        <a:srgbClr val="D5E3E0"/>
-                      </a:solidFill>
-                      <a:prstDash val="solid"/>
-                      <a:round/>
-                      <a:headEnd type="none" w="med" len="med"/>
-                      <a:tailEnd type="none" w="med" len="med"/>
-                    </a:lnR>
-                    <a:lnT w="9525" cap="flat" cmpd="sng" algn="ctr">
-                      <a:solidFill>
-                        <a:srgbClr val="D5E3E0"/>
-                      </a:solidFill>
-                      <a:prstDash val="solid"/>
-                      <a:round/>
-                      <a:headEnd type="none" w="med" len="med"/>
-                      <a:tailEnd type="none" w="med" len="med"/>
-                    </a:lnT>
-                    <a:lnB w="9525" cap="flat" cmpd="sng" algn="ctr">
-                      <a:solidFill>
-                        <a:srgbClr val="D5E3E0"/>
-                      </a:solidFill>
-                      <a:prstDash val="solid"/>
-                      <a:round/>
-                      <a:headEnd type="none" w="med" len="med"/>
-                      <a:tailEnd type="none" w="med" len="med"/>
-                    </a:lnB>
-                    <a:solidFill>
-                      <a:srgbClr val="FFFFFF"/>
-                    </a:solidFill>
-                  </a:tcPr>
-                </a:tc>
-                <a:tc>
-                  <a:txBody>
-                    <a:bodyPr/>
-                    <a:lstStyle/>
-                    <a:p>
-                      <a:pPr marL="0" indent="0" algn="l">
-                        <a:buNone/>
-                      </a:pPr>
-                      <a:r>
-                        <a:rPr lang="en-US" sz="1400" b="1" dirty="0">
-                          <a:solidFill>
-                            <a:srgbClr val="DC2626"/>
-                          </a:solidFill>
-                          <a:latin typeface="+mn-lt" pitchFamily="34" charset="0"/>
-                          <a:ea typeface="+mn-lt" pitchFamily="34" charset="-122"/>
-                          <a:cs typeface="+mn-lt" pitchFamily="34" charset="-120"/>
-                        </a:rPr>
-                        <a:t>−$127.67</a:t>
-                      </a:r>
-                      <a:endParaRPr lang="en-US" sz="1400" dirty="0">
-                        <a:latin typeface="+mn-lt" charset="0"/>
-                        <a:ea typeface="+mn-lt" charset="0"/>
-                        <a:cs typeface="+mn-lt" charset="0"/>
-                      </a:endParaRPr>
-                    </a:p>
-                  </a:txBody>
-                  <a:tcPr anchor="ctr">
-                    <a:lnL w="9525" cap="flat" cmpd="sng" algn="ctr">
-                      <a:solidFill>
-                        <a:srgbClr val="D5E3E0"/>
-                      </a:solidFill>
-                      <a:prstDash val="solid"/>
-                      <a:round/>
-                      <a:headEnd type="none" w="med" len="med"/>
-                      <a:tailEnd type="none" w="med" len="med"/>
-                    </a:lnL>
-                    <a:lnR w="9525" cap="flat" cmpd="sng" algn="ctr">
-                      <a:solidFill>
-                        <a:srgbClr val="D5E3E0"/>
-                      </a:solidFill>
-                      <a:prstDash val="solid"/>
-                      <a:round/>
-                      <a:headEnd type="none" w="med" len="med"/>
-                      <a:tailEnd type="none" w="med" len="med"/>
-                    </a:lnR>
-                    <a:lnT w="9525" cap="flat" cmpd="sng" algn="ctr">
-                      <a:solidFill>
-                        <a:srgbClr val="D5E3E0"/>
-                      </a:solidFill>
-                      <a:prstDash val="solid"/>
-                      <a:round/>
-                      <a:headEnd type="none" w="med" len="med"/>
-                      <a:tailEnd type="none" w="med" len="med"/>
-                    </a:lnT>
-                    <a:lnB w="9525" cap="flat" cmpd="sng" algn="ctr">
-                      <a:solidFill>
-                        <a:srgbClr val="D5E3E0"/>
-                      </a:solidFill>
-                      <a:prstDash val="solid"/>
-                      <a:round/>
-                      <a:headEnd type="none" w="med" len="med"/>
-                      <a:tailEnd type="none" w="med" len="med"/>
-                    </a:lnB>
-                    <a:solidFill>
-                      <a:srgbClr val="FFFFFF"/>
-                    </a:solidFill>
-                  </a:tcPr>
-                </a:tc>
-                <a:tc>
-                  <a:txBody>
-                    <a:bodyPr/>
-                    <a:lstStyle/>
-                    <a:p>
-                      <a:pPr marL="0" indent="0" algn="l">
-                        <a:buNone/>
-                      </a:pPr>
-                      <a:r>
-                        <a:rPr lang="en-US" sz="1400" dirty="0">
-                          <a:solidFill>
-                            <a:srgbClr val="DC2626"/>
-                          </a:solidFill>
-                          <a:latin typeface="+mn-lt" pitchFamily="34" charset="0"/>
-                          <a:ea typeface="+mn-lt" pitchFamily="34" charset="-122"/>
-                          <a:cs typeface="+mn-lt" pitchFamily="34" charset="-120"/>
-                        </a:rPr>
-                        <a:t>Loss</a:t>
-                      </a:r>
-                      <a:endParaRPr lang="en-US" sz="1400" dirty="0">
-                        <a:latin typeface="+mn-lt" charset="0"/>
-                        <a:ea typeface="+mn-lt" charset="0"/>
-                        <a:cs typeface="+mn-lt" charset="0"/>
-                      </a:endParaRPr>
-                    </a:p>
-                  </a:txBody>
-                  <a:tcPr anchor="ctr">
-                    <a:lnL w="9525" cap="flat" cmpd="sng" algn="ctr">
-                      <a:solidFill>
-                        <a:srgbClr val="D5E3E0"/>
-                      </a:solidFill>
-                      <a:prstDash val="solid"/>
-                      <a:round/>
-                      <a:headEnd type="none" w="med" len="med"/>
-                      <a:tailEnd type="none" w="med" len="med"/>
-                    </a:lnL>
-                    <a:lnR w="9525" cap="flat" cmpd="sng" algn="ctr">
-                      <a:solidFill>
-                        <a:srgbClr val="D5E3E0"/>
-                      </a:solidFill>
-                      <a:prstDash val="solid"/>
-                      <a:round/>
-                      <a:headEnd type="none" w="med" len="med"/>
-                      <a:tailEnd type="none" w="med" len="med"/>
-                    </a:lnR>
-                    <a:lnT w="9525" cap="flat" cmpd="sng" algn="ctr">
-                      <a:solidFill>
-                        <a:srgbClr val="D5E3E0"/>
-                      </a:solidFill>
-                      <a:prstDash val="solid"/>
-                      <a:round/>
-                      <a:headEnd type="none" w="med" len="med"/>
-                      <a:tailEnd type="none" w="med" len="med"/>
-                    </a:lnT>
-                    <a:lnB w="9525" cap="flat" cmpd="sng" algn="ctr">
-                      <a:solidFill>
-                        <a:srgbClr val="D5E3E0"/>
-                      </a:solidFill>
-                      <a:prstDash val="solid"/>
-                      <a:round/>
-                      <a:headEnd type="none" w="med" len="med"/>
-                      <a:tailEnd type="none" w="med" len="med"/>
-                    </a:lnB>
-                    <a:solidFill>
-                      <a:srgbClr val="FFFFFF"/>
-                    </a:solidFill>
-                  </a:tcPr>
-                </a:tc>
-                <a:extLst>
-                  <a:ext uri="{0D108BD9-81ED-4DB2-BD59-A6C34878D82A}">
-                    <a16:rowId xmlns:a16="http://schemas.microsoft.com/office/drawing/2014/main" val="10009"/>
-                  </a:ext>
-                </a:extLst>
-              </a:tr>
-            </a:tbl>
-          </a:graphicData>
-        </a:graphic>
-      </p:graphicFrame>
-      <p:sp>
-        <p:nvSpPr>
-          <p:cNvPr id="4" name="g2_bg"/>
-          <p:cNvSpPr/>
-          <p:nvPr/>
-        </p:nvSpPr>
-        <p:spPr>
-          <a:xfrm>
-            <a:off x="4709160" y="1143000"/>
-            <a:ext cx="3977640" cy="1097280"/>
-          </a:xfrm>
-          <a:prstGeom prst="roundRect">
-            <a:avLst>
-              <a:gd name="adj" fmla="val 8333"/>
-            </a:avLst>
-          </a:prstGeom>
-          <a:solidFill>
-            <a:schemeClr val="bg1"/>
-          </a:solidFill>
-          <a:ln w="12700">
-            <a:solidFill>
-              <a:schemeClr val="bg1"/>
-            </a:solidFill>
-            <a:prstDash val="solid"/>
-          </a:ln>
-          <a:effectLst>
-            <a:outerShdw blurRad="101600" dist="25400" dir="5400000" algn="bl" rotWithShape="0">
-              <a:srgbClr val="10222B">
-                <a:alpha val="15000"/>
-              </a:srgbClr>
-            </a:outerShdw>
-          </a:effectLst>
-        </p:spPr>
-      </p:sp>
-      <p:sp>
-        <p:nvSpPr>
-          <p:cNvPr id="5" name="g2_v"/>
-          <p:cNvSpPr txBox="1"/>
-          <p:nvPr/>
-        </p:nvSpPr>
-        <p:spPr>
-          <a:xfrm>
-            <a:off x="4892040" y="1216152"/>
-            <a:ext cx="3611880" cy="411480"/>
-          </a:xfrm>
-          <a:prstGeom prst="rect">
-            <a:avLst/>
-          </a:prstGeom>
-          <a:noFill/>
-          <a:ln/>
-        </p:spPr>
-        <p:txBody>
-          <a:bodyPr wrap="square" lIns="0" tIns="0" rIns="0" bIns="0" rtlCol="0" anchor="ctr"/>
-          <a:lstStyle/>
-          <a:p>
-            <a:pPr marL="0" indent="0">
-              <a:buNone/>
-            </a:pPr>
-            <a:r>
-              <a:rPr lang="en-US" sz="2400" b="1" dirty="0">
-                <a:solidFill>
-                  <a:schemeClr val="accent4"/>
-                </a:solidFill>
-                <a:latin typeface="Cambria" pitchFamily="34" charset="0"/>
-                <a:ea typeface="Cambria" pitchFamily="34" charset="-122"/>
-                <a:cs typeface="Cambria" pitchFamily="34" charset="-120"/>
-              </a:rPr>
-              <a:t>$1,234.60</a:t>
-            </a:r>
-            <a:endParaRPr lang="en-US" sz="2400" dirty="0"/>
-          </a:p>
-        </p:txBody>
-      </p:sp>
-      <p:sp>
-        <p:nvSpPr>
-          <p:cNvPr id="6" name="g2_d"/>
-          <p:cNvSpPr txBox="1"/>
-          <p:nvPr/>
-        </p:nvSpPr>
-        <p:spPr>
-          <a:xfrm>
-            <a:off x="4892040" y="1673352"/>
-            <a:ext cx="3611880" cy="502920"/>
-          </a:xfrm>
-          <a:prstGeom prst="rect">
-            <a:avLst/>
-          </a:prstGeom>
-          <a:noFill/>
-          <a:ln/>
-        </p:spPr>
-        <p:txBody>
-          <a:bodyPr wrap="square" lIns="0" tIns="0" rIns="0" bIns="0" rtlCol="0" anchor="t"/>
-          <a:lstStyle/>
-          <a:p>
-            <a:pPr marL="0" indent="0">
-              <a:buNone/>
-            </a:pPr>
-            <a:r>
-              <a:rPr lang="en-US" sz="1400" dirty="0">
-                <a:solidFill>
-                  <a:schemeClr val="tx1"/>
-                </a:solidFill>
-                <a:latin typeface="Calibri" pitchFamily="34" charset="0"/>
-                <a:ea typeface="Calibri" pitchFamily="34" charset="-122"/>
-                <a:cs typeface="Calibri" pitchFamily="34" charset="-120"/>
-              </a:rPr>
-              <a:t>earned at 0% and 20% discounts combined.</a:t>
-            </a:r>
-            <a:endParaRPr lang="en-US" sz="1400" dirty="0"/>
-          </a:p>
-        </p:txBody>
-      </p:sp>
-      <p:sp>
-        <p:nvSpPr>
-          <p:cNvPr id="7" name="g3_bg"/>
-          <p:cNvSpPr/>
-          <p:nvPr/>
-        </p:nvSpPr>
-        <p:spPr>
-          <a:xfrm>
-            <a:off x="4709160" y="2331720"/>
-            <a:ext cx="3977640" cy="1097280"/>
-          </a:xfrm>
-          <a:prstGeom prst="roundRect">
-            <a:avLst>
-              <a:gd name="adj" fmla="val 8333"/>
-            </a:avLst>
-          </a:prstGeom>
-          <a:solidFill>
-            <a:schemeClr val="bg1"/>
-          </a:solidFill>
-          <a:ln w="12700">
-            <a:solidFill>
-              <a:schemeClr val="bg1"/>
-            </a:solidFill>
-            <a:prstDash val="solid"/>
-          </a:ln>
-          <a:effectLst>
-            <a:outerShdw blurRad="101600" dist="25400" dir="5400000" algn="bl" rotWithShape="0">
-              <a:srgbClr val="10222B">
-                <a:alpha val="15000"/>
-              </a:srgbClr>
-            </a:outerShdw>
-          </a:effectLst>
-        </p:spPr>
-      </p:sp>
-      <p:sp>
-        <p:nvSpPr>
-          <p:cNvPr id="8" name="g3_v"/>
-          <p:cNvSpPr txBox="1"/>
-          <p:nvPr/>
-        </p:nvSpPr>
-        <p:spPr>
-          <a:xfrm>
-            <a:off x="4892040" y="2404872"/>
-            <a:ext cx="3611880" cy="411480"/>
-          </a:xfrm>
-          <a:prstGeom prst="rect">
-            <a:avLst/>
-          </a:prstGeom>
-          <a:noFill/>
-          <a:ln/>
-        </p:spPr>
-        <p:txBody>
-          <a:bodyPr wrap="square" lIns="0" tIns="0" rIns="0" bIns="0" rtlCol="0" anchor="ctr"/>
-          <a:lstStyle/>
-          <a:p>
-            <a:pPr marL="0" indent="0">
-              <a:buNone/>
-            </a:pPr>
-            <a:r>
-              <a:rPr lang="en-US" sz="2400" b="1" dirty="0">
-                <a:solidFill>
-                  <a:schemeClr val="accent3"/>
-                </a:solidFill>
-                <a:latin typeface="Cambria" pitchFamily="34" charset="0"/>
-                <a:ea typeface="Cambria" pitchFamily="34" charset="-122"/>
-                <a:cs typeface="Cambria" pitchFamily="34" charset="-120"/>
-              </a:rPr>
-              <a:t>−$2,399.63</a:t>
-            </a:r>
-            <a:endParaRPr lang="en-US" sz="2400" dirty="0"/>
-          </a:p>
-        </p:txBody>
-      </p:sp>
-      <p:sp>
-        <p:nvSpPr>
-          <p:cNvPr id="9" name="g3_d"/>
-          <p:cNvSpPr txBox="1"/>
-          <p:nvPr/>
-        </p:nvSpPr>
-        <p:spPr>
-          <a:xfrm>
-            <a:off x="4892040" y="2862072"/>
-            <a:ext cx="3611880" cy="502920"/>
-          </a:xfrm>
-          <a:prstGeom prst="rect">
-            <a:avLst/>
-          </a:prstGeom>
-          <a:noFill/>
-          <a:ln/>
-        </p:spPr>
-        <p:txBody>
-          <a:bodyPr wrap="square" lIns="0" tIns="0" rIns="0" bIns="0" rtlCol="0" anchor="t"/>
-          <a:lstStyle/>
-          <a:p>
-            <a:pPr marL="0" indent="0">
-              <a:buNone/>
-            </a:pPr>
-            <a:r>
-              <a:rPr lang="en-US" sz="1400" dirty="0">
-                <a:solidFill>
-                  <a:schemeClr val="tx1"/>
-                </a:solidFill>
-                <a:latin typeface="Calibri" pitchFamily="34" charset="0"/>
-                <a:ea typeface="Calibri" pitchFamily="34" charset="-122"/>
-                <a:cs typeface="Calibri" pitchFamily="34" charset="-120"/>
-              </a:rPr>
-              <a:t>lost across all seven discount levels of 30% and above.</a:t>
-            </a:r>
-            <a:endParaRPr lang="en-US" sz="1400" dirty="0"/>
-          </a:p>
-        </p:txBody>
-      </p:sp>
-      <p:sp>
-        <p:nvSpPr>
-          <p:cNvPr id="10" name="g4_bg"/>
-          <p:cNvSpPr/>
-          <p:nvPr/>
-        </p:nvSpPr>
-        <p:spPr>
-          <a:xfrm>
-            <a:off x="4709160" y="3520440"/>
-            <a:ext cx="3977640" cy="1097280"/>
-          </a:xfrm>
-          <a:prstGeom prst="roundRect">
-            <a:avLst>
-              <a:gd name="adj" fmla="val 8333"/>
-            </a:avLst>
-          </a:prstGeom>
-          <a:solidFill>
-            <a:schemeClr val="bg1"/>
-          </a:solidFill>
-          <a:ln w="12700">
-            <a:solidFill>
-              <a:schemeClr val="bg1"/>
-            </a:solidFill>
-            <a:prstDash val="solid"/>
-          </a:ln>
-          <a:effectLst>
-            <a:outerShdw blurRad="101600" dist="25400" dir="5400000" algn="bl" rotWithShape="0">
-              <a:srgbClr val="10222B">
-                <a:alpha val="15000"/>
-              </a:srgbClr>
-            </a:outerShdw>
-          </a:effectLst>
-        </p:spPr>
-      </p:sp>
-      <p:sp>
-        <p:nvSpPr>
-          <p:cNvPr id="3" name="g4_v"/>
-          <p:cNvSpPr txBox="1"/>
-          <p:nvPr/>
-        </p:nvSpPr>
-        <p:spPr>
-          <a:xfrm>
-            <a:off x="4892040" y="3593592"/>
-            <a:ext cx="3611880" cy="411480"/>
-          </a:xfrm>
-          <a:prstGeom prst="rect">
-            <a:avLst/>
-          </a:prstGeom>
-          <a:noFill/>
-          <a:ln/>
-        </p:spPr>
-        <p:txBody>
-          <a:bodyPr wrap="square" lIns="0" tIns="0" rIns="0" bIns="0" rtlCol="0" anchor="ctr"/>
-          <a:lstStyle/>
-          <a:p>
-            <a:pPr marL="0" indent="0">
-              <a:buNone/>
-            </a:pPr>
-            <a:r>
-              <a:rPr lang="en-US" sz="2400" b="1" dirty="0">
-                <a:solidFill>
-                  <a:schemeClr val="accent1"/>
-                </a:solidFill>
-                <a:latin typeface="Cambria" pitchFamily="34" charset="0"/>
-                <a:ea typeface="Cambria" pitchFamily="34" charset="-122"/>
-                <a:cs typeface="Cambria" pitchFamily="34" charset="-120"/>
-              </a:rPr>
-              <a:t>69%</a:t>
-            </a:r>
-            <a:endParaRPr lang="en-US" sz="2400" dirty="0"/>
-          </a:p>
-        </p:txBody>
-      </p:sp>
-      <p:sp>
-        <p:nvSpPr>
-          <p:cNvPr id="12" name="g4_d"/>
-          <p:cNvSpPr txBox="1"/>
-          <p:nvPr/>
-        </p:nvSpPr>
-        <p:spPr>
-          <a:xfrm>
-            <a:off x="4892040" y="4050792"/>
-            <a:ext cx="3611880" cy="502920"/>
-          </a:xfrm>
-          <a:prstGeom prst="rect">
-            <a:avLst/>
-          </a:prstGeom>
-          <a:noFill/>
-          <a:ln/>
-        </p:spPr>
-        <p:txBody>
-          <a:bodyPr wrap="square" lIns="0" tIns="0" rIns="0" bIns="0" rtlCol="0" anchor="t"/>
-          <a:lstStyle/>
-          <a:p>
-            <a:pPr marL="0" indent="0">
-              <a:buNone/>
-            </a:pPr>
-            <a:r>
-              <a:rPr lang="en-US" sz="1400" dirty="0">
-                <a:solidFill>
-                  <a:schemeClr val="tx1"/>
-                </a:solidFill>
-                <a:latin typeface="Calibri" pitchFamily="34" charset="0"/>
-                <a:ea typeface="Calibri" pitchFamily="34" charset="-122"/>
-                <a:cs typeface="Calibri" pitchFamily="34" charset="-120"/>
-              </a:rPr>
-              <a:t>of those losses come from the 50% discount alone ($1,665.05).</a:t>
-            </a:r>
-            <a:endParaRPr lang="en-US" sz="1400" dirty="0"/>
-          </a:p>
-        </p:txBody>
-      </p:sp>
-      <p:sp>
-        <p:nvSpPr>
-          <p:cNvPr id="25" name="Slide Number Placeholder 0"/>
-          <p:cNvSpPr>
-            <a:spLocks noGrp="1"/>
-          </p:cNvSpPr>
-          <p:nvPr>
-            <p:ph type="sldNum" sz="quarter" idx="4294967295"/>
-          </p:nvPr>
-        </p:nvSpPr>
-        <p:spPr>
-          <a:xfrm>
-            <a:off x="8229600" y="4800600"/>
-            <a:ext cx="457200" cy="228600"/>
-          </a:xfrm>
-          <a:prstGeom prst="rect">
-            <a:avLst/>
-          </a:prstGeom>
-          <a:extLst>
-            <a:ext uri="{C572A759-6A51-4108-AA02-DFA0A04FC94B}">
-              <ma14:wrappingTextBoxFlag xmlns:ma14="http://schemas.microsoft.com/office/mac/drawingml/2011/main" xmlns="" val="0"/>
-            </a:ext>
-          </a:extLst>
-        </p:spPr>
-        <p:txBody>
-          <a:bodyPr/>
-          <a:lstStyle>
-            <a:lvl1pPr>
-              <a:defRPr sz="1000">
-                <a:solidFill>
-                  <a:schemeClr val="tx1"/>
-                </a:solidFill>
-              </a:defRPr>
-            </a:lvl1pPr>
-          </a:lstStyle>
-          <a:p>
-            <a:pPr algn="l"/>
-            <a:fld id="{F7021451-1387-4CA6-816F-3879F97B5CBC}" type="slidenum">
-              <a:rPr lang="en-US" b="0"/>
-              <a:t>10</a:t>
-            </a:fld>
-            <a:endParaRPr lang="en-US"/>
-          </a:p>
-        </p:txBody>
-      </p:sp>
-    </p:spTree>
-  </p:cSld>
-  <p:clrMapOvr>
-    <a:masterClrMapping/>
-  </p:clrMapOvr>
-  <p:transition spd="med">
-    <p:fade/>
-  </p:transition>
-  <p:timing>
-    <p:tnLst>
-      <p:par>
-        <p:cTn id="1" dur="indefinite" restart="never" nodeType="tmRoot">
-          <p:childTnLst>
-            <p:seq concurrent="1" nextAc="seek">
-              <p:cTn id="2" dur="indefinite" nodeType="mainSeq">
-                <p:childTnLst>
-                  <p:par>
-                    <p:cTn id="3" fill="hold">
-                      <p:stCondLst>
-                        <p:cond delay="indefinite"/>
-                      </p:stCondLst>
-                      <p:childTnLst>
-                        <p:par>
-                          <p:cTn id="4" fill="hold">
-                            <p:stCondLst>
-                              <p:cond delay="0"/>
-                            </p:stCondLst>
-                            <p:childTnLst>
-                              <p:par>
-                                <p:cTn id="5" presetID="10" presetClass="entr" presetSubtype="0" fill="hold" nodeType="clickEffect">
-                                  <p:stCondLst>
-                                    <p:cond delay="0"/>
-                                  </p:stCondLst>
-                                  <p:childTnLst>
-                                    <p:set>
-                                      <p:cBhvr>
-                                        <p:cTn id="6" dur="1" fill="hold">
-                                          <p:stCondLst>
-                                            <p:cond delay="0"/>
-                                          </p:stCondLst>
-                                        </p:cTn>
-                                        <p:tgtEl>
-                                          <p:spTgt spid="11"/>
-                                        </p:tgtEl>
-                                        <p:attrNameLst>
-                                          <p:attrName>style.visibility</p:attrName>
-                                        </p:attrNameLst>
-                                      </p:cBhvr>
-                                      <p:to>
-                                        <p:strVal val="visible"/>
-                                      </p:to>
-                                    </p:set>
-                                    <p:animEffect transition="in" filter="fade">
-                                      <p:cBhvr>
-                                        <p:cTn id="7" dur="500"/>
-                                        <p:tgtEl>
-                                          <p:spTgt spid="11"/>
-                                        </p:tgtEl>
-                                      </p:cBhvr>
-                                    </p:animEffect>
-                                  </p:childTnLst>
-                                </p:cTn>
-                              </p:par>
-                            </p:childTnLst>
-                          </p:cTn>
-                        </p:par>
-                      </p:childTnLst>
-                    </p:cTn>
-                  </p:par>
-                  <p:par>
-                    <p:cTn id="8" fill="hold">
-                      <p:stCondLst>
-                        <p:cond delay="indefinite"/>
-                      </p:stCondLst>
-                      <p:childTnLst>
-                        <p:par>
-                          <p:cTn id="9" fill="hold">
-                            <p:stCondLst>
-                              <p:cond delay="0"/>
-                            </p:stCondLst>
-                            <p:childTnLst>
-                              <p:par>
-                                <p:cTn id="10" presetID="10" presetClass="entr" presetSubtype="0" fill="hold" nodeType="clickEffect">
-                                  <p:stCondLst>
-                                    <p:cond delay="0"/>
-                                  </p:stCondLst>
-                                  <p:childTnLst>
-                                    <p:set>
-                                      <p:cBhvr>
-                                        <p:cTn id="11" dur="1" fill="hold">
-                                          <p:stCondLst>
-                                            <p:cond delay="0"/>
-                                          </p:stCondLst>
-                                        </p:cTn>
-                                        <p:tgtEl>
-                                          <p:spTgt spid="4"/>
-                                        </p:tgtEl>
-                                        <p:attrNameLst>
-                                          <p:attrName>style.visibility</p:attrName>
-                                        </p:attrNameLst>
-                                      </p:cBhvr>
-                                      <p:to>
-                                        <p:strVal val="visible"/>
-                                      </p:to>
-                                    </p:set>
-                                    <p:animEffect transition="in" filter="fade">
-                                      <p:cBhvr>
-                                        <p:cTn id="12" dur="500"/>
-                                        <p:tgtEl>
-                                          <p:spTgt spid="4"/>
-                                        </p:tgtEl>
-                                      </p:cBhvr>
-                                    </p:animEffect>
-                                  </p:childTnLst>
-                                </p:cTn>
-                              </p:par>
-                              <p:par>
-                                <p:cTn id="13" presetID="10" presetClass="entr" presetSubtype="0" fill="hold" nodeType="withEffect">
-                                  <p:stCondLst>
-                                    <p:cond delay="80"/>
-                                  </p:stCondLst>
-                                  <p:childTnLst>
-                                    <p:set>
-                                      <p:cBhvr>
-                                        <p:cTn id="14" dur="1" fill="hold">
-                                          <p:stCondLst>
-                                            <p:cond delay="0"/>
-                                          </p:stCondLst>
-                                        </p:cTn>
-                                        <p:tgtEl>
-                                          <p:spTgt spid="5"/>
-                                        </p:tgtEl>
-                                        <p:attrNameLst>
-                                          <p:attrName>style.visibility</p:attrName>
-                                        </p:attrNameLst>
-                                      </p:cBhvr>
-                                      <p:to>
-                                        <p:strVal val="visible"/>
-                                      </p:to>
-                                    </p:set>
-                                    <p:animEffect transition="in" filter="fade">
-                                      <p:cBhvr>
-                                        <p:cTn id="15" dur="500"/>
-                                        <p:tgtEl>
-                                          <p:spTgt spid="5"/>
-                                        </p:tgtEl>
-                                      </p:cBhvr>
-                                    </p:animEffect>
-                                  </p:childTnLst>
-                                </p:cTn>
-                              </p:par>
-                              <p:par>
-                                <p:cTn id="16" presetID="10" presetClass="entr" presetSubtype="0" fill="hold" nodeType="withEffect">
-                                  <p:stCondLst>
-                                    <p:cond delay="160"/>
-                                  </p:stCondLst>
-                                  <p:childTnLst>
-                                    <p:set>
-                                      <p:cBhvr>
-                                        <p:cTn id="17" dur="1" fill="hold">
-                                          <p:stCondLst>
-                                            <p:cond delay="0"/>
-                                          </p:stCondLst>
-                                        </p:cTn>
-                                        <p:tgtEl>
-                                          <p:spTgt spid="6"/>
-                                        </p:tgtEl>
-                                        <p:attrNameLst>
-                                          <p:attrName>style.visibility</p:attrName>
-                                        </p:attrNameLst>
-                                      </p:cBhvr>
-                                      <p:to>
-                                        <p:strVal val="visible"/>
-                                      </p:to>
-                                    </p:set>
-                                    <p:animEffect transition="in" filter="fade">
-                                      <p:cBhvr>
-                                        <p:cTn id="18" dur="500"/>
-                                        <p:tgtEl>
-                                          <p:spTgt spid="6"/>
-                                        </p:tgtEl>
-                                      </p:cBhvr>
-                                    </p:animEffect>
-                                  </p:childTnLst>
-                                </p:cTn>
-                              </p:par>
-                            </p:childTnLst>
-                          </p:cTn>
-                        </p:par>
-                      </p:childTnLst>
-                    </p:cTn>
-                  </p:par>
-                  <p:par>
-                    <p:cTn id="19" fill="hold">
-                      <p:stCondLst>
-                        <p:cond delay="indefinite"/>
-                      </p:stCondLst>
-                      <p:childTnLst>
-                        <p:par>
-                          <p:cTn id="20" fill="hold">
-                            <p:stCondLst>
-                              <p:cond delay="0"/>
-                            </p:stCondLst>
-                            <p:childTnLst>
-                              <p:par>
-                                <p:cTn id="21" presetID="10" presetClass="entr" presetSubtype="0" fill="hold" nodeType="clickEffect">
-                                  <p:stCondLst>
-                                    <p:cond delay="0"/>
-                                  </p:stCondLst>
-                                  <p:childTnLst>
-                                    <p:set>
-                                      <p:cBhvr>
-                                        <p:cTn id="22" dur="1" fill="hold">
-                                          <p:stCondLst>
-                                            <p:cond delay="0"/>
-                                          </p:stCondLst>
-                                        </p:cTn>
-                                        <p:tgtEl>
-                                          <p:spTgt spid="7"/>
-                                        </p:tgtEl>
-                                        <p:attrNameLst>
-                                          <p:attrName>style.visibility</p:attrName>
-                                        </p:attrNameLst>
-                                      </p:cBhvr>
-                                      <p:to>
-                                        <p:strVal val="visible"/>
-                                      </p:to>
-                                    </p:set>
-                                    <p:animEffect transition="in" filter="fade">
-                                      <p:cBhvr>
-                                        <p:cTn id="23" dur="500"/>
-                                        <p:tgtEl>
-                                          <p:spTgt spid="7"/>
-                                        </p:tgtEl>
-                                      </p:cBhvr>
-                                    </p:animEffect>
-                                  </p:childTnLst>
-                                </p:cTn>
-                              </p:par>
-                              <p:par>
-                                <p:cTn id="24" presetID="10" presetClass="entr" presetSubtype="0" fill="hold" nodeType="withEffect">
-                                  <p:stCondLst>
-                                    <p:cond delay="80"/>
-                                  </p:stCondLst>
-                                  <p:childTnLst>
-                                    <p:set>
-                                      <p:cBhvr>
-                                        <p:cTn id="25" dur="1" fill="hold">
-                                          <p:stCondLst>
-                                            <p:cond delay="0"/>
-                                          </p:stCondLst>
-                                        </p:cTn>
-                                        <p:tgtEl>
-                                          <p:spTgt spid="8"/>
-                                        </p:tgtEl>
-                                        <p:attrNameLst>
-                                          <p:attrName>style.visibility</p:attrName>
-                                        </p:attrNameLst>
-                                      </p:cBhvr>
-                                      <p:to>
-                                        <p:strVal val="visible"/>
-                                      </p:to>
-                                    </p:set>
-                                    <p:animEffect transition="in" filter="fade">
-                                      <p:cBhvr>
-                                        <p:cTn id="26" dur="500"/>
-                                        <p:tgtEl>
-                                          <p:spTgt spid="8"/>
-                                        </p:tgtEl>
-                                      </p:cBhvr>
-                                    </p:animEffect>
-                                  </p:childTnLst>
-                                </p:cTn>
-                              </p:par>
-                              <p:par>
-                                <p:cTn id="27" presetID="10" presetClass="entr" presetSubtype="0" fill="hold" nodeType="withEffect">
-                                  <p:stCondLst>
-                                    <p:cond delay="160"/>
-                                  </p:stCondLst>
-                                  <p:childTnLst>
-                                    <p:set>
-                                      <p:cBhvr>
-                                        <p:cTn id="28" dur="1" fill="hold">
-                                          <p:stCondLst>
-                                            <p:cond delay="0"/>
-                                          </p:stCondLst>
-                                        </p:cTn>
-                                        <p:tgtEl>
-                                          <p:spTgt spid="9"/>
-                                        </p:tgtEl>
-                                        <p:attrNameLst>
-                                          <p:attrName>style.visibility</p:attrName>
-                                        </p:attrNameLst>
-                                      </p:cBhvr>
-                                      <p:to>
-                                        <p:strVal val="visible"/>
-                                      </p:to>
-                                    </p:set>
-                                    <p:animEffect transition="in" filter="fade">
-                                      <p:cBhvr>
-                                        <p:cTn id="29" dur="500"/>
-                                        <p:tgtEl>
-                                          <p:spTgt spid="9"/>
-                                        </p:tgtEl>
-                                      </p:cBhvr>
-                                    </p:animEffect>
-                                  </p:childTnLst>
-                                </p:cTn>
-                              </p:par>
-                            </p:childTnLst>
-                          </p:cTn>
-                        </p:par>
-                      </p:childTnLst>
-                    </p:cTn>
-                  </p:par>
-                  <p:par>
-                    <p:cTn id="30" fill="hold">
-                      <p:stCondLst>
-                        <p:cond delay="indefinite"/>
-                      </p:stCondLst>
-                      <p:childTnLst>
-                        <p:par>
-                          <p:cTn id="31" fill="hold">
-                            <p:stCondLst>
-                              <p:cond delay="0"/>
-                            </p:stCondLst>
-                            <p:childTnLst>
-                              <p:par>
-                                <p:cTn id="32" presetID="10" presetClass="entr" presetSubtype="0" fill="hold" nodeType="clickEffect">
-                                  <p:stCondLst>
-                                    <p:cond delay="0"/>
-                                  </p:stCondLst>
-                                  <p:childTnLst>
-                                    <p:set>
-                                      <p:cBhvr>
-                                        <p:cTn id="33" dur="1" fill="hold">
-                                          <p:stCondLst>
-                                            <p:cond delay="0"/>
-                                          </p:stCondLst>
-                                        </p:cTn>
-                                        <p:tgtEl>
-                                          <p:spTgt spid="10"/>
-                                        </p:tgtEl>
-                                        <p:attrNameLst>
-                                          <p:attrName>style.visibility</p:attrName>
-                                        </p:attrNameLst>
-                                      </p:cBhvr>
-                                      <p:to>
-                                        <p:strVal val="visible"/>
-                                      </p:to>
-                                    </p:set>
-                                    <p:animEffect transition="in" filter="fade">
-                                      <p:cBhvr>
-                                        <p:cTn id="34" dur="500"/>
-                                        <p:tgtEl>
-                                          <p:spTgt spid="10"/>
-                                        </p:tgtEl>
-                                      </p:cBhvr>
-                                    </p:animEffect>
-                                  </p:childTnLst>
-                                </p:cTn>
-                              </p:par>
-                              <p:par>
-                                <p:cTn id="35" presetID="10" presetClass="entr" presetSubtype="0" fill="hold" nodeType="withEffect">
-                                  <p:stCondLst>
-                                    <p:cond delay="80"/>
-                                  </p:stCondLst>
-                                  <p:childTnLst>
-                                    <p:set>
-                                      <p:cBhvr>
-                                        <p:cTn id="36" dur="1" fill="hold">
-                                          <p:stCondLst>
-                                            <p:cond delay="0"/>
-                                          </p:stCondLst>
-                                        </p:cTn>
-                                        <p:tgtEl>
-                                          <p:spTgt spid="11"/>
-                                        </p:tgtEl>
-                                        <p:attrNameLst>
-                                          <p:attrName>style.visibility</p:attrName>
-                                        </p:attrNameLst>
-                                      </p:cBhvr>
-                                      <p:to>
-                                        <p:strVal val="visible"/>
-                                      </p:to>
-                                    </p:set>
-                                    <p:animEffect transition="in" filter="fade">
-                                      <p:cBhvr>
-                                        <p:cTn id="37" dur="500"/>
-                                        <p:tgtEl>
-                                          <p:spTgt spid="11"/>
-                                        </p:tgtEl>
-                                      </p:cBhvr>
-                                    </p:animEffect>
-                                  </p:childTnLst>
-                                </p:cTn>
-                              </p:par>
-                              <p:par>
-                                <p:cTn id="38" presetID="10" presetClass="entr" presetSubtype="0" fill="hold" nodeType="withEffect">
-                                  <p:stCondLst>
-                                    <p:cond delay="160"/>
-                                  </p:stCondLst>
-                                  <p:childTnLst>
-                                    <p:set>
-                                      <p:cBhvr>
-                                        <p:cTn id="39" dur="1" fill="hold">
-                                          <p:stCondLst>
-                                            <p:cond delay="0"/>
-                                          </p:stCondLst>
-                                        </p:cTn>
-                                        <p:tgtEl>
-                                          <p:spTgt spid="12"/>
-                                        </p:tgtEl>
-                                        <p:attrNameLst>
-                                          <p:attrName>style.visibility</p:attrName>
-                                        </p:attrNameLst>
-                                      </p:cBhvr>
-                                      <p:to>
-                                        <p:strVal val="visible"/>
-                                      </p:to>
-                                    </p:set>
-                                    <p:animEffect transition="in" filter="fade">
-                                      <p:cBhvr>
-                                        <p:cTn id="40" dur="500"/>
-                                        <p:tgtEl>
-                                          <p:spTgt spid="12"/>
-                                        </p:tgtEl>
-                                      </p:cBhvr>
-                                    </p:animEffect>
-                                  </p:childTnLst>
-                                </p:cTn>
-                              </p:par>
-                            </p:childTnLst>
-                          </p:cTn>
-                        </p:par>
-                      </p:childTnLst>
-                    </p:cTn>
-                  </p:par>
-                </p:childTnLst>
-              </p:cTn>
-              <p:prevCondLst>
-                <p:cond evt="onPrev" delay="0">
-                  <p:tgtEl>
-                    <p:sldTgt/>
-                  </p:tgtEl>
-                </p:cond>
-              </p:prevCondLst>
-              <p:nextCondLst>
-                <p:cond evt="onNext" delay="0">
-                  <p:tgtEl>
-                    <p:sldTgt/>
-                  </p:tgtEl>
-                </p:cond>
-              </p:nextCondLst>
-            </p:seq>
-          </p:childTnLst>
-        </p:cTn>
-      </p:par>
-    </p:tnLst>
-  </p:timing>
-</p:sld>
-</file>
-
-<file path=ppt/slides/slide11.xml><?xml version="1.0" encoding="utf-8"?>
-<p:sld xmlns:a="http://schemas.openxmlformats.org/drawingml/2006/main" xmlns:r="http://schemas.openxmlformats.org/officeDocument/2006/relationships" xmlns:p="http://schemas.openxmlformats.org/presentationml/2006/main">
   <p:cSld name="Slide 11">
     <p:spTree>
       <p:nvGrpSpPr>
@@ -6850,7 +3701,7 @@
           </a:prstGeom>
           <a:extLst>
             <a:ext uri="{C572A759-6A51-4108-AA02-DFA0A04FC94B}">
-              <ma14:wrappingTextBoxFlag xmlns:ma14="http://schemas.microsoft.com/office/mac/drawingml/2011/main" xmlns="" val="0"/>
+              <ma14:wrappingTextBoxFlag xmlns="" xmlns:ma14="http://schemas.microsoft.com/office/mac/drawingml/2011/main" val="0"/>
             </a:ext>
           </a:extLst>
         </p:spPr>
@@ -6869,7 +3720,7 @@
             <a:pPr algn="l"/>
             <a:fld id="{F7021451-1387-4CA6-816F-3879F97B5CBC}" type="slidenum">
               <a:rPr lang="en-US" b="0"/>
-              <a:t>11</a:t>
+              <a:t>10</a:t>
             </a:fld>
             <a:endParaRPr lang="en-US"/>
           </a:p>
@@ -7848,7 +4699,7 @@
           </a:prstGeom>
           <a:extLst>
             <a:ext uri="{C572A759-6A51-4108-AA02-DFA0A04FC94B}">
-              <ma14:wrappingTextBoxFlag xmlns:ma14="http://schemas.microsoft.com/office/mac/drawingml/2011/main" xmlns="" val="0"/>
+              <ma14:wrappingTextBoxFlag xmlns="" xmlns:ma14="http://schemas.microsoft.com/office/mac/drawingml/2011/main" val="0"/>
             </a:ext>
           </a:extLst>
         </p:spPr>
@@ -9433,7 +6284,7 @@
           </a:prstGeom>
           <a:extLst>
             <a:ext uri="{C572A759-6A51-4108-AA02-DFA0A04FC94B}">
-              <ma14:wrappingTextBoxFlag xmlns:ma14="http://schemas.microsoft.com/office/mac/drawingml/2011/main" xmlns="" val="0"/>
+              <ma14:wrappingTextBoxFlag xmlns="" xmlns:ma14="http://schemas.microsoft.com/office/mac/drawingml/2011/main" val="0"/>
             </a:ext>
           </a:extLst>
         </p:spPr>
@@ -10500,7 +7351,7 @@
 
 <file path=ppt/slides/slide4.xml><?xml version="1.0" encoding="utf-8"?>
 <p:sld xmlns:a="http://schemas.openxmlformats.org/drawingml/2006/main" xmlns:r="http://schemas.openxmlformats.org/officeDocument/2006/relationships" xmlns:p="http://schemas.openxmlformats.org/presentationml/2006/main">
-  <p:cSld name="Slide 4">
+  <p:cSld name="Slide 5">
     <p:spTree>
       <p:nvGrpSpPr>
         <p:cNvPr id="1" name=""/>
@@ -10552,1477 +7403,26 @@
                 <a:ea typeface="Cambria" pitchFamily="34" charset="-122"/>
                 <a:cs typeface="Cambria" pitchFamily="34" charset="-120"/>
               </a:rPr>
-              <a:t>Category chart: the numbers</a:t>
+              <a:t>Profit by ship mode</a:t>
             </a:r>
             <a:endParaRPr lang="en-US" sz="3400" dirty="0"/>
           </a:p>
         </p:txBody>
       </p:sp>
-      <p:graphicFrame>
-        <p:nvGraphicFramePr>
-          <p:cNvPr id="5" name="g1_table"/>
-          <p:cNvGraphicFramePr>
-            <a:graphicFrameLocks noGrp="1"/>
-          </p:cNvGraphicFramePr>
-          <p:nvPr>
-            <p:extLst>
-              <p:ext uri="{D42A27DB-BD31-4B8C-83A1-F6EECF244321}">
-                <p14:modId xmlns:p14="http://schemas.microsoft.com/office/powerpoint/2010/main" val="1579011935"/>
-              </p:ext>
-            </p:extLst>
-          </p:nvPr>
-        </p:nvGraphicFramePr>
-        <p:xfrm>
-          <a:off x="457200" y="1143000"/>
-          <a:ext cx="8229600" cy="1828800"/>
-        </p:xfrm>
-        <a:graphic>
-          <a:graphicData uri="http://schemas.openxmlformats.org/drawingml/2006/table">
-            <a:tbl>
-              <a:tblPr/>
-              <a:tblGrid>
-                <a:gridCol w="2743200">
-                  <a:extLst>
-                    <a:ext uri="{9D8B030D-6E8A-4147-A177-3AD203B41FA5}">
-                      <a16:colId xmlns:a16="http://schemas.microsoft.com/office/drawing/2014/main" val="20000"/>
-                    </a:ext>
-                  </a:extLst>
-                </a:gridCol>
-                <a:gridCol w="1828800">
-                  <a:extLst>
-                    <a:ext uri="{9D8B030D-6E8A-4147-A177-3AD203B41FA5}">
-                      <a16:colId xmlns:a16="http://schemas.microsoft.com/office/drawing/2014/main" val="20001"/>
-                    </a:ext>
-                  </a:extLst>
-                </a:gridCol>
-                <a:gridCol w="1828800">
-                  <a:extLst>
-                    <a:ext uri="{9D8B030D-6E8A-4147-A177-3AD203B41FA5}">
-                      <a16:colId xmlns:a16="http://schemas.microsoft.com/office/drawing/2014/main" val="20002"/>
-                    </a:ext>
-                  </a:extLst>
-                </a:gridCol>
-                <a:gridCol w="1828800">
-                  <a:extLst>
-                    <a:ext uri="{9D8B030D-6E8A-4147-A177-3AD203B41FA5}">
-                      <a16:colId xmlns:a16="http://schemas.microsoft.com/office/drawing/2014/main" val="20003"/>
-                    </a:ext>
-                  </a:extLst>
-                </a:gridCol>
-              </a:tblGrid>
-              <a:tr h="365760">
-                <a:tc>
-                  <a:txBody>
-                    <a:bodyPr/>
-                    <a:lstStyle/>
-                    <a:p>
-                      <a:pPr marL="0" indent="0" algn="l">
-                        <a:buNone/>
-                      </a:pPr>
-                      <a:r>
-                        <a:rPr lang="en-US" sz="1400" b="1" dirty="0">
-                          <a:solidFill>
-                            <a:srgbClr val="FFFFFF"/>
-                          </a:solidFill>
-                          <a:latin typeface="+mn-lt" pitchFamily="34" charset="0"/>
-                          <a:ea typeface="+mn-lt" pitchFamily="34" charset="-122"/>
-                          <a:cs typeface="+mn-lt" pitchFamily="34" charset="-120"/>
-                        </a:rPr>
-                        <a:t>Category</a:t>
-                      </a:r>
-                      <a:endParaRPr lang="en-US" sz="1400" dirty="0">
-                        <a:latin typeface="+mn-lt" charset="0"/>
-                        <a:ea typeface="+mn-lt" charset="0"/>
-                        <a:cs typeface="+mn-lt" charset="0"/>
-                      </a:endParaRPr>
-                    </a:p>
-                  </a:txBody>
-                  <a:tcPr anchor="ctr">
-                    <a:lnL w="9525" cap="flat" cmpd="sng" algn="ctr">
-                      <a:solidFill>
-                        <a:srgbClr val="D5E3E0"/>
-                      </a:solidFill>
-                      <a:prstDash val="solid"/>
-                      <a:round/>
-                      <a:headEnd type="none" w="med" len="med"/>
-                      <a:tailEnd type="none" w="med" len="med"/>
-                    </a:lnL>
-                    <a:lnR w="9525" cap="flat" cmpd="sng" algn="ctr">
-                      <a:solidFill>
-                        <a:srgbClr val="D5E3E0"/>
-                      </a:solidFill>
-                      <a:prstDash val="solid"/>
-                      <a:round/>
-                      <a:headEnd type="none" w="med" len="med"/>
-                      <a:tailEnd type="none" w="med" len="med"/>
-                    </a:lnR>
-                    <a:lnT w="9525" cap="flat" cmpd="sng" algn="ctr">
-                      <a:solidFill>
-                        <a:srgbClr val="D5E3E0"/>
-                      </a:solidFill>
-                      <a:prstDash val="solid"/>
-                      <a:round/>
-                      <a:headEnd type="none" w="med" len="med"/>
-                      <a:tailEnd type="none" w="med" len="med"/>
-                    </a:lnT>
-                    <a:lnB w="9525" cap="flat" cmpd="sng" algn="ctr">
-                      <a:solidFill>
-                        <a:srgbClr val="D5E3E0"/>
-                      </a:solidFill>
-                      <a:prstDash val="solid"/>
-                      <a:round/>
-                      <a:headEnd type="none" w="med" len="med"/>
-                      <a:tailEnd type="none" w="med" len="med"/>
-                    </a:lnB>
-                    <a:solidFill>
-                      <a:srgbClr val="0F766E"/>
-                    </a:solidFill>
-                  </a:tcPr>
-                </a:tc>
-                <a:tc>
-                  <a:txBody>
-                    <a:bodyPr/>
-                    <a:lstStyle/>
-                    <a:p>
-                      <a:pPr marL="0" indent="0" algn="l">
-                        <a:buNone/>
-                      </a:pPr>
-                      <a:r>
-                        <a:rPr lang="en-US" sz="1400" b="1" dirty="0">
-                          <a:solidFill>
-                            <a:srgbClr val="FFFFFF"/>
-                          </a:solidFill>
-                          <a:latin typeface="+mn-lt" pitchFamily="34" charset="0"/>
-                          <a:ea typeface="+mn-lt" pitchFamily="34" charset="-122"/>
-                          <a:cs typeface="+mn-lt" pitchFamily="34" charset="-120"/>
-                        </a:rPr>
-                        <a:t>Sales</a:t>
-                      </a:r>
-                      <a:endParaRPr lang="en-US" sz="1400" dirty="0">
-                        <a:latin typeface="+mn-lt" charset="0"/>
-                        <a:ea typeface="+mn-lt" charset="0"/>
-                        <a:cs typeface="+mn-lt" charset="0"/>
-                      </a:endParaRPr>
-                    </a:p>
-                  </a:txBody>
-                  <a:tcPr anchor="ctr">
-                    <a:lnL w="9525" cap="flat" cmpd="sng" algn="ctr">
-                      <a:solidFill>
-                        <a:srgbClr val="D5E3E0"/>
-                      </a:solidFill>
-                      <a:prstDash val="solid"/>
-                      <a:round/>
-                      <a:headEnd type="none" w="med" len="med"/>
-                      <a:tailEnd type="none" w="med" len="med"/>
-                    </a:lnL>
-                    <a:lnR w="9525" cap="flat" cmpd="sng" algn="ctr">
-                      <a:solidFill>
-                        <a:srgbClr val="D5E3E0"/>
-                      </a:solidFill>
-                      <a:prstDash val="solid"/>
-                      <a:round/>
-                      <a:headEnd type="none" w="med" len="med"/>
-                      <a:tailEnd type="none" w="med" len="med"/>
-                    </a:lnR>
-                    <a:lnT w="9525" cap="flat" cmpd="sng" algn="ctr">
-                      <a:solidFill>
-                        <a:srgbClr val="D5E3E0"/>
-                      </a:solidFill>
-                      <a:prstDash val="solid"/>
-                      <a:round/>
-                      <a:headEnd type="none" w="med" len="med"/>
-                      <a:tailEnd type="none" w="med" len="med"/>
-                    </a:lnT>
-                    <a:lnB w="9525" cap="flat" cmpd="sng" algn="ctr">
-                      <a:solidFill>
-                        <a:srgbClr val="D5E3E0"/>
-                      </a:solidFill>
-                      <a:prstDash val="solid"/>
-                      <a:round/>
-                      <a:headEnd type="none" w="med" len="med"/>
-                      <a:tailEnd type="none" w="med" len="med"/>
-                    </a:lnB>
-                    <a:solidFill>
-                      <a:srgbClr val="0F766E"/>
-                    </a:solidFill>
-                  </a:tcPr>
-                </a:tc>
-                <a:tc>
-                  <a:txBody>
-                    <a:bodyPr/>
-                    <a:lstStyle/>
-                    <a:p>
-                      <a:pPr marL="0" indent="0" algn="l">
-                        <a:buNone/>
-                      </a:pPr>
-                      <a:r>
-                        <a:rPr lang="en-US" sz="1400" b="1" dirty="0">
-                          <a:solidFill>
-                            <a:srgbClr val="FFFFFF"/>
-                          </a:solidFill>
-                          <a:latin typeface="+mn-lt" pitchFamily="34" charset="0"/>
-                          <a:ea typeface="+mn-lt" pitchFamily="34" charset="-122"/>
-                          <a:cs typeface="+mn-lt" pitchFamily="34" charset="-120"/>
-                        </a:rPr>
-                        <a:t>Profit</a:t>
-                      </a:r>
-                      <a:endParaRPr lang="en-US" sz="1400" dirty="0">
-                        <a:latin typeface="+mn-lt" charset="0"/>
-                        <a:ea typeface="+mn-lt" charset="0"/>
-                        <a:cs typeface="+mn-lt" charset="0"/>
-                      </a:endParaRPr>
-                    </a:p>
-                  </a:txBody>
-                  <a:tcPr anchor="ctr">
-                    <a:lnL w="9525" cap="flat" cmpd="sng" algn="ctr">
-                      <a:solidFill>
-                        <a:srgbClr val="D5E3E0"/>
-                      </a:solidFill>
-                      <a:prstDash val="solid"/>
-                      <a:round/>
-                      <a:headEnd type="none" w="med" len="med"/>
-                      <a:tailEnd type="none" w="med" len="med"/>
-                    </a:lnL>
-                    <a:lnR w="9525" cap="flat" cmpd="sng" algn="ctr">
-                      <a:solidFill>
-                        <a:srgbClr val="D5E3E0"/>
-                      </a:solidFill>
-                      <a:prstDash val="solid"/>
-                      <a:round/>
-                      <a:headEnd type="none" w="med" len="med"/>
-                      <a:tailEnd type="none" w="med" len="med"/>
-                    </a:lnR>
-                    <a:lnT w="9525" cap="flat" cmpd="sng" algn="ctr">
-                      <a:solidFill>
-                        <a:srgbClr val="D5E3E0"/>
-                      </a:solidFill>
-                      <a:prstDash val="solid"/>
-                      <a:round/>
-                      <a:headEnd type="none" w="med" len="med"/>
-                      <a:tailEnd type="none" w="med" len="med"/>
-                    </a:lnT>
-                    <a:lnB w="9525" cap="flat" cmpd="sng" algn="ctr">
-                      <a:solidFill>
-                        <a:srgbClr val="D5E3E0"/>
-                      </a:solidFill>
-                      <a:prstDash val="solid"/>
-                      <a:round/>
-                      <a:headEnd type="none" w="med" len="med"/>
-                      <a:tailEnd type="none" w="med" len="med"/>
-                    </a:lnB>
-                    <a:solidFill>
-                      <a:srgbClr val="0F766E"/>
-                    </a:solidFill>
-                  </a:tcPr>
-                </a:tc>
-                <a:tc>
-                  <a:txBody>
-                    <a:bodyPr/>
-                    <a:lstStyle/>
-                    <a:p>
-                      <a:pPr marL="0" indent="0" algn="l">
-                        <a:buNone/>
-                      </a:pPr>
-                      <a:r>
-                        <a:rPr lang="en-US" sz="1400" b="1" dirty="0">
-                          <a:solidFill>
-                            <a:srgbClr val="FFFFFF"/>
-                          </a:solidFill>
-                          <a:latin typeface="+mn-lt" pitchFamily="34" charset="0"/>
-                          <a:ea typeface="+mn-lt" pitchFamily="34" charset="-122"/>
-                          <a:cs typeface="+mn-lt" pitchFamily="34" charset="-120"/>
-                        </a:rPr>
-                        <a:t>Profit margin</a:t>
-                      </a:r>
-                      <a:endParaRPr lang="en-US" sz="1400" dirty="0">
-                        <a:latin typeface="+mn-lt" charset="0"/>
-                        <a:ea typeface="+mn-lt" charset="0"/>
-                        <a:cs typeface="+mn-lt" charset="0"/>
-                      </a:endParaRPr>
-                    </a:p>
-                  </a:txBody>
-                  <a:tcPr anchor="ctr">
-                    <a:lnL w="9525" cap="flat" cmpd="sng" algn="ctr">
-                      <a:solidFill>
-                        <a:srgbClr val="D5E3E0"/>
-                      </a:solidFill>
-                      <a:prstDash val="solid"/>
-                      <a:round/>
-                      <a:headEnd type="none" w="med" len="med"/>
-                      <a:tailEnd type="none" w="med" len="med"/>
-                    </a:lnL>
-                    <a:lnR w="9525" cap="flat" cmpd="sng" algn="ctr">
-                      <a:solidFill>
-                        <a:srgbClr val="D5E3E0"/>
-                      </a:solidFill>
-                      <a:prstDash val="solid"/>
-                      <a:round/>
-                      <a:headEnd type="none" w="med" len="med"/>
-                      <a:tailEnd type="none" w="med" len="med"/>
-                    </a:lnR>
-                    <a:lnT w="9525" cap="flat" cmpd="sng" algn="ctr">
-                      <a:solidFill>
-                        <a:srgbClr val="D5E3E0"/>
-                      </a:solidFill>
-                      <a:prstDash val="solid"/>
-                      <a:round/>
-                      <a:headEnd type="none" w="med" len="med"/>
-                      <a:tailEnd type="none" w="med" len="med"/>
-                    </a:lnT>
-                    <a:lnB w="9525" cap="flat" cmpd="sng" algn="ctr">
-                      <a:solidFill>
-                        <a:srgbClr val="D5E3E0"/>
-                      </a:solidFill>
-                      <a:prstDash val="solid"/>
-                      <a:round/>
-                      <a:headEnd type="none" w="med" len="med"/>
-                      <a:tailEnd type="none" w="med" len="med"/>
-                    </a:lnB>
-                    <a:solidFill>
-                      <a:srgbClr val="0F766E"/>
-                    </a:solidFill>
-                  </a:tcPr>
-                </a:tc>
-                <a:extLst>
-                  <a:ext uri="{0D108BD9-81ED-4DB2-BD59-A6C34878D82A}">
-                    <a16:rowId xmlns:a16="http://schemas.microsoft.com/office/drawing/2014/main" val="10000"/>
-                  </a:ext>
-                </a:extLst>
-              </a:tr>
-              <a:tr h="365760">
-                <a:tc>
-                  <a:txBody>
-                    <a:bodyPr/>
-                    <a:lstStyle/>
-                    <a:p>
-                      <a:pPr marL="0" indent="0" algn="l">
-                        <a:buNone/>
-                      </a:pPr>
-                      <a:r>
-                        <a:rPr lang="en-US" sz="1400" dirty="0">
-                          <a:solidFill>
-                            <a:srgbClr val="10222B"/>
-                          </a:solidFill>
-                          <a:latin typeface="+mn-lt" pitchFamily="34" charset="0"/>
-                          <a:ea typeface="+mn-lt" pitchFamily="34" charset="-122"/>
-                          <a:cs typeface="+mn-lt" pitchFamily="34" charset="-120"/>
-                        </a:rPr>
-                        <a:t>Furniture</a:t>
-                      </a:r>
-                      <a:endParaRPr lang="en-US" sz="1400" dirty="0">
-                        <a:latin typeface="+mn-lt" charset="0"/>
-                        <a:ea typeface="+mn-lt" charset="0"/>
-                        <a:cs typeface="+mn-lt" charset="0"/>
-                      </a:endParaRPr>
-                    </a:p>
-                  </a:txBody>
-                  <a:tcPr anchor="ctr">
-                    <a:lnL w="9525" cap="flat" cmpd="sng" algn="ctr">
-                      <a:solidFill>
-                        <a:srgbClr val="D5E3E0"/>
-                      </a:solidFill>
-                      <a:prstDash val="solid"/>
-                      <a:round/>
-                      <a:headEnd type="none" w="med" len="med"/>
-                      <a:tailEnd type="none" w="med" len="med"/>
-                    </a:lnL>
-                    <a:lnR w="9525" cap="flat" cmpd="sng" algn="ctr">
-                      <a:solidFill>
-                        <a:srgbClr val="D5E3E0"/>
-                      </a:solidFill>
-                      <a:prstDash val="solid"/>
-                      <a:round/>
-                      <a:headEnd type="none" w="med" len="med"/>
-                      <a:tailEnd type="none" w="med" len="med"/>
-                    </a:lnR>
-                    <a:lnT w="9525" cap="flat" cmpd="sng" algn="ctr">
-                      <a:solidFill>
-                        <a:srgbClr val="D5E3E0"/>
-                      </a:solidFill>
-                      <a:prstDash val="solid"/>
-                      <a:round/>
-                      <a:headEnd type="none" w="med" len="med"/>
-                      <a:tailEnd type="none" w="med" len="med"/>
-                    </a:lnT>
-                    <a:lnB w="9525" cap="flat" cmpd="sng" algn="ctr">
-                      <a:solidFill>
-                        <a:srgbClr val="D5E3E0"/>
-                      </a:solidFill>
-                      <a:prstDash val="solid"/>
-                      <a:round/>
-                      <a:headEnd type="none" w="med" len="med"/>
-                      <a:tailEnd type="none" w="med" len="med"/>
-                    </a:lnB>
-                    <a:solidFill>
-                      <a:srgbClr val="FFFFFF"/>
-                    </a:solidFill>
-                  </a:tcPr>
-                </a:tc>
-                <a:tc>
-                  <a:txBody>
-                    <a:bodyPr/>
-                    <a:lstStyle/>
-                    <a:p>
-                      <a:pPr marL="0" indent="0" algn="l">
-                        <a:buNone/>
-                      </a:pPr>
-                      <a:r>
-                        <a:rPr lang="en-US" sz="1400" dirty="0">
-                          <a:solidFill>
-                            <a:srgbClr val="10222B"/>
-                          </a:solidFill>
-                          <a:latin typeface="+mn-lt" pitchFamily="34" charset="0"/>
-                          <a:ea typeface="+mn-lt" pitchFamily="34" charset="-122"/>
-                          <a:cs typeface="+mn-lt" pitchFamily="34" charset="-120"/>
-                        </a:rPr>
-                        <a:t>$8,965.53</a:t>
-                      </a:r>
-                      <a:endParaRPr lang="en-US" sz="1400" dirty="0">
-                        <a:latin typeface="+mn-lt" charset="0"/>
-                        <a:ea typeface="+mn-lt" charset="0"/>
-                        <a:cs typeface="+mn-lt" charset="0"/>
-                      </a:endParaRPr>
-                    </a:p>
-                  </a:txBody>
-                  <a:tcPr anchor="ctr">
-                    <a:lnL w="9525" cap="flat" cmpd="sng" algn="ctr">
-                      <a:solidFill>
-                        <a:srgbClr val="D5E3E0"/>
-                      </a:solidFill>
-                      <a:prstDash val="solid"/>
-                      <a:round/>
-                      <a:headEnd type="none" w="med" len="med"/>
-                      <a:tailEnd type="none" w="med" len="med"/>
-                    </a:lnL>
-                    <a:lnR w="9525" cap="flat" cmpd="sng" algn="ctr">
-                      <a:solidFill>
-                        <a:srgbClr val="D5E3E0"/>
-                      </a:solidFill>
-                      <a:prstDash val="solid"/>
-                      <a:round/>
-                      <a:headEnd type="none" w="med" len="med"/>
-                      <a:tailEnd type="none" w="med" len="med"/>
-                    </a:lnR>
-                    <a:lnT w="9525" cap="flat" cmpd="sng" algn="ctr">
-                      <a:solidFill>
-                        <a:srgbClr val="D5E3E0"/>
-                      </a:solidFill>
-                      <a:prstDash val="solid"/>
-                      <a:round/>
-                      <a:headEnd type="none" w="med" len="med"/>
-                      <a:tailEnd type="none" w="med" len="med"/>
-                    </a:lnT>
-                    <a:lnB w="9525" cap="flat" cmpd="sng" algn="ctr">
-                      <a:solidFill>
-                        <a:srgbClr val="D5E3E0"/>
-                      </a:solidFill>
-                      <a:prstDash val="solid"/>
-                      <a:round/>
-                      <a:headEnd type="none" w="med" len="med"/>
-                      <a:tailEnd type="none" w="med" len="med"/>
-                    </a:lnB>
-                    <a:solidFill>
-                      <a:srgbClr val="FFFFFF"/>
-                    </a:solidFill>
-                  </a:tcPr>
-                </a:tc>
-                <a:tc>
-                  <a:txBody>
-                    <a:bodyPr/>
-                    <a:lstStyle/>
-                    <a:p>
-                      <a:pPr marL="0" indent="0" algn="l">
-                        <a:buNone/>
-                      </a:pPr>
-                      <a:r>
-                        <a:rPr lang="en-US" sz="1400" b="1" dirty="0">
-                          <a:solidFill>
-                            <a:srgbClr val="DC2626"/>
-                          </a:solidFill>
-                          <a:latin typeface="+mn-lt" pitchFamily="34" charset="0"/>
-                          <a:ea typeface="+mn-lt" pitchFamily="34" charset="-122"/>
-                          <a:cs typeface="+mn-lt" pitchFamily="34" charset="-120"/>
-                        </a:rPr>
-                        <a:t>−$1,642.43</a:t>
-                      </a:r>
-                      <a:endParaRPr lang="en-US" sz="1400" dirty="0">
-                        <a:latin typeface="+mn-lt" charset="0"/>
-                        <a:ea typeface="+mn-lt" charset="0"/>
-                        <a:cs typeface="+mn-lt" charset="0"/>
-                      </a:endParaRPr>
-                    </a:p>
-                  </a:txBody>
-                  <a:tcPr anchor="ctr">
-                    <a:lnL w="9525" cap="flat" cmpd="sng" algn="ctr">
-                      <a:solidFill>
-                        <a:srgbClr val="D5E3E0"/>
-                      </a:solidFill>
-                      <a:prstDash val="solid"/>
-                      <a:round/>
-                      <a:headEnd type="none" w="med" len="med"/>
-                      <a:tailEnd type="none" w="med" len="med"/>
-                    </a:lnL>
-                    <a:lnR w="9525" cap="flat" cmpd="sng" algn="ctr">
-                      <a:solidFill>
-                        <a:srgbClr val="D5E3E0"/>
-                      </a:solidFill>
-                      <a:prstDash val="solid"/>
-                      <a:round/>
-                      <a:headEnd type="none" w="med" len="med"/>
-                      <a:tailEnd type="none" w="med" len="med"/>
-                    </a:lnR>
-                    <a:lnT w="9525" cap="flat" cmpd="sng" algn="ctr">
-                      <a:solidFill>
-                        <a:srgbClr val="D5E3E0"/>
-                      </a:solidFill>
-                      <a:prstDash val="solid"/>
-                      <a:round/>
-                      <a:headEnd type="none" w="med" len="med"/>
-                      <a:tailEnd type="none" w="med" len="med"/>
-                    </a:lnT>
-                    <a:lnB w="9525" cap="flat" cmpd="sng" algn="ctr">
-                      <a:solidFill>
-                        <a:srgbClr val="D5E3E0"/>
-                      </a:solidFill>
-                      <a:prstDash val="solid"/>
-                      <a:round/>
-                      <a:headEnd type="none" w="med" len="med"/>
-                      <a:tailEnd type="none" w="med" len="med"/>
-                    </a:lnB>
-                    <a:solidFill>
-                      <a:srgbClr val="FFFFFF"/>
-                    </a:solidFill>
-                  </a:tcPr>
-                </a:tc>
-                <a:tc>
-                  <a:txBody>
-                    <a:bodyPr/>
-                    <a:lstStyle/>
-                    <a:p>
-                      <a:pPr marL="0" indent="0" algn="l">
-                        <a:buNone/>
-                      </a:pPr>
-                      <a:r>
-                        <a:rPr lang="en-US" sz="1400" b="1" dirty="0">
-                          <a:solidFill>
-                            <a:srgbClr val="DC2626"/>
-                          </a:solidFill>
-                          <a:latin typeface="+mn-lt" pitchFamily="34" charset="0"/>
-                          <a:ea typeface="+mn-lt" pitchFamily="34" charset="-122"/>
-                          <a:cs typeface="+mn-lt" pitchFamily="34" charset="-120"/>
-                        </a:rPr>
-                        <a:t>−18.3%</a:t>
-                      </a:r>
-                      <a:endParaRPr lang="en-US" sz="1400" dirty="0">
-                        <a:latin typeface="+mn-lt" charset="0"/>
-                        <a:ea typeface="+mn-lt" charset="0"/>
-                        <a:cs typeface="+mn-lt" charset="0"/>
-                      </a:endParaRPr>
-                    </a:p>
-                  </a:txBody>
-                  <a:tcPr anchor="ctr">
-                    <a:lnL w="9525" cap="flat" cmpd="sng" algn="ctr">
-                      <a:solidFill>
-                        <a:srgbClr val="D5E3E0"/>
-                      </a:solidFill>
-                      <a:prstDash val="solid"/>
-                      <a:round/>
-                      <a:headEnd type="none" w="med" len="med"/>
-                      <a:tailEnd type="none" w="med" len="med"/>
-                    </a:lnL>
-                    <a:lnR w="9525" cap="flat" cmpd="sng" algn="ctr">
-                      <a:solidFill>
-                        <a:srgbClr val="D5E3E0"/>
-                      </a:solidFill>
-                      <a:prstDash val="solid"/>
-                      <a:round/>
-                      <a:headEnd type="none" w="med" len="med"/>
-                      <a:tailEnd type="none" w="med" len="med"/>
-                    </a:lnR>
-                    <a:lnT w="9525" cap="flat" cmpd="sng" algn="ctr">
-                      <a:solidFill>
-                        <a:srgbClr val="D5E3E0"/>
-                      </a:solidFill>
-                      <a:prstDash val="solid"/>
-                      <a:round/>
-                      <a:headEnd type="none" w="med" len="med"/>
-                      <a:tailEnd type="none" w="med" len="med"/>
-                    </a:lnT>
-                    <a:lnB w="9525" cap="flat" cmpd="sng" algn="ctr">
-                      <a:solidFill>
-                        <a:srgbClr val="D5E3E0"/>
-                      </a:solidFill>
-                      <a:prstDash val="solid"/>
-                      <a:round/>
-                      <a:headEnd type="none" w="med" len="med"/>
-                      <a:tailEnd type="none" w="med" len="med"/>
-                    </a:lnB>
-                    <a:solidFill>
-                      <a:srgbClr val="FFFFFF"/>
-                    </a:solidFill>
-                  </a:tcPr>
-                </a:tc>
-                <a:extLst>
-                  <a:ext uri="{0D108BD9-81ED-4DB2-BD59-A6C34878D82A}">
-                    <a16:rowId xmlns:a16="http://schemas.microsoft.com/office/drawing/2014/main" val="10001"/>
-                  </a:ext>
-                </a:extLst>
-              </a:tr>
-              <a:tr h="365760">
-                <a:tc>
-                  <a:txBody>
-                    <a:bodyPr/>
-                    <a:lstStyle/>
-                    <a:p>
-                      <a:pPr marL="0" indent="0" algn="l">
-                        <a:buNone/>
-                      </a:pPr>
-                      <a:r>
-                        <a:rPr lang="en-US" sz="1400" dirty="0">
-                          <a:solidFill>
-                            <a:srgbClr val="10222B"/>
-                          </a:solidFill>
-                          <a:latin typeface="+mn-lt" pitchFamily="34" charset="0"/>
-                          <a:ea typeface="+mn-lt" pitchFamily="34" charset="-122"/>
-                          <a:cs typeface="+mn-lt" pitchFamily="34" charset="-120"/>
-                        </a:rPr>
-                        <a:t>Office Supplies</a:t>
-                      </a:r>
-                      <a:endParaRPr lang="en-US" sz="1400" dirty="0">
-                        <a:latin typeface="+mn-lt" charset="0"/>
-                        <a:ea typeface="+mn-lt" charset="0"/>
-                        <a:cs typeface="+mn-lt" charset="0"/>
-                      </a:endParaRPr>
-                    </a:p>
-                  </a:txBody>
-                  <a:tcPr anchor="ctr">
-                    <a:lnL w="9525" cap="flat" cmpd="sng" algn="ctr">
-                      <a:solidFill>
-                        <a:srgbClr val="D5E3E0"/>
-                      </a:solidFill>
-                      <a:prstDash val="solid"/>
-                      <a:round/>
-                      <a:headEnd type="none" w="med" len="med"/>
-                      <a:tailEnd type="none" w="med" len="med"/>
-                    </a:lnL>
-                    <a:lnR w="9525" cap="flat" cmpd="sng" algn="ctr">
-                      <a:solidFill>
-                        <a:srgbClr val="D5E3E0"/>
-                      </a:solidFill>
-                      <a:prstDash val="solid"/>
-                      <a:round/>
-                      <a:headEnd type="none" w="med" len="med"/>
-                      <a:tailEnd type="none" w="med" len="med"/>
-                    </a:lnR>
-                    <a:lnT w="9525" cap="flat" cmpd="sng" algn="ctr">
-                      <a:solidFill>
-                        <a:srgbClr val="D5E3E0"/>
-                      </a:solidFill>
-                      <a:prstDash val="solid"/>
-                      <a:round/>
-                      <a:headEnd type="none" w="med" len="med"/>
-                      <a:tailEnd type="none" w="med" len="med"/>
-                    </a:lnT>
-                    <a:lnB w="9525" cap="flat" cmpd="sng" algn="ctr">
-                      <a:solidFill>
-                        <a:srgbClr val="D5E3E0"/>
-                      </a:solidFill>
-                      <a:prstDash val="solid"/>
-                      <a:round/>
-                      <a:headEnd type="none" w="med" len="med"/>
-                      <a:tailEnd type="none" w="med" len="med"/>
-                    </a:lnB>
-                    <a:solidFill>
-                      <a:srgbClr val="EAF2F1"/>
-                    </a:solidFill>
-                  </a:tcPr>
-                </a:tc>
-                <a:tc>
-                  <a:txBody>
-                    <a:bodyPr/>
-                    <a:lstStyle/>
-                    <a:p>
-                      <a:pPr marL="0" indent="0" algn="l">
-                        <a:buNone/>
-                      </a:pPr>
-                      <a:r>
-                        <a:rPr lang="en-US" sz="1400" dirty="0">
-                          <a:solidFill>
-                            <a:srgbClr val="10222B"/>
-                          </a:solidFill>
-                          <a:latin typeface="+mn-lt" pitchFamily="34" charset="0"/>
-                          <a:ea typeface="+mn-lt" pitchFamily="34" charset="-122"/>
-                          <a:cs typeface="+mn-lt" pitchFamily="34" charset="-120"/>
-                        </a:rPr>
-                        <a:t>$1,781.27</a:t>
-                      </a:r>
-                      <a:endParaRPr lang="en-US" sz="1400" dirty="0">
-                        <a:latin typeface="+mn-lt" charset="0"/>
-                        <a:ea typeface="+mn-lt" charset="0"/>
-                        <a:cs typeface="+mn-lt" charset="0"/>
-                      </a:endParaRPr>
-                    </a:p>
-                  </a:txBody>
-                  <a:tcPr anchor="ctr">
-                    <a:lnL w="9525" cap="flat" cmpd="sng" algn="ctr">
-                      <a:solidFill>
-                        <a:srgbClr val="D5E3E0"/>
-                      </a:solidFill>
-                      <a:prstDash val="solid"/>
-                      <a:round/>
-                      <a:headEnd type="none" w="med" len="med"/>
-                      <a:tailEnd type="none" w="med" len="med"/>
-                    </a:lnL>
-                    <a:lnR w="9525" cap="flat" cmpd="sng" algn="ctr">
-                      <a:solidFill>
-                        <a:srgbClr val="D5E3E0"/>
-                      </a:solidFill>
-                      <a:prstDash val="solid"/>
-                      <a:round/>
-                      <a:headEnd type="none" w="med" len="med"/>
-                      <a:tailEnd type="none" w="med" len="med"/>
-                    </a:lnR>
-                    <a:lnT w="9525" cap="flat" cmpd="sng" algn="ctr">
-                      <a:solidFill>
-                        <a:srgbClr val="D5E3E0"/>
-                      </a:solidFill>
-                      <a:prstDash val="solid"/>
-                      <a:round/>
-                      <a:headEnd type="none" w="med" len="med"/>
-                      <a:tailEnd type="none" w="med" len="med"/>
-                    </a:lnT>
-                    <a:lnB w="9525" cap="flat" cmpd="sng" algn="ctr">
-                      <a:solidFill>
-                        <a:srgbClr val="D5E3E0"/>
-                      </a:solidFill>
-                      <a:prstDash val="solid"/>
-                      <a:round/>
-                      <a:headEnd type="none" w="med" len="med"/>
-                      <a:tailEnd type="none" w="med" len="med"/>
-                    </a:lnB>
-                    <a:solidFill>
-                      <a:srgbClr val="EAF2F1"/>
-                    </a:solidFill>
-                  </a:tcPr>
-                </a:tc>
-                <a:tc>
-                  <a:txBody>
-                    <a:bodyPr/>
-                    <a:lstStyle/>
-                    <a:p>
-                      <a:pPr marL="0" indent="0" algn="l">
-                        <a:buNone/>
-                      </a:pPr>
-                      <a:r>
-                        <a:rPr lang="en-US" sz="1400" b="1" dirty="0">
-                          <a:solidFill>
-                            <a:srgbClr val="16A34A"/>
-                          </a:solidFill>
-                          <a:latin typeface="+mn-lt" pitchFamily="34" charset="0"/>
-                          <a:ea typeface="+mn-lt" pitchFamily="34" charset="-122"/>
-                          <a:cs typeface="+mn-lt" pitchFamily="34" charset="-120"/>
-                        </a:rPr>
-                        <a:t>$167.06</a:t>
-                      </a:r>
-                      <a:endParaRPr lang="en-US" sz="1400" dirty="0">
-                        <a:latin typeface="+mn-lt" charset="0"/>
-                        <a:ea typeface="+mn-lt" charset="0"/>
-                        <a:cs typeface="+mn-lt" charset="0"/>
-                      </a:endParaRPr>
-                    </a:p>
-                  </a:txBody>
-                  <a:tcPr anchor="ctr">
-                    <a:lnL w="9525" cap="flat" cmpd="sng" algn="ctr">
-                      <a:solidFill>
-                        <a:srgbClr val="D5E3E0"/>
-                      </a:solidFill>
-                      <a:prstDash val="solid"/>
-                      <a:round/>
-                      <a:headEnd type="none" w="med" len="med"/>
-                      <a:tailEnd type="none" w="med" len="med"/>
-                    </a:lnL>
-                    <a:lnR w="9525" cap="flat" cmpd="sng" algn="ctr">
-                      <a:solidFill>
-                        <a:srgbClr val="D5E3E0"/>
-                      </a:solidFill>
-                      <a:prstDash val="solid"/>
-                      <a:round/>
-                      <a:headEnd type="none" w="med" len="med"/>
-                      <a:tailEnd type="none" w="med" len="med"/>
-                    </a:lnR>
-                    <a:lnT w="9525" cap="flat" cmpd="sng" algn="ctr">
-                      <a:solidFill>
-                        <a:srgbClr val="D5E3E0"/>
-                      </a:solidFill>
-                      <a:prstDash val="solid"/>
-                      <a:round/>
-                      <a:headEnd type="none" w="med" len="med"/>
-                      <a:tailEnd type="none" w="med" len="med"/>
-                    </a:lnT>
-                    <a:lnB w="9525" cap="flat" cmpd="sng" algn="ctr">
-                      <a:solidFill>
-                        <a:srgbClr val="D5E3E0"/>
-                      </a:solidFill>
-                      <a:prstDash val="solid"/>
-                      <a:round/>
-                      <a:headEnd type="none" w="med" len="med"/>
-                      <a:tailEnd type="none" w="med" len="med"/>
-                    </a:lnB>
-                    <a:solidFill>
-                      <a:srgbClr val="EAF2F1"/>
-                    </a:solidFill>
-                  </a:tcPr>
-                </a:tc>
-                <a:tc>
-                  <a:txBody>
-                    <a:bodyPr/>
-                    <a:lstStyle/>
-                    <a:p>
-                      <a:pPr marL="0" indent="0" algn="l">
-                        <a:buNone/>
-                      </a:pPr>
-                      <a:r>
-                        <a:rPr lang="en-US" sz="1400" b="1" dirty="0">
-                          <a:solidFill>
-                            <a:srgbClr val="16A34A"/>
-                          </a:solidFill>
-                          <a:latin typeface="+mn-lt" pitchFamily="34" charset="0"/>
-                          <a:ea typeface="+mn-lt" pitchFamily="34" charset="-122"/>
-                          <a:cs typeface="+mn-lt" pitchFamily="34" charset="-120"/>
-                        </a:rPr>
-                        <a:t>9.4%</a:t>
-                      </a:r>
-                      <a:endParaRPr lang="en-US" sz="1400" dirty="0">
-                        <a:latin typeface="+mn-lt" charset="0"/>
-                        <a:ea typeface="+mn-lt" charset="0"/>
-                        <a:cs typeface="+mn-lt" charset="0"/>
-                      </a:endParaRPr>
-                    </a:p>
-                  </a:txBody>
-                  <a:tcPr anchor="ctr">
-                    <a:lnL w="9525" cap="flat" cmpd="sng" algn="ctr">
-                      <a:solidFill>
-                        <a:srgbClr val="D5E3E0"/>
-                      </a:solidFill>
-                      <a:prstDash val="solid"/>
-                      <a:round/>
-                      <a:headEnd type="none" w="med" len="med"/>
-                      <a:tailEnd type="none" w="med" len="med"/>
-                    </a:lnL>
-                    <a:lnR w="9525" cap="flat" cmpd="sng" algn="ctr">
-                      <a:solidFill>
-                        <a:srgbClr val="D5E3E0"/>
-                      </a:solidFill>
-                      <a:prstDash val="solid"/>
-                      <a:round/>
-                      <a:headEnd type="none" w="med" len="med"/>
-                      <a:tailEnd type="none" w="med" len="med"/>
-                    </a:lnR>
-                    <a:lnT w="9525" cap="flat" cmpd="sng" algn="ctr">
-                      <a:solidFill>
-                        <a:srgbClr val="D5E3E0"/>
-                      </a:solidFill>
-                      <a:prstDash val="solid"/>
-                      <a:round/>
-                      <a:headEnd type="none" w="med" len="med"/>
-                      <a:tailEnd type="none" w="med" len="med"/>
-                    </a:lnT>
-                    <a:lnB w="9525" cap="flat" cmpd="sng" algn="ctr">
-                      <a:solidFill>
-                        <a:srgbClr val="D5E3E0"/>
-                      </a:solidFill>
-                      <a:prstDash val="solid"/>
-                      <a:round/>
-                      <a:headEnd type="none" w="med" len="med"/>
-                      <a:tailEnd type="none" w="med" len="med"/>
-                    </a:lnB>
-                    <a:solidFill>
-                      <a:srgbClr val="EAF2F1"/>
-                    </a:solidFill>
-                  </a:tcPr>
-                </a:tc>
-                <a:extLst>
-                  <a:ext uri="{0D108BD9-81ED-4DB2-BD59-A6C34878D82A}">
-                    <a16:rowId xmlns:a16="http://schemas.microsoft.com/office/drawing/2014/main" val="10002"/>
-                  </a:ext>
-                </a:extLst>
-              </a:tr>
-              <a:tr h="365760">
-                <a:tc>
-                  <a:txBody>
-                    <a:bodyPr/>
-                    <a:lstStyle/>
-                    <a:p>
-                      <a:pPr marL="0" indent="0" algn="l">
-                        <a:buNone/>
-                      </a:pPr>
-                      <a:r>
-                        <a:rPr lang="en-US" sz="1400" dirty="0">
-                          <a:solidFill>
-                            <a:srgbClr val="10222B"/>
-                          </a:solidFill>
-                          <a:latin typeface="+mn-lt" pitchFamily="34" charset="0"/>
-                          <a:ea typeface="+mn-lt" pitchFamily="34" charset="-122"/>
-                          <a:cs typeface="+mn-lt" pitchFamily="34" charset="-120"/>
-                        </a:rPr>
-                        <a:t>Technology</a:t>
-                      </a:r>
-                      <a:endParaRPr lang="en-US" sz="1400" dirty="0">
-                        <a:latin typeface="+mn-lt" charset="0"/>
-                        <a:ea typeface="+mn-lt" charset="0"/>
-                        <a:cs typeface="+mn-lt" charset="0"/>
-                      </a:endParaRPr>
-                    </a:p>
-                  </a:txBody>
-                  <a:tcPr anchor="ctr">
-                    <a:lnL w="9525" cap="flat" cmpd="sng" algn="ctr">
-                      <a:solidFill>
-                        <a:srgbClr val="D5E3E0"/>
-                      </a:solidFill>
-                      <a:prstDash val="solid"/>
-                      <a:round/>
-                      <a:headEnd type="none" w="med" len="med"/>
-                      <a:tailEnd type="none" w="med" len="med"/>
-                    </a:lnL>
-                    <a:lnR w="9525" cap="flat" cmpd="sng" algn="ctr">
-                      <a:solidFill>
-                        <a:srgbClr val="D5E3E0"/>
-                      </a:solidFill>
-                      <a:prstDash val="solid"/>
-                      <a:round/>
-                      <a:headEnd type="none" w="med" len="med"/>
-                      <a:tailEnd type="none" w="med" len="med"/>
-                    </a:lnR>
-                    <a:lnT w="9525" cap="flat" cmpd="sng" algn="ctr">
-                      <a:solidFill>
-                        <a:srgbClr val="D5E3E0"/>
-                      </a:solidFill>
-                      <a:prstDash val="solid"/>
-                      <a:round/>
-                      <a:headEnd type="none" w="med" len="med"/>
-                      <a:tailEnd type="none" w="med" len="med"/>
-                    </a:lnT>
-                    <a:lnB w="9525" cap="flat" cmpd="sng" algn="ctr">
-                      <a:solidFill>
-                        <a:srgbClr val="D5E3E0"/>
-                      </a:solidFill>
-                      <a:prstDash val="solid"/>
-                      <a:round/>
-                      <a:headEnd type="none" w="med" len="med"/>
-                      <a:tailEnd type="none" w="med" len="med"/>
-                    </a:lnB>
-                    <a:solidFill>
-                      <a:srgbClr val="FFFFFF"/>
-                    </a:solidFill>
-                  </a:tcPr>
-                </a:tc>
-                <a:tc>
-                  <a:txBody>
-                    <a:bodyPr/>
-                    <a:lstStyle/>
-                    <a:p>
-                      <a:pPr marL="0" indent="0" algn="l">
-                        <a:buNone/>
-                      </a:pPr>
-                      <a:r>
-                        <a:rPr lang="en-US" sz="1400" dirty="0">
-                          <a:solidFill>
-                            <a:srgbClr val="10222B"/>
-                          </a:solidFill>
-                          <a:latin typeface="+mn-lt" pitchFamily="34" charset="0"/>
-                          <a:ea typeface="+mn-lt" pitchFamily="34" charset="-122"/>
-                          <a:cs typeface="+mn-lt" pitchFamily="34" charset="-120"/>
-                        </a:rPr>
-                        <a:t>$3,220.17</a:t>
-                      </a:r>
-                      <a:endParaRPr lang="en-US" sz="1400" dirty="0">
-                        <a:latin typeface="+mn-lt" charset="0"/>
-                        <a:ea typeface="+mn-lt" charset="0"/>
-                        <a:cs typeface="+mn-lt" charset="0"/>
-                      </a:endParaRPr>
-                    </a:p>
-                  </a:txBody>
-                  <a:tcPr anchor="ctr">
-                    <a:lnL w="9525" cap="flat" cmpd="sng" algn="ctr">
-                      <a:solidFill>
-                        <a:srgbClr val="D5E3E0"/>
-                      </a:solidFill>
-                      <a:prstDash val="solid"/>
-                      <a:round/>
-                      <a:headEnd type="none" w="med" len="med"/>
-                      <a:tailEnd type="none" w="med" len="med"/>
-                    </a:lnL>
-                    <a:lnR w="9525" cap="flat" cmpd="sng" algn="ctr">
-                      <a:solidFill>
-                        <a:srgbClr val="D5E3E0"/>
-                      </a:solidFill>
-                      <a:prstDash val="solid"/>
-                      <a:round/>
-                      <a:headEnd type="none" w="med" len="med"/>
-                      <a:tailEnd type="none" w="med" len="med"/>
-                    </a:lnR>
-                    <a:lnT w="9525" cap="flat" cmpd="sng" algn="ctr">
-                      <a:solidFill>
-                        <a:srgbClr val="D5E3E0"/>
-                      </a:solidFill>
-                      <a:prstDash val="solid"/>
-                      <a:round/>
-                      <a:headEnd type="none" w="med" len="med"/>
-                      <a:tailEnd type="none" w="med" len="med"/>
-                    </a:lnT>
-                    <a:lnB w="9525" cap="flat" cmpd="sng" algn="ctr">
-                      <a:solidFill>
-                        <a:srgbClr val="D5E3E0"/>
-                      </a:solidFill>
-                      <a:prstDash val="solid"/>
-                      <a:round/>
-                      <a:headEnd type="none" w="med" len="med"/>
-                      <a:tailEnd type="none" w="med" len="med"/>
-                    </a:lnB>
-                    <a:solidFill>
-                      <a:srgbClr val="FFFFFF"/>
-                    </a:solidFill>
-                  </a:tcPr>
-                </a:tc>
-                <a:tc>
-                  <a:txBody>
-                    <a:bodyPr/>
-                    <a:lstStyle/>
-                    <a:p>
-                      <a:pPr marL="0" indent="0" algn="l">
-                        <a:buNone/>
-                      </a:pPr>
-                      <a:r>
-                        <a:rPr lang="en-US" sz="1400" b="1" dirty="0">
-                          <a:solidFill>
-                            <a:srgbClr val="16A34A"/>
-                          </a:solidFill>
-                          <a:latin typeface="+mn-lt" pitchFamily="34" charset="0"/>
-                          <a:ea typeface="+mn-lt" pitchFamily="34" charset="-122"/>
-                          <a:cs typeface="+mn-lt" pitchFamily="34" charset="-120"/>
-                        </a:rPr>
-                        <a:t>$310.33</a:t>
-                      </a:r>
-                      <a:endParaRPr lang="en-US" sz="1400" dirty="0">
-                        <a:latin typeface="+mn-lt" charset="0"/>
-                        <a:ea typeface="+mn-lt" charset="0"/>
-                        <a:cs typeface="+mn-lt" charset="0"/>
-                      </a:endParaRPr>
-                    </a:p>
-                  </a:txBody>
-                  <a:tcPr anchor="ctr">
-                    <a:lnL w="9525" cap="flat" cmpd="sng" algn="ctr">
-                      <a:solidFill>
-                        <a:srgbClr val="D5E3E0"/>
-                      </a:solidFill>
-                      <a:prstDash val="solid"/>
-                      <a:round/>
-                      <a:headEnd type="none" w="med" len="med"/>
-                      <a:tailEnd type="none" w="med" len="med"/>
-                    </a:lnL>
-                    <a:lnR w="9525" cap="flat" cmpd="sng" algn="ctr">
-                      <a:solidFill>
-                        <a:srgbClr val="D5E3E0"/>
-                      </a:solidFill>
-                      <a:prstDash val="solid"/>
-                      <a:round/>
-                      <a:headEnd type="none" w="med" len="med"/>
-                      <a:tailEnd type="none" w="med" len="med"/>
-                    </a:lnR>
-                    <a:lnT w="9525" cap="flat" cmpd="sng" algn="ctr">
-                      <a:solidFill>
-                        <a:srgbClr val="D5E3E0"/>
-                      </a:solidFill>
-                      <a:prstDash val="solid"/>
-                      <a:round/>
-                      <a:headEnd type="none" w="med" len="med"/>
-                      <a:tailEnd type="none" w="med" len="med"/>
-                    </a:lnT>
-                    <a:lnB w="9525" cap="flat" cmpd="sng" algn="ctr">
-                      <a:solidFill>
-                        <a:srgbClr val="D5E3E0"/>
-                      </a:solidFill>
-                      <a:prstDash val="solid"/>
-                      <a:round/>
-                      <a:headEnd type="none" w="med" len="med"/>
-                      <a:tailEnd type="none" w="med" len="med"/>
-                    </a:lnB>
-                    <a:solidFill>
-                      <a:srgbClr val="FFFFFF"/>
-                    </a:solidFill>
-                  </a:tcPr>
-                </a:tc>
-                <a:tc>
-                  <a:txBody>
-                    <a:bodyPr/>
-                    <a:lstStyle/>
-                    <a:p>
-                      <a:pPr marL="0" indent="0" algn="l">
-                        <a:buNone/>
-                      </a:pPr>
-                      <a:r>
-                        <a:rPr lang="en-US" sz="1400" b="1" dirty="0">
-                          <a:solidFill>
-                            <a:srgbClr val="16A34A"/>
-                          </a:solidFill>
-                          <a:latin typeface="+mn-lt" pitchFamily="34" charset="0"/>
-                          <a:ea typeface="+mn-lt" pitchFamily="34" charset="-122"/>
-                          <a:cs typeface="+mn-lt" pitchFamily="34" charset="-120"/>
-                        </a:rPr>
-                        <a:t>9.6%</a:t>
-                      </a:r>
-                      <a:endParaRPr lang="en-US" sz="1400" dirty="0">
-                        <a:latin typeface="+mn-lt" charset="0"/>
-                        <a:ea typeface="+mn-lt" charset="0"/>
-                        <a:cs typeface="+mn-lt" charset="0"/>
-                      </a:endParaRPr>
-                    </a:p>
-                  </a:txBody>
-                  <a:tcPr anchor="ctr">
-                    <a:lnL w="9525" cap="flat" cmpd="sng" algn="ctr">
-                      <a:solidFill>
-                        <a:srgbClr val="D5E3E0"/>
-                      </a:solidFill>
-                      <a:prstDash val="solid"/>
-                      <a:round/>
-                      <a:headEnd type="none" w="med" len="med"/>
-                      <a:tailEnd type="none" w="med" len="med"/>
-                    </a:lnL>
-                    <a:lnR w="9525" cap="flat" cmpd="sng" algn="ctr">
-                      <a:solidFill>
-                        <a:srgbClr val="D5E3E0"/>
-                      </a:solidFill>
-                      <a:prstDash val="solid"/>
-                      <a:round/>
-                      <a:headEnd type="none" w="med" len="med"/>
-                      <a:tailEnd type="none" w="med" len="med"/>
-                    </a:lnR>
-                    <a:lnT w="9525" cap="flat" cmpd="sng" algn="ctr">
-                      <a:solidFill>
-                        <a:srgbClr val="D5E3E0"/>
-                      </a:solidFill>
-                      <a:prstDash val="solid"/>
-                      <a:round/>
-                      <a:headEnd type="none" w="med" len="med"/>
-                      <a:tailEnd type="none" w="med" len="med"/>
-                    </a:lnT>
-                    <a:lnB w="9525" cap="flat" cmpd="sng" algn="ctr">
-                      <a:solidFill>
-                        <a:srgbClr val="D5E3E0"/>
-                      </a:solidFill>
-                      <a:prstDash val="solid"/>
-                      <a:round/>
-                      <a:headEnd type="none" w="med" len="med"/>
-                      <a:tailEnd type="none" w="med" len="med"/>
-                    </a:lnB>
-                    <a:solidFill>
-                      <a:srgbClr val="FFFFFF"/>
-                    </a:solidFill>
-                  </a:tcPr>
-                </a:tc>
-                <a:extLst>
-                  <a:ext uri="{0D108BD9-81ED-4DB2-BD59-A6C34878D82A}">
-                    <a16:rowId xmlns:a16="http://schemas.microsoft.com/office/drawing/2014/main" val="10003"/>
-                  </a:ext>
-                </a:extLst>
-              </a:tr>
-              <a:tr h="365760">
-                <a:tc>
-                  <a:txBody>
-                    <a:bodyPr/>
-                    <a:lstStyle/>
-                    <a:p>
-                      <a:pPr marL="0" indent="0" algn="l">
-                        <a:buNone/>
-                      </a:pPr>
-                      <a:r>
-                        <a:rPr lang="en-US" sz="1400" b="1" dirty="0">
-                          <a:solidFill>
-                            <a:srgbClr val="10222B"/>
-                          </a:solidFill>
-                          <a:latin typeface="+mn-lt" pitchFamily="34" charset="0"/>
-                          <a:ea typeface="+mn-lt" pitchFamily="34" charset="-122"/>
-                          <a:cs typeface="+mn-lt" pitchFamily="34" charset="-120"/>
-                        </a:rPr>
-                        <a:t>Total</a:t>
-                      </a:r>
-                      <a:endParaRPr lang="en-US" sz="1400" dirty="0">
-                        <a:latin typeface="+mn-lt" charset="0"/>
-                        <a:ea typeface="+mn-lt" charset="0"/>
-                        <a:cs typeface="+mn-lt" charset="0"/>
-                      </a:endParaRPr>
-                    </a:p>
-                  </a:txBody>
-                  <a:tcPr anchor="ctr">
-                    <a:lnL w="9525" cap="flat" cmpd="sng" algn="ctr">
-                      <a:solidFill>
-                        <a:srgbClr val="D5E3E0"/>
-                      </a:solidFill>
-                      <a:prstDash val="solid"/>
-                      <a:round/>
-                      <a:headEnd type="none" w="med" len="med"/>
-                      <a:tailEnd type="none" w="med" len="med"/>
-                    </a:lnL>
-                    <a:lnR w="9525" cap="flat" cmpd="sng" algn="ctr">
-                      <a:solidFill>
-                        <a:srgbClr val="D5E3E0"/>
-                      </a:solidFill>
-                      <a:prstDash val="solid"/>
-                      <a:round/>
-                      <a:headEnd type="none" w="med" len="med"/>
-                      <a:tailEnd type="none" w="med" len="med"/>
-                    </a:lnR>
-                    <a:lnT w="9525" cap="flat" cmpd="sng" algn="ctr">
-                      <a:solidFill>
-                        <a:srgbClr val="D5E3E0"/>
-                      </a:solidFill>
-                      <a:prstDash val="solid"/>
-                      <a:round/>
-                      <a:headEnd type="none" w="med" len="med"/>
-                      <a:tailEnd type="none" w="med" len="med"/>
-                    </a:lnT>
-                    <a:lnB w="9525" cap="flat" cmpd="sng" algn="ctr">
-                      <a:solidFill>
-                        <a:srgbClr val="D5E3E0"/>
-                      </a:solidFill>
-                      <a:prstDash val="solid"/>
-                      <a:round/>
-                      <a:headEnd type="none" w="med" len="med"/>
-                      <a:tailEnd type="none" w="med" len="med"/>
-                    </a:lnB>
-                    <a:solidFill>
-                      <a:srgbClr val="EAF2F1"/>
-                    </a:solidFill>
-                  </a:tcPr>
-                </a:tc>
-                <a:tc>
-                  <a:txBody>
-                    <a:bodyPr/>
-                    <a:lstStyle/>
-                    <a:p>
-                      <a:pPr marL="0" indent="0" algn="l">
-                        <a:buNone/>
-                      </a:pPr>
-                      <a:r>
-                        <a:rPr lang="en-US" sz="1400" b="1" dirty="0">
-                          <a:solidFill>
-                            <a:srgbClr val="10222B"/>
-                          </a:solidFill>
-                          <a:latin typeface="+mn-lt" pitchFamily="34" charset="0"/>
-                          <a:ea typeface="+mn-lt" pitchFamily="34" charset="-122"/>
-                          <a:cs typeface="+mn-lt" pitchFamily="34" charset="-120"/>
-                        </a:rPr>
-                        <a:t>$13,966.97</a:t>
-                      </a:r>
-                      <a:endParaRPr lang="en-US" sz="1400" dirty="0">
-                        <a:latin typeface="+mn-lt" charset="0"/>
-                        <a:ea typeface="+mn-lt" charset="0"/>
-                        <a:cs typeface="+mn-lt" charset="0"/>
-                      </a:endParaRPr>
-                    </a:p>
-                  </a:txBody>
-                  <a:tcPr anchor="ctr">
-                    <a:lnL w="9525" cap="flat" cmpd="sng" algn="ctr">
-                      <a:solidFill>
-                        <a:srgbClr val="D5E3E0"/>
-                      </a:solidFill>
-                      <a:prstDash val="solid"/>
-                      <a:round/>
-                      <a:headEnd type="none" w="med" len="med"/>
-                      <a:tailEnd type="none" w="med" len="med"/>
-                    </a:lnL>
-                    <a:lnR w="9525" cap="flat" cmpd="sng" algn="ctr">
-                      <a:solidFill>
-                        <a:srgbClr val="D5E3E0"/>
-                      </a:solidFill>
-                      <a:prstDash val="solid"/>
-                      <a:round/>
-                      <a:headEnd type="none" w="med" len="med"/>
-                      <a:tailEnd type="none" w="med" len="med"/>
-                    </a:lnR>
-                    <a:lnT w="9525" cap="flat" cmpd="sng" algn="ctr">
-                      <a:solidFill>
-                        <a:srgbClr val="D5E3E0"/>
-                      </a:solidFill>
-                      <a:prstDash val="solid"/>
-                      <a:round/>
-                      <a:headEnd type="none" w="med" len="med"/>
-                      <a:tailEnd type="none" w="med" len="med"/>
-                    </a:lnT>
-                    <a:lnB w="9525" cap="flat" cmpd="sng" algn="ctr">
-                      <a:solidFill>
-                        <a:srgbClr val="D5E3E0"/>
-                      </a:solidFill>
-                      <a:prstDash val="solid"/>
-                      <a:round/>
-                      <a:headEnd type="none" w="med" len="med"/>
-                      <a:tailEnd type="none" w="med" len="med"/>
-                    </a:lnB>
-                    <a:solidFill>
-                      <a:srgbClr val="EAF2F1"/>
-                    </a:solidFill>
-                  </a:tcPr>
-                </a:tc>
-                <a:tc>
-                  <a:txBody>
-                    <a:bodyPr/>
-                    <a:lstStyle/>
-                    <a:p>
-                      <a:pPr marL="0" indent="0" algn="l">
-                        <a:buNone/>
-                      </a:pPr>
-                      <a:r>
-                        <a:rPr lang="en-US" sz="1400" b="1" dirty="0">
-                          <a:solidFill>
-                            <a:srgbClr val="DC2626"/>
-                          </a:solidFill>
-                          <a:latin typeface="+mn-lt" pitchFamily="34" charset="0"/>
-                          <a:ea typeface="+mn-lt" pitchFamily="34" charset="-122"/>
-                          <a:cs typeface="+mn-lt" pitchFamily="34" charset="-120"/>
-                        </a:rPr>
-                        <a:t>−$1,165.04</a:t>
-                      </a:r>
-                      <a:endParaRPr lang="en-US" sz="1400" dirty="0">
-                        <a:latin typeface="+mn-lt" charset="0"/>
-                        <a:ea typeface="+mn-lt" charset="0"/>
-                        <a:cs typeface="+mn-lt" charset="0"/>
-                      </a:endParaRPr>
-                    </a:p>
-                  </a:txBody>
-                  <a:tcPr anchor="ctr">
-                    <a:lnL w="9525" cap="flat" cmpd="sng" algn="ctr">
-                      <a:solidFill>
-                        <a:srgbClr val="D5E3E0"/>
-                      </a:solidFill>
-                      <a:prstDash val="solid"/>
-                      <a:round/>
-                      <a:headEnd type="none" w="med" len="med"/>
-                      <a:tailEnd type="none" w="med" len="med"/>
-                    </a:lnL>
-                    <a:lnR w="9525" cap="flat" cmpd="sng" algn="ctr">
-                      <a:solidFill>
-                        <a:srgbClr val="D5E3E0"/>
-                      </a:solidFill>
-                      <a:prstDash val="solid"/>
-                      <a:round/>
-                      <a:headEnd type="none" w="med" len="med"/>
-                      <a:tailEnd type="none" w="med" len="med"/>
-                    </a:lnR>
-                    <a:lnT w="9525" cap="flat" cmpd="sng" algn="ctr">
-                      <a:solidFill>
-                        <a:srgbClr val="D5E3E0"/>
-                      </a:solidFill>
-                      <a:prstDash val="solid"/>
-                      <a:round/>
-                      <a:headEnd type="none" w="med" len="med"/>
-                      <a:tailEnd type="none" w="med" len="med"/>
-                    </a:lnT>
-                    <a:lnB w="9525" cap="flat" cmpd="sng" algn="ctr">
-                      <a:solidFill>
-                        <a:srgbClr val="D5E3E0"/>
-                      </a:solidFill>
-                      <a:prstDash val="solid"/>
-                      <a:round/>
-                      <a:headEnd type="none" w="med" len="med"/>
-                      <a:tailEnd type="none" w="med" len="med"/>
-                    </a:lnB>
-                    <a:solidFill>
-                      <a:srgbClr val="EAF2F1"/>
-                    </a:solidFill>
-                  </a:tcPr>
-                </a:tc>
-                <a:tc>
-                  <a:txBody>
-                    <a:bodyPr/>
-                    <a:lstStyle/>
-                    <a:p>
-                      <a:pPr marL="0" indent="0" algn="l">
-                        <a:buNone/>
-                      </a:pPr>
-                      <a:r>
-                        <a:rPr lang="en-US" sz="1400" b="1" dirty="0">
-                          <a:solidFill>
-                            <a:srgbClr val="DC2626"/>
-                          </a:solidFill>
-                          <a:latin typeface="+mn-lt" pitchFamily="34" charset="0"/>
-                          <a:ea typeface="+mn-lt" pitchFamily="34" charset="-122"/>
-                          <a:cs typeface="+mn-lt" pitchFamily="34" charset="-120"/>
-                        </a:rPr>
-                        <a:t>−8.3%</a:t>
-                      </a:r>
-                      <a:endParaRPr lang="en-US" sz="1400" dirty="0">
-                        <a:latin typeface="+mn-lt" charset="0"/>
-                        <a:ea typeface="+mn-lt" charset="0"/>
-                        <a:cs typeface="+mn-lt" charset="0"/>
-                      </a:endParaRPr>
-                    </a:p>
-                  </a:txBody>
-                  <a:tcPr anchor="ctr">
-                    <a:lnL w="9525" cap="flat" cmpd="sng" algn="ctr">
-                      <a:solidFill>
-                        <a:srgbClr val="D5E3E0"/>
-                      </a:solidFill>
-                      <a:prstDash val="solid"/>
-                      <a:round/>
-                      <a:headEnd type="none" w="med" len="med"/>
-                      <a:tailEnd type="none" w="med" len="med"/>
-                    </a:lnL>
-                    <a:lnR w="9525" cap="flat" cmpd="sng" algn="ctr">
-                      <a:solidFill>
-                        <a:srgbClr val="D5E3E0"/>
-                      </a:solidFill>
-                      <a:prstDash val="solid"/>
-                      <a:round/>
-                      <a:headEnd type="none" w="med" len="med"/>
-                      <a:tailEnd type="none" w="med" len="med"/>
-                    </a:lnR>
-                    <a:lnT w="9525" cap="flat" cmpd="sng" algn="ctr">
-                      <a:solidFill>
-                        <a:srgbClr val="D5E3E0"/>
-                      </a:solidFill>
-                      <a:prstDash val="solid"/>
-                      <a:round/>
-                      <a:headEnd type="none" w="med" len="med"/>
-                      <a:tailEnd type="none" w="med" len="med"/>
-                    </a:lnT>
-                    <a:lnB w="9525" cap="flat" cmpd="sng" algn="ctr">
-                      <a:solidFill>
-                        <a:srgbClr val="D5E3E0"/>
-                      </a:solidFill>
-                      <a:prstDash val="solid"/>
-                      <a:round/>
-                      <a:headEnd type="none" w="med" len="med"/>
-                      <a:tailEnd type="none" w="med" len="med"/>
-                    </a:lnB>
-                    <a:solidFill>
-                      <a:srgbClr val="EAF2F1"/>
-                    </a:solidFill>
-                  </a:tcPr>
-                </a:tc>
-                <a:extLst>
-                  <a:ext uri="{0D108BD9-81ED-4DB2-BD59-A6C34878D82A}">
-                    <a16:rowId xmlns:a16="http://schemas.microsoft.com/office/drawing/2014/main" val="10004"/>
-                  </a:ext>
-                </a:extLst>
-              </a:tr>
-            </a:tbl>
-          </a:graphicData>
-        </a:graphic>
-      </p:graphicFrame>
-      <p:sp>
-        <p:nvSpPr>
-          <p:cNvPr id="4" name="g2_bg"/>
+      <p:sp>
+        <p:nvSpPr>
+          <p:cNvPr id="3" name="g1_imgbg"/>
           <p:cNvSpPr/>
           <p:nvPr/>
         </p:nvSpPr>
         <p:spPr>
           <a:xfrm>
-            <a:off x="457200" y="3200400"/>
-            <a:ext cx="2651760" cy="1463040"/>
+            <a:off x="457200" y="1143000"/>
+            <a:ext cx="5394960" cy="3520440"/>
           </a:xfrm>
           <a:prstGeom prst="roundRect">
             <a:avLst>
-              <a:gd name="adj" fmla="val 6250"/>
+              <a:gd name="adj" fmla="val 2597"/>
             </a:avLst>
           </a:prstGeom>
           <a:solidFill>
@@ -12043,16 +7443,74 @@
           </a:effectLst>
         </p:spPr>
       </p:sp>
-      <p:sp>
-        <p:nvSpPr>
-          <p:cNvPr id="3" name="g2_v"/>
+      <p:pic>
+        <p:nvPicPr>
+          <p:cNvPr id="4" name="g1_img" descr="Q2.png"/>
+          <p:cNvPicPr>
+            <a:picLocks noChangeAspect="1"/>
+          </p:cNvPicPr>
+          <p:nvPr/>
+        </p:nvPicPr>
+        <p:blipFill>
+          <a:blip r:embed="rId3"/>
+          <a:stretch>
+            <a:fillRect/>
+          </a:stretch>
+        </p:blipFill>
+        <p:spPr>
+          <a:xfrm>
+            <a:off x="548640" y="1285390"/>
+            <a:ext cx="5212080" cy="3235659"/>
+          </a:xfrm>
+          <a:prstGeom prst="rect">
+            <a:avLst/>
+          </a:prstGeom>
+        </p:spPr>
+      </p:pic>
+      <p:sp>
+        <p:nvSpPr>
+          <p:cNvPr id="5" name="g2_bg"/>
+          <p:cNvSpPr/>
+          <p:nvPr/>
+        </p:nvSpPr>
+        <p:spPr>
+          <a:xfrm>
+            <a:off x="6080760" y="1143000"/>
+            <a:ext cx="2606040" cy="1691640"/>
+          </a:xfrm>
+          <a:prstGeom prst="roundRect">
+            <a:avLst>
+              <a:gd name="adj" fmla="val 5405"/>
+            </a:avLst>
+          </a:prstGeom>
+          <a:solidFill>
+            <a:schemeClr val="bg1"/>
+          </a:solidFill>
+          <a:ln w="12700">
+            <a:solidFill>
+              <a:schemeClr val="bg1"/>
+            </a:solidFill>
+            <a:prstDash val="solid"/>
+          </a:ln>
+          <a:effectLst>
+            <a:outerShdw blurRad="101600" dist="25400" dir="5400000" algn="bl" rotWithShape="0">
+              <a:srgbClr val="10222B">
+                <a:alpha val="15000"/>
+              </a:srgbClr>
+            </a:outerShdw>
+          </a:effectLst>
+        </p:spPr>
+      </p:sp>
+      <p:sp>
+        <p:nvSpPr>
+          <p:cNvPr id="6" name="g2_l"/>
           <p:cNvSpPr txBox="1"/>
           <p:nvPr/>
         </p:nvSpPr>
         <p:spPr>
           <a:xfrm>
-            <a:off x="640080" y="3310128"/>
-            <a:ext cx="2286000" cy="457200"/>
+            <a:off x="6263640" y="1280160"/>
+            <a:ext cx="2240280" cy="274320"/>
           </a:xfrm>
           <a:prstGeom prst="rect">
             <a:avLst/>
@@ -12068,30 +7526,69 @@
               <a:buNone/>
             </a:pPr>
             <a:r>
-              <a:rPr lang="en-US" sz="2600" b="1" dirty="0">
+              <a:rPr lang="en-US" sz="1400" dirty="0">
                 <a:solidFill>
-                  <a:schemeClr val="accent3"/>
+                  <a:schemeClr val="accent5"/>
+                </a:solidFill>
+                <a:latin typeface="Calibri" pitchFamily="34" charset="0"/>
+                <a:ea typeface="Calibri" pitchFamily="34" charset="-122"/>
+                <a:cs typeface="Calibri" pitchFamily="34" charset="-120"/>
+              </a:rPr>
+              <a:t>Only profitable mode</a:t>
+            </a:r>
+            <a:endParaRPr lang="en-US" sz="1400" dirty="0"/>
+          </a:p>
+        </p:txBody>
+      </p:sp>
+      <p:sp>
+        <p:nvSpPr>
+          <p:cNvPr id="7" name="g2_v"/>
+          <p:cNvSpPr txBox="1"/>
+          <p:nvPr/>
+        </p:nvSpPr>
+        <p:spPr>
+          <a:xfrm>
+            <a:off x="6263640" y="1581912"/>
+            <a:ext cx="2240280" cy="457200"/>
+          </a:xfrm>
+          <a:prstGeom prst="rect">
+            <a:avLst/>
+          </a:prstGeom>
+          <a:noFill/>
+          <a:ln/>
+        </p:spPr>
+        <p:txBody>
+          <a:bodyPr wrap="square" lIns="0" tIns="0" rIns="0" bIns="0" rtlCol="0" anchor="ctr"/>
+          <a:lstStyle/>
+          <a:p>
+            <a:pPr marL="0" indent="0">
+              <a:buNone/>
+            </a:pPr>
+            <a:r>
+              <a:rPr lang="en-US" sz="2400" b="1" dirty="0">
+                <a:solidFill>
+                  <a:schemeClr val="accent4"/>
                 </a:solidFill>
                 <a:latin typeface="Cambria" pitchFamily="34" charset="0"/>
                 <a:ea typeface="Cambria" pitchFamily="34" charset="-122"/>
                 <a:cs typeface="Cambria" pitchFamily="34" charset="-120"/>
               </a:rPr>
-              <a:t>−18.3%</a:t>
+              <a:t>Second Class</a:t>
             </a:r>
-            <a:endParaRPr lang="en-US" sz="2600" dirty="0"/>
+            <a:endParaRPr lang="en-US" sz="2400" dirty="0"/>
           </a:p>
         </p:txBody>
       </p:sp>
       <p:sp>
         <p:nvSpPr>
-          <p:cNvPr id="6" name="g2_d"/>
+          <p:cNvPr id="8" name="g2_d"/>
           <p:cNvSpPr txBox="1"/>
           <p:nvPr/>
         </p:nvSpPr>
         <p:spPr>
           <a:xfrm>
-            <a:off x="640080" y="3840480"/>
-            <a:ext cx="2286000" cy="731520"/>
+            <a:off x="6263640" y="2075688"/>
+            <a:ext cx="2240280" cy="640080"/>
           </a:xfrm>
           <a:prstGeom prst="rect">
             <a:avLst/>
@@ -12115,7 +7612,7 @@
                 <a:ea typeface="Calibri" pitchFamily="34" charset="-122"/>
                 <a:cs typeface="Calibri" pitchFamily="34" charset="-120"/>
               </a:rPr>
-              <a:t>Furniture margin: each $1 of sales loses about 18 cents.</a:t>
+              <a:t>$329.16 profit</a:t>
             </a:r>
             <a:endParaRPr lang="en-US" sz="1400" dirty="0"/>
           </a:p>
@@ -12123,18 +7620,18 @@
       </p:sp>
       <p:sp>
         <p:nvSpPr>
-          <p:cNvPr id="7" name="g3_bg"/>
+          <p:cNvPr id="9" name="g3_bg"/>
           <p:cNvSpPr/>
           <p:nvPr/>
         </p:nvSpPr>
         <p:spPr>
           <a:xfrm>
-            <a:off x="3291840" y="3200400"/>
-            <a:ext cx="2651760" cy="1463040"/>
+            <a:off x="6080760" y="2971800"/>
+            <a:ext cx="2606040" cy="1691640"/>
           </a:xfrm>
           <a:prstGeom prst="roundRect">
             <a:avLst>
-              <a:gd name="adj" fmla="val 6250"/>
+              <a:gd name="adj" fmla="val 5405"/>
             </a:avLst>
           </a:prstGeom>
           <a:solidFill>
@@ -12157,14 +7654,14 @@
       </p:sp>
       <p:sp>
         <p:nvSpPr>
-          <p:cNvPr id="8" name="g3_v"/>
+          <p:cNvPr id="10" name="g3_l"/>
           <p:cNvSpPr txBox="1"/>
           <p:nvPr/>
         </p:nvSpPr>
         <p:spPr>
           <a:xfrm>
-            <a:off x="3474720" y="3310128"/>
-            <a:ext cx="2286000" cy="457200"/>
+            <a:off x="6263640" y="3108960"/>
+            <a:ext cx="2240280" cy="274320"/>
           </a:xfrm>
           <a:prstGeom prst="rect">
             <a:avLst/>
@@ -12180,30 +7677,69 @@
               <a:buNone/>
             </a:pPr>
             <a:r>
-              <a:rPr lang="en-US" sz="2600" b="1" dirty="0">
+              <a:rPr lang="en-US" sz="1400" dirty="0">
                 <a:solidFill>
-                  <a:schemeClr val="accent4"/>
+                  <a:schemeClr val="accent5"/>
+                </a:solidFill>
+                <a:latin typeface="Calibri" pitchFamily="34" charset="0"/>
+                <a:ea typeface="Calibri" pitchFamily="34" charset="-122"/>
+                <a:cs typeface="Calibri" pitchFamily="34" charset="-120"/>
+              </a:rPr>
+              <a:t>Biggest loss</a:t>
+            </a:r>
+            <a:endParaRPr lang="en-US" sz="1400" dirty="0"/>
+          </a:p>
+        </p:txBody>
+      </p:sp>
+      <p:sp>
+        <p:nvSpPr>
+          <p:cNvPr id="11" name="g3_v"/>
+          <p:cNvSpPr txBox="1"/>
+          <p:nvPr/>
+        </p:nvSpPr>
+        <p:spPr>
+          <a:xfrm>
+            <a:off x="6263640" y="3410712"/>
+            <a:ext cx="2240280" cy="457200"/>
+          </a:xfrm>
+          <a:prstGeom prst="rect">
+            <a:avLst/>
+          </a:prstGeom>
+          <a:noFill/>
+          <a:ln/>
+        </p:spPr>
+        <p:txBody>
+          <a:bodyPr wrap="square" lIns="0" tIns="0" rIns="0" bIns="0" rtlCol="0" anchor="ctr"/>
+          <a:lstStyle/>
+          <a:p>
+            <a:pPr marL="0" indent="0">
+              <a:buNone/>
+            </a:pPr>
+            <a:r>
+              <a:rPr lang="en-US" sz="2400" b="1" dirty="0">
+                <a:solidFill>
+                  <a:schemeClr val="accent3"/>
                 </a:solidFill>
                 <a:latin typeface="Cambria" pitchFamily="34" charset="0"/>
                 <a:ea typeface="Cambria" pitchFamily="34" charset="-122"/>
                 <a:cs typeface="Cambria" pitchFamily="34" charset="-120"/>
               </a:rPr>
-              <a:t>9.6%</a:t>
+              <a:t>Standard Class</a:t>
             </a:r>
-            <a:endParaRPr lang="en-US" sz="2600" dirty="0"/>
+            <a:endParaRPr lang="en-US" sz="2400" dirty="0"/>
           </a:p>
         </p:txBody>
       </p:sp>
       <p:sp>
         <p:nvSpPr>
-          <p:cNvPr id="9" name="g3_d"/>
+          <p:cNvPr id="12" name="g3_d"/>
           <p:cNvSpPr txBox="1"/>
           <p:nvPr/>
         </p:nvSpPr>
         <p:spPr>
           <a:xfrm>
-            <a:off x="3474720" y="3840480"/>
-            <a:ext cx="2286000" cy="731520"/>
+            <a:off x="6263640" y="3904488"/>
+            <a:ext cx="2240280" cy="640080"/>
           </a:xfrm>
           <a:prstGeom prst="rect">
             <a:avLst/>
@@ -12227,119 +7763,7 @@
                 <a:ea typeface="Calibri" pitchFamily="34" charset="-122"/>
                 <a:cs typeface="Calibri" pitchFamily="34" charset="-120"/>
               </a:rPr>
-              <a:t>Technology's margin, just above Office Supplies at 9.4%.</a:t>
-            </a:r>
-            <a:endParaRPr lang="en-US" sz="1400" dirty="0"/>
-          </a:p>
-        </p:txBody>
-      </p:sp>
-      <p:sp>
-        <p:nvSpPr>
-          <p:cNvPr id="10" name="g4_bg"/>
-          <p:cNvSpPr/>
-          <p:nvPr/>
-        </p:nvSpPr>
-        <p:spPr>
-          <a:xfrm>
-            <a:off x="6126480" y="3200400"/>
-            <a:ext cx="2560320" cy="1463040"/>
-          </a:xfrm>
-          <a:prstGeom prst="roundRect">
-            <a:avLst>
-              <a:gd name="adj" fmla="val 6250"/>
-            </a:avLst>
-          </a:prstGeom>
-          <a:solidFill>
-            <a:schemeClr val="bg1"/>
-          </a:solidFill>
-          <a:ln w="12700">
-            <a:solidFill>
-              <a:schemeClr val="bg1"/>
-            </a:solidFill>
-            <a:prstDash val="solid"/>
-          </a:ln>
-          <a:effectLst>
-            <a:outerShdw blurRad="101600" dist="25400" dir="5400000" algn="bl" rotWithShape="0">
-              <a:srgbClr val="10222B">
-                <a:alpha val="15000"/>
-              </a:srgbClr>
-            </a:outerShdw>
-          </a:effectLst>
-        </p:spPr>
-      </p:sp>
-      <p:sp>
-        <p:nvSpPr>
-          <p:cNvPr id="11" name="g4_v"/>
-          <p:cNvSpPr txBox="1"/>
-          <p:nvPr/>
-        </p:nvSpPr>
-        <p:spPr>
-          <a:xfrm>
-            <a:off x="6309360" y="3310128"/>
-            <a:ext cx="2194560" cy="457200"/>
-          </a:xfrm>
-          <a:prstGeom prst="rect">
-            <a:avLst/>
-          </a:prstGeom>
-          <a:noFill/>
-          <a:ln/>
-        </p:spPr>
-        <p:txBody>
-          <a:bodyPr wrap="square" lIns="0" tIns="0" rIns="0" bIns="0" rtlCol="0" anchor="ctr"/>
-          <a:lstStyle/>
-          <a:p>
-            <a:pPr marL="0" indent="0">
-              <a:buNone/>
-            </a:pPr>
-            <a:r>
-              <a:rPr lang="en-US" sz="2600" b="1" dirty="0">
-                <a:solidFill>
-                  <a:schemeClr val="accent1"/>
-                </a:solidFill>
-                <a:latin typeface="Cambria" pitchFamily="34" charset="0"/>
-                <a:ea typeface="Cambria" pitchFamily="34" charset="-122"/>
-                <a:cs typeface="Cambria" pitchFamily="34" charset="-120"/>
-              </a:rPr>
-              <a:t>64%</a:t>
-            </a:r>
-            <a:endParaRPr lang="en-US" sz="2600" dirty="0"/>
-          </a:p>
-        </p:txBody>
-      </p:sp>
-      <p:sp>
-        <p:nvSpPr>
-          <p:cNvPr id="12" name="g4_d"/>
-          <p:cNvSpPr txBox="1"/>
-          <p:nvPr/>
-        </p:nvSpPr>
-        <p:spPr>
-          <a:xfrm>
-            <a:off x="6309360" y="3840480"/>
-            <a:ext cx="2194560" cy="731520"/>
-          </a:xfrm>
-          <a:prstGeom prst="rect">
-            <a:avLst/>
-          </a:prstGeom>
-          <a:noFill/>
-          <a:ln/>
-        </p:spPr>
-        <p:txBody>
-          <a:bodyPr wrap="square" lIns="0" tIns="0" rIns="0" bIns="0" rtlCol="0" anchor="t"/>
-          <a:lstStyle/>
-          <a:p>
-            <a:pPr marL="0" indent="0">
-              <a:buNone/>
-            </a:pPr>
-            <a:r>
-              <a:rPr lang="en-US" sz="1400" dirty="0">
-                <a:solidFill>
-                  <a:schemeClr val="tx1"/>
-                </a:solidFill>
-                <a:latin typeface="Calibri" pitchFamily="34" charset="0"/>
-                <a:ea typeface="Calibri" pitchFamily="34" charset="-122"/>
-                <a:cs typeface="Calibri" pitchFamily="34" charset="-120"/>
-              </a:rPr>
-              <a:t>of all sales come from Furniture, yet overall profit is −$1,165.04.</a:t>
+              <a:t>−$1,469.70 loss; First Class loses $24.49</a:t>
             </a:r>
             <a:endParaRPr lang="en-US" sz="1400" dirty="0"/>
           </a:p>
@@ -12365,7 +7789,7 @@
           </a:prstGeom>
           <a:extLst>
             <a:ext uri="{C572A759-6A51-4108-AA02-DFA0A04FC94B}">
-              <ma14:wrappingTextBoxFlag xmlns:ma14="http://schemas.microsoft.com/office/mac/drawingml/2011/main" xmlns="" val="0"/>
+              <ma14:wrappingTextBoxFlag xmlns="" xmlns:ma14="http://schemas.microsoft.com/office/mac/drawingml/2011/main" val="0"/>
             </a:ext>
           </a:extLst>
         </p:spPr>
@@ -12432,7 +7856,7 @@
                                           </p:stCondLst>
                                         </p:cTn>
                                         <p:tgtEl>
-                                          <p:spTgt spid="5"/>
+                                          <p:spTgt spid="3"/>
                                         </p:tgtEl>
                                         <p:attrNameLst>
                                           <p:attrName>style.visibility</p:attrName>
@@ -12446,7 +7870,42 @@
                                       <p:cBhvr>
                                         <p:cTn id="7" dur="500"/>
                                         <p:tgtEl>
-                                          <p:spTgt spid="5"/>
+                                          <p:spTgt spid="3"/>
+                                        </p:tgtEl>
+                                      </p:cBhvr>
+                                    </p:animEffect>
+                                  </p:childTnLst>
+                                </p:cTn>
+                              </p:par>
+                              <p:par>
+                                <p:cTn id="8" presetID="10" presetClass="entr" presetSubtype="0" fill="hold" nodeType="withEffect">
+                                  <p:stCondLst>
+                                    <p:cond delay="80"/>
+                                  </p:stCondLst>
+                                  <p:childTnLst>
+                                    <p:set>
+                                      <p:cBhvr>
+                                        <p:cTn id="9" dur="1" fill="hold">
+                                          <p:stCondLst>
+                                            <p:cond delay="0"/>
+                                          </p:stCondLst>
+                                        </p:cTn>
+                                        <p:tgtEl>
+                                          <p:spTgt spid="4"/>
+                                        </p:tgtEl>
+                                        <p:attrNameLst>
+                                          <p:attrName>style.visibility</p:attrName>
+                                        </p:attrNameLst>
+                                      </p:cBhvr>
+                                      <p:to>
+                                        <p:strVal val="visible"/>
+                                      </p:to>
+                                    </p:set>
+                                    <p:animEffect transition="in" filter="fade">
+                                      <p:cBhvr>
+                                        <p:cTn id="10" dur="500"/>
+                                        <p:tgtEl>
+                                          <p:spTgt spid="4"/>
                                         </p:tgtEl>
                                       </p:cBhvr>
                                     </p:animEffect>
@@ -12460,56 +7919,21 @@
                     </p:cTn>
                   </p:par>
                   <p:par>
-                    <p:cTn id="8" fill="hold">
+                    <p:cTn id="11" fill="hold">
                       <p:stCondLst>
                         <p:cond delay="indefinite"/>
                       </p:stCondLst>
                       <p:childTnLst>
                         <p:par>
-                          <p:cTn id="9" fill="hold">
+                          <p:cTn id="12" fill="hold">
                             <p:stCondLst>
                               <p:cond delay="0"/>
                             </p:stCondLst>
                             <p:childTnLst>
                               <p:par>
-                                <p:cTn id="10" presetID="10" presetClass="entr" presetSubtype="0" fill="hold" nodeType="clickEffect">
+                                <p:cTn id="13" presetID="10" presetClass="entr" presetSubtype="0" fill="hold" nodeType="clickEffect">
                                   <p:stCondLst>
                                     <p:cond delay="0"/>
-                                  </p:stCondLst>
-                                  <p:childTnLst>
-                                    <p:set>
-                                      <p:cBhvr>
-                                        <p:cTn id="11" dur="1" fill="hold">
-                                          <p:stCondLst>
-                                            <p:cond delay="0"/>
-                                          </p:stCondLst>
-                                        </p:cTn>
-                                        <p:tgtEl>
-                                          <p:spTgt spid="4"/>
-                                        </p:tgtEl>
-                                        <p:attrNameLst>
-                                          <p:attrName>style.visibility</p:attrName>
-                                        </p:attrNameLst>
-                                      </p:cBhvr>
-                                      <p:to>
-                                        <p:strVal val="visible"/>
-                                      </p:to>
-                                    </p:set>
-                                    <p:animEffect transition="in" filter="fade">
-                                      <p:cBhvr>
-                                        <p:cTn id="12" dur="500"/>
-                                        <p:tgtEl>
-                                          <p:spTgt spid="4"/>
-                                        </p:tgtEl>
-                                      </p:cBhvr>
-                                    </p:animEffect>
-                                  </p:childTnLst>
-                                </p:cTn>
-                              </p:par>
-                              <p:par>
-                                <p:cTn id="13" presetID="10" presetClass="entr" presetSubtype="0" fill="hold" nodeType="withEffect">
-                                  <p:stCondLst>
-                                    <p:cond delay="80"/>
                                   </p:stCondLst>
                                   <p:childTnLst>
                                     <p:set>
@@ -12544,7 +7968,7 @@
                               <p:par>
                                 <p:cTn id="16" presetID="10" presetClass="entr" presetSubtype="0" fill="hold" nodeType="withEffect">
                                   <p:stCondLst>
-                                    <p:cond delay="160"/>
+                                    <p:cond delay="80"/>
                                   </p:stCondLst>
                                   <p:childTnLst>
                                     <p:set>
@@ -12570,6 +7994,76 @@
                                         <p:cTn id="18" dur="500"/>
                                         <p:tgtEl>
                                           <p:spTgt spid="6"/>
+                                        </p:tgtEl>
+                                      </p:cBhvr>
+                                    </p:animEffect>
+                                  </p:childTnLst>
+                                </p:cTn>
+                              </p:par>
+                              <p:par>
+                                <p:cTn id="19" presetID="10" presetClass="entr" presetSubtype="0" fill="hold" nodeType="withEffect">
+                                  <p:stCondLst>
+                                    <p:cond delay="160"/>
+                                  </p:stCondLst>
+                                  <p:childTnLst>
+                                    <p:set>
+                                      <p:cBhvr>
+                                        <p:cTn id="20" dur="1" fill="hold">
+                                          <p:stCondLst>
+                                            <p:cond delay="0"/>
+                                          </p:stCondLst>
+                                        </p:cTn>
+                                        <p:tgtEl>
+                                          <p:spTgt spid="7"/>
+                                        </p:tgtEl>
+                                        <p:attrNameLst>
+                                          <p:attrName>style.visibility</p:attrName>
+                                        </p:attrNameLst>
+                                      </p:cBhvr>
+                                      <p:to>
+                                        <p:strVal val="visible"/>
+                                      </p:to>
+                                    </p:set>
+                                    <p:animEffect transition="in" filter="fade">
+                                      <p:cBhvr>
+                                        <p:cTn id="21" dur="500"/>
+                                        <p:tgtEl>
+                                          <p:spTgt spid="7"/>
+                                        </p:tgtEl>
+                                      </p:cBhvr>
+                                    </p:animEffect>
+                                  </p:childTnLst>
+                                </p:cTn>
+                              </p:par>
+                              <p:par>
+                                <p:cTn id="22" presetID="10" presetClass="entr" presetSubtype="0" fill="hold" nodeType="withEffect">
+                                  <p:stCondLst>
+                                    <p:cond delay="240"/>
+                                  </p:stCondLst>
+                                  <p:childTnLst>
+                                    <p:set>
+                                      <p:cBhvr>
+                                        <p:cTn id="23" dur="1" fill="hold">
+                                          <p:stCondLst>
+                                            <p:cond delay="0"/>
+                                          </p:stCondLst>
+                                        </p:cTn>
+                                        <p:tgtEl>
+                                          <p:spTgt spid="8"/>
+                                        </p:tgtEl>
+                                        <p:attrNameLst>
+                                          <p:attrName>style.visibility</p:attrName>
+                                        </p:attrNameLst>
+                                      </p:cBhvr>
+                                      <p:to>
+                                        <p:strVal val="visible"/>
+                                      </p:to>
+                                    </p:set>
+                                    <p:animEffect transition="in" filter="fade">
+                                      <p:cBhvr>
+                                        <p:cTn id="24" dur="500"/>
+                                        <p:tgtEl>
+                                          <p:spTgt spid="8"/>
                                         </p:tgtEl>
                                       </p:cBhvr>
                                     </p:animEffect>
@@ -12583,32 +8077,32 @@
                     </p:cTn>
                   </p:par>
                   <p:par>
-                    <p:cTn id="19" fill="hold">
+                    <p:cTn id="25" fill="hold">
                       <p:stCondLst>
                         <p:cond delay="indefinite"/>
                       </p:stCondLst>
                       <p:childTnLst>
                         <p:par>
-                          <p:cTn id="20" fill="hold">
+                          <p:cTn id="26" fill="hold">
                             <p:stCondLst>
                               <p:cond delay="0"/>
                             </p:stCondLst>
                             <p:childTnLst>
                               <p:par>
-                                <p:cTn id="21" presetID="10" presetClass="entr" presetSubtype="0" fill="hold" nodeType="clickEffect">
+                                <p:cTn id="27" presetID="10" presetClass="entr" presetSubtype="0" fill="hold" nodeType="clickEffect">
                                   <p:stCondLst>
                                     <p:cond delay="0"/>
                                   </p:stCondLst>
                                   <p:childTnLst>
                                     <p:set>
                                       <p:cBhvr>
-                                        <p:cTn id="22" dur="1" fill="hold">
+                                        <p:cTn id="28" dur="1" fill="hold">
                                           <p:stCondLst>
                                             <p:cond delay="0"/>
                                           </p:stCondLst>
                                         </p:cTn>
                                         <p:tgtEl>
-                                          <p:spTgt spid="7"/>
+                                          <p:spTgt spid="9"/>
                                         </p:tgtEl>
                                         <p:attrNameLst>
                                           <p:attrName>style.visibility</p:attrName>
@@ -12620,9 +8114,9 @@
                                     </p:set>
                                     <p:animEffect transition="in" filter="fade">
                                       <p:cBhvr>
-                                        <p:cTn id="23" dur="500"/>
-                                        <p:tgtEl>
-                                          <p:spTgt spid="7"/>
+                                        <p:cTn id="29" dur="500"/>
+                                        <p:tgtEl>
+                                          <p:spTgt spid="9"/>
                                         </p:tgtEl>
                                       </p:cBhvr>
                                     </p:animEffect>
@@ -12630,20 +8124,20 @@
                                 </p:cTn>
                               </p:par>
                               <p:par>
-                                <p:cTn id="24" presetID="10" presetClass="entr" presetSubtype="0" fill="hold" nodeType="withEffect">
+                                <p:cTn id="30" presetID="10" presetClass="entr" presetSubtype="0" fill="hold" nodeType="withEffect">
                                   <p:stCondLst>
                                     <p:cond delay="80"/>
                                   </p:stCondLst>
                                   <p:childTnLst>
                                     <p:set>
                                       <p:cBhvr>
-                                        <p:cTn id="25" dur="1" fill="hold">
+                                        <p:cTn id="31" dur="1" fill="hold">
                                           <p:stCondLst>
                                             <p:cond delay="0"/>
                                           </p:stCondLst>
                                         </p:cTn>
                                         <p:tgtEl>
-                                          <p:spTgt spid="8"/>
+                                          <p:spTgt spid="10"/>
                                         </p:tgtEl>
                                         <p:attrNameLst>
                                           <p:attrName>style.visibility</p:attrName>
@@ -12655,9 +8149,9 @@
                                     </p:set>
                                     <p:animEffect transition="in" filter="fade">
                                       <p:cBhvr>
-                                        <p:cTn id="26" dur="500"/>
-                                        <p:tgtEl>
-                                          <p:spTgt spid="8"/>
+                                        <p:cTn id="32" dur="500"/>
+                                        <p:tgtEl>
+                                          <p:spTgt spid="10"/>
                                         </p:tgtEl>
                                       </p:cBhvr>
                                     </p:animEffect>
@@ -12665,20 +8159,20 @@
                                 </p:cTn>
                               </p:par>
                               <p:par>
-                                <p:cTn id="27" presetID="10" presetClass="entr" presetSubtype="0" fill="hold" nodeType="withEffect">
+                                <p:cTn id="33" presetID="10" presetClass="entr" presetSubtype="0" fill="hold" nodeType="withEffect">
                                   <p:stCondLst>
                                     <p:cond delay="160"/>
                                   </p:stCondLst>
                                   <p:childTnLst>
                                     <p:set>
                                       <p:cBhvr>
-                                        <p:cTn id="28" dur="1" fill="hold">
+                                        <p:cTn id="34" dur="1" fill="hold">
                                           <p:stCondLst>
                                             <p:cond delay="0"/>
                                           </p:stCondLst>
                                         </p:cTn>
                                         <p:tgtEl>
-                                          <p:spTgt spid="9"/>
+                                          <p:spTgt spid="11"/>
                                         </p:tgtEl>
                                         <p:attrNameLst>
                                           <p:attrName>style.visibility</p:attrName>
@@ -12690,48 +8184,30 @@
                                     </p:set>
                                     <p:animEffect transition="in" filter="fade">
                                       <p:cBhvr>
-                                        <p:cTn id="29" dur="500"/>
-                                        <p:tgtEl>
-                                          <p:spTgt spid="9"/>
+                                        <p:cTn id="35" dur="500"/>
+                                        <p:tgtEl>
+                                          <p:spTgt spid="11"/>
                                         </p:tgtEl>
                                       </p:cBhvr>
                                     </p:animEffect>
                                   </p:childTnLst>
                                 </p:cTn>
                               </p:par>
-                            </p:childTnLst>
-                          </p:cTn>
-                        </p:par>
-                      </p:childTnLst>
-                    </p:cTn>
-                  </p:par>
-                  <p:par>
-                    <p:cTn id="30" fill="hold">
-                      <p:stCondLst>
-                        <p:cond delay="indefinite"/>
-                      </p:stCondLst>
-                      <p:childTnLst>
-                        <p:par>
-                          <p:cTn id="31" fill="hold">
-                            <p:stCondLst>
-                              <p:cond delay="0"/>
-                            </p:stCondLst>
-                            <p:childTnLst>
                               <p:par>
-                                <p:cTn id="32" presetID="10" presetClass="entr" presetSubtype="0" fill="hold" nodeType="clickEffect">
+                                <p:cTn id="36" presetID="10" presetClass="entr" presetSubtype="0" fill="hold" nodeType="withEffect">
                                   <p:stCondLst>
-                                    <p:cond delay="0"/>
+                                    <p:cond delay="240"/>
                                   </p:stCondLst>
                                   <p:childTnLst>
                                     <p:set>
                                       <p:cBhvr>
-                                        <p:cTn id="33" dur="1" fill="hold">
+                                        <p:cTn id="37" dur="1" fill="hold">
                                           <p:stCondLst>
                                             <p:cond delay="0"/>
                                           </p:stCondLst>
                                         </p:cTn>
                                         <p:tgtEl>
-                                          <p:spTgt spid="10"/>
+                                          <p:spTgt spid="12"/>
                                         </p:tgtEl>
                                         <p:attrNameLst>
                                           <p:attrName>style.visibility</p:attrName>
@@ -12743,77 +8219,7 @@
                                     </p:set>
                                     <p:animEffect transition="in" filter="fade">
                                       <p:cBhvr>
-                                        <p:cTn id="34" dur="500"/>
-                                        <p:tgtEl>
-                                          <p:spTgt spid="10"/>
-                                        </p:tgtEl>
-                                      </p:cBhvr>
-                                    </p:animEffect>
-                                  </p:childTnLst>
-                                </p:cTn>
-                              </p:par>
-                              <p:par>
-                                <p:cTn id="35" presetID="10" presetClass="entr" presetSubtype="0" fill="hold" nodeType="withEffect">
-                                  <p:stCondLst>
-                                    <p:cond delay="80"/>
-                                  </p:stCondLst>
-                                  <p:childTnLst>
-                                    <p:set>
-                                      <p:cBhvr>
-                                        <p:cTn id="36" dur="1" fill="hold">
-                                          <p:stCondLst>
-                                            <p:cond delay="0"/>
-                                          </p:stCondLst>
-                                        </p:cTn>
-                                        <p:tgtEl>
-                                          <p:spTgt spid="11"/>
-                                        </p:tgtEl>
-                                        <p:attrNameLst>
-                                          <p:attrName>style.visibility</p:attrName>
-                                        </p:attrNameLst>
-                                      </p:cBhvr>
-                                      <p:to>
-                                        <p:strVal val="visible"/>
-                                      </p:to>
-                                    </p:set>
-                                    <p:animEffect transition="in" filter="fade">
-                                      <p:cBhvr>
-                                        <p:cTn id="37" dur="500"/>
-                                        <p:tgtEl>
-                                          <p:spTgt spid="11"/>
-                                        </p:tgtEl>
-                                      </p:cBhvr>
-                                    </p:animEffect>
-                                  </p:childTnLst>
-                                </p:cTn>
-                              </p:par>
-                              <p:par>
-                                <p:cTn id="38" presetID="10" presetClass="entr" presetSubtype="0" fill="hold" nodeType="withEffect">
-                                  <p:stCondLst>
-                                    <p:cond delay="160"/>
-                                  </p:stCondLst>
-                                  <p:childTnLst>
-                                    <p:set>
-                                      <p:cBhvr>
-                                        <p:cTn id="39" dur="1" fill="hold">
-                                          <p:stCondLst>
-                                            <p:cond delay="0"/>
-                                          </p:stCondLst>
-                                        </p:cTn>
-                                        <p:tgtEl>
-                                          <p:spTgt spid="12"/>
-                                        </p:tgtEl>
-                                        <p:attrNameLst>
-                                          <p:attrName>style.visibility</p:attrName>
-                                        </p:attrNameLst>
-                                      </p:cBhvr>
-                                      <p:to>
-                                        <p:strVal val="visible"/>
-                                      </p:to>
-                                    </p:set>
-                                    <p:animEffect transition="in" filter="fade">
-                                      <p:cBhvr>
-                                        <p:cTn id="40" dur="500"/>
+                                        <p:cTn id="38" dur="500"/>
                                         <p:tgtEl>
                                           <p:spTgt spid="12"/>
                                         </p:tgtEl>
@@ -12854,916 +8260,6 @@
 </file>
 
 <file path=ppt/slides/slide5.xml><?xml version="1.0" encoding="utf-8"?>
-<p:sld xmlns:a="http://schemas.openxmlformats.org/drawingml/2006/main" xmlns:r="http://schemas.openxmlformats.org/officeDocument/2006/relationships" xmlns:p="http://schemas.openxmlformats.org/presentationml/2006/main">
-  <p:cSld name="Slide 5">
-    <p:spTree>
-      <p:nvGrpSpPr>
-        <p:cNvPr id="1" name=""/>
-        <p:cNvGrpSpPr/>
-        <p:nvPr/>
-      </p:nvGrpSpPr>
-      <p:grpSpPr>
-        <a:xfrm>
-          <a:off x="0" y="0"/>
-          <a:ext cx="0" cy="0"/>
-          <a:chOff x="0" y="0"/>
-          <a:chExt cx="0" cy="0"/>
-        </a:xfrm>
-      </p:grpSpPr>
-      <p:sp>
-        <p:nvSpPr>
-          <p:cNvPr id="2" name="Text 0"/>
-          <p:cNvSpPr>
-            <a:spLocks noGrp="1"/>
-          </p:cNvSpPr>
-          <p:nvPr>
-            <p:ph type="title" idx="100" hasCustomPrompt="1"/>
-          </p:nvPr>
-        </p:nvSpPr>
-        <p:spPr>
-          <a:xfrm>
-            <a:off x="457200" y="274320"/>
-            <a:ext cx="8229600" cy="731520"/>
-          </a:xfrm>
-          <a:prstGeom prst="rect">
-            <a:avLst/>
-          </a:prstGeom>
-          <a:noFill/>
-          <a:ln/>
-        </p:spPr>
-        <p:txBody>
-          <a:bodyPr wrap="square" lIns="0" tIns="0" rIns="0" bIns="0" rtlCol="0" anchor="ctr"/>
-          <a:lstStyle/>
-          <a:p>
-            <a:pPr marL="0" indent="0" algn="l">
-              <a:buNone/>
-            </a:pPr>
-            <a:r>
-              <a:rPr lang="en-US" sz="3400" b="1" dirty="0">
-                <a:solidFill>
-                  <a:schemeClr val="tx1"/>
-                </a:solidFill>
-                <a:latin typeface="Cambria" pitchFamily="34" charset="0"/>
-                <a:ea typeface="Cambria" pitchFamily="34" charset="-122"/>
-                <a:cs typeface="Cambria" pitchFamily="34" charset="-120"/>
-              </a:rPr>
-              <a:t>Profit by ship mode</a:t>
-            </a:r>
-            <a:endParaRPr lang="en-US" sz="3400" dirty="0"/>
-          </a:p>
-        </p:txBody>
-      </p:sp>
-      <p:sp>
-        <p:nvSpPr>
-          <p:cNvPr id="3" name="g1_imgbg"/>
-          <p:cNvSpPr/>
-          <p:nvPr/>
-        </p:nvSpPr>
-        <p:spPr>
-          <a:xfrm>
-            <a:off x="457200" y="1143000"/>
-            <a:ext cx="5394960" cy="3520440"/>
-          </a:xfrm>
-          <a:prstGeom prst="roundRect">
-            <a:avLst>
-              <a:gd name="adj" fmla="val 2597"/>
-            </a:avLst>
-          </a:prstGeom>
-          <a:solidFill>
-            <a:schemeClr val="bg1"/>
-          </a:solidFill>
-          <a:ln w="12700">
-            <a:solidFill>
-              <a:schemeClr val="bg1"/>
-            </a:solidFill>
-            <a:prstDash val="solid"/>
-          </a:ln>
-          <a:effectLst>
-            <a:outerShdw blurRad="101600" dist="25400" dir="5400000" algn="bl" rotWithShape="0">
-              <a:srgbClr val="10222B">
-                <a:alpha val="15000"/>
-              </a:srgbClr>
-            </a:outerShdw>
-          </a:effectLst>
-        </p:spPr>
-      </p:sp>
-      <p:pic>
-        <p:nvPicPr>
-          <p:cNvPr id="4" name="g1_img" descr="Q2.png"/>
-          <p:cNvPicPr>
-            <a:picLocks noChangeAspect="1"/>
-          </p:cNvPicPr>
-          <p:nvPr/>
-        </p:nvPicPr>
-        <p:blipFill>
-          <a:blip r:embed="rId3"/>
-          <a:stretch>
-            <a:fillRect/>
-          </a:stretch>
-        </p:blipFill>
-        <p:spPr>
-          <a:xfrm>
-            <a:off x="548640" y="1285390"/>
-            <a:ext cx="5212080" cy="3235659"/>
-          </a:xfrm>
-          <a:prstGeom prst="rect">
-            <a:avLst/>
-          </a:prstGeom>
-        </p:spPr>
-      </p:pic>
-      <p:sp>
-        <p:nvSpPr>
-          <p:cNvPr id="5" name="g2_bg"/>
-          <p:cNvSpPr/>
-          <p:nvPr/>
-        </p:nvSpPr>
-        <p:spPr>
-          <a:xfrm>
-            <a:off x="6080760" y="1143000"/>
-            <a:ext cx="2606040" cy="1691640"/>
-          </a:xfrm>
-          <a:prstGeom prst="roundRect">
-            <a:avLst>
-              <a:gd name="adj" fmla="val 5405"/>
-            </a:avLst>
-          </a:prstGeom>
-          <a:solidFill>
-            <a:schemeClr val="bg1"/>
-          </a:solidFill>
-          <a:ln w="12700">
-            <a:solidFill>
-              <a:schemeClr val="bg1"/>
-            </a:solidFill>
-            <a:prstDash val="solid"/>
-          </a:ln>
-          <a:effectLst>
-            <a:outerShdw blurRad="101600" dist="25400" dir="5400000" algn="bl" rotWithShape="0">
-              <a:srgbClr val="10222B">
-                <a:alpha val="15000"/>
-              </a:srgbClr>
-            </a:outerShdw>
-          </a:effectLst>
-        </p:spPr>
-      </p:sp>
-      <p:sp>
-        <p:nvSpPr>
-          <p:cNvPr id="6" name="g2_l"/>
-          <p:cNvSpPr txBox="1"/>
-          <p:nvPr/>
-        </p:nvSpPr>
-        <p:spPr>
-          <a:xfrm>
-            <a:off x="6263640" y="1280160"/>
-            <a:ext cx="2240280" cy="274320"/>
-          </a:xfrm>
-          <a:prstGeom prst="rect">
-            <a:avLst/>
-          </a:prstGeom>
-          <a:noFill/>
-          <a:ln/>
-        </p:spPr>
-        <p:txBody>
-          <a:bodyPr wrap="square" lIns="0" tIns="0" rIns="0" bIns="0" rtlCol="0" anchor="ctr"/>
-          <a:lstStyle/>
-          <a:p>
-            <a:pPr marL="0" indent="0">
-              <a:buNone/>
-            </a:pPr>
-            <a:r>
-              <a:rPr lang="en-US" sz="1400" dirty="0">
-                <a:solidFill>
-                  <a:schemeClr val="accent5"/>
-                </a:solidFill>
-                <a:latin typeface="Calibri" pitchFamily="34" charset="0"/>
-                <a:ea typeface="Calibri" pitchFamily="34" charset="-122"/>
-                <a:cs typeface="Calibri" pitchFamily="34" charset="-120"/>
-              </a:rPr>
-              <a:t>Only profitable mode</a:t>
-            </a:r>
-            <a:endParaRPr lang="en-US" sz="1400" dirty="0"/>
-          </a:p>
-        </p:txBody>
-      </p:sp>
-      <p:sp>
-        <p:nvSpPr>
-          <p:cNvPr id="7" name="g2_v"/>
-          <p:cNvSpPr txBox="1"/>
-          <p:nvPr/>
-        </p:nvSpPr>
-        <p:spPr>
-          <a:xfrm>
-            <a:off x="6263640" y="1581912"/>
-            <a:ext cx="2240280" cy="457200"/>
-          </a:xfrm>
-          <a:prstGeom prst="rect">
-            <a:avLst/>
-          </a:prstGeom>
-          <a:noFill/>
-          <a:ln/>
-        </p:spPr>
-        <p:txBody>
-          <a:bodyPr wrap="square" lIns="0" tIns="0" rIns="0" bIns="0" rtlCol="0" anchor="ctr"/>
-          <a:lstStyle/>
-          <a:p>
-            <a:pPr marL="0" indent="0">
-              <a:buNone/>
-            </a:pPr>
-            <a:r>
-              <a:rPr lang="en-US" sz="2400" b="1" dirty="0">
-                <a:solidFill>
-                  <a:schemeClr val="accent4"/>
-                </a:solidFill>
-                <a:latin typeface="Cambria" pitchFamily="34" charset="0"/>
-                <a:ea typeface="Cambria" pitchFamily="34" charset="-122"/>
-                <a:cs typeface="Cambria" pitchFamily="34" charset="-120"/>
-              </a:rPr>
-              <a:t>Second Class</a:t>
-            </a:r>
-            <a:endParaRPr lang="en-US" sz="2400" dirty="0"/>
-          </a:p>
-        </p:txBody>
-      </p:sp>
-      <p:sp>
-        <p:nvSpPr>
-          <p:cNvPr id="8" name="g2_d"/>
-          <p:cNvSpPr txBox="1"/>
-          <p:nvPr/>
-        </p:nvSpPr>
-        <p:spPr>
-          <a:xfrm>
-            <a:off x="6263640" y="2075688"/>
-            <a:ext cx="2240280" cy="640080"/>
-          </a:xfrm>
-          <a:prstGeom prst="rect">
-            <a:avLst/>
-          </a:prstGeom>
-          <a:noFill/>
-          <a:ln/>
-        </p:spPr>
-        <p:txBody>
-          <a:bodyPr wrap="square" lIns="0" tIns="0" rIns="0" bIns="0" rtlCol="0" anchor="t"/>
-          <a:lstStyle/>
-          <a:p>
-            <a:pPr marL="0" indent="0">
-              <a:buNone/>
-            </a:pPr>
-            <a:r>
-              <a:rPr lang="en-US" sz="1400" dirty="0">
-                <a:solidFill>
-                  <a:schemeClr val="tx1"/>
-                </a:solidFill>
-                <a:latin typeface="Calibri" pitchFamily="34" charset="0"/>
-                <a:ea typeface="Calibri" pitchFamily="34" charset="-122"/>
-                <a:cs typeface="Calibri" pitchFamily="34" charset="-120"/>
-              </a:rPr>
-              <a:t>$329.16 profit</a:t>
-            </a:r>
-            <a:endParaRPr lang="en-US" sz="1400" dirty="0"/>
-          </a:p>
-        </p:txBody>
-      </p:sp>
-      <p:sp>
-        <p:nvSpPr>
-          <p:cNvPr id="9" name="g3_bg"/>
-          <p:cNvSpPr/>
-          <p:nvPr/>
-        </p:nvSpPr>
-        <p:spPr>
-          <a:xfrm>
-            <a:off x="6080760" y="2971800"/>
-            <a:ext cx="2606040" cy="1691640"/>
-          </a:xfrm>
-          <a:prstGeom prst="roundRect">
-            <a:avLst>
-              <a:gd name="adj" fmla="val 5405"/>
-            </a:avLst>
-          </a:prstGeom>
-          <a:solidFill>
-            <a:schemeClr val="bg1"/>
-          </a:solidFill>
-          <a:ln w="12700">
-            <a:solidFill>
-              <a:schemeClr val="bg1"/>
-            </a:solidFill>
-            <a:prstDash val="solid"/>
-          </a:ln>
-          <a:effectLst>
-            <a:outerShdw blurRad="101600" dist="25400" dir="5400000" algn="bl" rotWithShape="0">
-              <a:srgbClr val="10222B">
-                <a:alpha val="15000"/>
-              </a:srgbClr>
-            </a:outerShdw>
-          </a:effectLst>
-        </p:spPr>
-      </p:sp>
-      <p:sp>
-        <p:nvSpPr>
-          <p:cNvPr id="10" name="g3_l"/>
-          <p:cNvSpPr txBox="1"/>
-          <p:nvPr/>
-        </p:nvSpPr>
-        <p:spPr>
-          <a:xfrm>
-            <a:off x="6263640" y="3108960"/>
-            <a:ext cx="2240280" cy="274320"/>
-          </a:xfrm>
-          <a:prstGeom prst="rect">
-            <a:avLst/>
-          </a:prstGeom>
-          <a:noFill/>
-          <a:ln/>
-        </p:spPr>
-        <p:txBody>
-          <a:bodyPr wrap="square" lIns="0" tIns="0" rIns="0" bIns="0" rtlCol="0" anchor="ctr"/>
-          <a:lstStyle/>
-          <a:p>
-            <a:pPr marL="0" indent="0">
-              <a:buNone/>
-            </a:pPr>
-            <a:r>
-              <a:rPr lang="en-US" sz="1400" dirty="0">
-                <a:solidFill>
-                  <a:schemeClr val="accent5"/>
-                </a:solidFill>
-                <a:latin typeface="Calibri" pitchFamily="34" charset="0"/>
-                <a:ea typeface="Calibri" pitchFamily="34" charset="-122"/>
-                <a:cs typeface="Calibri" pitchFamily="34" charset="-120"/>
-              </a:rPr>
-              <a:t>Biggest loss</a:t>
-            </a:r>
-            <a:endParaRPr lang="en-US" sz="1400" dirty="0"/>
-          </a:p>
-        </p:txBody>
-      </p:sp>
-      <p:sp>
-        <p:nvSpPr>
-          <p:cNvPr id="11" name="g3_v"/>
-          <p:cNvSpPr txBox="1"/>
-          <p:nvPr/>
-        </p:nvSpPr>
-        <p:spPr>
-          <a:xfrm>
-            <a:off x="6263640" y="3410712"/>
-            <a:ext cx="2240280" cy="457200"/>
-          </a:xfrm>
-          <a:prstGeom prst="rect">
-            <a:avLst/>
-          </a:prstGeom>
-          <a:noFill/>
-          <a:ln/>
-        </p:spPr>
-        <p:txBody>
-          <a:bodyPr wrap="square" lIns="0" tIns="0" rIns="0" bIns="0" rtlCol="0" anchor="ctr"/>
-          <a:lstStyle/>
-          <a:p>
-            <a:pPr marL="0" indent="0">
-              <a:buNone/>
-            </a:pPr>
-            <a:r>
-              <a:rPr lang="en-US" sz="2400" b="1" dirty="0">
-                <a:solidFill>
-                  <a:schemeClr val="accent3"/>
-                </a:solidFill>
-                <a:latin typeface="Cambria" pitchFamily="34" charset="0"/>
-                <a:ea typeface="Cambria" pitchFamily="34" charset="-122"/>
-                <a:cs typeface="Cambria" pitchFamily="34" charset="-120"/>
-              </a:rPr>
-              <a:t>Standard Class</a:t>
-            </a:r>
-            <a:endParaRPr lang="en-US" sz="2400" dirty="0"/>
-          </a:p>
-        </p:txBody>
-      </p:sp>
-      <p:sp>
-        <p:nvSpPr>
-          <p:cNvPr id="12" name="g3_d"/>
-          <p:cNvSpPr txBox="1"/>
-          <p:nvPr/>
-        </p:nvSpPr>
-        <p:spPr>
-          <a:xfrm>
-            <a:off x="6263640" y="3904488"/>
-            <a:ext cx="2240280" cy="640080"/>
-          </a:xfrm>
-          <a:prstGeom prst="rect">
-            <a:avLst/>
-          </a:prstGeom>
-          <a:noFill/>
-          <a:ln/>
-        </p:spPr>
-        <p:txBody>
-          <a:bodyPr wrap="square" lIns="0" tIns="0" rIns="0" bIns="0" rtlCol="0" anchor="t"/>
-          <a:lstStyle/>
-          <a:p>
-            <a:pPr marL="0" indent="0">
-              <a:buNone/>
-            </a:pPr>
-            <a:r>
-              <a:rPr lang="en-US" sz="1400" dirty="0">
-                <a:solidFill>
-                  <a:schemeClr val="tx1"/>
-                </a:solidFill>
-                <a:latin typeface="Calibri" pitchFamily="34" charset="0"/>
-                <a:ea typeface="Calibri" pitchFamily="34" charset="-122"/>
-                <a:cs typeface="Calibri" pitchFamily="34" charset="-120"/>
-              </a:rPr>
-              <a:t>−$1,469.70 loss; First Class loses $24.49</a:t>
-            </a:r>
-            <a:endParaRPr lang="en-US" sz="1400" dirty="0"/>
-          </a:p>
-        </p:txBody>
-      </p:sp>
-      <p:sp>
-        <p:nvSpPr>
-          <p:cNvPr id="25" name="Slide Number Placeholder 0"/>
-          <p:cNvSpPr>
-            <a:spLocks noGrp="1"/>
-          </p:cNvSpPr>
-          <p:nvPr>
-            <p:ph type="sldNum" sz="quarter" idx="4294967295"/>
-          </p:nvPr>
-        </p:nvSpPr>
-        <p:spPr>
-          <a:xfrm>
-            <a:off x="8229600" y="4800600"/>
-            <a:ext cx="457200" cy="228600"/>
-          </a:xfrm>
-          <a:prstGeom prst="rect">
-            <a:avLst/>
-          </a:prstGeom>
-          <a:extLst>
-            <a:ext uri="{C572A759-6A51-4108-AA02-DFA0A04FC94B}">
-              <ma14:wrappingTextBoxFlag xmlns:ma14="http://schemas.microsoft.com/office/mac/drawingml/2011/main" xmlns="" val="0"/>
-            </a:ext>
-          </a:extLst>
-        </p:spPr>
-        <p:txBody>
-          <a:bodyPr/>
-          <a:lstStyle>
-            <a:lvl1pPr>
-              <a:defRPr sz="1000">
-                <a:solidFill>
-                  <a:schemeClr val="tx1"/>
-                </a:solidFill>
-              </a:defRPr>
-            </a:lvl1pPr>
-          </a:lstStyle>
-          <a:p>
-            <a:pPr algn="l"/>
-            <a:fld id="{F7021451-1387-4CA6-816F-3879F97B5CBC}" type="slidenum">
-              <a:rPr lang="en-US" b="0"/>
-              <a:t>5</a:t>
-            </a:fld>
-            <a:endParaRPr lang="en-US"/>
-          </a:p>
-        </p:txBody>
-      </p:sp>
-    </p:spTree>
-  </p:cSld>
-  <p:clrMapOvr>
-    <a:masterClrMapping/>
-  </p:clrMapOvr>
-  <p:transition spd="med">
-    <p:fade/>
-  </p:transition>
-  <p:timing>
-    <p:tnLst>
-      <p:par>
-        <p:cTn id="1" dur="indefinite" restart="never" nodeType="tmRoot">
-          <p:childTnLst>
-            <p:seq concurrent="1" nextAc="seek">
-              <p:cTn id="2" dur="indefinite" nodeType="mainSeq">
-                <p:childTnLst>
-                  <p:par>
-                    <p:cTn id="3" fill="hold">
-                      <p:stCondLst>
-                        <p:cond delay="indefinite"/>
-                      </p:stCondLst>
-                      <p:childTnLst>
-                        <p:par>
-                          <p:cTn id="4" fill="hold">
-                            <p:stCondLst>
-                              <p:cond delay="0"/>
-                            </p:stCondLst>
-                            <p:childTnLst>
-                              <p:par>
-                                <p:cTn id="5" presetID="10" presetClass="entr" presetSubtype="0" fill="hold" nodeType="clickEffect">
-                                  <p:stCondLst>
-                                    <p:cond delay="0"/>
-                                  </p:stCondLst>
-                                  <p:childTnLst>
-                                    <p:set>
-                                      <p:cBhvr>
-                                        <p:cTn id="6" dur="1" fill="hold">
-                                          <p:stCondLst>
-                                            <p:cond delay="0"/>
-                                          </p:stCondLst>
-                                        </p:cTn>
-                                        <p:tgtEl>
-                                          <p:spTgt spid="3"/>
-                                        </p:tgtEl>
-                                        <p:attrNameLst>
-                                          <p:attrName>style.visibility</p:attrName>
-                                        </p:attrNameLst>
-                                      </p:cBhvr>
-                                      <p:to>
-                                        <p:strVal val="visible"/>
-                                      </p:to>
-                                    </p:set>
-                                    <p:animEffect transition="in" filter="fade">
-                                      <p:cBhvr>
-                                        <p:cTn id="7" dur="500"/>
-                                        <p:tgtEl>
-                                          <p:spTgt spid="3"/>
-                                        </p:tgtEl>
-                                      </p:cBhvr>
-                                    </p:animEffect>
-                                  </p:childTnLst>
-                                </p:cTn>
-                              </p:par>
-                              <p:par>
-                                <p:cTn id="8" presetID="10" presetClass="entr" presetSubtype="0" fill="hold" nodeType="withEffect">
-                                  <p:stCondLst>
-                                    <p:cond delay="80"/>
-                                  </p:stCondLst>
-                                  <p:childTnLst>
-                                    <p:set>
-                                      <p:cBhvr>
-                                        <p:cTn id="9" dur="1" fill="hold">
-                                          <p:stCondLst>
-                                            <p:cond delay="0"/>
-                                          </p:stCondLst>
-                                        </p:cTn>
-                                        <p:tgtEl>
-                                          <p:spTgt spid="4"/>
-                                        </p:tgtEl>
-                                        <p:attrNameLst>
-                                          <p:attrName>style.visibility</p:attrName>
-                                        </p:attrNameLst>
-                                      </p:cBhvr>
-                                      <p:to>
-                                        <p:strVal val="visible"/>
-                                      </p:to>
-                                    </p:set>
-                                    <p:animEffect transition="in" filter="fade">
-                                      <p:cBhvr>
-                                        <p:cTn id="10" dur="500"/>
-                                        <p:tgtEl>
-                                          <p:spTgt spid="4"/>
-                                        </p:tgtEl>
-                                      </p:cBhvr>
-                                    </p:animEffect>
-                                  </p:childTnLst>
-                                </p:cTn>
-                              </p:par>
-                            </p:childTnLst>
-                          </p:cTn>
-                        </p:par>
-                      </p:childTnLst>
-                    </p:cTn>
-                  </p:par>
-                  <p:par>
-                    <p:cTn id="11" fill="hold">
-                      <p:stCondLst>
-                        <p:cond delay="indefinite"/>
-                      </p:stCondLst>
-                      <p:childTnLst>
-                        <p:par>
-                          <p:cTn id="12" fill="hold">
-                            <p:stCondLst>
-                              <p:cond delay="0"/>
-                            </p:stCondLst>
-                            <p:childTnLst>
-                              <p:par>
-                                <p:cTn id="13" presetID="10" presetClass="entr" presetSubtype="0" fill="hold" nodeType="clickEffect">
-                                  <p:stCondLst>
-                                    <p:cond delay="0"/>
-                                  </p:stCondLst>
-                                  <p:childTnLst>
-                                    <p:set>
-                                      <p:cBhvr>
-                                        <p:cTn id="14" dur="1" fill="hold">
-                                          <p:stCondLst>
-                                            <p:cond delay="0"/>
-                                          </p:stCondLst>
-                                        </p:cTn>
-                                        <p:tgtEl>
-                                          <p:spTgt spid="5"/>
-                                        </p:tgtEl>
-                                        <p:attrNameLst>
-                                          <p:attrName>style.visibility</p:attrName>
-                                        </p:attrNameLst>
-                                      </p:cBhvr>
-                                      <p:to>
-                                        <p:strVal val="visible"/>
-                                      </p:to>
-                                    </p:set>
-                                    <p:animEffect transition="in" filter="fade">
-                                      <p:cBhvr>
-                                        <p:cTn id="15" dur="500"/>
-                                        <p:tgtEl>
-                                          <p:spTgt spid="5"/>
-                                        </p:tgtEl>
-                                      </p:cBhvr>
-                                    </p:animEffect>
-                                  </p:childTnLst>
-                                </p:cTn>
-                              </p:par>
-                              <p:par>
-                                <p:cTn id="16" presetID="10" presetClass="entr" presetSubtype="0" fill="hold" nodeType="withEffect">
-                                  <p:stCondLst>
-                                    <p:cond delay="80"/>
-                                  </p:stCondLst>
-                                  <p:childTnLst>
-                                    <p:set>
-                                      <p:cBhvr>
-                                        <p:cTn id="17" dur="1" fill="hold">
-                                          <p:stCondLst>
-                                            <p:cond delay="0"/>
-                                          </p:stCondLst>
-                                        </p:cTn>
-                                        <p:tgtEl>
-                                          <p:spTgt spid="6"/>
-                                        </p:tgtEl>
-                                        <p:attrNameLst>
-                                          <p:attrName>style.visibility</p:attrName>
-                                        </p:attrNameLst>
-                                      </p:cBhvr>
-                                      <p:to>
-                                        <p:strVal val="visible"/>
-                                      </p:to>
-                                    </p:set>
-                                    <p:animEffect transition="in" filter="fade">
-                                      <p:cBhvr>
-                                        <p:cTn id="18" dur="500"/>
-                                        <p:tgtEl>
-                                          <p:spTgt spid="6"/>
-                                        </p:tgtEl>
-                                      </p:cBhvr>
-                                    </p:animEffect>
-                                  </p:childTnLst>
-                                </p:cTn>
-                              </p:par>
-                              <p:par>
-                                <p:cTn id="19" presetID="10" presetClass="entr" presetSubtype="0" fill="hold" nodeType="withEffect">
-                                  <p:stCondLst>
-                                    <p:cond delay="160"/>
-                                  </p:stCondLst>
-                                  <p:childTnLst>
-                                    <p:set>
-                                      <p:cBhvr>
-                                        <p:cTn id="20" dur="1" fill="hold">
-                                          <p:stCondLst>
-                                            <p:cond delay="0"/>
-                                          </p:stCondLst>
-                                        </p:cTn>
-                                        <p:tgtEl>
-                                          <p:spTgt spid="7"/>
-                                        </p:tgtEl>
-                                        <p:attrNameLst>
-                                          <p:attrName>style.visibility</p:attrName>
-                                        </p:attrNameLst>
-                                      </p:cBhvr>
-                                      <p:to>
-                                        <p:strVal val="visible"/>
-                                      </p:to>
-                                    </p:set>
-                                    <p:animEffect transition="in" filter="fade">
-                                      <p:cBhvr>
-                                        <p:cTn id="21" dur="500"/>
-                                        <p:tgtEl>
-                                          <p:spTgt spid="7"/>
-                                        </p:tgtEl>
-                                      </p:cBhvr>
-                                    </p:animEffect>
-                                  </p:childTnLst>
-                                </p:cTn>
-                              </p:par>
-                              <p:par>
-                                <p:cTn id="22" presetID="10" presetClass="entr" presetSubtype="0" fill="hold" nodeType="withEffect">
-                                  <p:stCondLst>
-                                    <p:cond delay="240"/>
-                                  </p:stCondLst>
-                                  <p:childTnLst>
-                                    <p:set>
-                                      <p:cBhvr>
-                                        <p:cTn id="23" dur="1" fill="hold">
-                                          <p:stCondLst>
-                                            <p:cond delay="0"/>
-                                          </p:stCondLst>
-                                        </p:cTn>
-                                        <p:tgtEl>
-                                          <p:spTgt spid="8"/>
-                                        </p:tgtEl>
-                                        <p:attrNameLst>
-                                          <p:attrName>style.visibility</p:attrName>
-                                        </p:attrNameLst>
-                                      </p:cBhvr>
-                                      <p:to>
-                                        <p:strVal val="visible"/>
-                                      </p:to>
-                                    </p:set>
-                                    <p:animEffect transition="in" filter="fade">
-                                      <p:cBhvr>
-                                        <p:cTn id="24" dur="500"/>
-                                        <p:tgtEl>
-                                          <p:spTgt spid="8"/>
-                                        </p:tgtEl>
-                                      </p:cBhvr>
-                                    </p:animEffect>
-                                  </p:childTnLst>
-                                </p:cTn>
-                              </p:par>
-                            </p:childTnLst>
-                          </p:cTn>
-                        </p:par>
-                      </p:childTnLst>
-                    </p:cTn>
-                  </p:par>
-                  <p:par>
-                    <p:cTn id="25" fill="hold">
-                      <p:stCondLst>
-                        <p:cond delay="indefinite"/>
-                      </p:stCondLst>
-                      <p:childTnLst>
-                        <p:par>
-                          <p:cTn id="26" fill="hold">
-                            <p:stCondLst>
-                              <p:cond delay="0"/>
-                            </p:stCondLst>
-                            <p:childTnLst>
-                              <p:par>
-                                <p:cTn id="27" presetID="10" presetClass="entr" presetSubtype="0" fill="hold" nodeType="clickEffect">
-                                  <p:stCondLst>
-                                    <p:cond delay="0"/>
-                                  </p:stCondLst>
-                                  <p:childTnLst>
-                                    <p:set>
-                                      <p:cBhvr>
-                                        <p:cTn id="28" dur="1" fill="hold">
-                                          <p:stCondLst>
-                                            <p:cond delay="0"/>
-                                          </p:stCondLst>
-                                        </p:cTn>
-                                        <p:tgtEl>
-                                          <p:spTgt spid="9"/>
-                                        </p:tgtEl>
-                                        <p:attrNameLst>
-                                          <p:attrName>style.visibility</p:attrName>
-                                        </p:attrNameLst>
-                                      </p:cBhvr>
-                                      <p:to>
-                                        <p:strVal val="visible"/>
-                                      </p:to>
-                                    </p:set>
-                                    <p:animEffect transition="in" filter="fade">
-                                      <p:cBhvr>
-                                        <p:cTn id="29" dur="500"/>
-                                        <p:tgtEl>
-                                          <p:spTgt spid="9"/>
-                                        </p:tgtEl>
-                                      </p:cBhvr>
-                                    </p:animEffect>
-                                  </p:childTnLst>
-                                </p:cTn>
-                              </p:par>
-                              <p:par>
-                                <p:cTn id="30" presetID="10" presetClass="entr" presetSubtype="0" fill="hold" nodeType="withEffect">
-                                  <p:stCondLst>
-                                    <p:cond delay="80"/>
-                                  </p:stCondLst>
-                                  <p:childTnLst>
-                                    <p:set>
-                                      <p:cBhvr>
-                                        <p:cTn id="31" dur="1" fill="hold">
-                                          <p:stCondLst>
-                                            <p:cond delay="0"/>
-                                          </p:stCondLst>
-                                        </p:cTn>
-                                        <p:tgtEl>
-                                          <p:spTgt spid="10"/>
-                                        </p:tgtEl>
-                                        <p:attrNameLst>
-                                          <p:attrName>style.visibility</p:attrName>
-                                        </p:attrNameLst>
-                                      </p:cBhvr>
-                                      <p:to>
-                                        <p:strVal val="visible"/>
-                                      </p:to>
-                                    </p:set>
-                                    <p:animEffect transition="in" filter="fade">
-                                      <p:cBhvr>
-                                        <p:cTn id="32" dur="500"/>
-                                        <p:tgtEl>
-                                          <p:spTgt spid="10"/>
-                                        </p:tgtEl>
-                                      </p:cBhvr>
-                                    </p:animEffect>
-                                  </p:childTnLst>
-                                </p:cTn>
-                              </p:par>
-                              <p:par>
-                                <p:cTn id="33" presetID="10" presetClass="entr" presetSubtype="0" fill="hold" nodeType="withEffect">
-                                  <p:stCondLst>
-                                    <p:cond delay="160"/>
-                                  </p:stCondLst>
-                                  <p:childTnLst>
-                                    <p:set>
-                                      <p:cBhvr>
-                                        <p:cTn id="34" dur="1" fill="hold">
-                                          <p:stCondLst>
-                                            <p:cond delay="0"/>
-                                          </p:stCondLst>
-                                        </p:cTn>
-                                        <p:tgtEl>
-                                          <p:spTgt spid="11"/>
-                                        </p:tgtEl>
-                                        <p:attrNameLst>
-                                          <p:attrName>style.visibility</p:attrName>
-                                        </p:attrNameLst>
-                                      </p:cBhvr>
-                                      <p:to>
-                                        <p:strVal val="visible"/>
-                                      </p:to>
-                                    </p:set>
-                                    <p:animEffect transition="in" filter="fade">
-                                      <p:cBhvr>
-                                        <p:cTn id="35" dur="500"/>
-                                        <p:tgtEl>
-                                          <p:spTgt spid="11"/>
-                                        </p:tgtEl>
-                                      </p:cBhvr>
-                                    </p:animEffect>
-                                  </p:childTnLst>
-                                </p:cTn>
-                              </p:par>
-                              <p:par>
-                                <p:cTn id="36" presetID="10" presetClass="entr" presetSubtype="0" fill="hold" nodeType="withEffect">
-                                  <p:stCondLst>
-                                    <p:cond delay="240"/>
-                                  </p:stCondLst>
-                                  <p:childTnLst>
-                                    <p:set>
-                                      <p:cBhvr>
-                                        <p:cTn id="37" dur="1" fill="hold">
-                                          <p:stCondLst>
-                                            <p:cond delay="0"/>
-                                          </p:stCondLst>
-                                        </p:cTn>
-                                        <p:tgtEl>
-                                          <p:spTgt spid="12"/>
-                                        </p:tgtEl>
-                                        <p:attrNameLst>
-                                          <p:attrName>style.visibility</p:attrName>
-                                        </p:attrNameLst>
-                                      </p:cBhvr>
-                                      <p:to>
-                                        <p:strVal val="visible"/>
-                                      </p:to>
-                                    </p:set>
-                                    <p:animEffect transition="in" filter="fade">
-                                      <p:cBhvr>
-                                        <p:cTn id="38" dur="500"/>
-                                        <p:tgtEl>
-                                          <p:spTgt spid="12"/>
-                                        </p:tgtEl>
-                                      </p:cBhvr>
-                                    </p:animEffect>
-                                  </p:childTnLst>
-                                </p:cTn>
-                              </p:par>
-                            </p:childTnLst>
-                          </p:cTn>
-                        </p:par>
-                      </p:childTnLst>
-                    </p:cTn>
-                  </p:par>
-                </p:childTnLst>
-              </p:cTn>
-              <p:prevCondLst>
-                <p:cond evt="onPrev" delay="0">
-                  <p:tgtEl>
-                    <p:sldTgt/>
-                  </p:tgtEl>
-                </p:cond>
-              </p:prevCondLst>
-              <p:nextCondLst>
-                <p:cond evt="onNext" delay="0">
-                  <p:tgtEl>
-                    <p:sldTgt/>
-                  </p:tgtEl>
-                </p:cond>
-              </p:nextCondLst>
-            </p:seq>
-          </p:childTnLst>
-        </p:cTn>
-      </p:par>
-    </p:tnLst>
-  </p:timing>
-</p:sld>
-</file>
-
-<file path=ppt/slides/slide6.xml><?xml version="1.0" encoding="utf-8"?>
 <p:sld xmlns:a="http://schemas.openxmlformats.org/drawingml/2006/main" xmlns:r="http://schemas.openxmlformats.org/officeDocument/2006/relationships" xmlns:p="http://schemas.openxmlformats.org/presentationml/2006/main">
   <p:cSld name="Slide 6">
     <p:spTree>
@@ -15283,7 +9779,7 @@
           </a:prstGeom>
           <a:extLst>
             <a:ext uri="{C572A759-6A51-4108-AA02-DFA0A04FC94B}">
-              <ma14:wrappingTextBoxFlag xmlns:ma14="http://schemas.microsoft.com/office/mac/drawingml/2011/main" xmlns="" val="0"/>
+              <ma14:wrappingTextBoxFlag xmlns="" xmlns:ma14="http://schemas.microsoft.com/office/mac/drawingml/2011/main" val="0"/>
             </a:ext>
           </a:extLst>
         </p:spPr>
@@ -15302,7 +9798,7 @@
             <a:pPr algn="l"/>
             <a:fld id="{F7021451-1387-4CA6-816F-3879F97B5CBC}" type="slidenum">
               <a:rPr lang="en-US" b="0"/>
-              <a:t>6</a:t>
+              <a:t>5</a:t>
             </a:fld>
             <a:endParaRPr lang="en-US"/>
           </a:p>
@@ -15771,7 +10267,7 @@
 </p:sld>
 </file>
 
-<file path=ppt/slides/slide7.xml><?xml version="1.0" encoding="utf-8"?>
+<file path=ppt/slides/slide6.xml><?xml version="1.0" encoding="utf-8"?>
 <p:sld xmlns:a="http://schemas.openxmlformats.org/drawingml/2006/main" xmlns:r="http://schemas.openxmlformats.org/officeDocument/2006/relationships" xmlns:p="http://schemas.openxmlformats.org/presentationml/2006/main">
   <p:cSld name="Slide 7">
     <p:spTree>
@@ -16266,7 +10762,7 @@
           </a:prstGeom>
           <a:extLst>
             <a:ext uri="{C572A759-6A51-4108-AA02-DFA0A04FC94B}">
-              <ma14:wrappingTextBoxFlag xmlns:ma14="http://schemas.microsoft.com/office/mac/drawingml/2011/main" xmlns="" val="0"/>
+              <ma14:wrappingTextBoxFlag xmlns="" xmlns:ma14="http://schemas.microsoft.com/office/mac/drawingml/2011/main" val="0"/>
             </a:ext>
           </a:extLst>
         </p:spPr>
@@ -16285,7 +10781,7 @@
             <a:pPr algn="l"/>
             <a:fld id="{F7021451-1387-4CA6-816F-3879F97B5CBC}" type="slidenum">
               <a:rPr lang="en-US" b="0"/>
-              <a:t>7</a:t>
+              <a:t>6</a:t>
             </a:fld>
             <a:endParaRPr lang="en-US"/>
           </a:p>
@@ -16807,7 +11303,7 @@
 </p:sld>
 </file>
 
-<file path=ppt/slides/slide8.xml><?xml version="1.0" encoding="utf-8"?>
+<file path=ppt/slides/slide7.xml><?xml version="1.0" encoding="utf-8"?>
 <p:sld xmlns:a="http://schemas.openxmlformats.org/drawingml/2006/main" xmlns:r="http://schemas.openxmlformats.org/officeDocument/2006/relationships" xmlns:p="http://schemas.openxmlformats.org/presentationml/2006/main">
   <p:cSld name="Slide 8">
     <p:spTree>
@@ -17583,7 +12079,7 @@
           </a:prstGeom>
           <a:extLst>
             <a:ext uri="{C572A759-6A51-4108-AA02-DFA0A04FC94B}">
-              <ma14:wrappingTextBoxFlag xmlns:ma14="http://schemas.microsoft.com/office/mac/drawingml/2011/main" xmlns="" val="0"/>
+              <ma14:wrappingTextBoxFlag xmlns="" xmlns:ma14="http://schemas.microsoft.com/office/mac/drawingml/2011/main" val="0"/>
             </a:ext>
           </a:extLst>
         </p:spPr>
@@ -17602,7 +12098,7 @@
             <a:pPr algn="l"/>
             <a:fld id="{F7021451-1387-4CA6-816F-3879F97B5CBC}" type="slidenum">
               <a:rPr lang="en-US" b="0"/>
-              <a:t>8</a:t>
+              <a:t>7</a:t>
             </a:fld>
             <a:endParaRPr lang="en-US"/>
           </a:p>
@@ -18281,7 +12777,7 @@
 </p:sld>
 </file>
 
-<file path=ppt/slides/slide9.xml><?xml version="1.0" encoding="utf-8"?>
+<file path=ppt/slides/slide8.xml><?xml version="1.0" encoding="utf-8"?>
 <p:sld xmlns:a="http://schemas.openxmlformats.org/drawingml/2006/main" xmlns:r="http://schemas.openxmlformats.org/officeDocument/2006/relationships" xmlns:p="http://schemas.openxmlformats.org/presentationml/2006/main">
   <p:cSld name="Slide 9">
     <p:spTree>
@@ -18748,7 +13244,7 @@
           </a:prstGeom>
           <a:extLst>
             <a:ext uri="{C572A759-6A51-4108-AA02-DFA0A04FC94B}">
-              <ma14:wrappingTextBoxFlag xmlns:ma14="http://schemas.microsoft.com/office/mac/drawingml/2011/main" xmlns="" val="0"/>
+              <ma14:wrappingTextBoxFlag xmlns="" xmlns:ma14="http://schemas.microsoft.com/office/mac/drawingml/2011/main" val="0"/>
             </a:ext>
           </a:extLst>
         </p:spPr>
@@ -18767,7 +13263,7 @@
             <a:pPr algn="l"/>
             <a:fld id="{F7021451-1387-4CA6-816F-3879F97B5CBC}" type="slidenum">
               <a:rPr lang="en-US" b="0"/>
-              <a:t>9</a:t>
+              <a:t>8</a:t>
             </a:fld>
             <a:endParaRPr lang="en-US"/>
           </a:p>
@@ -19215,6 +13711,3069 @@
                                     <p:animEffect transition="in" filter="fade">
                                       <p:cBhvr>
                                         <p:cTn id="42" dur="500"/>
+                                        <p:tgtEl>
+                                          <p:spTgt spid="12"/>
+                                        </p:tgtEl>
+                                      </p:cBhvr>
+                                    </p:animEffect>
+                                  </p:childTnLst>
+                                </p:cTn>
+                              </p:par>
+                            </p:childTnLst>
+                          </p:cTn>
+                        </p:par>
+                      </p:childTnLst>
+                    </p:cTn>
+                  </p:par>
+                </p:childTnLst>
+              </p:cTn>
+              <p:prevCondLst>
+                <p:cond evt="onPrev" delay="0">
+                  <p:tgtEl>
+                    <p:sldTgt/>
+                  </p:tgtEl>
+                </p:cond>
+              </p:prevCondLst>
+              <p:nextCondLst>
+                <p:cond evt="onNext" delay="0">
+                  <p:tgtEl>
+                    <p:sldTgt/>
+                  </p:tgtEl>
+                </p:cond>
+              </p:nextCondLst>
+            </p:seq>
+          </p:childTnLst>
+        </p:cTn>
+      </p:par>
+    </p:tnLst>
+  </p:timing>
+</p:sld>
+</file>
+
+<file path=ppt/slides/slide9.xml><?xml version="1.0" encoding="utf-8"?>
+<p:sld xmlns:a="http://schemas.openxmlformats.org/drawingml/2006/main" xmlns:r="http://schemas.openxmlformats.org/officeDocument/2006/relationships" xmlns:p="http://schemas.openxmlformats.org/presentationml/2006/main">
+  <p:cSld name="Slide 10">
+    <p:spTree>
+      <p:nvGrpSpPr>
+        <p:cNvPr id="1" name=""/>
+        <p:cNvGrpSpPr/>
+        <p:nvPr/>
+      </p:nvGrpSpPr>
+      <p:grpSpPr>
+        <a:xfrm>
+          <a:off x="0" y="0"/>
+          <a:ext cx="0" cy="0"/>
+          <a:chOff x="0" y="0"/>
+          <a:chExt cx="0" cy="0"/>
+        </a:xfrm>
+      </p:grpSpPr>
+      <p:sp>
+        <p:nvSpPr>
+          <p:cNvPr id="2" name="Text 0"/>
+          <p:cNvSpPr>
+            <a:spLocks noGrp="1"/>
+          </p:cNvSpPr>
+          <p:nvPr>
+            <p:ph type="title" idx="100" hasCustomPrompt="1"/>
+          </p:nvPr>
+        </p:nvSpPr>
+        <p:spPr>
+          <a:xfrm>
+            <a:off x="457200" y="274320"/>
+            <a:ext cx="8229600" cy="731520"/>
+          </a:xfrm>
+          <a:prstGeom prst="rect">
+            <a:avLst/>
+          </a:prstGeom>
+          <a:noFill/>
+          <a:ln/>
+        </p:spPr>
+        <p:txBody>
+          <a:bodyPr wrap="square" lIns="0" tIns="0" rIns="0" bIns="0" rtlCol="0" anchor="ctr"/>
+          <a:lstStyle/>
+          <a:p>
+            <a:pPr marL="0" indent="0" algn="l">
+              <a:buNone/>
+            </a:pPr>
+            <a:r>
+              <a:rPr lang="en-US" sz="3400" b="1" dirty="0">
+                <a:solidFill>
+                  <a:schemeClr val="tx1"/>
+                </a:solidFill>
+                <a:latin typeface="Cambria" pitchFamily="34" charset="0"/>
+                <a:ea typeface="Cambria" pitchFamily="34" charset="-122"/>
+                <a:cs typeface="Cambria" pitchFamily="34" charset="-120"/>
+              </a:rPr>
+              <a:t>Discount chart: the numbers</a:t>
+            </a:r>
+            <a:endParaRPr lang="en-US" sz="3400" dirty="0"/>
+          </a:p>
+        </p:txBody>
+      </p:sp>
+      <p:graphicFrame>
+        <p:nvGraphicFramePr>
+          <p:cNvPr id="11" name="g1_table"/>
+          <p:cNvGraphicFramePr>
+            <a:graphicFrameLocks noGrp="1"/>
+          </p:cNvGraphicFramePr>
+          <p:nvPr>
+            <p:extLst>
+              <p:ext uri="{D42A27DB-BD31-4B8C-83A1-F6EECF244321}">
+                <p14:modId xmlns:p14="http://schemas.microsoft.com/office/powerpoint/2010/main" val="1579011935"/>
+              </p:ext>
+            </p:extLst>
+          </p:nvPr>
+        </p:nvGraphicFramePr>
+        <p:xfrm>
+          <a:off x="457200" y="1143000"/>
+          <a:ext cx="4023360" cy="3291840"/>
+        </p:xfrm>
+        <a:graphic>
+          <a:graphicData uri="http://schemas.openxmlformats.org/drawingml/2006/table">
+            <a:tbl>
+              <a:tblPr/>
+              <a:tblGrid>
+                <a:gridCol w="1188720">
+                  <a:extLst>
+                    <a:ext uri="{9D8B030D-6E8A-4147-A177-3AD203B41FA5}">
+                      <a16:colId xmlns:a16="http://schemas.microsoft.com/office/drawing/2014/main" val="20000"/>
+                    </a:ext>
+                  </a:extLst>
+                </a:gridCol>
+                <a:gridCol w="1554480">
+                  <a:extLst>
+                    <a:ext uri="{9D8B030D-6E8A-4147-A177-3AD203B41FA5}">
+                      <a16:colId xmlns:a16="http://schemas.microsoft.com/office/drawing/2014/main" val="20001"/>
+                    </a:ext>
+                  </a:extLst>
+                </a:gridCol>
+                <a:gridCol w="1280160">
+                  <a:extLst>
+                    <a:ext uri="{9D8B030D-6E8A-4147-A177-3AD203B41FA5}">
+                      <a16:colId xmlns:a16="http://schemas.microsoft.com/office/drawing/2014/main" val="20002"/>
+                    </a:ext>
+                  </a:extLst>
+                </a:gridCol>
+              </a:tblGrid>
+              <a:tr h="329184">
+                <a:tc>
+                  <a:txBody>
+                    <a:bodyPr/>
+                    <a:lstStyle/>
+                    <a:p>
+                      <a:pPr marL="0" indent="0" algn="l">
+                        <a:buNone/>
+                      </a:pPr>
+                      <a:r>
+                        <a:rPr lang="en-US" sz="1400" b="1" dirty="0">
+                          <a:solidFill>
+                            <a:srgbClr val="FFFFFF"/>
+                          </a:solidFill>
+                          <a:latin typeface="+mn-lt" pitchFamily="34" charset="0"/>
+                          <a:ea typeface="+mn-lt" pitchFamily="34" charset="-122"/>
+                          <a:cs typeface="+mn-lt" pitchFamily="34" charset="-120"/>
+                        </a:rPr>
+                        <a:t>Discount</a:t>
+                      </a:r>
+                      <a:endParaRPr lang="en-US" sz="1400" dirty="0">
+                        <a:latin typeface="+mn-lt" charset="0"/>
+                        <a:ea typeface="+mn-lt" charset="0"/>
+                        <a:cs typeface="+mn-lt" charset="0"/>
+                      </a:endParaRPr>
+                    </a:p>
+                  </a:txBody>
+                  <a:tcPr anchor="ctr">
+                    <a:lnL w="9525" cap="flat" cmpd="sng" algn="ctr">
+                      <a:solidFill>
+                        <a:srgbClr val="D5E3E0"/>
+                      </a:solidFill>
+                      <a:prstDash val="solid"/>
+                      <a:round/>
+                      <a:headEnd type="none" w="med" len="med"/>
+                      <a:tailEnd type="none" w="med" len="med"/>
+                    </a:lnL>
+                    <a:lnR w="9525" cap="flat" cmpd="sng" algn="ctr">
+                      <a:solidFill>
+                        <a:srgbClr val="D5E3E0"/>
+                      </a:solidFill>
+                      <a:prstDash val="solid"/>
+                      <a:round/>
+                      <a:headEnd type="none" w="med" len="med"/>
+                      <a:tailEnd type="none" w="med" len="med"/>
+                    </a:lnR>
+                    <a:lnT w="9525" cap="flat" cmpd="sng" algn="ctr">
+                      <a:solidFill>
+                        <a:srgbClr val="D5E3E0"/>
+                      </a:solidFill>
+                      <a:prstDash val="solid"/>
+                      <a:round/>
+                      <a:headEnd type="none" w="med" len="med"/>
+                      <a:tailEnd type="none" w="med" len="med"/>
+                    </a:lnT>
+                    <a:lnB w="9525" cap="flat" cmpd="sng" algn="ctr">
+                      <a:solidFill>
+                        <a:srgbClr val="D5E3E0"/>
+                      </a:solidFill>
+                      <a:prstDash val="solid"/>
+                      <a:round/>
+                      <a:headEnd type="none" w="med" len="med"/>
+                      <a:tailEnd type="none" w="med" len="med"/>
+                    </a:lnB>
+                    <a:solidFill>
+                      <a:srgbClr val="0F766E"/>
+                    </a:solidFill>
+                  </a:tcPr>
+                </a:tc>
+                <a:tc>
+                  <a:txBody>
+                    <a:bodyPr/>
+                    <a:lstStyle/>
+                    <a:p>
+                      <a:pPr marL="0" indent="0" algn="l">
+                        <a:buNone/>
+                      </a:pPr>
+                      <a:r>
+                        <a:rPr lang="en-US" sz="1400" b="1" dirty="0">
+                          <a:solidFill>
+                            <a:srgbClr val="FFFFFF"/>
+                          </a:solidFill>
+                          <a:latin typeface="+mn-lt" pitchFamily="34" charset="0"/>
+                          <a:ea typeface="+mn-lt" pitchFamily="34" charset="-122"/>
+                          <a:cs typeface="+mn-lt" pitchFamily="34" charset="-120"/>
+                        </a:rPr>
+                        <a:t>Profit</a:t>
+                      </a:r>
+                      <a:endParaRPr lang="en-US" sz="1400" dirty="0">
+                        <a:latin typeface="+mn-lt" charset="0"/>
+                        <a:ea typeface="+mn-lt" charset="0"/>
+                        <a:cs typeface="+mn-lt" charset="0"/>
+                      </a:endParaRPr>
+                    </a:p>
+                  </a:txBody>
+                  <a:tcPr anchor="ctr">
+                    <a:lnL w="9525" cap="flat" cmpd="sng" algn="ctr">
+                      <a:solidFill>
+                        <a:srgbClr val="D5E3E0"/>
+                      </a:solidFill>
+                      <a:prstDash val="solid"/>
+                      <a:round/>
+                      <a:headEnd type="none" w="med" len="med"/>
+                      <a:tailEnd type="none" w="med" len="med"/>
+                    </a:lnL>
+                    <a:lnR w="9525" cap="flat" cmpd="sng" algn="ctr">
+                      <a:solidFill>
+                        <a:srgbClr val="D5E3E0"/>
+                      </a:solidFill>
+                      <a:prstDash val="solid"/>
+                      <a:round/>
+                      <a:headEnd type="none" w="med" len="med"/>
+                      <a:tailEnd type="none" w="med" len="med"/>
+                    </a:lnR>
+                    <a:lnT w="9525" cap="flat" cmpd="sng" algn="ctr">
+                      <a:solidFill>
+                        <a:srgbClr val="D5E3E0"/>
+                      </a:solidFill>
+                      <a:prstDash val="solid"/>
+                      <a:round/>
+                      <a:headEnd type="none" w="med" len="med"/>
+                      <a:tailEnd type="none" w="med" len="med"/>
+                    </a:lnT>
+                    <a:lnB w="9525" cap="flat" cmpd="sng" algn="ctr">
+                      <a:solidFill>
+                        <a:srgbClr val="D5E3E0"/>
+                      </a:solidFill>
+                      <a:prstDash val="solid"/>
+                      <a:round/>
+                      <a:headEnd type="none" w="med" len="med"/>
+                      <a:tailEnd type="none" w="med" len="med"/>
+                    </a:lnB>
+                    <a:solidFill>
+                      <a:srgbClr val="0F766E"/>
+                    </a:solidFill>
+                  </a:tcPr>
+                </a:tc>
+                <a:tc>
+                  <a:txBody>
+                    <a:bodyPr/>
+                    <a:lstStyle/>
+                    <a:p>
+                      <a:pPr marL="0" indent="0" algn="l">
+                        <a:buNone/>
+                      </a:pPr>
+                      <a:r>
+                        <a:rPr lang="en-US" sz="1400" b="1" dirty="0">
+                          <a:solidFill>
+                            <a:srgbClr val="FFFFFF"/>
+                          </a:solidFill>
+                          <a:latin typeface="+mn-lt" pitchFamily="34" charset="0"/>
+                          <a:ea typeface="+mn-lt" pitchFamily="34" charset="-122"/>
+                          <a:cs typeface="+mn-lt" pitchFamily="34" charset="-120"/>
+                        </a:rPr>
+                        <a:t>Result</a:t>
+                      </a:r>
+                      <a:endParaRPr lang="en-US" sz="1400" dirty="0">
+                        <a:latin typeface="+mn-lt" charset="0"/>
+                        <a:ea typeface="+mn-lt" charset="0"/>
+                        <a:cs typeface="+mn-lt" charset="0"/>
+                      </a:endParaRPr>
+                    </a:p>
+                  </a:txBody>
+                  <a:tcPr anchor="ctr">
+                    <a:lnL w="9525" cap="flat" cmpd="sng" algn="ctr">
+                      <a:solidFill>
+                        <a:srgbClr val="D5E3E0"/>
+                      </a:solidFill>
+                      <a:prstDash val="solid"/>
+                      <a:round/>
+                      <a:headEnd type="none" w="med" len="med"/>
+                      <a:tailEnd type="none" w="med" len="med"/>
+                    </a:lnL>
+                    <a:lnR w="9525" cap="flat" cmpd="sng" algn="ctr">
+                      <a:solidFill>
+                        <a:srgbClr val="D5E3E0"/>
+                      </a:solidFill>
+                      <a:prstDash val="solid"/>
+                      <a:round/>
+                      <a:headEnd type="none" w="med" len="med"/>
+                      <a:tailEnd type="none" w="med" len="med"/>
+                    </a:lnR>
+                    <a:lnT w="9525" cap="flat" cmpd="sng" algn="ctr">
+                      <a:solidFill>
+                        <a:srgbClr val="D5E3E0"/>
+                      </a:solidFill>
+                      <a:prstDash val="solid"/>
+                      <a:round/>
+                      <a:headEnd type="none" w="med" len="med"/>
+                      <a:tailEnd type="none" w="med" len="med"/>
+                    </a:lnT>
+                    <a:lnB w="9525" cap="flat" cmpd="sng" algn="ctr">
+                      <a:solidFill>
+                        <a:srgbClr val="D5E3E0"/>
+                      </a:solidFill>
+                      <a:prstDash val="solid"/>
+                      <a:round/>
+                      <a:headEnd type="none" w="med" len="med"/>
+                      <a:tailEnd type="none" w="med" len="med"/>
+                    </a:lnB>
+                    <a:solidFill>
+                      <a:srgbClr val="0F766E"/>
+                    </a:solidFill>
+                  </a:tcPr>
+                </a:tc>
+                <a:extLst>
+                  <a:ext uri="{0D108BD9-81ED-4DB2-BD59-A6C34878D82A}">
+                    <a16:rowId xmlns:a16="http://schemas.microsoft.com/office/drawing/2014/main" val="10000"/>
+                  </a:ext>
+                </a:extLst>
+              </a:tr>
+              <a:tr h="329184">
+                <a:tc>
+                  <a:txBody>
+                    <a:bodyPr/>
+                    <a:lstStyle/>
+                    <a:p>
+                      <a:pPr marL="0" indent="0" algn="l">
+                        <a:buNone/>
+                      </a:pPr>
+                      <a:r>
+                        <a:rPr lang="en-US" sz="1400" dirty="0">
+                          <a:solidFill>
+                            <a:srgbClr val="10222B"/>
+                          </a:solidFill>
+                          <a:latin typeface="+mn-lt" pitchFamily="34" charset="0"/>
+                          <a:ea typeface="+mn-lt" pitchFamily="34" charset="-122"/>
+                          <a:cs typeface="+mn-lt" pitchFamily="34" charset="-120"/>
+                        </a:rPr>
+                        <a:t>0%</a:t>
+                      </a:r>
+                      <a:endParaRPr lang="en-US" sz="1400" dirty="0">
+                        <a:latin typeface="+mn-lt" charset="0"/>
+                        <a:ea typeface="+mn-lt" charset="0"/>
+                        <a:cs typeface="+mn-lt" charset="0"/>
+                      </a:endParaRPr>
+                    </a:p>
+                  </a:txBody>
+                  <a:tcPr anchor="ctr">
+                    <a:lnL w="9525" cap="flat" cmpd="sng" algn="ctr">
+                      <a:solidFill>
+                        <a:srgbClr val="D5E3E0"/>
+                      </a:solidFill>
+                      <a:prstDash val="solid"/>
+                      <a:round/>
+                      <a:headEnd type="none" w="med" len="med"/>
+                      <a:tailEnd type="none" w="med" len="med"/>
+                    </a:lnL>
+                    <a:lnR w="9525" cap="flat" cmpd="sng" algn="ctr">
+                      <a:solidFill>
+                        <a:srgbClr val="D5E3E0"/>
+                      </a:solidFill>
+                      <a:prstDash val="solid"/>
+                      <a:round/>
+                      <a:headEnd type="none" w="med" len="med"/>
+                      <a:tailEnd type="none" w="med" len="med"/>
+                    </a:lnR>
+                    <a:lnT w="9525" cap="flat" cmpd="sng" algn="ctr">
+                      <a:solidFill>
+                        <a:srgbClr val="D5E3E0"/>
+                      </a:solidFill>
+                      <a:prstDash val="solid"/>
+                      <a:round/>
+                      <a:headEnd type="none" w="med" len="med"/>
+                      <a:tailEnd type="none" w="med" len="med"/>
+                    </a:lnT>
+                    <a:lnB w="9525" cap="flat" cmpd="sng" algn="ctr">
+                      <a:solidFill>
+                        <a:srgbClr val="D5E3E0"/>
+                      </a:solidFill>
+                      <a:prstDash val="solid"/>
+                      <a:round/>
+                      <a:headEnd type="none" w="med" len="med"/>
+                      <a:tailEnd type="none" w="med" len="med"/>
+                    </a:lnB>
+                    <a:solidFill>
+                      <a:srgbClr val="FFFFFF"/>
+                    </a:solidFill>
+                  </a:tcPr>
+                </a:tc>
+                <a:tc>
+                  <a:txBody>
+                    <a:bodyPr/>
+                    <a:lstStyle/>
+                    <a:p>
+                      <a:pPr marL="0" indent="0" algn="l">
+                        <a:buNone/>
+                      </a:pPr>
+                      <a:r>
+                        <a:rPr lang="en-US" sz="1400" b="1" dirty="0">
+                          <a:solidFill>
+                            <a:srgbClr val="16A34A"/>
+                          </a:solidFill>
+                          <a:latin typeface="+mn-lt" pitchFamily="34" charset="0"/>
+                          <a:ea typeface="+mn-lt" pitchFamily="34" charset="-122"/>
+                          <a:cs typeface="+mn-lt" pitchFamily="34" charset="-120"/>
+                        </a:rPr>
+                        <a:t>$617.55</a:t>
+                      </a:r>
+                      <a:endParaRPr lang="en-US" sz="1400" dirty="0">
+                        <a:latin typeface="+mn-lt" charset="0"/>
+                        <a:ea typeface="+mn-lt" charset="0"/>
+                        <a:cs typeface="+mn-lt" charset="0"/>
+                      </a:endParaRPr>
+                    </a:p>
+                  </a:txBody>
+                  <a:tcPr anchor="ctr">
+                    <a:lnL w="9525" cap="flat" cmpd="sng" algn="ctr">
+                      <a:solidFill>
+                        <a:srgbClr val="D5E3E0"/>
+                      </a:solidFill>
+                      <a:prstDash val="solid"/>
+                      <a:round/>
+                      <a:headEnd type="none" w="med" len="med"/>
+                      <a:tailEnd type="none" w="med" len="med"/>
+                    </a:lnL>
+                    <a:lnR w="9525" cap="flat" cmpd="sng" algn="ctr">
+                      <a:solidFill>
+                        <a:srgbClr val="D5E3E0"/>
+                      </a:solidFill>
+                      <a:prstDash val="solid"/>
+                      <a:round/>
+                      <a:headEnd type="none" w="med" len="med"/>
+                      <a:tailEnd type="none" w="med" len="med"/>
+                    </a:lnR>
+                    <a:lnT w="9525" cap="flat" cmpd="sng" algn="ctr">
+                      <a:solidFill>
+                        <a:srgbClr val="D5E3E0"/>
+                      </a:solidFill>
+                      <a:prstDash val="solid"/>
+                      <a:round/>
+                      <a:headEnd type="none" w="med" len="med"/>
+                      <a:tailEnd type="none" w="med" len="med"/>
+                    </a:lnT>
+                    <a:lnB w="9525" cap="flat" cmpd="sng" algn="ctr">
+                      <a:solidFill>
+                        <a:srgbClr val="D5E3E0"/>
+                      </a:solidFill>
+                      <a:prstDash val="solid"/>
+                      <a:round/>
+                      <a:headEnd type="none" w="med" len="med"/>
+                      <a:tailEnd type="none" w="med" len="med"/>
+                    </a:lnB>
+                    <a:solidFill>
+                      <a:srgbClr val="FFFFFF"/>
+                    </a:solidFill>
+                  </a:tcPr>
+                </a:tc>
+                <a:tc>
+                  <a:txBody>
+                    <a:bodyPr/>
+                    <a:lstStyle/>
+                    <a:p>
+                      <a:pPr marL="0" indent="0" algn="l">
+                        <a:buNone/>
+                      </a:pPr>
+                      <a:r>
+                        <a:rPr lang="en-US" sz="1400" dirty="0">
+                          <a:solidFill>
+                            <a:srgbClr val="16A34A"/>
+                          </a:solidFill>
+                          <a:latin typeface="+mn-lt" pitchFamily="34" charset="0"/>
+                          <a:ea typeface="+mn-lt" pitchFamily="34" charset="-122"/>
+                          <a:cs typeface="+mn-lt" pitchFamily="34" charset="-120"/>
+                        </a:rPr>
+                        <a:t>Profit</a:t>
+                      </a:r>
+                      <a:endParaRPr lang="en-US" sz="1400" dirty="0">
+                        <a:latin typeface="+mn-lt" charset="0"/>
+                        <a:ea typeface="+mn-lt" charset="0"/>
+                        <a:cs typeface="+mn-lt" charset="0"/>
+                      </a:endParaRPr>
+                    </a:p>
+                  </a:txBody>
+                  <a:tcPr anchor="ctr">
+                    <a:lnL w="9525" cap="flat" cmpd="sng" algn="ctr">
+                      <a:solidFill>
+                        <a:srgbClr val="D5E3E0"/>
+                      </a:solidFill>
+                      <a:prstDash val="solid"/>
+                      <a:round/>
+                      <a:headEnd type="none" w="med" len="med"/>
+                      <a:tailEnd type="none" w="med" len="med"/>
+                    </a:lnL>
+                    <a:lnR w="9525" cap="flat" cmpd="sng" algn="ctr">
+                      <a:solidFill>
+                        <a:srgbClr val="D5E3E0"/>
+                      </a:solidFill>
+                      <a:prstDash val="solid"/>
+                      <a:round/>
+                      <a:headEnd type="none" w="med" len="med"/>
+                      <a:tailEnd type="none" w="med" len="med"/>
+                    </a:lnR>
+                    <a:lnT w="9525" cap="flat" cmpd="sng" algn="ctr">
+                      <a:solidFill>
+                        <a:srgbClr val="D5E3E0"/>
+                      </a:solidFill>
+                      <a:prstDash val="solid"/>
+                      <a:round/>
+                      <a:headEnd type="none" w="med" len="med"/>
+                      <a:tailEnd type="none" w="med" len="med"/>
+                    </a:lnT>
+                    <a:lnB w="9525" cap="flat" cmpd="sng" algn="ctr">
+                      <a:solidFill>
+                        <a:srgbClr val="D5E3E0"/>
+                      </a:solidFill>
+                      <a:prstDash val="solid"/>
+                      <a:round/>
+                      <a:headEnd type="none" w="med" len="med"/>
+                      <a:tailEnd type="none" w="med" len="med"/>
+                    </a:lnB>
+                    <a:solidFill>
+                      <a:srgbClr val="FFFFFF"/>
+                    </a:solidFill>
+                  </a:tcPr>
+                </a:tc>
+                <a:extLst>
+                  <a:ext uri="{0D108BD9-81ED-4DB2-BD59-A6C34878D82A}">
+                    <a16:rowId xmlns:a16="http://schemas.microsoft.com/office/drawing/2014/main" val="10001"/>
+                  </a:ext>
+                </a:extLst>
+              </a:tr>
+              <a:tr h="329184">
+                <a:tc>
+                  <a:txBody>
+                    <a:bodyPr/>
+                    <a:lstStyle/>
+                    <a:p>
+                      <a:pPr marL="0" indent="0" algn="l">
+                        <a:buNone/>
+                      </a:pPr>
+                      <a:r>
+                        <a:rPr lang="en-US" sz="1400" dirty="0">
+                          <a:solidFill>
+                            <a:srgbClr val="10222B"/>
+                          </a:solidFill>
+                          <a:latin typeface="+mn-lt" pitchFamily="34" charset="0"/>
+                          <a:ea typeface="+mn-lt" pitchFamily="34" charset="-122"/>
+                          <a:cs typeface="+mn-lt" pitchFamily="34" charset="-120"/>
+                        </a:rPr>
+                        <a:t>20%</a:t>
+                      </a:r>
+                      <a:endParaRPr lang="en-US" sz="1400" dirty="0">
+                        <a:latin typeface="+mn-lt" charset="0"/>
+                        <a:ea typeface="+mn-lt" charset="0"/>
+                        <a:cs typeface="+mn-lt" charset="0"/>
+                      </a:endParaRPr>
+                    </a:p>
+                  </a:txBody>
+                  <a:tcPr anchor="ctr">
+                    <a:lnL w="9525" cap="flat" cmpd="sng" algn="ctr">
+                      <a:solidFill>
+                        <a:srgbClr val="D5E3E0"/>
+                      </a:solidFill>
+                      <a:prstDash val="solid"/>
+                      <a:round/>
+                      <a:headEnd type="none" w="med" len="med"/>
+                      <a:tailEnd type="none" w="med" len="med"/>
+                    </a:lnL>
+                    <a:lnR w="9525" cap="flat" cmpd="sng" algn="ctr">
+                      <a:solidFill>
+                        <a:srgbClr val="D5E3E0"/>
+                      </a:solidFill>
+                      <a:prstDash val="solid"/>
+                      <a:round/>
+                      <a:headEnd type="none" w="med" len="med"/>
+                      <a:tailEnd type="none" w="med" len="med"/>
+                    </a:lnR>
+                    <a:lnT w="9525" cap="flat" cmpd="sng" algn="ctr">
+                      <a:solidFill>
+                        <a:srgbClr val="D5E3E0"/>
+                      </a:solidFill>
+                      <a:prstDash val="solid"/>
+                      <a:round/>
+                      <a:headEnd type="none" w="med" len="med"/>
+                      <a:tailEnd type="none" w="med" len="med"/>
+                    </a:lnT>
+                    <a:lnB w="9525" cap="flat" cmpd="sng" algn="ctr">
+                      <a:solidFill>
+                        <a:srgbClr val="D5E3E0"/>
+                      </a:solidFill>
+                      <a:prstDash val="solid"/>
+                      <a:round/>
+                      <a:headEnd type="none" w="med" len="med"/>
+                      <a:tailEnd type="none" w="med" len="med"/>
+                    </a:lnB>
+                    <a:solidFill>
+                      <a:srgbClr val="EAF2F1"/>
+                    </a:solidFill>
+                  </a:tcPr>
+                </a:tc>
+                <a:tc>
+                  <a:txBody>
+                    <a:bodyPr/>
+                    <a:lstStyle/>
+                    <a:p>
+                      <a:pPr marL="0" indent="0" algn="l">
+                        <a:buNone/>
+                      </a:pPr>
+                      <a:r>
+                        <a:rPr lang="en-US" sz="1400" b="1" dirty="0">
+                          <a:solidFill>
+                            <a:srgbClr val="16A34A"/>
+                          </a:solidFill>
+                          <a:latin typeface="+mn-lt" pitchFamily="34" charset="0"/>
+                          <a:ea typeface="+mn-lt" pitchFamily="34" charset="-122"/>
+                          <a:cs typeface="+mn-lt" pitchFamily="34" charset="-120"/>
+                        </a:rPr>
+                        <a:t>$617.05</a:t>
+                      </a:r>
+                      <a:endParaRPr lang="en-US" sz="1400" dirty="0">
+                        <a:latin typeface="+mn-lt" charset="0"/>
+                        <a:ea typeface="+mn-lt" charset="0"/>
+                        <a:cs typeface="+mn-lt" charset="0"/>
+                      </a:endParaRPr>
+                    </a:p>
+                  </a:txBody>
+                  <a:tcPr anchor="ctr">
+                    <a:lnL w="9525" cap="flat" cmpd="sng" algn="ctr">
+                      <a:solidFill>
+                        <a:srgbClr val="D5E3E0"/>
+                      </a:solidFill>
+                      <a:prstDash val="solid"/>
+                      <a:round/>
+                      <a:headEnd type="none" w="med" len="med"/>
+                      <a:tailEnd type="none" w="med" len="med"/>
+                    </a:lnL>
+                    <a:lnR w="9525" cap="flat" cmpd="sng" algn="ctr">
+                      <a:solidFill>
+                        <a:srgbClr val="D5E3E0"/>
+                      </a:solidFill>
+                      <a:prstDash val="solid"/>
+                      <a:round/>
+                      <a:headEnd type="none" w="med" len="med"/>
+                      <a:tailEnd type="none" w="med" len="med"/>
+                    </a:lnR>
+                    <a:lnT w="9525" cap="flat" cmpd="sng" algn="ctr">
+                      <a:solidFill>
+                        <a:srgbClr val="D5E3E0"/>
+                      </a:solidFill>
+                      <a:prstDash val="solid"/>
+                      <a:round/>
+                      <a:headEnd type="none" w="med" len="med"/>
+                      <a:tailEnd type="none" w="med" len="med"/>
+                    </a:lnT>
+                    <a:lnB w="9525" cap="flat" cmpd="sng" algn="ctr">
+                      <a:solidFill>
+                        <a:srgbClr val="D5E3E0"/>
+                      </a:solidFill>
+                      <a:prstDash val="solid"/>
+                      <a:round/>
+                      <a:headEnd type="none" w="med" len="med"/>
+                      <a:tailEnd type="none" w="med" len="med"/>
+                    </a:lnB>
+                    <a:solidFill>
+                      <a:srgbClr val="EAF2F1"/>
+                    </a:solidFill>
+                  </a:tcPr>
+                </a:tc>
+                <a:tc>
+                  <a:txBody>
+                    <a:bodyPr/>
+                    <a:lstStyle/>
+                    <a:p>
+                      <a:pPr marL="0" indent="0" algn="l">
+                        <a:buNone/>
+                      </a:pPr>
+                      <a:r>
+                        <a:rPr lang="en-US" sz="1400" dirty="0">
+                          <a:solidFill>
+                            <a:srgbClr val="16A34A"/>
+                          </a:solidFill>
+                          <a:latin typeface="+mn-lt" pitchFamily="34" charset="0"/>
+                          <a:ea typeface="+mn-lt" pitchFamily="34" charset="-122"/>
+                          <a:cs typeface="+mn-lt" pitchFamily="34" charset="-120"/>
+                        </a:rPr>
+                        <a:t>Profit</a:t>
+                      </a:r>
+                      <a:endParaRPr lang="en-US" sz="1400" dirty="0">
+                        <a:latin typeface="+mn-lt" charset="0"/>
+                        <a:ea typeface="+mn-lt" charset="0"/>
+                        <a:cs typeface="+mn-lt" charset="0"/>
+                      </a:endParaRPr>
+                    </a:p>
+                  </a:txBody>
+                  <a:tcPr anchor="ctr">
+                    <a:lnL w="9525" cap="flat" cmpd="sng" algn="ctr">
+                      <a:solidFill>
+                        <a:srgbClr val="D5E3E0"/>
+                      </a:solidFill>
+                      <a:prstDash val="solid"/>
+                      <a:round/>
+                      <a:headEnd type="none" w="med" len="med"/>
+                      <a:tailEnd type="none" w="med" len="med"/>
+                    </a:lnL>
+                    <a:lnR w="9525" cap="flat" cmpd="sng" algn="ctr">
+                      <a:solidFill>
+                        <a:srgbClr val="D5E3E0"/>
+                      </a:solidFill>
+                      <a:prstDash val="solid"/>
+                      <a:round/>
+                      <a:headEnd type="none" w="med" len="med"/>
+                      <a:tailEnd type="none" w="med" len="med"/>
+                    </a:lnR>
+                    <a:lnT w="9525" cap="flat" cmpd="sng" algn="ctr">
+                      <a:solidFill>
+                        <a:srgbClr val="D5E3E0"/>
+                      </a:solidFill>
+                      <a:prstDash val="solid"/>
+                      <a:round/>
+                      <a:headEnd type="none" w="med" len="med"/>
+                      <a:tailEnd type="none" w="med" len="med"/>
+                    </a:lnT>
+                    <a:lnB w="9525" cap="flat" cmpd="sng" algn="ctr">
+                      <a:solidFill>
+                        <a:srgbClr val="D5E3E0"/>
+                      </a:solidFill>
+                      <a:prstDash val="solid"/>
+                      <a:round/>
+                      <a:headEnd type="none" w="med" len="med"/>
+                      <a:tailEnd type="none" w="med" len="med"/>
+                    </a:lnB>
+                    <a:solidFill>
+                      <a:srgbClr val="EAF2F1"/>
+                    </a:solidFill>
+                  </a:tcPr>
+                </a:tc>
+                <a:extLst>
+                  <a:ext uri="{0D108BD9-81ED-4DB2-BD59-A6C34878D82A}">
+                    <a16:rowId xmlns:a16="http://schemas.microsoft.com/office/drawing/2014/main" val="10002"/>
+                  </a:ext>
+                </a:extLst>
+              </a:tr>
+              <a:tr h="329184">
+                <a:tc>
+                  <a:txBody>
+                    <a:bodyPr/>
+                    <a:lstStyle/>
+                    <a:p>
+                      <a:pPr marL="0" indent="0" algn="l">
+                        <a:buNone/>
+                      </a:pPr>
+                      <a:r>
+                        <a:rPr lang="en-US" sz="1400" dirty="0">
+                          <a:solidFill>
+                            <a:srgbClr val="10222B"/>
+                          </a:solidFill>
+                          <a:latin typeface="+mn-lt" pitchFamily="34" charset="0"/>
+                          <a:ea typeface="+mn-lt" pitchFamily="34" charset="-122"/>
+                          <a:cs typeface="+mn-lt" pitchFamily="34" charset="-120"/>
+                        </a:rPr>
+                        <a:t>30%</a:t>
+                      </a:r>
+                      <a:endParaRPr lang="en-US" sz="1400" dirty="0">
+                        <a:latin typeface="+mn-lt" charset="0"/>
+                        <a:ea typeface="+mn-lt" charset="0"/>
+                        <a:cs typeface="+mn-lt" charset="0"/>
+                      </a:endParaRPr>
+                    </a:p>
+                  </a:txBody>
+                  <a:tcPr anchor="ctr">
+                    <a:lnL w="9525" cap="flat" cmpd="sng" algn="ctr">
+                      <a:solidFill>
+                        <a:srgbClr val="D5E3E0"/>
+                      </a:solidFill>
+                      <a:prstDash val="solid"/>
+                      <a:round/>
+                      <a:headEnd type="none" w="med" len="med"/>
+                      <a:tailEnd type="none" w="med" len="med"/>
+                    </a:lnL>
+                    <a:lnR w="9525" cap="flat" cmpd="sng" algn="ctr">
+                      <a:solidFill>
+                        <a:srgbClr val="D5E3E0"/>
+                      </a:solidFill>
+                      <a:prstDash val="solid"/>
+                      <a:round/>
+                      <a:headEnd type="none" w="med" len="med"/>
+                      <a:tailEnd type="none" w="med" len="med"/>
+                    </a:lnR>
+                    <a:lnT w="9525" cap="flat" cmpd="sng" algn="ctr">
+                      <a:solidFill>
+                        <a:srgbClr val="D5E3E0"/>
+                      </a:solidFill>
+                      <a:prstDash val="solid"/>
+                      <a:round/>
+                      <a:headEnd type="none" w="med" len="med"/>
+                      <a:tailEnd type="none" w="med" len="med"/>
+                    </a:lnT>
+                    <a:lnB w="9525" cap="flat" cmpd="sng" algn="ctr">
+                      <a:solidFill>
+                        <a:srgbClr val="D5E3E0"/>
+                      </a:solidFill>
+                      <a:prstDash val="solid"/>
+                      <a:round/>
+                      <a:headEnd type="none" w="med" len="med"/>
+                      <a:tailEnd type="none" w="med" len="med"/>
+                    </a:lnB>
+                    <a:solidFill>
+                      <a:srgbClr val="FFFFFF"/>
+                    </a:solidFill>
+                  </a:tcPr>
+                </a:tc>
+                <a:tc>
+                  <a:txBody>
+                    <a:bodyPr/>
+                    <a:lstStyle/>
+                    <a:p>
+                      <a:pPr marL="0" indent="0" algn="l">
+                        <a:buNone/>
+                      </a:pPr>
+                      <a:r>
+                        <a:rPr lang="en-US" sz="1400" b="1" dirty="0">
+                          <a:solidFill>
+                            <a:srgbClr val="DC2626"/>
+                          </a:solidFill>
+                          <a:latin typeface="+mn-lt" pitchFamily="34" charset="0"/>
+                          <a:ea typeface="+mn-lt" pitchFamily="34" charset="-122"/>
+                          <a:cs typeface="+mn-lt" pitchFamily="34" charset="-120"/>
+                        </a:rPr>
+                        <a:t>−$16.17</a:t>
+                      </a:r>
+                      <a:endParaRPr lang="en-US" sz="1400" dirty="0">
+                        <a:latin typeface="+mn-lt" charset="0"/>
+                        <a:ea typeface="+mn-lt" charset="0"/>
+                        <a:cs typeface="+mn-lt" charset="0"/>
+                      </a:endParaRPr>
+                    </a:p>
+                  </a:txBody>
+                  <a:tcPr anchor="ctr">
+                    <a:lnL w="9525" cap="flat" cmpd="sng" algn="ctr">
+                      <a:solidFill>
+                        <a:srgbClr val="D5E3E0"/>
+                      </a:solidFill>
+                      <a:prstDash val="solid"/>
+                      <a:round/>
+                      <a:headEnd type="none" w="med" len="med"/>
+                      <a:tailEnd type="none" w="med" len="med"/>
+                    </a:lnL>
+                    <a:lnR w="9525" cap="flat" cmpd="sng" algn="ctr">
+                      <a:solidFill>
+                        <a:srgbClr val="D5E3E0"/>
+                      </a:solidFill>
+                      <a:prstDash val="solid"/>
+                      <a:round/>
+                      <a:headEnd type="none" w="med" len="med"/>
+                      <a:tailEnd type="none" w="med" len="med"/>
+                    </a:lnR>
+                    <a:lnT w="9525" cap="flat" cmpd="sng" algn="ctr">
+                      <a:solidFill>
+                        <a:srgbClr val="D5E3E0"/>
+                      </a:solidFill>
+                      <a:prstDash val="solid"/>
+                      <a:round/>
+                      <a:headEnd type="none" w="med" len="med"/>
+                      <a:tailEnd type="none" w="med" len="med"/>
+                    </a:lnT>
+                    <a:lnB w="9525" cap="flat" cmpd="sng" algn="ctr">
+                      <a:solidFill>
+                        <a:srgbClr val="D5E3E0"/>
+                      </a:solidFill>
+                      <a:prstDash val="solid"/>
+                      <a:round/>
+                      <a:headEnd type="none" w="med" len="med"/>
+                      <a:tailEnd type="none" w="med" len="med"/>
+                    </a:lnB>
+                    <a:solidFill>
+                      <a:srgbClr val="FFFFFF"/>
+                    </a:solidFill>
+                  </a:tcPr>
+                </a:tc>
+                <a:tc>
+                  <a:txBody>
+                    <a:bodyPr/>
+                    <a:lstStyle/>
+                    <a:p>
+                      <a:pPr marL="0" indent="0" algn="l">
+                        <a:buNone/>
+                      </a:pPr>
+                      <a:r>
+                        <a:rPr lang="en-US" sz="1400" dirty="0">
+                          <a:solidFill>
+                            <a:srgbClr val="DC2626"/>
+                          </a:solidFill>
+                          <a:latin typeface="+mn-lt" pitchFamily="34" charset="0"/>
+                          <a:ea typeface="+mn-lt" pitchFamily="34" charset="-122"/>
+                          <a:cs typeface="+mn-lt" pitchFamily="34" charset="-120"/>
+                        </a:rPr>
+                        <a:t>Loss</a:t>
+                      </a:r>
+                      <a:endParaRPr lang="en-US" sz="1400" dirty="0">
+                        <a:latin typeface="+mn-lt" charset="0"/>
+                        <a:ea typeface="+mn-lt" charset="0"/>
+                        <a:cs typeface="+mn-lt" charset="0"/>
+                      </a:endParaRPr>
+                    </a:p>
+                  </a:txBody>
+                  <a:tcPr anchor="ctr">
+                    <a:lnL w="9525" cap="flat" cmpd="sng" algn="ctr">
+                      <a:solidFill>
+                        <a:srgbClr val="D5E3E0"/>
+                      </a:solidFill>
+                      <a:prstDash val="solid"/>
+                      <a:round/>
+                      <a:headEnd type="none" w="med" len="med"/>
+                      <a:tailEnd type="none" w="med" len="med"/>
+                    </a:lnL>
+                    <a:lnR w="9525" cap="flat" cmpd="sng" algn="ctr">
+                      <a:solidFill>
+                        <a:srgbClr val="D5E3E0"/>
+                      </a:solidFill>
+                      <a:prstDash val="solid"/>
+                      <a:round/>
+                      <a:headEnd type="none" w="med" len="med"/>
+                      <a:tailEnd type="none" w="med" len="med"/>
+                    </a:lnR>
+                    <a:lnT w="9525" cap="flat" cmpd="sng" algn="ctr">
+                      <a:solidFill>
+                        <a:srgbClr val="D5E3E0"/>
+                      </a:solidFill>
+                      <a:prstDash val="solid"/>
+                      <a:round/>
+                      <a:headEnd type="none" w="med" len="med"/>
+                      <a:tailEnd type="none" w="med" len="med"/>
+                    </a:lnT>
+                    <a:lnB w="9525" cap="flat" cmpd="sng" algn="ctr">
+                      <a:solidFill>
+                        <a:srgbClr val="D5E3E0"/>
+                      </a:solidFill>
+                      <a:prstDash val="solid"/>
+                      <a:round/>
+                      <a:headEnd type="none" w="med" len="med"/>
+                      <a:tailEnd type="none" w="med" len="med"/>
+                    </a:lnB>
+                    <a:solidFill>
+                      <a:srgbClr val="FFFFFF"/>
+                    </a:solidFill>
+                  </a:tcPr>
+                </a:tc>
+                <a:extLst>
+                  <a:ext uri="{0D108BD9-81ED-4DB2-BD59-A6C34878D82A}">
+                    <a16:rowId xmlns:a16="http://schemas.microsoft.com/office/drawing/2014/main" val="10003"/>
+                  </a:ext>
+                </a:extLst>
+              </a:tr>
+              <a:tr h="329184">
+                <a:tc>
+                  <a:txBody>
+                    <a:bodyPr/>
+                    <a:lstStyle/>
+                    <a:p>
+                      <a:pPr marL="0" indent="0" algn="l">
+                        <a:buNone/>
+                      </a:pPr>
+                      <a:r>
+                        <a:rPr lang="en-US" sz="1400" dirty="0">
+                          <a:solidFill>
+                            <a:srgbClr val="10222B"/>
+                          </a:solidFill>
+                          <a:latin typeface="+mn-lt" pitchFamily="34" charset="0"/>
+                          <a:ea typeface="+mn-lt" pitchFamily="34" charset="-122"/>
+                          <a:cs typeface="+mn-lt" pitchFamily="34" charset="-120"/>
+                        </a:rPr>
+                        <a:t>32%</a:t>
+                      </a:r>
+                      <a:endParaRPr lang="en-US" sz="1400" dirty="0">
+                        <a:latin typeface="+mn-lt" charset="0"/>
+                        <a:ea typeface="+mn-lt" charset="0"/>
+                        <a:cs typeface="+mn-lt" charset="0"/>
+                      </a:endParaRPr>
+                    </a:p>
+                  </a:txBody>
+                  <a:tcPr anchor="ctr">
+                    <a:lnL w="9525" cap="flat" cmpd="sng" algn="ctr">
+                      <a:solidFill>
+                        <a:srgbClr val="D5E3E0"/>
+                      </a:solidFill>
+                      <a:prstDash val="solid"/>
+                      <a:round/>
+                      <a:headEnd type="none" w="med" len="med"/>
+                      <a:tailEnd type="none" w="med" len="med"/>
+                    </a:lnL>
+                    <a:lnR w="9525" cap="flat" cmpd="sng" algn="ctr">
+                      <a:solidFill>
+                        <a:srgbClr val="D5E3E0"/>
+                      </a:solidFill>
+                      <a:prstDash val="solid"/>
+                      <a:round/>
+                      <a:headEnd type="none" w="med" len="med"/>
+                      <a:tailEnd type="none" w="med" len="med"/>
+                    </a:lnR>
+                    <a:lnT w="9525" cap="flat" cmpd="sng" algn="ctr">
+                      <a:solidFill>
+                        <a:srgbClr val="D5E3E0"/>
+                      </a:solidFill>
+                      <a:prstDash val="solid"/>
+                      <a:round/>
+                      <a:headEnd type="none" w="med" len="med"/>
+                      <a:tailEnd type="none" w="med" len="med"/>
+                    </a:lnT>
+                    <a:lnB w="9525" cap="flat" cmpd="sng" algn="ctr">
+                      <a:solidFill>
+                        <a:srgbClr val="D5E3E0"/>
+                      </a:solidFill>
+                      <a:prstDash val="solid"/>
+                      <a:round/>
+                      <a:headEnd type="none" w="med" len="med"/>
+                      <a:tailEnd type="none" w="med" len="med"/>
+                    </a:lnB>
+                    <a:solidFill>
+                      <a:srgbClr val="EAF2F1"/>
+                    </a:solidFill>
+                  </a:tcPr>
+                </a:tc>
+                <a:tc>
+                  <a:txBody>
+                    <a:bodyPr/>
+                    <a:lstStyle/>
+                    <a:p>
+                      <a:pPr marL="0" indent="0" algn="l">
+                        <a:buNone/>
+                      </a:pPr>
+                      <a:r>
+                        <a:rPr lang="en-US" sz="1400" b="1" dirty="0">
+                          <a:solidFill>
+                            <a:srgbClr val="DC2626"/>
+                          </a:solidFill>
+                          <a:latin typeface="+mn-lt" pitchFamily="34" charset="0"/>
+                          <a:ea typeface="+mn-lt" pitchFamily="34" charset="-122"/>
+                          <a:cs typeface="+mn-lt" pitchFamily="34" charset="-120"/>
+                        </a:rPr>
+                        <a:t>−$46.98</a:t>
+                      </a:r>
+                      <a:endParaRPr lang="en-US" sz="1400" dirty="0">
+                        <a:latin typeface="+mn-lt" charset="0"/>
+                        <a:ea typeface="+mn-lt" charset="0"/>
+                        <a:cs typeface="+mn-lt" charset="0"/>
+                      </a:endParaRPr>
+                    </a:p>
+                  </a:txBody>
+                  <a:tcPr anchor="ctr">
+                    <a:lnL w="9525" cap="flat" cmpd="sng" algn="ctr">
+                      <a:solidFill>
+                        <a:srgbClr val="D5E3E0"/>
+                      </a:solidFill>
+                      <a:prstDash val="solid"/>
+                      <a:round/>
+                      <a:headEnd type="none" w="med" len="med"/>
+                      <a:tailEnd type="none" w="med" len="med"/>
+                    </a:lnL>
+                    <a:lnR w="9525" cap="flat" cmpd="sng" algn="ctr">
+                      <a:solidFill>
+                        <a:srgbClr val="D5E3E0"/>
+                      </a:solidFill>
+                      <a:prstDash val="solid"/>
+                      <a:round/>
+                      <a:headEnd type="none" w="med" len="med"/>
+                      <a:tailEnd type="none" w="med" len="med"/>
+                    </a:lnR>
+                    <a:lnT w="9525" cap="flat" cmpd="sng" algn="ctr">
+                      <a:solidFill>
+                        <a:srgbClr val="D5E3E0"/>
+                      </a:solidFill>
+                      <a:prstDash val="solid"/>
+                      <a:round/>
+                      <a:headEnd type="none" w="med" len="med"/>
+                      <a:tailEnd type="none" w="med" len="med"/>
+                    </a:lnT>
+                    <a:lnB w="9525" cap="flat" cmpd="sng" algn="ctr">
+                      <a:solidFill>
+                        <a:srgbClr val="D5E3E0"/>
+                      </a:solidFill>
+                      <a:prstDash val="solid"/>
+                      <a:round/>
+                      <a:headEnd type="none" w="med" len="med"/>
+                      <a:tailEnd type="none" w="med" len="med"/>
+                    </a:lnB>
+                    <a:solidFill>
+                      <a:srgbClr val="EAF2F1"/>
+                    </a:solidFill>
+                  </a:tcPr>
+                </a:tc>
+                <a:tc>
+                  <a:txBody>
+                    <a:bodyPr/>
+                    <a:lstStyle/>
+                    <a:p>
+                      <a:pPr marL="0" indent="0" algn="l">
+                        <a:buNone/>
+                      </a:pPr>
+                      <a:r>
+                        <a:rPr lang="en-US" sz="1400" dirty="0">
+                          <a:solidFill>
+                            <a:srgbClr val="DC2626"/>
+                          </a:solidFill>
+                          <a:latin typeface="+mn-lt" pitchFamily="34" charset="0"/>
+                          <a:ea typeface="+mn-lt" pitchFamily="34" charset="-122"/>
+                          <a:cs typeface="+mn-lt" pitchFamily="34" charset="-120"/>
+                        </a:rPr>
+                        <a:t>Loss</a:t>
+                      </a:r>
+                      <a:endParaRPr lang="en-US" sz="1400" dirty="0">
+                        <a:latin typeface="+mn-lt" charset="0"/>
+                        <a:ea typeface="+mn-lt" charset="0"/>
+                        <a:cs typeface="+mn-lt" charset="0"/>
+                      </a:endParaRPr>
+                    </a:p>
+                  </a:txBody>
+                  <a:tcPr anchor="ctr">
+                    <a:lnL w="9525" cap="flat" cmpd="sng" algn="ctr">
+                      <a:solidFill>
+                        <a:srgbClr val="D5E3E0"/>
+                      </a:solidFill>
+                      <a:prstDash val="solid"/>
+                      <a:round/>
+                      <a:headEnd type="none" w="med" len="med"/>
+                      <a:tailEnd type="none" w="med" len="med"/>
+                    </a:lnL>
+                    <a:lnR w="9525" cap="flat" cmpd="sng" algn="ctr">
+                      <a:solidFill>
+                        <a:srgbClr val="D5E3E0"/>
+                      </a:solidFill>
+                      <a:prstDash val="solid"/>
+                      <a:round/>
+                      <a:headEnd type="none" w="med" len="med"/>
+                      <a:tailEnd type="none" w="med" len="med"/>
+                    </a:lnR>
+                    <a:lnT w="9525" cap="flat" cmpd="sng" algn="ctr">
+                      <a:solidFill>
+                        <a:srgbClr val="D5E3E0"/>
+                      </a:solidFill>
+                      <a:prstDash val="solid"/>
+                      <a:round/>
+                      <a:headEnd type="none" w="med" len="med"/>
+                      <a:tailEnd type="none" w="med" len="med"/>
+                    </a:lnT>
+                    <a:lnB w="9525" cap="flat" cmpd="sng" algn="ctr">
+                      <a:solidFill>
+                        <a:srgbClr val="D5E3E0"/>
+                      </a:solidFill>
+                      <a:prstDash val="solid"/>
+                      <a:round/>
+                      <a:headEnd type="none" w="med" len="med"/>
+                      <a:tailEnd type="none" w="med" len="med"/>
+                    </a:lnB>
+                    <a:solidFill>
+                      <a:srgbClr val="EAF2F1"/>
+                    </a:solidFill>
+                  </a:tcPr>
+                </a:tc>
+                <a:extLst>
+                  <a:ext uri="{0D108BD9-81ED-4DB2-BD59-A6C34878D82A}">
+                    <a16:rowId xmlns:a16="http://schemas.microsoft.com/office/drawing/2014/main" val="10004"/>
+                  </a:ext>
+                </a:extLst>
+              </a:tr>
+              <a:tr h="329184">
+                <a:tc>
+                  <a:txBody>
+                    <a:bodyPr/>
+                    <a:lstStyle/>
+                    <a:p>
+                      <a:pPr marL="0" indent="0" algn="l">
+                        <a:buNone/>
+                      </a:pPr>
+                      <a:r>
+                        <a:rPr lang="en-US" sz="1400" dirty="0">
+                          <a:solidFill>
+                            <a:srgbClr val="10222B"/>
+                          </a:solidFill>
+                          <a:latin typeface="+mn-lt" pitchFamily="34" charset="0"/>
+                          <a:ea typeface="+mn-lt" pitchFamily="34" charset="-122"/>
+                          <a:cs typeface="+mn-lt" pitchFamily="34" charset="-120"/>
+                        </a:rPr>
+                        <a:t>45%</a:t>
+                      </a:r>
+                      <a:endParaRPr lang="en-US" sz="1400" dirty="0">
+                        <a:latin typeface="+mn-lt" charset="0"/>
+                        <a:ea typeface="+mn-lt" charset="0"/>
+                        <a:cs typeface="+mn-lt" charset="0"/>
+                      </a:endParaRPr>
+                    </a:p>
+                  </a:txBody>
+                  <a:tcPr anchor="ctr">
+                    <a:lnL w="9525" cap="flat" cmpd="sng" algn="ctr">
+                      <a:solidFill>
+                        <a:srgbClr val="D5E3E0"/>
+                      </a:solidFill>
+                      <a:prstDash val="solid"/>
+                      <a:round/>
+                      <a:headEnd type="none" w="med" len="med"/>
+                      <a:tailEnd type="none" w="med" len="med"/>
+                    </a:lnL>
+                    <a:lnR w="9525" cap="flat" cmpd="sng" algn="ctr">
+                      <a:solidFill>
+                        <a:srgbClr val="D5E3E0"/>
+                      </a:solidFill>
+                      <a:prstDash val="solid"/>
+                      <a:round/>
+                      <a:headEnd type="none" w="med" len="med"/>
+                      <a:tailEnd type="none" w="med" len="med"/>
+                    </a:lnR>
+                    <a:lnT w="9525" cap="flat" cmpd="sng" algn="ctr">
+                      <a:solidFill>
+                        <a:srgbClr val="D5E3E0"/>
+                      </a:solidFill>
+                      <a:prstDash val="solid"/>
+                      <a:round/>
+                      <a:headEnd type="none" w="med" len="med"/>
+                      <a:tailEnd type="none" w="med" len="med"/>
+                    </a:lnT>
+                    <a:lnB w="9525" cap="flat" cmpd="sng" algn="ctr">
+                      <a:solidFill>
+                        <a:srgbClr val="D5E3E0"/>
+                      </a:solidFill>
+                      <a:prstDash val="solid"/>
+                      <a:round/>
+                      <a:headEnd type="none" w="med" len="med"/>
+                      <a:tailEnd type="none" w="med" len="med"/>
+                    </a:lnB>
+                    <a:solidFill>
+                      <a:srgbClr val="FFFFFF"/>
+                    </a:solidFill>
+                  </a:tcPr>
+                </a:tc>
+                <a:tc>
+                  <a:txBody>
+                    <a:bodyPr/>
+                    <a:lstStyle/>
+                    <a:p>
+                      <a:pPr marL="0" indent="0" algn="l">
+                        <a:buNone/>
+                      </a:pPr>
+                      <a:r>
+                        <a:rPr lang="en-US" sz="1400" b="1" dirty="0">
+                          <a:solidFill>
+                            <a:srgbClr val="DC2626"/>
+                          </a:solidFill>
+                          <a:latin typeface="+mn-lt" pitchFamily="34" charset="0"/>
+                          <a:ea typeface="+mn-lt" pitchFamily="34" charset="-122"/>
+                          <a:cs typeface="+mn-lt" pitchFamily="34" charset="-120"/>
+                        </a:rPr>
+                        <a:t>−$383.03</a:t>
+                      </a:r>
+                      <a:endParaRPr lang="en-US" sz="1400" dirty="0">
+                        <a:latin typeface="+mn-lt" charset="0"/>
+                        <a:ea typeface="+mn-lt" charset="0"/>
+                        <a:cs typeface="+mn-lt" charset="0"/>
+                      </a:endParaRPr>
+                    </a:p>
+                  </a:txBody>
+                  <a:tcPr anchor="ctr">
+                    <a:lnL w="9525" cap="flat" cmpd="sng" algn="ctr">
+                      <a:solidFill>
+                        <a:srgbClr val="D5E3E0"/>
+                      </a:solidFill>
+                      <a:prstDash val="solid"/>
+                      <a:round/>
+                      <a:headEnd type="none" w="med" len="med"/>
+                      <a:tailEnd type="none" w="med" len="med"/>
+                    </a:lnL>
+                    <a:lnR w="9525" cap="flat" cmpd="sng" algn="ctr">
+                      <a:solidFill>
+                        <a:srgbClr val="D5E3E0"/>
+                      </a:solidFill>
+                      <a:prstDash val="solid"/>
+                      <a:round/>
+                      <a:headEnd type="none" w="med" len="med"/>
+                      <a:tailEnd type="none" w="med" len="med"/>
+                    </a:lnR>
+                    <a:lnT w="9525" cap="flat" cmpd="sng" algn="ctr">
+                      <a:solidFill>
+                        <a:srgbClr val="D5E3E0"/>
+                      </a:solidFill>
+                      <a:prstDash val="solid"/>
+                      <a:round/>
+                      <a:headEnd type="none" w="med" len="med"/>
+                      <a:tailEnd type="none" w="med" len="med"/>
+                    </a:lnT>
+                    <a:lnB w="9525" cap="flat" cmpd="sng" algn="ctr">
+                      <a:solidFill>
+                        <a:srgbClr val="D5E3E0"/>
+                      </a:solidFill>
+                      <a:prstDash val="solid"/>
+                      <a:round/>
+                      <a:headEnd type="none" w="med" len="med"/>
+                      <a:tailEnd type="none" w="med" len="med"/>
+                    </a:lnB>
+                    <a:solidFill>
+                      <a:srgbClr val="FFFFFF"/>
+                    </a:solidFill>
+                  </a:tcPr>
+                </a:tc>
+                <a:tc>
+                  <a:txBody>
+                    <a:bodyPr/>
+                    <a:lstStyle/>
+                    <a:p>
+                      <a:pPr marL="0" indent="0" algn="l">
+                        <a:buNone/>
+                      </a:pPr>
+                      <a:r>
+                        <a:rPr lang="en-US" sz="1400" dirty="0">
+                          <a:solidFill>
+                            <a:srgbClr val="DC2626"/>
+                          </a:solidFill>
+                          <a:latin typeface="+mn-lt" pitchFamily="34" charset="0"/>
+                          <a:ea typeface="+mn-lt" pitchFamily="34" charset="-122"/>
+                          <a:cs typeface="+mn-lt" pitchFamily="34" charset="-120"/>
+                        </a:rPr>
+                        <a:t>Loss</a:t>
+                      </a:r>
+                      <a:endParaRPr lang="en-US" sz="1400" dirty="0">
+                        <a:latin typeface="+mn-lt" charset="0"/>
+                        <a:ea typeface="+mn-lt" charset="0"/>
+                        <a:cs typeface="+mn-lt" charset="0"/>
+                      </a:endParaRPr>
+                    </a:p>
+                  </a:txBody>
+                  <a:tcPr anchor="ctr">
+                    <a:lnL w="9525" cap="flat" cmpd="sng" algn="ctr">
+                      <a:solidFill>
+                        <a:srgbClr val="D5E3E0"/>
+                      </a:solidFill>
+                      <a:prstDash val="solid"/>
+                      <a:round/>
+                      <a:headEnd type="none" w="med" len="med"/>
+                      <a:tailEnd type="none" w="med" len="med"/>
+                    </a:lnL>
+                    <a:lnR w="9525" cap="flat" cmpd="sng" algn="ctr">
+                      <a:solidFill>
+                        <a:srgbClr val="D5E3E0"/>
+                      </a:solidFill>
+                      <a:prstDash val="solid"/>
+                      <a:round/>
+                      <a:headEnd type="none" w="med" len="med"/>
+                      <a:tailEnd type="none" w="med" len="med"/>
+                    </a:lnR>
+                    <a:lnT w="9525" cap="flat" cmpd="sng" algn="ctr">
+                      <a:solidFill>
+                        <a:srgbClr val="D5E3E0"/>
+                      </a:solidFill>
+                      <a:prstDash val="solid"/>
+                      <a:round/>
+                      <a:headEnd type="none" w="med" len="med"/>
+                      <a:tailEnd type="none" w="med" len="med"/>
+                    </a:lnT>
+                    <a:lnB w="9525" cap="flat" cmpd="sng" algn="ctr">
+                      <a:solidFill>
+                        <a:srgbClr val="D5E3E0"/>
+                      </a:solidFill>
+                      <a:prstDash val="solid"/>
+                      <a:round/>
+                      <a:headEnd type="none" w="med" len="med"/>
+                      <a:tailEnd type="none" w="med" len="med"/>
+                    </a:lnB>
+                    <a:solidFill>
+                      <a:srgbClr val="FFFFFF"/>
+                    </a:solidFill>
+                  </a:tcPr>
+                </a:tc>
+                <a:extLst>
+                  <a:ext uri="{0D108BD9-81ED-4DB2-BD59-A6C34878D82A}">
+                    <a16:rowId xmlns:a16="http://schemas.microsoft.com/office/drawing/2014/main" val="10005"/>
+                  </a:ext>
+                </a:extLst>
+              </a:tr>
+              <a:tr h="329184">
+                <a:tc>
+                  <a:txBody>
+                    <a:bodyPr/>
+                    <a:lstStyle/>
+                    <a:p>
+                      <a:pPr marL="0" indent="0" algn="l">
+                        <a:buNone/>
+                      </a:pPr>
+                      <a:r>
+                        <a:rPr lang="en-US" sz="1400" dirty="0">
+                          <a:solidFill>
+                            <a:srgbClr val="10222B"/>
+                          </a:solidFill>
+                          <a:latin typeface="+mn-lt" pitchFamily="34" charset="0"/>
+                          <a:ea typeface="+mn-lt" pitchFamily="34" charset="-122"/>
+                          <a:cs typeface="+mn-lt" pitchFamily="34" charset="-120"/>
+                        </a:rPr>
+                        <a:t>50%</a:t>
+                      </a:r>
+                      <a:endParaRPr lang="en-US" sz="1400" dirty="0">
+                        <a:latin typeface="+mn-lt" charset="0"/>
+                        <a:ea typeface="+mn-lt" charset="0"/>
+                        <a:cs typeface="+mn-lt" charset="0"/>
+                      </a:endParaRPr>
+                    </a:p>
+                  </a:txBody>
+                  <a:tcPr anchor="ctr">
+                    <a:lnL w="9525" cap="flat" cmpd="sng" algn="ctr">
+                      <a:solidFill>
+                        <a:srgbClr val="D5E3E0"/>
+                      </a:solidFill>
+                      <a:prstDash val="solid"/>
+                      <a:round/>
+                      <a:headEnd type="none" w="med" len="med"/>
+                      <a:tailEnd type="none" w="med" len="med"/>
+                    </a:lnL>
+                    <a:lnR w="9525" cap="flat" cmpd="sng" algn="ctr">
+                      <a:solidFill>
+                        <a:srgbClr val="D5E3E0"/>
+                      </a:solidFill>
+                      <a:prstDash val="solid"/>
+                      <a:round/>
+                      <a:headEnd type="none" w="med" len="med"/>
+                      <a:tailEnd type="none" w="med" len="med"/>
+                    </a:lnR>
+                    <a:lnT w="9525" cap="flat" cmpd="sng" algn="ctr">
+                      <a:solidFill>
+                        <a:srgbClr val="D5E3E0"/>
+                      </a:solidFill>
+                      <a:prstDash val="solid"/>
+                      <a:round/>
+                      <a:headEnd type="none" w="med" len="med"/>
+                      <a:tailEnd type="none" w="med" len="med"/>
+                    </a:lnT>
+                    <a:lnB w="9525" cap="flat" cmpd="sng" algn="ctr">
+                      <a:solidFill>
+                        <a:srgbClr val="D5E3E0"/>
+                      </a:solidFill>
+                      <a:prstDash val="solid"/>
+                      <a:round/>
+                      <a:headEnd type="none" w="med" len="med"/>
+                      <a:tailEnd type="none" w="med" len="med"/>
+                    </a:lnB>
+                    <a:solidFill>
+                      <a:srgbClr val="EAF2F1"/>
+                    </a:solidFill>
+                  </a:tcPr>
+                </a:tc>
+                <a:tc>
+                  <a:txBody>
+                    <a:bodyPr/>
+                    <a:lstStyle/>
+                    <a:p>
+                      <a:pPr marL="0" indent="0" algn="l">
+                        <a:buNone/>
+                      </a:pPr>
+                      <a:r>
+                        <a:rPr lang="en-US" sz="1400" b="1" dirty="0">
+                          <a:solidFill>
+                            <a:srgbClr val="DC2626"/>
+                          </a:solidFill>
+                          <a:latin typeface="+mn-lt" pitchFamily="34" charset="0"/>
+                          <a:ea typeface="+mn-lt" pitchFamily="34" charset="-122"/>
+                          <a:cs typeface="+mn-lt" pitchFamily="34" charset="-120"/>
+                        </a:rPr>
+                        <a:t>−$1,665.05</a:t>
+                      </a:r>
+                      <a:endParaRPr lang="en-US" sz="1400" dirty="0">
+                        <a:latin typeface="+mn-lt" charset="0"/>
+                        <a:ea typeface="+mn-lt" charset="0"/>
+                        <a:cs typeface="+mn-lt" charset="0"/>
+                      </a:endParaRPr>
+                    </a:p>
+                  </a:txBody>
+                  <a:tcPr anchor="ctr">
+                    <a:lnL w="9525" cap="flat" cmpd="sng" algn="ctr">
+                      <a:solidFill>
+                        <a:srgbClr val="D5E3E0"/>
+                      </a:solidFill>
+                      <a:prstDash val="solid"/>
+                      <a:round/>
+                      <a:headEnd type="none" w="med" len="med"/>
+                      <a:tailEnd type="none" w="med" len="med"/>
+                    </a:lnL>
+                    <a:lnR w="9525" cap="flat" cmpd="sng" algn="ctr">
+                      <a:solidFill>
+                        <a:srgbClr val="D5E3E0"/>
+                      </a:solidFill>
+                      <a:prstDash val="solid"/>
+                      <a:round/>
+                      <a:headEnd type="none" w="med" len="med"/>
+                      <a:tailEnd type="none" w="med" len="med"/>
+                    </a:lnR>
+                    <a:lnT w="9525" cap="flat" cmpd="sng" algn="ctr">
+                      <a:solidFill>
+                        <a:srgbClr val="D5E3E0"/>
+                      </a:solidFill>
+                      <a:prstDash val="solid"/>
+                      <a:round/>
+                      <a:headEnd type="none" w="med" len="med"/>
+                      <a:tailEnd type="none" w="med" len="med"/>
+                    </a:lnT>
+                    <a:lnB w="9525" cap="flat" cmpd="sng" algn="ctr">
+                      <a:solidFill>
+                        <a:srgbClr val="D5E3E0"/>
+                      </a:solidFill>
+                      <a:prstDash val="solid"/>
+                      <a:round/>
+                      <a:headEnd type="none" w="med" len="med"/>
+                      <a:tailEnd type="none" w="med" len="med"/>
+                    </a:lnB>
+                    <a:solidFill>
+                      <a:srgbClr val="EAF2F1"/>
+                    </a:solidFill>
+                  </a:tcPr>
+                </a:tc>
+                <a:tc>
+                  <a:txBody>
+                    <a:bodyPr/>
+                    <a:lstStyle/>
+                    <a:p>
+                      <a:pPr marL="0" indent="0" algn="l">
+                        <a:buNone/>
+                      </a:pPr>
+                      <a:r>
+                        <a:rPr lang="en-US" sz="1400" dirty="0">
+                          <a:solidFill>
+                            <a:srgbClr val="DC2626"/>
+                          </a:solidFill>
+                          <a:latin typeface="+mn-lt" pitchFamily="34" charset="0"/>
+                          <a:ea typeface="+mn-lt" pitchFamily="34" charset="-122"/>
+                          <a:cs typeface="+mn-lt" pitchFamily="34" charset="-120"/>
+                        </a:rPr>
+                        <a:t>Loss</a:t>
+                      </a:r>
+                      <a:endParaRPr lang="en-US" sz="1400" dirty="0">
+                        <a:latin typeface="+mn-lt" charset="0"/>
+                        <a:ea typeface="+mn-lt" charset="0"/>
+                        <a:cs typeface="+mn-lt" charset="0"/>
+                      </a:endParaRPr>
+                    </a:p>
+                  </a:txBody>
+                  <a:tcPr anchor="ctr">
+                    <a:lnL w="9525" cap="flat" cmpd="sng" algn="ctr">
+                      <a:solidFill>
+                        <a:srgbClr val="D5E3E0"/>
+                      </a:solidFill>
+                      <a:prstDash val="solid"/>
+                      <a:round/>
+                      <a:headEnd type="none" w="med" len="med"/>
+                      <a:tailEnd type="none" w="med" len="med"/>
+                    </a:lnL>
+                    <a:lnR w="9525" cap="flat" cmpd="sng" algn="ctr">
+                      <a:solidFill>
+                        <a:srgbClr val="D5E3E0"/>
+                      </a:solidFill>
+                      <a:prstDash val="solid"/>
+                      <a:round/>
+                      <a:headEnd type="none" w="med" len="med"/>
+                      <a:tailEnd type="none" w="med" len="med"/>
+                    </a:lnR>
+                    <a:lnT w="9525" cap="flat" cmpd="sng" algn="ctr">
+                      <a:solidFill>
+                        <a:srgbClr val="D5E3E0"/>
+                      </a:solidFill>
+                      <a:prstDash val="solid"/>
+                      <a:round/>
+                      <a:headEnd type="none" w="med" len="med"/>
+                      <a:tailEnd type="none" w="med" len="med"/>
+                    </a:lnT>
+                    <a:lnB w="9525" cap="flat" cmpd="sng" algn="ctr">
+                      <a:solidFill>
+                        <a:srgbClr val="D5E3E0"/>
+                      </a:solidFill>
+                      <a:prstDash val="solid"/>
+                      <a:round/>
+                      <a:headEnd type="none" w="med" len="med"/>
+                      <a:tailEnd type="none" w="med" len="med"/>
+                    </a:lnB>
+                    <a:solidFill>
+                      <a:srgbClr val="EAF2F1"/>
+                    </a:solidFill>
+                  </a:tcPr>
+                </a:tc>
+                <a:extLst>
+                  <a:ext uri="{0D108BD9-81ED-4DB2-BD59-A6C34878D82A}">
+                    <a16:rowId xmlns:a16="http://schemas.microsoft.com/office/drawing/2014/main" val="10006"/>
+                  </a:ext>
+                </a:extLst>
+              </a:tr>
+              <a:tr h="329184">
+                <a:tc>
+                  <a:txBody>
+                    <a:bodyPr/>
+                    <a:lstStyle/>
+                    <a:p>
+                      <a:pPr marL="0" indent="0" algn="l">
+                        <a:buNone/>
+                      </a:pPr>
+                      <a:r>
+                        <a:rPr lang="en-US" sz="1400" dirty="0">
+                          <a:solidFill>
+                            <a:srgbClr val="10222B"/>
+                          </a:solidFill>
+                          <a:latin typeface="+mn-lt" pitchFamily="34" charset="0"/>
+                          <a:ea typeface="+mn-lt" pitchFamily="34" charset="-122"/>
+                          <a:cs typeface="+mn-lt" pitchFamily="34" charset="-120"/>
+                        </a:rPr>
+                        <a:t>60%</a:t>
+                      </a:r>
+                      <a:endParaRPr lang="en-US" sz="1400" dirty="0">
+                        <a:latin typeface="+mn-lt" charset="0"/>
+                        <a:ea typeface="+mn-lt" charset="0"/>
+                        <a:cs typeface="+mn-lt" charset="0"/>
+                      </a:endParaRPr>
+                    </a:p>
+                  </a:txBody>
+                  <a:tcPr anchor="ctr">
+                    <a:lnL w="9525" cap="flat" cmpd="sng" algn="ctr">
+                      <a:solidFill>
+                        <a:srgbClr val="D5E3E0"/>
+                      </a:solidFill>
+                      <a:prstDash val="solid"/>
+                      <a:round/>
+                      <a:headEnd type="none" w="med" len="med"/>
+                      <a:tailEnd type="none" w="med" len="med"/>
+                    </a:lnL>
+                    <a:lnR w="9525" cap="flat" cmpd="sng" algn="ctr">
+                      <a:solidFill>
+                        <a:srgbClr val="D5E3E0"/>
+                      </a:solidFill>
+                      <a:prstDash val="solid"/>
+                      <a:round/>
+                      <a:headEnd type="none" w="med" len="med"/>
+                      <a:tailEnd type="none" w="med" len="med"/>
+                    </a:lnR>
+                    <a:lnT w="9525" cap="flat" cmpd="sng" algn="ctr">
+                      <a:solidFill>
+                        <a:srgbClr val="D5E3E0"/>
+                      </a:solidFill>
+                      <a:prstDash val="solid"/>
+                      <a:round/>
+                      <a:headEnd type="none" w="med" len="med"/>
+                      <a:tailEnd type="none" w="med" len="med"/>
+                    </a:lnT>
+                    <a:lnB w="9525" cap="flat" cmpd="sng" algn="ctr">
+                      <a:solidFill>
+                        <a:srgbClr val="D5E3E0"/>
+                      </a:solidFill>
+                      <a:prstDash val="solid"/>
+                      <a:round/>
+                      <a:headEnd type="none" w="med" len="med"/>
+                      <a:tailEnd type="none" w="med" len="med"/>
+                    </a:lnB>
+                    <a:solidFill>
+                      <a:srgbClr val="FFFFFF"/>
+                    </a:solidFill>
+                  </a:tcPr>
+                </a:tc>
+                <a:tc>
+                  <a:txBody>
+                    <a:bodyPr/>
+                    <a:lstStyle/>
+                    <a:p>
+                      <a:pPr marL="0" indent="0" algn="l">
+                        <a:buNone/>
+                      </a:pPr>
+                      <a:r>
+                        <a:rPr lang="en-US" sz="1400" b="1" dirty="0">
+                          <a:solidFill>
+                            <a:srgbClr val="DC2626"/>
+                          </a:solidFill>
+                          <a:latin typeface="+mn-lt" pitchFamily="34" charset="0"/>
+                          <a:ea typeface="+mn-lt" pitchFamily="34" charset="-122"/>
+                          <a:cs typeface="+mn-lt" pitchFamily="34" charset="-120"/>
+                        </a:rPr>
+                        <a:t>−$147.96</a:t>
+                      </a:r>
+                      <a:endParaRPr lang="en-US" sz="1400" dirty="0">
+                        <a:latin typeface="+mn-lt" charset="0"/>
+                        <a:ea typeface="+mn-lt" charset="0"/>
+                        <a:cs typeface="+mn-lt" charset="0"/>
+                      </a:endParaRPr>
+                    </a:p>
+                  </a:txBody>
+                  <a:tcPr anchor="ctr">
+                    <a:lnL w="9525" cap="flat" cmpd="sng" algn="ctr">
+                      <a:solidFill>
+                        <a:srgbClr val="D5E3E0"/>
+                      </a:solidFill>
+                      <a:prstDash val="solid"/>
+                      <a:round/>
+                      <a:headEnd type="none" w="med" len="med"/>
+                      <a:tailEnd type="none" w="med" len="med"/>
+                    </a:lnL>
+                    <a:lnR w="9525" cap="flat" cmpd="sng" algn="ctr">
+                      <a:solidFill>
+                        <a:srgbClr val="D5E3E0"/>
+                      </a:solidFill>
+                      <a:prstDash val="solid"/>
+                      <a:round/>
+                      <a:headEnd type="none" w="med" len="med"/>
+                      <a:tailEnd type="none" w="med" len="med"/>
+                    </a:lnR>
+                    <a:lnT w="9525" cap="flat" cmpd="sng" algn="ctr">
+                      <a:solidFill>
+                        <a:srgbClr val="D5E3E0"/>
+                      </a:solidFill>
+                      <a:prstDash val="solid"/>
+                      <a:round/>
+                      <a:headEnd type="none" w="med" len="med"/>
+                      <a:tailEnd type="none" w="med" len="med"/>
+                    </a:lnT>
+                    <a:lnB w="9525" cap="flat" cmpd="sng" algn="ctr">
+                      <a:solidFill>
+                        <a:srgbClr val="D5E3E0"/>
+                      </a:solidFill>
+                      <a:prstDash val="solid"/>
+                      <a:round/>
+                      <a:headEnd type="none" w="med" len="med"/>
+                      <a:tailEnd type="none" w="med" len="med"/>
+                    </a:lnB>
+                    <a:solidFill>
+                      <a:srgbClr val="FFFFFF"/>
+                    </a:solidFill>
+                  </a:tcPr>
+                </a:tc>
+                <a:tc>
+                  <a:txBody>
+                    <a:bodyPr/>
+                    <a:lstStyle/>
+                    <a:p>
+                      <a:pPr marL="0" indent="0" algn="l">
+                        <a:buNone/>
+                      </a:pPr>
+                      <a:r>
+                        <a:rPr lang="en-US" sz="1400" dirty="0">
+                          <a:solidFill>
+                            <a:srgbClr val="DC2626"/>
+                          </a:solidFill>
+                          <a:latin typeface="+mn-lt" pitchFamily="34" charset="0"/>
+                          <a:ea typeface="+mn-lt" pitchFamily="34" charset="-122"/>
+                          <a:cs typeface="+mn-lt" pitchFamily="34" charset="-120"/>
+                        </a:rPr>
+                        <a:t>Loss</a:t>
+                      </a:r>
+                      <a:endParaRPr lang="en-US" sz="1400" dirty="0">
+                        <a:latin typeface="+mn-lt" charset="0"/>
+                        <a:ea typeface="+mn-lt" charset="0"/>
+                        <a:cs typeface="+mn-lt" charset="0"/>
+                      </a:endParaRPr>
+                    </a:p>
+                  </a:txBody>
+                  <a:tcPr anchor="ctr">
+                    <a:lnL w="9525" cap="flat" cmpd="sng" algn="ctr">
+                      <a:solidFill>
+                        <a:srgbClr val="D5E3E0"/>
+                      </a:solidFill>
+                      <a:prstDash val="solid"/>
+                      <a:round/>
+                      <a:headEnd type="none" w="med" len="med"/>
+                      <a:tailEnd type="none" w="med" len="med"/>
+                    </a:lnL>
+                    <a:lnR w="9525" cap="flat" cmpd="sng" algn="ctr">
+                      <a:solidFill>
+                        <a:srgbClr val="D5E3E0"/>
+                      </a:solidFill>
+                      <a:prstDash val="solid"/>
+                      <a:round/>
+                      <a:headEnd type="none" w="med" len="med"/>
+                      <a:tailEnd type="none" w="med" len="med"/>
+                    </a:lnR>
+                    <a:lnT w="9525" cap="flat" cmpd="sng" algn="ctr">
+                      <a:solidFill>
+                        <a:srgbClr val="D5E3E0"/>
+                      </a:solidFill>
+                      <a:prstDash val="solid"/>
+                      <a:round/>
+                      <a:headEnd type="none" w="med" len="med"/>
+                      <a:tailEnd type="none" w="med" len="med"/>
+                    </a:lnT>
+                    <a:lnB w="9525" cap="flat" cmpd="sng" algn="ctr">
+                      <a:solidFill>
+                        <a:srgbClr val="D5E3E0"/>
+                      </a:solidFill>
+                      <a:prstDash val="solid"/>
+                      <a:round/>
+                      <a:headEnd type="none" w="med" len="med"/>
+                      <a:tailEnd type="none" w="med" len="med"/>
+                    </a:lnB>
+                    <a:solidFill>
+                      <a:srgbClr val="FFFFFF"/>
+                    </a:solidFill>
+                  </a:tcPr>
+                </a:tc>
+                <a:extLst>
+                  <a:ext uri="{0D108BD9-81ED-4DB2-BD59-A6C34878D82A}">
+                    <a16:rowId xmlns:a16="http://schemas.microsoft.com/office/drawing/2014/main" val="10007"/>
+                  </a:ext>
+                </a:extLst>
+              </a:tr>
+              <a:tr h="329184">
+                <a:tc>
+                  <a:txBody>
+                    <a:bodyPr/>
+                    <a:lstStyle/>
+                    <a:p>
+                      <a:pPr marL="0" indent="0" algn="l">
+                        <a:buNone/>
+                      </a:pPr>
+                      <a:r>
+                        <a:rPr lang="en-US" sz="1400" dirty="0">
+                          <a:solidFill>
+                            <a:srgbClr val="10222B"/>
+                          </a:solidFill>
+                          <a:latin typeface="+mn-lt" pitchFamily="34" charset="0"/>
+                          <a:ea typeface="+mn-lt" pitchFamily="34" charset="-122"/>
+                          <a:cs typeface="+mn-lt" pitchFamily="34" charset="-120"/>
+                        </a:rPr>
+                        <a:t>70%</a:t>
+                      </a:r>
+                      <a:endParaRPr lang="en-US" sz="1400" dirty="0">
+                        <a:latin typeface="+mn-lt" charset="0"/>
+                        <a:ea typeface="+mn-lt" charset="0"/>
+                        <a:cs typeface="+mn-lt" charset="0"/>
+                      </a:endParaRPr>
+                    </a:p>
+                  </a:txBody>
+                  <a:tcPr anchor="ctr">
+                    <a:lnL w="9525" cap="flat" cmpd="sng" algn="ctr">
+                      <a:solidFill>
+                        <a:srgbClr val="D5E3E0"/>
+                      </a:solidFill>
+                      <a:prstDash val="solid"/>
+                      <a:round/>
+                      <a:headEnd type="none" w="med" len="med"/>
+                      <a:tailEnd type="none" w="med" len="med"/>
+                    </a:lnL>
+                    <a:lnR w="9525" cap="flat" cmpd="sng" algn="ctr">
+                      <a:solidFill>
+                        <a:srgbClr val="D5E3E0"/>
+                      </a:solidFill>
+                      <a:prstDash val="solid"/>
+                      <a:round/>
+                      <a:headEnd type="none" w="med" len="med"/>
+                      <a:tailEnd type="none" w="med" len="med"/>
+                    </a:lnR>
+                    <a:lnT w="9525" cap="flat" cmpd="sng" algn="ctr">
+                      <a:solidFill>
+                        <a:srgbClr val="D5E3E0"/>
+                      </a:solidFill>
+                      <a:prstDash val="solid"/>
+                      <a:round/>
+                      <a:headEnd type="none" w="med" len="med"/>
+                      <a:tailEnd type="none" w="med" len="med"/>
+                    </a:lnT>
+                    <a:lnB w="9525" cap="flat" cmpd="sng" algn="ctr">
+                      <a:solidFill>
+                        <a:srgbClr val="D5E3E0"/>
+                      </a:solidFill>
+                      <a:prstDash val="solid"/>
+                      <a:round/>
+                      <a:headEnd type="none" w="med" len="med"/>
+                      <a:tailEnd type="none" w="med" len="med"/>
+                    </a:lnB>
+                    <a:solidFill>
+                      <a:srgbClr val="EAF2F1"/>
+                    </a:solidFill>
+                  </a:tcPr>
+                </a:tc>
+                <a:tc>
+                  <a:txBody>
+                    <a:bodyPr/>
+                    <a:lstStyle/>
+                    <a:p>
+                      <a:pPr marL="0" indent="0" algn="l">
+                        <a:buNone/>
+                      </a:pPr>
+                      <a:r>
+                        <a:rPr lang="en-US" sz="1400" b="1" dirty="0">
+                          <a:solidFill>
+                            <a:srgbClr val="DC2626"/>
+                          </a:solidFill>
+                          <a:latin typeface="+mn-lt" pitchFamily="34" charset="0"/>
+                          <a:ea typeface="+mn-lt" pitchFamily="34" charset="-122"/>
+                          <a:cs typeface="+mn-lt" pitchFamily="34" charset="-120"/>
+                        </a:rPr>
+                        <a:t>−$12.77</a:t>
+                      </a:r>
+                      <a:endParaRPr lang="en-US" sz="1400" dirty="0">
+                        <a:latin typeface="+mn-lt" charset="0"/>
+                        <a:ea typeface="+mn-lt" charset="0"/>
+                        <a:cs typeface="+mn-lt" charset="0"/>
+                      </a:endParaRPr>
+                    </a:p>
+                  </a:txBody>
+                  <a:tcPr anchor="ctr">
+                    <a:lnL w="9525" cap="flat" cmpd="sng" algn="ctr">
+                      <a:solidFill>
+                        <a:srgbClr val="D5E3E0"/>
+                      </a:solidFill>
+                      <a:prstDash val="solid"/>
+                      <a:round/>
+                      <a:headEnd type="none" w="med" len="med"/>
+                      <a:tailEnd type="none" w="med" len="med"/>
+                    </a:lnL>
+                    <a:lnR w="9525" cap="flat" cmpd="sng" algn="ctr">
+                      <a:solidFill>
+                        <a:srgbClr val="D5E3E0"/>
+                      </a:solidFill>
+                      <a:prstDash val="solid"/>
+                      <a:round/>
+                      <a:headEnd type="none" w="med" len="med"/>
+                      <a:tailEnd type="none" w="med" len="med"/>
+                    </a:lnR>
+                    <a:lnT w="9525" cap="flat" cmpd="sng" algn="ctr">
+                      <a:solidFill>
+                        <a:srgbClr val="D5E3E0"/>
+                      </a:solidFill>
+                      <a:prstDash val="solid"/>
+                      <a:round/>
+                      <a:headEnd type="none" w="med" len="med"/>
+                      <a:tailEnd type="none" w="med" len="med"/>
+                    </a:lnT>
+                    <a:lnB w="9525" cap="flat" cmpd="sng" algn="ctr">
+                      <a:solidFill>
+                        <a:srgbClr val="D5E3E0"/>
+                      </a:solidFill>
+                      <a:prstDash val="solid"/>
+                      <a:round/>
+                      <a:headEnd type="none" w="med" len="med"/>
+                      <a:tailEnd type="none" w="med" len="med"/>
+                    </a:lnB>
+                    <a:solidFill>
+                      <a:srgbClr val="EAF2F1"/>
+                    </a:solidFill>
+                  </a:tcPr>
+                </a:tc>
+                <a:tc>
+                  <a:txBody>
+                    <a:bodyPr/>
+                    <a:lstStyle/>
+                    <a:p>
+                      <a:pPr marL="0" indent="0" algn="l">
+                        <a:buNone/>
+                      </a:pPr>
+                      <a:r>
+                        <a:rPr lang="en-US" sz="1400" dirty="0">
+                          <a:solidFill>
+                            <a:srgbClr val="DC2626"/>
+                          </a:solidFill>
+                          <a:latin typeface="+mn-lt" pitchFamily="34" charset="0"/>
+                          <a:ea typeface="+mn-lt" pitchFamily="34" charset="-122"/>
+                          <a:cs typeface="+mn-lt" pitchFamily="34" charset="-120"/>
+                        </a:rPr>
+                        <a:t>Loss</a:t>
+                      </a:r>
+                      <a:endParaRPr lang="en-US" sz="1400" dirty="0">
+                        <a:latin typeface="+mn-lt" charset="0"/>
+                        <a:ea typeface="+mn-lt" charset="0"/>
+                        <a:cs typeface="+mn-lt" charset="0"/>
+                      </a:endParaRPr>
+                    </a:p>
+                  </a:txBody>
+                  <a:tcPr anchor="ctr">
+                    <a:lnL w="9525" cap="flat" cmpd="sng" algn="ctr">
+                      <a:solidFill>
+                        <a:srgbClr val="D5E3E0"/>
+                      </a:solidFill>
+                      <a:prstDash val="solid"/>
+                      <a:round/>
+                      <a:headEnd type="none" w="med" len="med"/>
+                      <a:tailEnd type="none" w="med" len="med"/>
+                    </a:lnL>
+                    <a:lnR w="9525" cap="flat" cmpd="sng" algn="ctr">
+                      <a:solidFill>
+                        <a:srgbClr val="D5E3E0"/>
+                      </a:solidFill>
+                      <a:prstDash val="solid"/>
+                      <a:round/>
+                      <a:headEnd type="none" w="med" len="med"/>
+                      <a:tailEnd type="none" w="med" len="med"/>
+                    </a:lnR>
+                    <a:lnT w="9525" cap="flat" cmpd="sng" algn="ctr">
+                      <a:solidFill>
+                        <a:srgbClr val="D5E3E0"/>
+                      </a:solidFill>
+                      <a:prstDash val="solid"/>
+                      <a:round/>
+                      <a:headEnd type="none" w="med" len="med"/>
+                      <a:tailEnd type="none" w="med" len="med"/>
+                    </a:lnT>
+                    <a:lnB w="9525" cap="flat" cmpd="sng" algn="ctr">
+                      <a:solidFill>
+                        <a:srgbClr val="D5E3E0"/>
+                      </a:solidFill>
+                      <a:prstDash val="solid"/>
+                      <a:round/>
+                      <a:headEnd type="none" w="med" len="med"/>
+                      <a:tailEnd type="none" w="med" len="med"/>
+                    </a:lnB>
+                    <a:solidFill>
+                      <a:srgbClr val="EAF2F1"/>
+                    </a:solidFill>
+                  </a:tcPr>
+                </a:tc>
+                <a:extLst>
+                  <a:ext uri="{0D108BD9-81ED-4DB2-BD59-A6C34878D82A}">
+                    <a16:rowId xmlns:a16="http://schemas.microsoft.com/office/drawing/2014/main" val="10008"/>
+                  </a:ext>
+                </a:extLst>
+              </a:tr>
+              <a:tr h="329184">
+                <a:tc>
+                  <a:txBody>
+                    <a:bodyPr/>
+                    <a:lstStyle/>
+                    <a:p>
+                      <a:pPr marL="0" indent="0" algn="l">
+                        <a:buNone/>
+                      </a:pPr>
+                      <a:r>
+                        <a:rPr lang="en-US" sz="1400" dirty="0">
+                          <a:solidFill>
+                            <a:srgbClr val="10222B"/>
+                          </a:solidFill>
+                          <a:latin typeface="+mn-lt" pitchFamily="34" charset="0"/>
+                          <a:ea typeface="+mn-lt" pitchFamily="34" charset="-122"/>
+                          <a:cs typeface="+mn-lt" pitchFamily="34" charset="-120"/>
+                        </a:rPr>
+                        <a:t>80%</a:t>
+                      </a:r>
+                      <a:endParaRPr lang="en-US" sz="1400" dirty="0">
+                        <a:latin typeface="+mn-lt" charset="0"/>
+                        <a:ea typeface="+mn-lt" charset="0"/>
+                        <a:cs typeface="+mn-lt" charset="0"/>
+                      </a:endParaRPr>
+                    </a:p>
+                  </a:txBody>
+                  <a:tcPr anchor="ctr">
+                    <a:lnL w="9525" cap="flat" cmpd="sng" algn="ctr">
+                      <a:solidFill>
+                        <a:srgbClr val="D5E3E0"/>
+                      </a:solidFill>
+                      <a:prstDash val="solid"/>
+                      <a:round/>
+                      <a:headEnd type="none" w="med" len="med"/>
+                      <a:tailEnd type="none" w="med" len="med"/>
+                    </a:lnL>
+                    <a:lnR w="9525" cap="flat" cmpd="sng" algn="ctr">
+                      <a:solidFill>
+                        <a:srgbClr val="D5E3E0"/>
+                      </a:solidFill>
+                      <a:prstDash val="solid"/>
+                      <a:round/>
+                      <a:headEnd type="none" w="med" len="med"/>
+                      <a:tailEnd type="none" w="med" len="med"/>
+                    </a:lnR>
+                    <a:lnT w="9525" cap="flat" cmpd="sng" algn="ctr">
+                      <a:solidFill>
+                        <a:srgbClr val="D5E3E0"/>
+                      </a:solidFill>
+                      <a:prstDash val="solid"/>
+                      <a:round/>
+                      <a:headEnd type="none" w="med" len="med"/>
+                      <a:tailEnd type="none" w="med" len="med"/>
+                    </a:lnT>
+                    <a:lnB w="9525" cap="flat" cmpd="sng" algn="ctr">
+                      <a:solidFill>
+                        <a:srgbClr val="D5E3E0"/>
+                      </a:solidFill>
+                      <a:prstDash val="solid"/>
+                      <a:round/>
+                      <a:headEnd type="none" w="med" len="med"/>
+                      <a:tailEnd type="none" w="med" len="med"/>
+                    </a:lnB>
+                    <a:solidFill>
+                      <a:srgbClr val="FFFFFF"/>
+                    </a:solidFill>
+                  </a:tcPr>
+                </a:tc>
+                <a:tc>
+                  <a:txBody>
+                    <a:bodyPr/>
+                    <a:lstStyle/>
+                    <a:p>
+                      <a:pPr marL="0" indent="0" algn="l">
+                        <a:buNone/>
+                      </a:pPr>
+                      <a:r>
+                        <a:rPr lang="en-US" sz="1400" b="1" dirty="0">
+                          <a:solidFill>
+                            <a:srgbClr val="DC2626"/>
+                          </a:solidFill>
+                          <a:latin typeface="+mn-lt" pitchFamily="34" charset="0"/>
+                          <a:ea typeface="+mn-lt" pitchFamily="34" charset="-122"/>
+                          <a:cs typeface="+mn-lt" pitchFamily="34" charset="-120"/>
+                        </a:rPr>
+                        <a:t>−$127.67</a:t>
+                      </a:r>
+                      <a:endParaRPr lang="en-US" sz="1400" dirty="0">
+                        <a:latin typeface="+mn-lt" charset="0"/>
+                        <a:ea typeface="+mn-lt" charset="0"/>
+                        <a:cs typeface="+mn-lt" charset="0"/>
+                      </a:endParaRPr>
+                    </a:p>
+                  </a:txBody>
+                  <a:tcPr anchor="ctr">
+                    <a:lnL w="9525" cap="flat" cmpd="sng" algn="ctr">
+                      <a:solidFill>
+                        <a:srgbClr val="D5E3E0"/>
+                      </a:solidFill>
+                      <a:prstDash val="solid"/>
+                      <a:round/>
+                      <a:headEnd type="none" w="med" len="med"/>
+                      <a:tailEnd type="none" w="med" len="med"/>
+                    </a:lnL>
+                    <a:lnR w="9525" cap="flat" cmpd="sng" algn="ctr">
+                      <a:solidFill>
+                        <a:srgbClr val="D5E3E0"/>
+                      </a:solidFill>
+                      <a:prstDash val="solid"/>
+                      <a:round/>
+                      <a:headEnd type="none" w="med" len="med"/>
+                      <a:tailEnd type="none" w="med" len="med"/>
+                    </a:lnR>
+                    <a:lnT w="9525" cap="flat" cmpd="sng" algn="ctr">
+                      <a:solidFill>
+                        <a:srgbClr val="D5E3E0"/>
+                      </a:solidFill>
+                      <a:prstDash val="solid"/>
+                      <a:round/>
+                      <a:headEnd type="none" w="med" len="med"/>
+                      <a:tailEnd type="none" w="med" len="med"/>
+                    </a:lnT>
+                    <a:lnB w="9525" cap="flat" cmpd="sng" algn="ctr">
+                      <a:solidFill>
+                        <a:srgbClr val="D5E3E0"/>
+                      </a:solidFill>
+                      <a:prstDash val="solid"/>
+                      <a:round/>
+                      <a:headEnd type="none" w="med" len="med"/>
+                      <a:tailEnd type="none" w="med" len="med"/>
+                    </a:lnB>
+                    <a:solidFill>
+                      <a:srgbClr val="FFFFFF"/>
+                    </a:solidFill>
+                  </a:tcPr>
+                </a:tc>
+                <a:tc>
+                  <a:txBody>
+                    <a:bodyPr/>
+                    <a:lstStyle/>
+                    <a:p>
+                      <a:pPr marL="0" indent="0" algn="l">
+                        <a:buNone/>
+                      </a:pPr>
+                      <a:r>
+                        <a:rPr lang="en-US" sz="1400" dirty="0">
+                          <a:solidFill>
+                            <a:srgbClr val="DC2626"/>
+                          </a:solidFill>
+                          <a:latin typeface="+mn-lt" pitchFamily="34" charset="0"/>
+                          <a:ea typeface="+mn-lt" pitchFamily="34" charset="-122"/>
+                          <a:cs typeface="+mn-lt" pitchFamily="34" charset="-120"/>
+                        </a:rPr>
+                        <a:t>Loss</a:t>
+                      </a:r>
+                      <a:endParaRPr lang="en-US" sz="1400" dirty="0">
+                        <a:latin typeface="+mn-lt" charset="0"/>
+                        <a:ea typeface="+mn-lt" charset="0"/>
+                        <a:cs typeface="+mn-lt" charset="0"/>
+                      </a:endParaRPr>
+                    </a:p>
+                  </a:txBody>
+                  <a:tcPr anchor="ctr">
+                    <a:lnL w="9525" cap="flat" cmpd="sng" algn="ctr">
+                      <a:solidFill>
+                        <a:srgbClr val="D5E3E0"/>
+                      </a:solidFill>
+                      <a:prstDash val="solid"/>
+                      <a:round/>
+                      <a:headEnd type="none" w="med" len="med"/>
+                      <a:tailEnd type="none" w="med" len="med"/>
+                    </a:lnL>
+                    <a:lnR w="9525" cap="flat" cmpd="sng" algn="ctr">
+                      <a:solidFill>
+                        <a:srgbClr val="D5E3E0"/>
+                      </a:solidFill>
+                      <a:prstDash val="solid"/>
+                      <a:round/>
+                      <a:headEnd type="none" w="med" len="med"/>
+                      <a:tailEnd type="none" w="med" len="med"/>
+                    </a:lnR>
+                    <a:lnT w="9525" cap="flat" cmpd="sng" algn="ctr">
+                      <a:solidFill>
+                        <a:srgbClr val="D5E3E0"/>
+                      </a:solidFill>
+                      <a:prstDash val="solid"/>
+                      <a:round/>
+                      <a:headEnd type="none" w="med" len="med"/>
+                      <a:tailEnd type="none" w="med" len="med"/>
+                    </a:lnT>
+                    <a:lnB w="9525" cap="flat" cmpd="sng" algn="ctr">
+                      <a:solidFill>
+                        <a:srgbClr val="D5E3E0"/>
+                      </a:solidFill>
+                      <a:prstDash val="solid"/>
+                      <a:round/>
+                      <a:headEnd type="none" w="med" len="med"/>
+                      <a:tailEnd type="none" w="med" len="med"/>
+                    </a:lnB>
+                    <a:solidFill>
+                      <a:srgbClr val="FFFFFF"/>
+                    </a:solidFill>
+                  </a:tcPr>
+                </a:tc>
+                <a:extLst>
+                  <a:ext uri="{0D108BD9-81ED-4DB2-BD59-A6C34878D82A}">
+                    <a16:rowId xmlns:a16="http://schemas.microsoft.com/office/drawing/2014/main" val="10009"/>
+                  </a:ext>
+                </a:extLst>
+              </a:tr>
+            </a:tbl>
+          </a:graphicData>
+        </a:graphic>
+      </p:graphicFrame>
+      <p:sp>
+        <p:nvSpPr>
+          <p:cNvPr id="4" name="g2_bg"/>
+          <p:cNvSpPr/>
+          <p:nvPr/>
+        </p:nvSpPr>
+        <p:spPr>
+          <a:xfrm>
+            <a:off x="4709160" y="1143000"/>
+            <a:ext cx="3977640" cy="1097280"/>
+          </a:xfrm>
+          <a:prstGeom prst="roundRect">
+            <a:avLst>
+              <a:gd name="adj" fmla="val 8333"/>
+            </a:avLst>
+          </a:prstGeom>
+          <a:solidFill>
+            <a:schemeClr val="bg1"/>
+          </a:solidFill>
+          <a:ln w="12700">
+            <a:solidFill>
+              <a:schemeClr val="bg1"/>
+            </a:solidFill>
+            <a:prstDash val="solid"/>
+          </a:ln>
+          <a:effectLst>
+            <a:outerShdw blurRad="101600" dist="25400" dir="5400000" algn="bl" rotWithShape="0">
+              <a:srgbClr val="10222B">
+                <a:alpha val="15000"/>
+              </a:srgbClr>
+            </a:outerShdw>
+          </a:effectLst>
+        </p:spPr>
+      </p:sp>
+      <p:sp>
+        <p:nvSpPr>
+          <p:cNvPr id="5" name="g2_v"/>
+          <p:cNvSpPr txBox="1"/>
+          <p:nvPr/>
+        </p:nvSpPr>
+        <p:spPr>
+          <a:xfrm>
+            <a:off x="4892040" y="1216152"/>
+            <a:ext cx="3611880" cy="411480"/>
+          </a:xfrm>
+          <a:prstGeom prst="rect">
+            <a:avLst/>
+          </a:prstGeom>
+          <a:noFill/>
+          <a:ln/>
+        </p:spPr>
+        <p:txBody>
+          <a:bodyPr wrap="square" lIns="0" tIns="0" rIns="0" bIns="0" rtlCol="0" anchor="ctr"/>
+          <a:lstStyle/>
+          <a:p>
+            <a:pPr marL="0" indent="0">
+              <a:buNone/>
+            </a:pPr>
+            <a:r>
+              <a:rPr lang="en-US" sz="2400" b="1" dirty="0">
+                <a:solidFill>
+                  <a:schemeClr val="accent4"/>
+                </a:solidFill>
+                <a:latin typeface="Cambria" pitchFamily="34" charset="0"/>
+                <a:ea typeface="Cambria" pitchFamily="34" charset="-122"/>
+                <a:cs typeface="Cambria" pitchFamily="34" charset="-120"/>
+              </a:rPr>
+              <a:t>$1,234.60</a:t>
+            </a:r>
+            <a:endParaRPr lang="en-US" sz="2400" dirty="0"/>
+          </a:p>
+        </p:txBody>
+      </p:sp>
+      <p:sp>
+        <p:nvSpPr>
+          <p:cNvPr id="6" name="g2_d"/>
+          <p:cNvSpPr txBox="1"/>
+          <p:nvPr/>
+        </p:nvSpPr>
+        <p:spPr>
+          <a:xfrm>
+            <a:off x="4892040" y="1673352"/>
+            <a:ext cx="3611880" cy="502920"/>
+          </a:xfrm>
+          <a:prstGeom prst="rect">
+            <a:avLst/>
+          </a:prstGeom>
+          <a:noFill/>
+          <a:ln/>
+        </p:spPr>
+        <p:txBody>
+          <a:bodyPr wrap="square" lIns="0" tIns="0" rIns="0" bIns="0" rtlCol="0" anchor="t"/>
+          <a:lstStyle/>
+          <a:p>
+            <a:pPr marL="0" indent="0">
+              <a:buNone/>
+            </a:pPr>
+            <a:r>
+              <a:rPr lang="en-US" sz="1400" dirty="0">
+                <a:solidFill>
+                  <a:schemeClr val="tx1"/>
+                </a:solidFill>
+                <a:latin typeface="Calibri" pitchFamily="34" charset="0"/>
+                <a:ea typeface="Calibri" pitchFamily="34" charset="-122"/>
+                <a:cs typeface="Calibri" pitchFamily="34" charset="-120"/>
+              </a:rPr>
+              <a:t>earned at 0% and 20% discounts combined.</a:t>
+            </a:r>
+            <a:endParaRPr lang="en-US" sz="1400" dirty="0"/>
+          </a:p>
+        </p:txBody>
+      </p:sp>
+      <p:sp>
+        <p:nvSpPr>
+          <p:cNvPr id="7" name="g3_bg"/>
+          <p:cNvSpPr/>
+          <p:nvPr/>
+        </p:nvSpPr>
+        <p:spPr>
+          <a:xfrm>
+            <a:off x="4709160" y="2331720"/>
+            <a:ext cx="3977640" cy="1097280"/>
+          </a:xfrm>
+          <a:prstGeom prst="roundRect">
+            <a:avLst>
+              <a:gd name="adj" fmla="val 8333"/>
+            </a:avLst>
+          </a:prstGeom>
+          <a:solidFill>
+            <a:schemeClr val="bg1"/>
+          </a:solidFill>
+          <a:ln w="12700">
+            <a:solidFill>
+              <a:schemeClr val="bg1"/>
+            </a:solidFill>
+            <a:prstDash val="solid"/>
+          </a:ln>
+          <a:effectLst>
+            <a:outerShdw blurRad="101600" dist="25400" dir="5400000" algn="bl" rotWithShape="0">
+              <a:srgbClr val="10222B">
+                <a:alpha val="15000"/>
+              </a:srgbClr>
+            </a:outerShdw>
+          </a:effectLst>
+        </p:spPr>
+      </p:sp>
+      <p:sp>
+        <p:nvSpPr>
+          <p:cNvPr id="8" name="g3_v"/>
+          <p:cNvSpPr txBox="1"/>
+          <p:nvPr/>
+        </p:nvSpPr>
+        <p:spPr>
+          <a:xfrm>
+            <a:off x="4892040" y="2404872"/>
+            <a:ext cx="3611880" cy="411480"/>
+          </a:xfrm>
+          <a:prstGeom prst="rect">
+            <a:avLst/>
+          </a:prstGeom>
+          <a:noFill/>
+          <a:ln/>
+        </p:spPr>
+        <p:txBody>
+          <a:bodyPr wrap="square" lIns="0" tIns="0" rIns="0" bIns="0" rtlCol="0" anchor="ctr"/>
+          <a:lstStyle/>
+          <a:p>
+            <a:pPr marL="0" indent="0">
+              <a:buNone/>
+            </a:pPr>
+            <a:r>
+              <a:rPr lang="en-US" sz="2400" b="1" dirty="0">
+                <a:solidFill>
+                  <a:schemeClr val="accent3"/>
+                </a:solidFill>
+                <a:latin typeface="Cambria" pitchFamily="34" charset="0"/>
+                <a:ea typeface="Cambria" pitchFamily="34" charset="-122"/>
+                <a:cs typeface="Cambria" pitchFamily="34" charset="-120"/>
+              </a:rPr>
+              <a:t>−$2,399.63</a:t>
+            </a:r>
+            <a:endParaRPr lang="en-US" sz="2400" dirty="0"/>
+          </a:p>
+        </p:txBody>
+      </p:sp>
+      <p:sp>
+        <p:nvSpPr>
+          <p:cNvPr id="9" name="g3_d"/>
+          <p:cNvSpPr txBox="1"/>
+          <p:nvPr/>
+        </p:nvSpPr>
+        <p:spPr>
+          <a:xfrm>
+            <a:off x="4892040" y="2862072"/>
+            <a:ext cx="3611880" cy="502920"/>
+          </a:xfrm>
+          <a:prstGeom prst="rect">
+            <a:avLst/>
+          </a:prstGeom>
+          <a:noFill/>
+          <a:ln/>
+        </p:spPr>
+        <p:txBody>
+          <a:bodyPr wrap="square" lIns="0" tIns="0" rIns="0" bIns="0" rtlCol="0" anchor="t"/>
+          <a:lstStyle/>
+          <a:p>
+            <a:pPr marL="0" indent="0">
+              <a:buNone/>
+            </a:pPr>
+            <a:r>
+              <a:rPr lang="en-US" sz="1400" dirty="0">
+                <a:solidFill>
+                  <a:schemeClr val="tx1"/>
+                </a:solidFill>
+                <a:latin typeface="Calibri" pitchFamily="34" charset="0"/>
+                <a:ea typeface="Calibri" pitchFamily="34" charset="-122"/>
+                <a:cs typeface="Calibri" pitchFamily="34" charset="-120"/>
+              </a:rPr>
+              <a:t>lost across all seven discount levels of 30% and above.</a:t>
+            </a:r>
+            <a:endParaRPr lang="en-US" sz="1400" dirty="0"/>
+          </a:p>
+        </p:txBody>
+      </p:sp>
+      <p:sp>
+        <p:nvSpPr>
+          <p:cNvPr id="10" name="g4_bg"/>
+          <p:cNvSpPr/>
+          <p:nvPr/>
+        </p:nvSpPr>
+        <p:spPr>
+          <a:xfrm>
+            <a:off x="4709160" y="3520440"/>
+            <a:ext cx="3977640" cy="1097280"/>
+          </a:xfrm>
+          <a:prstGeom prst="roundRect">
+            <a:avLst>
+              <a:gd name="adj" fmla="val 8333"/>
+            </a:avLst>
+          </a:prstGeom>
+          <a:solidFill>
+            <a:schemeClr val="bg1"/>
+          </a:solidFill>
+          <a:ln w="12700">
+            <a:solidFill>
+              <a:schemeClr val="bg1"/>
+            </a:solidFill>
+            <a:prstDash val="solid"/>
+          </a:ln>
+          <a:effectLst>
+            <a:outerShdw blurRad="101600" dist="25400" dir="5400000" algn="bl" rotWithShape="0">
+              <a:srgbClr val="10222B">
+                <a:alpha val="15000"/>
+              </a:srgbClr>
+            </a:outerShdw>
+          </a:effectLst>
+        </p:spPr>
+      </p:sp>
+      <p:sp>
+        <p:nvSpPr>
+          <p:cNvPr id="3" name="g4_v"/>
+          <p:cNvSpPr txBox="1"/>
+          <p:nvPr/>
+        </p:nvSpPr>
+        <p:spPr>
+          <a:xfrm>
+            <a:off x="4892040" y="3593592"/>
+            <a:ext cx="3611880" cy="411480"/>
+          </a:xfrm>
+          <a:prstGeom prst="rect">
+            <a:avLst/>
+          </a:prstGeom>
+          <a:noFill/>
+          <a:ln/>
+        </p:spPr>
+        <p:txBody>
+          <a:bodyPr wrap="square" lIns="0" tIns="0" rIns="0" bIns="0" rtlCol="0" anchor="ctr"/>
+          <a:lstStyle/>
+          <a:p>
+            <a:pPr marL="0" indent="0">
+              <a:buNone/>
+            </a:pPr>
+            <a:r>
+              <a:rPr lang="en-US" sz="2400" b="1" dirty="0">
+                <a:solidFill>
+                  <a:schemeClr val="accent1"/>
+                </a:solidFill>
+                <a:latin typeface="Cambria" pitchFamily="34" charset="0"/>
+                <a:ea typeface="Cambria" pitchFamily="34" charset="-122"/>
+                <a:cs typeface="Cambria" pitchFamily="34" charset="-120"/>
+              </a:rPr>
+              <a:t>69%</a:t>
+            </a:r>
+            <a:endParaRPr lang="en-US" sz="2400" dirty="0"/>
+          </a:p>
+        </p:txBody>
+      </p:sp>
+      <p:sp>
+        <p:nvSpPr>
+          <p:cNvPr id="12" name="g4_d"/>
+          <p:cNvSpPr txBox="1"/>
+          <p:nvPr/>
+        </p:nvSpPr>
+        <p:spPr>
+          <a:xfrm>
+            <a:off x="4892040" y="4050792"/>
+            <a:ext cx="3611880" cy="502920"/>
+          </a:xfrm>
+          <a:prstGeom prst="rect">
+            <a:avLst/>
+          </a:prstGeom>
+          <a:noFill/>
+          <a:ln/>
+        </p:spPr>
+        <p:txBody>
+          <a:bodyPr wrap="square" lIns="0" tIns="0" rIns="0" bIns="0" rtlCol="0" anchor="t"/>
+          <a:lstStyle/>
+          <a:p>
+            <a:pPr marL="0" indent="0">
+              <a:buNone/>
+            </a:pPr>
+            <a:r>
+              <a:rPr lang="en-US" sz="1400" dirty="0">
+                <a:solidFill>
+                  <a:schemeClr val="tx1"/>
+                </a:solidFill>
+                <a:latin typeface="Calibri" pitchFamily="34" charset="0"/>
+                <a:ea typeface="Calibri" pitchFamily="34" charset="-122"/>
+                <a:cs typeface="Calibri" pitchFamily="34" charset="-120"/>
+              </a:rPr>
+              <a:t>of those losses come from the 50% discount alone ($1,665.05).</a:t>
+            </a:r>
+            <a:endParaRPr lang="en-US" sz="1400" dirty="0"/>
+          </a:p>
+        </p:txBody>
+      </p:sp>
+      <p:sp>
+        <p:nvSpPr>
+          <p:cNvPr id="25" name="Slide Number Placeholder 0"/>
+          <p:cNvSpPr>
+            <a:spLocks noGrp="1"/>
+          </p:cNvSpPr>
+          <p:nvPr>
+            <p:ph type="sldNum" sz="quarter" idx="4294967295"/>
+          </p:nvPr>
+        </p:nvSpPr>
+        <p:spPr>
+          <a:xfrm>
+            <a:off x="8229600" y="4800600"/>
+            <a:ext cx="457200" cy="228600"/>
+          </a:xfrm>
+          <a:prstGeom prst="rect">
+            <a:avLst/>
+          </a:prstGeom>
+          <a:extLst>
+            <a:ext uri="{C572A759-6A51-4108-AA02-DFA0A04FC94B}">
+              <ma14:wrappingTextBoxFlag xmlns="" xmlns:ma14="http://schemas.microsoft.com/office/mac/drawingml/2011/main" val="0"/>
+            </a:ext>
+          </a:extLst>
+        </p:spPr>
+        <p:txBody>
+          <a:bodyPr/>
+          <a:lstStyle>
+            <a:lvl1pPr>
+              <a:defRPr sz="1000">
+                <a:solidFill>
+                  <a:schemeClr val="tx1"/>
+                </a:solidFill>
+              </a:defRPr>
+            </a:lvl1pPr>
+          </a:lstStyle>
+          <a:p>
+            <a:pPr algn="l"/>
+            <a:fld id="{F7021451-1387-4CA6-816F-3879F97B5CBC}" type="slidenum">
+              <a:rPr lang="en-US" b="0"/>
+              <a:t>9</a:t>
+            </a:fld>
+            <a:endParaRPr lang="en-US"/>
+          </a:p>
+        </p:txBody>
+      </p:sp>
+    </p:spTree>
+  </p:cSld>
+  <p:clrMapOvr>
+    <a:masterClrMapping/>
+  </p:clrMapOvr>
+  <p:transition spd="med">
+    <p:fade/>
+  </p:transition>
+  <p:timing>
+    <p:tnLst>
+      <p:par>
+        <p:cTn id="1" dur="indefinite" restart="never" nodeType="tmRoot">
+          <p:childTnLst>
+            <p:seq concurrent="1" nextAc="seek">
+              <p:cTn id="2" dur="indefinite" nodeType="mainSeq">
+                <p:childTnLst>
+                  <p:par>
+                    <p:cTn id="3" fill="hold">
+                      <p:stCondLst>
+                        <p:cond delay="indefinite"/>
+                      </p:stCondLst>
+                      <p:childTnLst>
+                        <p:par>
+                          <p:cTn id="4" fill="hold">
+                            <p:stCondLst>
+                              <p:cond delay="0"/>
+                            </p:stCondLst>
+                            <p:childTnLst>
+                              <p:par>
+                                <p:cTn id="5" presetID="10" presetClass="entr" presetSubtype="0" fill="hold" nodeType="clickEffect">
+                                  <p:stCondLst>
+                                    <p:cond delay="0"/>
+                                  </p:stCondLst>
+                                  <p:childTnLst>
+                                    <p:set>
+                                      <p:cBhvr>
+                                        <p:cTn id="6" dur="1" fill="hold">
+                                          <p:stCondLst>
+                                            <p:cond delay="0"/>
+                                          </p:stCondLst>
+                                        </p:cTn>
+                                        <p:tgtEl>
+                                          <p:spTgt spid="11"/>
+                                        </p:tgtEl>
+                                        <p:attrNameLst>
+                                          <p:attrName>style.visibility</p:attrName>
+                                        </p:attrNameLst>
+                                      </p:cBhvr>
+                                      <p:to>
+                                        <p:strVal val="visible"/>
+                                      </p:to>
+                                    </p:set>
+                                    <p:animEffect transition="in" filter="fade">
+                                      <p:cBhvr>
+                                        <p:cTn id="7" dur="500"/>
+                                        <p:tgtEl>
+                                          <p:spTgt spid="11"/>
+                                        </p:tgtEl>
+                                      </p:cBhvr>
+                                    </p:animEffect>
+                                  </p:childTnLst>
+                                </p:cTn>
+                              </p:par>
+                            </p:childTnLst>
+                          </p:cTn>
+                        </p:par>
+                      </p:childTnLst>
+                    </p:cTn>
+                  </p:par>
+                  <p:par>
+                    <p:cTn id="8" fill="hold">
+                      <p:stCondLst>
+                        <p:cond delay="indefinite"/>
+                      </p:stCondLst>
+                      <p:childTnLst>
+                        <p:par>
+                          <p:cTn id="9" fill="hold">
+                            <p:stCondLst>
+                              <p:cond delay="0"/>
+                            </p:stCondLst>
+                            <p:childTnLst>
+                              <p:par>
+                                <p:cTn id="10" presetID="10" presetClass="entr" presetSubtype="0" fill="hold" nodeType="clickEffect">
+                                  <p:stCondLst>
+                                    <p:cond delay="0"/>
+                                  </p:stCondLst>
+                                  <p:childTnLst>
+                                    <p:set>
+                                      <p:cBhvr>
+                                        <p:cTn id="11" dur="1" fill="hold">
+                                          <p:stCondLst>
+                                            <p:cond delay="0"/>
+                                          </p:stCondLst>
+                                        </p:cTn>
+                                        <p:tgtEl>
+                                          <p:spTgt spid="4"/>
+                                        </p:tgtEl>
+                                        <p:attrNameLst>
+                                          <p:attrName>style.visibility</p:attrName>
+                                        </p:attrNameLst>
+                                      </p:cBhvr>
+                                      <p:to>
+                                        <p:strVal val="visible"/>
+                                      </p:to>
+                                    </p:set>
+                                    <p:animEffect transition="in" filter="fade">
+                                      <p:cBhvr>
+                                        <p:cTn id="12" dur="500"/>
+                                        <p:tgtEl>
+                                          <p:spTgt spid="4"/>
+                                        </p:tgtEl>
+                                      </p:cBhvr>
+                                    </p:animEffect>
+                                  </p:childTnLst>
+                                </p:cTn>
+                              </p:par>
+                              <p:par>
+                                <p:cTn id="13" presetID="10" presetClass="entr" presetSubtype="0" fill="hold" nodeType="withEffect">
+                                  <p:stCondLst>
+                                    <p:cond delay="80"/>
+                                  </p:stCondLst>
+                                  <p:childTnLst>
+                                    <p:set>
+                                      <p:cBhvr>
+                                        <p:cTn id="14" dur="1" fill="hold">
+                                          <p:stCondLst>
+                                            <p:cond delay="0"/>
+                                          </p:stCondLst>
+                                        </p:cTn>
+                                        <p:tgtEl>
+                                          <p:spTgt spid="5"/>
+                                        </p:tgtEl>
+                                        <p:attrNameLst>
+                                          <p:attrName>style.visibility</p:attrName>
+                                        </p:attrNameLst>
+                                      </p:cBhvr>
+                                      <p:to>
+                                        <p:strVal val="visible"/>
+                                      </p:to>
+                                    </p:set>
+                                    <p:animEffect transition="in" filter="fade">
+                                      <p:cBhvr>
+                                        <p:cTn id="15" dur="500"/>
+                                        <p:tgtEl>
+                                          <p:spTgt spid="5"/>
+                                        </p:tgtEl>
+                                      </p:cBhvr>
+                                    </p:animEffect>
+                                  </p:childTnLst>
+                                </p:cTn>
+                              </p:par>
+                              <p:par>
+                                <p:cTn id="16" presetID="10" presetClass="entr" presetSubtype="0" fill="hold" nodeType="withEffect">
+                                  <p:stCondLst>
+                                    <p:cond delay="160"/>
+                                  </p:stCondLst>
+                                  <p:childTnLst>
+                                    <p:set>
+                                      <p:cBhvr>
+                                        <p:cTn id="17" dur="1" fill="hold">
+                                          <p:stCondLst>
+                                            <p:cond delay="0"/>
+                                          </p:stCondLst>
+                                        </p:cTn>
+                                        <p:tgtEl>
+                                          <p:spTgt spid="6"/>
+                                        </p:tgtEl>
+                                        <p:attrNameLst>
+                                          <p:attrName>style.visibility</p:attrName>
+                                        </p:attrNameLst>
+                                      </p:cBhvr>
+                                      <p:to>
+                                        <p:strVal val="visible"/>
+                                      </p:to>
+                                    </p:set>
+                                    <p:animEffect transition="in" filter="fade">
+                                      <p:cBhvr>
+                                        <p:cTn id="18" dur="500"/>
+                                        <p:tgtEl>
+                                          <p:spTgt spid="6"/>
+                                        </p:tgtEl>
+                                      </p:cBhvr>
+                                    </p:animEffect>
+                                  </p:childTnLst>
+                                </p:cTn>
+                              </p:par>
+                            </p:childTnLst>
+                          </p:cTn>
+                        </p:par>
+                      </p:childTnLst>
+                    </p:cTn>
+                  </p:par>
+                  <p:par>
+                    <p:cTn id="19" fill="hold">
+                      <p:stCondLst>
+                        <p:cond delay="indefinite"/>
+                      </p:stCondLst>
+                      <p:childTnLst>
+                        <p:par>
+                          <p:cTn id="20" fill="hold">
+                            <p:stCondLst>
+                              <p:cond delay="0"/>
+                            </p:stCondLst>
+                            <p:childTnLst>
+                              <p:par>
+                                <p:cTn id="21" presetID="10" presetClass="entr" presetSubtype="0" fill="hold" nodeType="clickEffect">
+                                  <p:stCondLst>
+                                    <p:cond delay="0"/>
+                                  </p:stCondLst>
+                                  <p:childTnLst>
+                                    <p:set>
+                                      <p:cBhvr>
+                                        <p:cTn id="22" dur="1" fill="hold">
+                                          <p:stCondLst>
+                                            <p:cond delay="0"/>
+                                          </p:stCondLst>
+                                        </p:cTn>
+                                        <p:tgtEl>
+                                          <p:spTgt spid="7"/>
+                                        </p:tgtEl>
+                                        <p:attrNameLst>
+                                          <p:attrName>style.visibility</p:attrName>
+                                        </p:attrNameLst>
+                                      </p:cBhvr>
+                                      <p:to>
+                                        <p:strVal val="visible"/>
+                                      </p:to>
+                                    </p:set>
+                                    <p:animEffect transition="in" filter="fade">
+                                      <p:cBhvr>
+                                        <p:cTn id="23" dur="500"/>
+                                        <p:tgtEl>
+                                          <p:spTgt spid="7"/>
+                                        </p:tgtEl>
+                                      </p:cBhvr>
+                                    </p:animEffect>
+                                  </p:childTnLst>
+                                </p:cTn>
+                              </p:par>
+                              <p:par>
+                                <p:cTn id="24" presetID="10" presetClass="entr" presetSubtype="0" fill="hold" nodeType="withEffect">
+                                  <p:stCondLst>
+                                    <p:cond delay="80"/>
+                                  </p:stCondLst>
+                                  <p:childTnLst>
+                                    <p:set>
+                                      <p:cBhvr>
+                                        <p:cTn id="25" dur="1" fill="hold">
+                                          <p:stCondLst>
+                                            <p:cond delay="0"/>
+                                          </p:stCondLst>
+                                        </p:cTn>
+                                        <p:tgtEl>
+                                          <p:spTgt spid="8"/>
+                                        </p:tgtEl>
+                                        <p:attrNameLst>
+                                          <p:attrName>style.visibility</p:attrName>
+                                        </p:attrNameLst>
+                                      </p:cBhvr>
+                                      <p:to>
+                                        <p:strVal val="visible"/>
+                                      </p:to>
+                                    </p:set>
+                                    <p:animEffect transition="in" filter="fade">
+                                      <p:cBhvr>
+                                        <p:cTn id="26" dur="500"/>
+                                        <p:tgtEl>
+                                          <p:spTgt spid="8"/>
+                                        </p:tgtEl>
+                                      </p:cBhvr>
+                                    </p:animEffect>
+                                  </p:childTnLst>
+                                </p:cTn>
+                              </p:par>
+                              <p:par>
+                                <p:cTn id="27" presetID="10" presetClass="entr" presetSubtype="0" fill="hold" nodeType="withEffect">
+                                  <p:stCondLst>
+                                    <p:cond delay="160"/>
+                                  </p:stCondLst>
+                                  <p:childTnLst>
+                                    <p:set>
+                                      <p:cBhvr>
+                                        <p:cTn id="28" dur="1" fill="hold">
+                                          <p:stCondLst>
+                                            <p:cond delay="0"/>
+                                          </p:stCondLst>
+                                        </p:cTn>
+                                        <p:tgtEl>
+                                          <p:spTgt spid="9"/>
+                                        </p:tgtEl>
+                                        <p:attrNameLst>
+                                          <p:attrName>style.visibility</p:attrName>
+                                        </p:attrNameLst>
+                                      </p:cBhvr>
+                                      <p:to>
+                                        <p:strVal val="visible"/>
+                                      </p:to>
+                                    </p:set>
+                                    <p:animEffect transition="in" filter="fade">
+                                      <p:cBhvr>
+                                        <p:cTn id="29" dur="500"/>
+                                        <p:tgtEl>
+                                          <p:spTgt spid="9"/>
+                                        </p:tgtEl>
+                                      </p:cBhvr>
+                                    </p:animEffect>
+                                  </p:childTnLst>
+                                </p:cTn>
+                              </p:par>
+                            </p:childTnLst>
+                          </p:cTn>
+                        </p:par>
+                      </p:childTnLst>
+                    </p:cTn>
+                  </p:par>
+                  <p:par>
+                    <p:cTn id="30" fill="hold">
+                      <p:stCondLst>
+                        <p:cond delay="indefinite"/>
+                      </p:stCondLst>
+                      <p:childTnLst>
+                        <p:par>
+                          <p:cTn id="31" fill="hold">
+                            <p:stCondLst>
+                              <p:cond delay="0"/>
+                            </p:stCondLst>
+                            <p:childTnLst>
+                              <p:par>
+                                <p:cTn id="32" presetID="10" presetClass="entr" presetSubtype="0" fill="hold" nodeType="clickEffect">
+                                  <p:stCondLst>
+                                    <p:cond delay="0"/>
+                                  </p:stCondLst>
+                                  <p:childTnLst>
+                                    <p:set>
+                                      <p:cBhvr>
+                                        <p:cTn id="33" dur="1" fill="hold">
+                                          <p:stCondLst>
+                                            <p:cond delay="0"/>
+                                          </p:stCondLst>
+                                        </p:cTn>
+                                        <p:tgtEl>
+                                          <p:spTgt spid="10"/>
+                                        </p:tgtEl>
+                                        <p:attrNameLst>
+                                          <p:attrName>style.visibility</p:attrName>
+                                        </p:attrNameLst>
+                                      </p:cBhvr>
+                                      <p:to>
+                                        <p:strVal val="visible"/>
+                                      </p:to>
+                                    </p:set>
+                                    <p:animEffect transition="in" filter="fade">
+                                      <p:cBhvr>
+                                        <p:cTn id="34" dur="500"/>
+                                        <p:tgtEl>
+                                          <p:spTgt spid="10"/>
+                                        </p:tgtEl>
+                                      </p:cBhvr>
+                                    </p:animEffect>
+                                  </p:childTnLst>
+                                </p:cTn>
+                              </p:par>
+                              <p:par>
+                                <p:cTn id="35" presetID="10" presetClass="entr" presetSubtype="0" fill="hold" nodeType="withEffect">
+                                  <p:stCondLst>
+                                    <p:cond delay="80"/>
+                                  </p:stCondLst>
+                                  <p:childTnLst>
+                                    <p:set>
+                                      <p:cBhvr>
+                                        <p:cTn id="36" dur="1" fill="hold">
+                                          <p:stCondLst>
+                                            <p:cond delay="0"/>
+                                          </p:stCondLst>
+                                        </p:cTn>
+                                        <p:tgtEl>
+                                          <p:spTgt spid="11"/>
+                                        </p:tgtEl>
+                                        <p:attrNameLst>
+                                          <p:attrName>style.visibility</p:attrName>
+                                        </p:attrNameLst>
+                                      </p:cBhvr>
+                                      <p:to>
+                                        <p:strVal val="visible"/>
+                                      </p:to>
+                                    </p:set>
+                                    <p:animEffect transition="in" filter="fade">
+                                      <p:cBhvr>
+                                        <p:cTn id="37" dur="500"/>
+                                        <p:tgtEl>
+                                          <p:spTgt spid="11"/>
+                                        </p:tgtEl>
+                                      </p:cBhvr>
+                                    </p:animEffect>
+                                  </p:childTnLst>
+                                </p:cTn>
+                              </p:par>
+                              <p:par>
+                                <p:cTn id="38" presetID="10" presetClass="entr" presetSubtype="0" fill="hold" nodeType="withEffect">
+                                  <p:stCondLst>
+                                    <p:cond delay="160"/>
+                                  </p:stCondLst>
+                                  <p:childTnLst>
+                                    <p:set>
+                                      <p:cBhvr>
+                                        <p:cTn id="39" dur="1" fill="hold">
+                                          <p:stCondLst>
+                                            <p:cond delay="0"/>
+                                          </p:stCondLst>
+                                        </p:cTn>
+                                        <p:tgtEl>
+                                          <p:spTgt spid="12"/>
+                                        </p:tgtEl>
+                                        <p:attrNameLst>
+                                          <p:attrName>style.visibility</p:attrName>
+                                        </p:attrNameLst>
+                                      </p:cBhvr>
+                                      <p:to>
+                                        <p:strVal val="visible"/>
+                                      </p:to>
+                                    </p:set>
+                                    <p:animEffect transition="in" filter="fade">
+                                      <p:cBhvr>
+                                        <p:cTn id="40" dur="500"/>
                                         <p:tgtEl>
                                           <p:spTgt spid="12"/>
                                         </p:tgtEl>

--- a/Data_Analysis_Project_Report.pptx
+++ b/Data_Analysis_Project_Report.pptx
@@ -1,23 +1,23 @@
 
 <file path=ppt/presentation.xml><?xml version="1.0" encoding="utf-8"?>
-<p:presentation xmlns:a="http://schemas.openxmlformats.org/drawingml/2006/main" xmlns:r="http://schemas.openxmlformats.org/officeDocument/2006/relationships" xmlns:p="http://schemas.openxmlformats.org/presentationml/2006/main" saveSubsetFonts="1" autoCompressPictures="0">
+<p:presentation xmlns:a="http://schemas.openxmlformats.org/drawingml/2006/main" xmlns:r="http://schemas.openxmlformats.org/officeDocument/2006/relationships" xmlns:p="http://schemas.openxmlformats.org/presentationml/2006/main" autoCompressPictures="0">
   <p:sldMasterIdLst>
     <p:sldMasterId id="2147483648" r:id="rId1"/>
   </p:sldMasterIdLst>
   <p:notesMasterIdLst>
-    <p:notesMasterId r:id="rId12"/>
+    <p:notesMasterId r:id="rId4"/>
   </p:notesMasterIdLst>
   <p:sldIdLst>
-    <p:sldId id="256" r:id="rId2"/>
-    <p:sldId id="258" r:id="rId3"/>
-    <p:sldId id="257" r:id="rId4"/>
-    <p:sldId id="260" r:id="rId5"/>
-    <p:sldId id="261" r:id="rId6"/>
-    <p:sldId id="262" r:id="rId7"/>
-    <p:sldId id="263" r:id="rId8"/>
-    <p:sldId id="264" r:id="rId9"/>
-    <p:sldId id="265" r:id="rId10"/>
-    <p:sldId id="266" r:id="rId11"/>
+    <p:sldId id="256" r:id="rId3"/>
+    <p:sldId id="258" r:id="rId5"/>
+    <p:sldId id="257" r:id="rId6"/>
+    <p:sldId id="260" r:id="rId7"/>
+    <p:sldId id="261" r:id="rId8"/>
+    <p:sldId id="262" r:id="rId9"/>
+    <p:sldId id="263" r:id="rId10"/>
+    <p:sldId id="264" r:id="rId11"/>
+    <p:sldId id="265" r:id="rId12"/>
+    <p:sldId id="266" r:id="rId13"/>
   </p:sldIdLst>
   <p:sldSz cx="9144000" cy="5143500" type="screen16x9"/>
   <p:notesSz cx="5143500" cy="9144000"/>
@@ -140,9 +140,6 @@
         </p14:section>
       </p14:sectionLst>
     </p:ext>
-    <p:ext uri="{EFAFB233-063F-42B5-8137-9DF3F51BA10A}">
-      <p15:sldGuideLst xmlns:p15="http://schemas.microsoft.com/office/powerpoint/2012/main"/>
-    </p:ext>
   </p:extLst>
 </p:presentation>
 </file>
@@ -170,11 +167,6 @@
         </a:xfrm>
       </p:grpSpPr>
     </p:spTree>
-    <p:extLst>
-      <p:ext uri="{BB962C8B-B14F-4D97-AF65-F5344CB8AC3E}">
-        <p14:creationId xmlns:p14="http://schemas.microsoft.com/office/powerpoint/2010/main" val="2836256842"/>
-      </p:ext>
-    </p:extLst>
   </p:cSld>
   <p:clrMap bg1="lt1" tx1="dk1" bg2="lt2" tx2="dk2" accent1="accent1" accent2="accent2" accent3="accent3" accent4="accent4" accent5="accent5" accent6="accent6" hlink="hlink" folHlink="folHlink"/>
   <p:notesStyle>
@@ -337,18 +329,12 @@
           <a:p>
             <a:fld id="{F7021451-1387-4CA6-816F-3879F97B5CBC}" type="slidenum">
               <a:rPr lang="en-US"/>
-              <a:t>1</a:t>
             </a:fld>
             <a:endParaRPr lang="en-US"/>
           </a:p>
         </p:txBody>
       </p:sp>
     </p:spTree>
-    <p:extLst>
-      <p:ext uri="{BB962C8B-B14F-4D97-AF65-F5344CB8AC3E}">
-        <p14:creationId xmlns:p14="http://schemas.microsoft.com/office/powerpoint/2010/main" val="1024086991"/>
-      </p:ext>
-    </p:extLst>
   </p:cSld>
   <p:clrMapOvr>
     <a:masterClrMapping/>
@@ -421,18 +407,12 @@
           <a:p>
             <a:fld id="{F7021451-1387-4CA6-816F-3879F97B5CBC}" type="slidenum">
               <a:rPr lang="en-US"/>
-              <a:t>10</a:t>
             </a:fld>
             <a:endParaRPr lang="en-US"/>
           </a:p>
         </p:txBody>
       </p:sp>
     </p:spTree>
-    <p:extLst>
-      <p:ext uri="{BB962C8B-B14F-4D97-AF65-F5344CB8AC3E}">
-        <p14:creationId xmlns:p14="http://schemas.microsoft.com/office/powerpoint/2010/main" val="1024086991"/>
-      </p:ext>
-    </p:extLst>
   </p:cSld>
   <p:clrMapOvr>
     <a:masterClrMapping/>
@@ -505,18 +485,12 @@
           <a:p>
             <a:fld id="{F7021451-1387-4CA6-816F-3879F97B5CBC}" type="slidenum">
               <a:rPr lang="en-US"/>
-              <a:t>2</a:t>
             </a:fld>
             <a:endParaRPr lang="en-US"/>
           </a:p>
         </p:txBody>
       </p:sp>
     </p:spTree>
-    <p:extLst>
-      <p:ext uri="{BB962C8B-B14F-4D97-AF65-F5344CB8AC3E}">
-        <p14:creationId xmlns:p14="http://schemas.microsoft.com/office/powerpoint/2010/main" val="1024086991"/>
-      </p:ext>
-    </p:extLst>
   </p:cSld>
   <p:clrMapOvr>
     <a:masterClrMapping/>
@@ -589,18 +563,12 @@
           <a:p>
             <a:fld id="{F7021451-1387-4CA6-816F-3879F97B5CBC}" type="slidenum">
               <a:rPr lang="en-US"/>
-              <a:t>3</a:t>
             </a:fld>
             <a:endParaRPr lang="en-US"/>
           </a:p>
         </p:txBody>
       </p:sp>
     </p:spTree>
-    <p:extLst>
-      <p:ext uri="{BB962C8B-B14F-4D97-AF65-F5344CB8AC3E}">
-        <p14:creationId xmlns:p14="http://schemas.microsoft.com/office/powerpoint/2010/main" val="1024086991"/>
-      </p:ext>
-    </p:extLst>
   </p:cSld>
   <p:clrMapOvr>
     <a:masterClrMapping/>
@@ -673,18 +641,12 @@
           <a:p>
             <a:fld id="{F7021451-1387-4CA6-816F-3879F97B5CBC}" type="slidenum">
               <a:rPr lang="en-US"/>
-              <a:t>4</a:t>
             </a:fld>
             <a:endParaRPr lang="en-US"/>
           </a:p>
         </p:txBody>
       </p:sp>
     </p:spTree>
-    <p:extLst>
-      <p:ext uri="{BB962C8B-B14F-4D97-AF65-F5344CB8AC3E}">
-        <p14:creationId xmlns:p14="http://schemas.microsoft.com/office/powerpoint/2010/main" val="1024086991"/>
-      </p:ext>
-    </p:extLst>
   </p:cSld>
   <p:clrMapOvr>
     <a:masterClrMapping/>
@@ -757,18 +719,12 @@
           <a:p>
             <a:fld id="{F7021451-1387-4CA6-816F-3879F97B5CBC}" type="slidenum">
               <a:rPr lang="en-US"/>
-              <a:t>5</a:t>
             </a:fld>
             <a:endParaRPr lang="en-US"/>
           </a:p>
         </p:txBody>
       </p:sp>
     </p:spTree>
-    <p:extLst>
-      <p:ext uri="{BB962C8B-B14F-4D97-AF65-F5344CB8AC3E}">
-        <p14:creationId xmlns:p14="http://schemas.microsoft.com/office/powerpoint/2010/main" val="1024086991"/>
-      </p:ext>
-    </p:extLst>
   </p:cSld>
   <p:clrMapOvr>
     <a:masterClrMapping/>
@@ -841,18 +797,12 @@
           <a:p>
             <a:fld id="{F7021451-1387-4CA6-816F-3879F97B5CBC}" type="slidenum">
               <a:rPr lang="en-US"/>
-              <a:t>6</a:t>
             </a:fld>
             <a:endParaRPr lang="en-US"/>
           </a:p>
         </p:txBody>
       </p:sp>
     </p:spTree>
-    <p:extLst>
-      <p:ext uri="{BB962C8B-B14F-4D97-AF65-F5344CB8AC3E}">
-        <p14:creationId xmlns:p14="http://schemas.microsoft.com/office/powerpoint/2010/main" val="1024086991"/>
-      </p:ext>
-    </p:extLst>
   </p:cSld>
   <p:clrMapOvr>
     <a:masterClrMapping/>
@@ -925,18 +875,12 @@
           <a:p>
             <a:fld id="{F7021451-1387-4CA6-816F-3879F97B5CBC}" type="slidenum">
               <a:rPr lang="en-US"/>
-              <a:t>7</a:t>
             </a:fld>
             <a:endParaRPr lang="en-US"/>
           </a:p>
         </p:txBody>
       </p:sp>
     </p:spTree>
-    <p:extLst>
-      <p:ext uri="{BB962C8B-B14F-4D97-AF65-F5344CB8AC3E}">
-        <p14:creationId xmlns:p14="http://schemas.microsoft.com/office/powerpoint/2010/main" val="1024086991"/>
-      </p:ext>
-    </p:extLst>
   </p:cSld>
   <p:clrMapOvr>
     <a:masterClrMapping/>
@@ -1009,18 +953,12 @@
           <a:p>
             <a:fld id="{F7021451-1387-4CA6-816F-3879F97B5CBC}" type="slidenum">
               <a:rPr lang="en-US"/>
-              <a:t>8</a:t>
             </a:fld>
             <a:endParaRPr lang="en-US"/>
           </a:p>
         </p:txBody>
       </p:sp>
     </p:spTree>
-    <p:extLst>
-      <p:ext uri="{BB962C8B-B14F-4D97-AF65-F5344CB8AC3E}">
-        <p14:creationId xmlns:p14="http://schemas.microsoft.com/office/powerpoint/2010/main" val="1024086991"/>
-      </p:ext>
-    </p:extLst>
   </p:cSld>
   <p:clrMapOvr>
     <a:masterClrMapping/>
@@ -1093,18 +1031,12 @@
           <a:p>
             <a:fld id="{F7021451-1387-4CA6-816F-3879F97B5CBC}" type="slidenum">
               <a:rPr lang="en-US"/>
-              <a:t>9</a:t>
             </a:fld>
             <a:endParaRPr lang="en-US"/>
           </a:p>
         </p:txBody>
       </p:sp>
     </p:spTree>
-    <p:extLst>
-      <p:ext uri="{BB962C8B-B14F-4D97-AF65-F5344CB8AC3E}">
-        <p14:creationId xmlns:p14="http://schemas.microsoft.com/office/powerpoint/2010/main" val="1024086991"/>
-      </p:ext>
-    </p:extLst>
   </p:cSld>
   <p:clrMapOvr>
     <a:masterClrMapping/>
@@ -1192,7 +1124,6 @@
             <a:avLst/>
           </a:prstGeom>
           <a:noFill/>
-          <a:ln/>
         </p:spPr>
         <p:txBody>
           <a:bodyPr wrap="square" rtlCol="0"/>
@@ -1203,9 +1134,9 @@
                 <a:solidFill>
                   <a:schemeClr val="bg1"/>
                 </a:solidFill>
-                <a:latin typeface="Cambria" pitchFamily="34" charset="0"/>
-                <a:ea typeface="Cambria" pitchFamily="34" charset="-122"/>
-                <a:cs typeface="Cambria" pitchFamily="34" charset="-120"/>
+                <a:latin typeface="Cambria" panose="02040503050406030204" pitchFamily="34" charset="0"/>
+                <a:ea typeface="Cambria" panose="02040503050406030204" pitchFamily="34" charset="-122"/>
+                <a:cs typeface="Cambria" panose="02040503050406030204" pitchFamily="34" charset="-120"/>
               </a:defRPr>
             </a:lvl1pPr>
           </a:lstStyle>
@@ -1232,7 +1163,6 @@
             <a:avLst/>
           </a:prstGeom>
           <a:noFill/>
-          <a:ln/>
         </p:spPr>
         <p:txBody>
           <a:bodyPr wrap="square" lIns="0" tIns="0" rIns="0" bIns="0" rtlCol="0" anchor="ctr"/>
@@ -1271,11 +1201,6 @@
           <a:prstGeom prst="rect">
             <a:avLst/>
           </a:prstGeom>
-          <a:extLst>
-            <a:ext uri="{C572A759-6A51-4108-AA02-DFA0A04FC94B}">
-              <ma14:wrappingTextBoxFlag xmlns="" xmlns:ma14="http://schemas.microsoft.com/office/mac/drawingml/2011/main" val="0"/>
-            </a:ext>
-          </a:extLst>
         </p:spPr>
         <p:txBody>
           <a:bodyPr/>
@@ -1292,7 +1217,6 @@
             <a:pPr algn="l"/>
             <a:fld id="{F7021451-1387-4CA6-816F-3879F97B5CBC}" type="slidenum">
               <a:rPr lang="en-US" b="0"/>
-              <a:t>‹#›</a:t>
             </a:fld>
             <a:endParaRPr lang="en-US"/>
           </a:p>
@@ -1356,7 +1280,6 @@
             <a:avLst/>
           </a:prstGeom>
           <a:noFill/>
-          <a:ln/>
         </p:spPr>
         <p:txBody>
           <a:bodyPr wrap="square" rtlCol="0"/>
@@ -1367,9 +1290,9 @@
                 <a:solidFill>
                   <a:schemeClr val="tx1"/>
                 </a:solidFill>
-                <a:latin typeface="Cambria" pitchFamily="34" charset="0"/>
-                <a:ea typeface="Cambria" pitchFamily="34" charset="-122"/>
-                <a:cs typeface="Cambria" pitchFamily="34" charset="-120"/>
+                <a:latin typeface="Cambria" panose="02040503050406030204" pitchFamily="34" charset="0"/>
+                <a:ea typeface="Cambria" panose="02040503050406030204" pitchFamily="34" charset="-122"/>
+                <a:cs typeface="Cambria" panose="02040503050406030204" pitchFamily="34" charset="-120"/>
               </a:defRPr>
             </a:lvl1pPr>
           </a:lstStyle>
@@ -1396,7 +1319,6 @@
             <a:avLst/>
           </a:prstGeom>
           <a:noFill/>
-          <a:ln/>
         </p:spPr>
         <p:txBody>
           <a:bodyPr wrap="square" lIns="0" tIns="0" rIns="0" bIns="0" rtlCol="0" anchor="ctr"/>
@@ -1435,11 +1357,6 @@
           <a:prstGeom prst="rect">
             <a:avLst/>
           </a:prstGeom>
-          <a:extLst>
-            <a:ext uri="{C572A759-6A51-4108-AA02-DFA0A04FC94B}">
-              <ma14:wrappingTextBoxFlag xmlns="" xmlns:ma14="http://schemas.microsoft.com/office/mac/drawingml/2011/main" val="0"/>
-            </a:ext>
-          </a:extLst>
         </p:spPr>
         <p:txBody>
           <a:bodyPr/>
@@ -1456,7 +1373,6 @@
             <a:pPr algn="l"/>
             <a:fld id="{F7021451-1387-4CA6-816F-3879F97B5CBC}" type="slidenum">
               <a:rPr lang="en-US" b="0"/>
-              <a:t>‹#›</a:t>
             </a:fld>
             <a:endParaRPr lang="en-US"/>
           </a:p>
@@ -1510,11 +1426,6 @@
           <a:prstGeom prst="rect">
             <a:avLst/>
           </a:prstGeom>
-          <a:extLst>
-            <a:ext uri="{C572A759-6A51-4108-AA02-DFA0A04FC94B}">
-              <ma14:wrappingTextBoxFlag xmlns="" xmlns:ma14="http://schemas.microsoft.com/office/mac/drawingml/2011/main" val="0"/>
-            </a:ext>
-          </a:extLst>
         </p:spPr>
         <p:txBody>
           <a:bodyPr/>
@@ -1531,7 +1442,6 @@
             <a:pPr algn="l"/>
             <a:fld id="{F7021451-1387-4CA6-816F-3879F97B5CBC}" type="slidenum">
               <a:rPr lang="en-US" b="0"/>
-              <a:t>‹#›</a:t>
             </a:fld>
             <a:endParaRPr lang="en-US"/>
           </a:p>
@@ -1568,7 +1478,7 @@
         <a:spcBef>
           <a:spcPct val="20000"/>
         </a:spcBef>
-        <a:buFont typeface="Arial" pitchFamily="34" charset="0"/>
+        <a:buFont typeface="Arial" panose="020B0604020202020204" pitchFamily="34" charset="0"/>
         <a:buChar char="•"/>
         <a:defRPr sz="3200" kern="1200">
           <a:solidFill>
@@ -1583,7 +1493,7 @@
         <a:spcBef>
           <a:spcPct val="20000"/>
         </a:spcBef>
-        <a:buFont typeface="Arial" pitchFamily="34" charset="0"/>
+        <a:buFont typeface="Arial" panose="020B0604020202020204" pitchFamily="34" charset="0"/>
         <a:buChar char="–"/>
         <a:defRPr sz="2800" kern="1200">
           <a:solidFill>
@@ -1598,7 +1508,7 @@
         <a:spcBef>
           <a:spcPct val="20000"/>
         </a:spcBef>
-        <a:buFont typeface="Arial" pitchFamily="34" charset="0"/>
+        <a:buFont typeface="Arial" panose="020B0604020202020204" pitchFamily="34" charset="0"/>
         <a:buChar char="•"/>
         <a:defRPr sz="2400" kern="1200">
           <a:solidFill>
@@ -1613,7 +1523,7 @@
         <a:spcBef>
           <a:spcPct val="20000"/>
         </a:spcBef>
-        <a:buFont typeface="Arial" pitchFamily="34" charset="0"/>
+        <a:buFont typeface="Arial" panose="020B0604020202020204" pitchFamily="34" charset="0"/>
         <a:buChar char="–"/>
         <a:defRPr sz="2000" kern="1200">
           <a:solidFill>
@@ -1628,7 +1538,7 @@
         <a:spcBef>
           <a:spcPct val="20000"/>
         </a:spcBef>
-        <a:buFont typeface="Arial" pitchFamily="34" charset="0"/>
+        <a:buFont typeface="Arial" panose="020B0604020202020204" pitchFamily="34" charset="0"/>
         <a:buChar char="»"/>
         <a:defRPr sz="2000" kern="1200">
           <a:solidFill>
@@ -1643,7 +1553,7 @@
         <a:spcBef>
           <a:spcPct val="20000"/>
         </a:spcBef>
-        <a:buFont typeface="Arial" pitchFamily="34" charset="0"/>
+        <a:buFont typeface="Arial" panose="020B0604020202020204" pitchFamily="34" charset="0"/>
         <a:buChar char="•"/>
         <a:defRPr sz="2000" kern="1200">
           <a:solidFill>
@@ -1658,7 +1568,7 @@
         <a:spcBef>
           <a:spcPct val="20000"/>
         </a:spcBef>
-        <a:buFont typeface="Arial" pitchFamily="34" charset="0"/>
+        <a:buFont typeface="Arial" panose="020B0604020202020204" pitchFamily="34" charset="0"/>
         <a:buChar char="•"/>
         <a:defRPr sz="2000" kern="1200">
           <a:solidFill>
@@ -1673,7 +1583,7 @@
         <a:spcBef>
           <a:spcPct val="20000"/>
         </a:spcBef>
-        <a:buFont typeface="Arial" pitchFamily="34" charset="0"/>
+        <a:buFont typeface="Arial" panose="020B0604020202020204" pitchFamily="34" charset="0"/>
         <a:buChar char="•"/>
         <a:defRPr sz="2000" kern="1200">
           <a:solidFill>
@@ -1688,7 +1598,7 @@
         <a:spcBef>
           <a:spcPct val="20000"/>
         </a:spcBef>
-        <a:buFont typeface="Arial" pitchFamily="34" charset="0"/>
+        <a:buFont typeface="Arial" panose="020B0604020202020204" pitchFamily="34" charset="0"/>
         <a:buChar char="•"/>
         <a:defRPr sz="2000" kern="1200">
           <a:solidFill>
@@ -1801,7 +1711,7 @@
 
 <file path=ppt/slides/slide1.xml><?xml version="1.0" encoding="utf-8"?>
 <p:sld xmlns:a="http://schemas.openxmlformats.org/drawingml/2006/main" xmlns:r="http://schemas.openxmlformats.org/officeDocument/2006/relationships" xmlns:p="http://schemas.openxmlformats.org/presentationml/2006/main">
-  <p:cSld name="Slide 1">
+  <p:cSld>
     <p:spTree>
       <p:nvGrpSpPr>
         <p:cNvPr id="1" name=""/>
@@ -1835,7 +1745,6 @@
             <a:avLst/>
           </a:prstGeom>
           <a:noFill/>
-          <a:ln/>
         </p:spPr>
         <p:txBody>
           <a:bodyPr wrap="square" lIns="0" tIns="0" rIns="0" bIns="0" rtlCol="0" anchor="ctr"/>
@@ -1849,9 +1758,9 @@
                 <a:solidFill>
                   <a:schemeClr val="bg1"/>
                 </a:solidFill>
-                <a:latin typeface="Cambria" pitchFamily="34" charset="0"/>
-                <a:ea typeface="Cambria" pitchFamily="34" charset="-122"/>
-                <a:cs typeface="Cambria" pitchFamily="34" charset="-120"/>
+                <a:latin typeface="Cambria" panose="02040503050406030204" pitchFamily="34" charset="0"/>
+                <a:ea typeface="Cambria" panose="02040503050406030204" pitchFamily="34" charset="-122"/>
+                <a:cs typeface="Cambria" panose="02040503050406030204" pitchFamily="34" charset="-120"/>
               </a:rPr>
               <a:t>Data Analysis Project Report</a:t>
             </a:r>
@@ -1874,7 +1783,6 @@
             <a:avLst/>
           </a:prstGeom>
           <a:noFill/>
-          <a:ln/>
         </p:spPr>
         <p:txBody>
           <a:bodyPr wrap="square" lIns="0" tIns="0" rIns="0" bIns="0" rtlCol="0" anchor="ctr"/>
@@ -1888,9 +1796,9 @@
                 <a:solidFill>
                   <a:schemeClr val="accent2"/>
                 </a:solidFill>
-                <a:latin typeface="Cambria" pitchFamily="34" charset="0"/>
-                <a:ea typeface="Cambria" pitchFamily="34" charset="-122"/>
-                <a:cs typeface="Cambria" pitchFamily="34" charset="-120"/>
+                <a:latin typeface="Cambria" panose="02040503050406030204" pitchFamily="34" charset="0"/>
+                <a:ea typeface="Cambria" panose="02040503050406030204" pitchFamily="34" charset="-122"/>
+                <a:cs typeface="Cambria" panose="02040503050406030204" pitchFamily="34" charset="-120"/>
               </a:rPr>
               <a:t>Asking questions from the data set</a:t>
             </a:r>
@@ -1946,7 +1854,6 @@
           <a:solidFill>
             <a:schemeClr val="accent2"/>
           </a:solidFill>
-          <a:ln/>
         </p:spPr>
       </p:sp>
       <p:sp>
@@ -1964,7 +1871,6 @@
             <a:avLst/>
           </a:prstGeom>
           <a:noFill/>
-          <a:ln/>
         </p:spPr>
         <p:txBody>
           <a:bodyPr wrap="square" lIns="0" tIns="0" rIns="0" bIns="0" rtlCol="0" anchor="ctr"/>
@@ -1978,9 +1884,9 @@
                 <a:solidFill>
                   <a:schemeClr val="tx1"/>
                 </a:solidFill>
-                <a:latin typeface="Cambria" pitchFamily="34" charset="0"/>
-                <a:ea typeface="Cambria" pitchFamily="34" charset="-122"/>
-                <a:cs typeface="Cambria" pitchFamily="34" charset="-120"/>
+                <a:latin typeface="Cambria" panose="02040503050406030204" pitchFamily="34" charset="0"/>
+                <a:ea typeface="Cambria" panose="02040503050406030204" pitchFamily="34" charset="-122"/>
+                <a:cs typeface="Cambria" panose="02040503050406030204" pitchFamily="34" charset="-120"/>
               </a:rPr>
               <a:t>1</a:t>
             </a:r>
@@ -2003,7 +1909,6 @@
             <a:avLst/>
           </a:prstGeom>
           <a:noFill/>
-          <a:ln/>
         </p:spPr>
         <p:txBody>
           <a:bodyPr wrap="square" lIns="0" tIns="0" rIns="0" bIns="0" rtlCol="0" anchor="ctr"/>
@@ -2017,9 +1922,9 @@
                 <a:solidFill>
                   <a:schemeClr val="bg1"/>
                 </a:solidFill>
-                <a:latin typeface="Calibri" pitchFamily="34" charset="0"/>
-                <a:ea typeface="Calibri" pitchFamily="34" charset="-122"/>
-                <a:cs typeface="Calibri" pitchFamily="34" charset="-120"/>
+                <a:latin typeface="Calibri" panose="020F0502020204030204" pitchFamily="34" charset="0"/>
+                <a:ea typeface="Calibri" panose="020F0502020204030204" pitchFamily="34" charset="-122"/>
+                <a:cs typeface="Calibri" panose="020F0502020204030204" pitchFamily="34" charset="-120"/>
               </a:rPr>
               <a:t>Which product categories generate the highest sales and profit?</a:t>
             </a:r>
@@ -2075,7 +1980,6 @@
           <a:solidFill>
             <a:schemeClr val="accent2"/>
           </a:solidFill>
-          <a:ln/>
         </p:spPr>
       </p:sp>
       <p:sp>
@@ -2093,7 +1997,6 @@
             <a:avLst/>
           </a:prstGeom>
           <a:noFill/>
-          <a:ln/>
         </p:spPr>
         <p:txBody>
           <a:bodyPr wrap="square" lIns="0" tIns="0" rIns="0" bIns="0" rtlCol="0" anchor="ctr"/>
@@ -2107,9 +2010,9 @@
                 <a:solidFill>
                   <a:schemeClr val="tx1"/>
                 </a:solidFill>
-                <a:latin typeface="Cambria" pitchFamily="34" charset="0"/>
-                <a:ea typeface="Cambria" pitchFamily="34" charset="-122"/>
-                <a:cs typeface="Cambria" pitchFamily="34" charset="-120"/>
+                <a:latin typeface="Cambria" panose="02040503050406030204" pitchFamily="34" charset="0"/>
+                <a:ea typeface="Cambria" panose="02040503050406030204" pitchFamily="34" charset="-122"/>
+                <a:cs typeface="Cambria" panose="02040503050406030204" pitchFamily="34" charset="-120"/>
               </a:rPr>
               <a:t>2</a:t>
             </a:r>
@@ -2132,7 +2035,6 @@
             <a:avLst/>
           </a:prstGeom>
           <a:noFill/>
-          <a:ln/>
         </p:spPr>
         <p:txBody>
           <a:bodyPr wrap="square" lIns="0" tIns="0" rIns="0" bIns="0" rtlCol="0" anchor="ctr"/>
@@ -2146,9 +2048,9 @@
                 <a:solidFill>
                   <a:schemeClr val="bg1"/>
                 </a:solidFill>
-                <a:latin typeface="Calibri" pitchFamily="34" charset="0"/>
-                <a:ea typeface="Calibri" pitchFamily="34" charset="-122"/>
-                <a:cs typeface="Calibri" pitchFamily="34" charset="-120"/>
+                <a:latin typeface="Calibri" panose="020F0502020204030204" pitchFamily="34" charset="0"/>
+                <a:ea typeface="Calibri" panose="020F0502020204030204" pitchFamily="34" charset="-122"/>
+                <a:cs typeface="Calibri" panose="020F0502020204030204" pitchFamily="34" charset="-120"/>
               </a:rPr>
               <a:t>Which shipping modes are most profitable?</a:t>
             </a:r>
@@ -2204,7 +2106,6 @@
           <a:solidFill>
             <a:schemeClr val="accent2"/>
           </a:solidFill>
-          <a:ln/>
         </p:spPr>
       </p:sp>
       <p:sp>
@@ -2222,7 +2123,6 @@
             <a:avLst/>
           </a:prstGeom>
           <a:noFill/>
-          <a:ln/>
         </p:spPr>
         <p:txBody>
           <a:bodyPr wrap="square" lIns="0" tIns="0" rIns="0" bIns="0" rtlCol="0" anchor="ctr"/>
@@ -2236,9 +2136,9 @@
                 <a:solidFill>
                   <a:schemeClr val="tx1"/>
                 </a:solidFill>
-                <a:latin typeface="Cambria" pitchFamily="34" charset="0"/>
-                <a:ea typeface="Cambria" pitchFamily="34" charset="-122"/>
-                <a:cs typeface="Cambria" pitchFamily="34" charset="-120"/>
+                <a:latin typeface="Cambria" panose="02040503050406030204" pitchFamily="34" charset="0"/>
+                <a:ea typeface="Cambria" panose="02040503050406030204" pitchFamily="34" charset="-122"/>
+                <a:cs typeface="Cambria" panose="02040503050406030204" pitchFamily="34" charset="-120"/>
               </a:rPr>
               <a:t>3</a:t>
             </a:r>
@@ -2261,7 +2161,6 @@
             <a:avLst/>
           </a:prstGeom>
           <a:noFill/>
-          <a:ln/>
         </p:spPr>
         <p:txBody>
           <a:bodyPr wrap="square" lIns="0" tIns="0" rIns="0" bIns="0" rtlCol="0" anchor="ctr"/>
@@ -2275,9 +2174,9 @@
                 <a:solidFill>
                   <a:schemeClr val="bg1"/>
                 </a:solidFill>
-                <a:latin typeface="Calibri" pitchFamily="34" charset="0"/>
-                <a:ea typeface="Calibri" pitchFamily="34" charset="-122"/>
-                <a:cs typeface="Calibri" pitchFamily="34" charset="-120"/>
+                <a:latin typeface="Calibri" panose="020F0502020204030204" pitchFamily="34" charset="0"/>
+                <a:ea typeface="Calibri" panose="020F0502020204030204" pitchFamily="34" charset="-122"/>
+                <a:cs typeface="Calibri" panose="020F0502020204030204" pitchFamily="34" charset="-120"/>
               </a:rPr>
               <a:t>Which states are the most profitable?</a:t>
             </a:r>
@@ -2333,7 +2232,6 @@
           <a:solidFill>
             <a:schemeClr val="accent2"/>
           </a:solidFill>
-          <a:ln/>
         </p:spPr>
       </p:sp>
       <p:sp>
@@ -2351,7 +2249,6 @@
             <a:avLst/>
           </a:prstGeom>
           <a:noFill/>
-          <a:ln/>
         </p:spPr>
         <p:txBody>
           <a:bodyPr wrap="square" lIns="0" tIns="0" rIns="0" bIns="0" rtlCol="0" anchor="ctr"/>
@@ -2365,9 +2262,9 @@
                 <a:solidFill>
                   <a:schemeClr val="tx1"/>
                 </a:solidFill>
-                <a:latin typeface="Cambria" pitchFamily="34" charset="0"/>
-                <a:ea typeface="Cambria" pitchFamily="34" charset="-122"/>
-                <a:cs typeface="Cambria" pitchFamily="34" charset="-120"/>
+                <a:latin typeface="Cambria" panose="02040503050406030204" pitchFamily="34" charset="0"/>
+                <a:ea typeface="Cambria" panose="02040503050406030204" pitchFamily="34" charset="-122"/>
+                <a:cs typeface="Cambria" panose="02040503050406030204" pitchFamily="34" charset="-120"/>
               </a:rPr>
               <a:t>4</a:t>
             </a:r>
@@ -2390,7 +2287,6 @@
             <a:avLst/>
           </a:prstGeom>
           <a:noFill/>
-          <a:ln/>
         </p:spPr>
         <p:txBody>
           <a:bodyPr wrap="square" lIns="0" tIns="0" rIns="0" bIns="0" rtlCol="0" anchor="ctr"/>
@@ -2404,9 +2300,9 @@
                 <a:solidFill>
                   <a:schemeClr val="bg1"/>
                 </a:solidFill>
-                <a:latin typeface="Calibri" pitchFamily="34" charset="0"/>
-                <a:ea typeface="Calibri" pitchFamily="34" charset="-122"/>
-                <a:cs typeface="Calibri" pitchFamily="34" charset="-120"/>
+                <a:latin typeface="Calibri" panose="020F0502020204030204" pitchFamily="34" charset="0"/>
+                <a:ea typeface="Calibri" panose="020F0502020204030204" pitchFamily="34" charset="-122"/>
+                <a:cs typeface="Calibri" panose="020F0502020204030204" pitchFamily="34" charset="-120"/>
               </a:rPr>
               <a:t>How does discount affect profit?</a:t>
             </a:r>
@@ -2432,11 +2328,6 @@
           <a:prstGeom prst="rect">
             <a:avLst/>
           </a:prstGeom>
-          <a:extLst>
-            <a:ext uri="{C572A759-6A51-4108-AA02-DFA0A04FC94B}">
-              <ma14:wrappingTextBoxFlag xmlns="" xmlns:ma14="http://schemas.microsoft.com/office/mac/drawingml/2011/main" val="0"/>
-            </a:ext>
-          </a:extLst>
         </p:spPr>
         <p:txBody>
           <a:bodyPr/>
@@ -2453,7 +2344,6 @@
             <a:pPr algn="l"/>
             <a:fld id="{F7021451-1387-4CA6-816F-3879F97B5CBC}" type="slidenum">
               <a:rPr lang="en-US" b="0"/>
-              <a:t>1</a:t>
             </a:fld>
             <a:endParaRPr lang="en-US"/>
           </a:p>
@@ -3187,7 +3077,7 @@
 
 <file path=ppt/slides/slide10.xml><?xml version="1.0" encoding="utf-8"?>
 <p:sld xmlns:a="http://schemas.openxmlformats.org/drawingml/2006/main" xmlns:r="http://schemas.openxmlformats.org/officeDocument/2006/relationships" xmlns:p="http://schemas.openxmlformats.org/presentationml/2006/main">
-  <p:cSld name="Slide 11">
+  <p:cSld>
     <p:spTree>
       <p:nvGrpSpPr>
         <p:cNvPr id="1" name=""/>
@@ -3221,7 +3111,6 @@
             <a:avLst/>
           </a:prstGeom>
           <a:noFill/>
-          <a:ln/>
         </p:spPr>
         <p:txBody>
           <a:bodyPr wrap="square" lIns="0" tIns="0" rIns="0" bIns="0" rtlCol="0" anchor="ctr"/>
@@ -3235,9 +3124,9 @@
                 <a:solidFill>
                   <a:schemeClr val="bg1"/>
                 </a:solidFill>
-                <a:latin typeface="Cambria" pitchFamily="34" charset="0"/>
-                <a:ea typeface="Cambria" pitchFamily="34" charset="-122"/>
-                <a:cs typeface="Cambria" pitchFamily="34" charset="-120"/>
+                <a:latin typeface="Cambria" panose="02040503050406030204" pitchFamily="34" charset="0"/>
+                <a:ea typeface="Cambria" panose="02040503050406030204" pitchFamily="34" charset="-122"/>
+                <a:cs typeface="Cambria" panose="02040503050406030204" pitchFamily="34" charset="-120"/>
               </a:rPr>
               <a:t>Key takeaways</a:t>
             </a:r>
@@ -3291,7 +3180,6 @@
             <a:avLst/>
           </a:prstGeom>
           <a:noFill/>
-          <a:ln/>
         </p:spPr>
         <p:txBody>
           <a:bodyPr wrap="square" lIns="0" tIns="0" rIns="0" bIns="0" rtlCol="0" anchor="ctr"/>
@@ -3305,9 +3193,9 @@
                 <a:solidFill>
                   <a:schemeClr val="accent2"/>
                 </a:solidFill>
-                <a:latin typeface="Cambria" pitchFamily="34" charset="0"/>
-                <a:ea typeface="Cambria" pitchFamily="34" charset="-122"/>
-                <a:cs typeface="Cambria" pitchFamily="34" charset="-120"/>
+                <a:latin typeface="Cambria" panose="02040503050406030204" pitchFamily="34" charset="0"/>
+                <a:ea typeface="Cambria" panose="02040503050406030204" pitchFamily="34" charset="-122"/>
+                <a:cs typeface="Cambria" panose="02040503050406030204" pitchFamily="34" charset="-120"/>
               </a:rPr>
               <a:t>Technology</a:t>
             </a:r>
@@ -3330,7 +3218,6 @@
             <a:avLst/>
           </a:prstGeom>
           <a:noFill/>
-          <a:ln/>
         </p:spPr>
         <p:txBody>
           <a:bodyPr wrap="square" lIns="0" tIns="0" rIns="0" bIns="0" rtlCol="0" anchor="t"/>
@@ -3344,9 +3231,9 @@
                 <a:solidFill>
                   <a:schemeClr val="bg1"/>
                 </a:solidFill>
-                <a:latin typeface="Calibri" pitchFamily="34" charset="0"/>
-                <a:ea typeface="Calibri" pitchFamily="34" charset="-122"/>
-                <a:cs typeface="Calibri" pitchFamily="34" charset="-120"/>
+                <a:latin typeface="Calibri" panose="020F0502020204030204" pitchFamily="34" charset="0"/>
+                <a:ea typeface="Calibri" panose="020F0502020204030204" pitchFamily="34" charset="-122"/>
+                <a:cs typeface="Calibri" panose="020F0502020204030204" pitchFamily="34" charset="-120"/>
               </a:rPr>
               <a:t>is the most profitable category; Furniture sells most but loses money.</a:t>
             </a:r>
@@ -3400,7 +3287,6 @@
             <a:avLst/>
           </a:prstGeom>
           <a:noFill/>
-          <a:ln/>
         </p:spPr>
         <p:txBody>
           <a:bodyPr wrap="square" lIns="0" tIns="0" rIns="0" bIns="0" rtlCol="0" anchor="ctr"/>
@@ -3414,9 +3300,9 @@
                 <a:solidFill>
                   <a:schemeClr val="accent2"/>
                 </a:solidFill>
-                <a:latin typeface="Cambria" pitchFamily="34" charset="0"/>
-                <a:ea typeface="Cambria" pitchFamily="34" charset="-122"/>
-                <a:cs typeface="Cambria" pitchFamily="34" charset="-120"/>
+                <a:latin typeface="Cambria" panose="02040503050406030204" pitchFamily="34" charset="0"/>
+                <a:ea typeface="Cambria" panose="02040503050406030204" pitchFamily="34" charset="-122"/>
+                <a:cs typeface="Cambria" panose="02040503050406030204" pitchFamily="34" charset="-120"/>
               </a:rPr>
               <a:t>Second Class</a:t>
             </a:r>
@@ -3439,7 +3325,6 @@
             <a:avLst/>
           </a:prstGeom>
           <a:noFill/>
-          <a:ln/>
         </p:spPr>
         <p:txBody>
           <a:bodyPr wrap="square" lIns="0" tIns="0" rIns="0" bIns="0" rtlCol="0" anchor="t"/>
@@ -3453,9 +3338,9 @@
                 <a:solidFill>
                   <a:schemeClr val="bg1"/>
                 </a:solidFill>
-                <a:latin typeface="Calibri" pitchFamily="34" charset="0"/>
-                <a:ea typeface="Calibri" pitchFamily="34" charset="-122"/>
-                <a:cs typeface="Calibri" pitchFamily="34" charset="-120"/>
+                <a:latin typeface="Calibri" panose="020F0502020204030204" pitchFamily="34" charset="0"/>
+                <a:ea typeface="Calibri" panose="020F0502020204030204" pitchFamily="34" charset="-122"/>
+                <a:cs typeface="Calibri" panose="020F0502020204030204" pitchFamily="34" charset="-120"/>
               </a:rPr>
               <a:t>is the only profitable ship mode.</a:t>
             </a:r>
@@ -3509,7 +3394,6 @@
             <a:avLst/>
           </a:prstGeom>
           <a:noFill/>
-          <a:ln/>
         </p:spPr>
         <p:txBody>
           <a:bodyPr wrap="square" lIns="0" tIns="0" rIns="0" bIns="0" rtlCol="0" anchor="ctr"/>
@@ -3523,9 +3407,9 @@
                 <a:solidFill>
                   <a:schemeClr val="accent2"/>
                 </a:solidFill>
-                <a:latin typeface="Cambria" pitchFamily="34" charset="0"/>
-                <a:ea typeface="Cambria" pitchFamily="34" charset="-122"/>
-                <a:cs typeface="Cambria" pitchFamily="34" charset="-120"/>
+                <a:latin typeface="Cambria" panose="02040503050406030204" pitchFamily="34" charset="0"/>
+                <a:ea typeface="Cambria" panose="02040503050406030204" pitchFamily="34" charset="-122"/>
+                <a:cs typeface="Cambria" panose="02040503050406030204" pitchFamily="34" charset="-120"/>
               </a:rPr>
               <a:t>California</a:t>
             </a:r>
@@ -3548,7 +3432,6 @@
             <a:avLst/>
           </a:prstGeom>
           <a:noFill/>
-          <a:ln/>
         </p:spPr>
         <p:txBody>
           <a:bodyPr wrap="square" lIns="0" tIns="0" rIns="0" bIns="0" rtlCol="0" anchor="t"/>
@@ -3562,9 +3445,9 @@
                 <a:solidFill>
                   <a:schemeClr val="bg1"/>
                 </a:solidFill>
-                <a:latin typeface="Calibri" pitchFamily="34" charset="0"/>
-                <a:ea typeface="Calibri" pitchFamily="34" charset="-122"/>
-                <a:cs typeface="Calibri" pitchFamily="34" charset="-120"/>
+                <a:latin typeface="Calibri" panose="020F0502020204030204" pitchFamily="34" charset="0"/>
+                <a:ea typeface="Calibri" panose="020F0502020204030204" pitchFamily="34" charset="-122"/>
+                <a:cs typeface="Calibri" panose="020F0502020204030204" pitchFamily="34" charset="-120"/>
               </a:rPr>
               <a:t>has the highest profit among the states shown.</a:t>
             </a:r>
@@ -3618,7 +3501,6 @@
             <a:avLst/>
           </a:prstGeom>
           <a:noFill/>
-          <a:ln/>
         </p:spPr>
         <p:txBody>
           <a:bodyPr wrap="square" lIns="0" tIns="0" rIns="0" bIns="0" rtlCol="0" anchor="ctr"/>
@@ -3632,9 +3514,9 @@
                 <a:solidFill>
                   <a:schemeClr val="accent2"/>
                 </a:solidFill>
-                <a:latin typeface="Cambria" pitchFamily="34" charset="0"/>
-                <a:ea typeface="Cambria" pitchFamily="34" charset="-122"/>
-                <a:cs typeface="Cambria" pitchFamily="34" charset="-120"/>
+                <a:latin typeface="Cambria" panose="02040503050406030204" pitchFamily="34" charset="0"/>
+                <a:ea typeface="Cambria" panose="02040503050406030204" pitchFamily="34" charset="-122"/>
+                <a:cs typeface="Cambria" panose="02040503050406030204" pitchFamily="34" charset="-120"/>
               </a:rPr>
               <a:t>Discounts</a:t>
             </a:r>
@@ -3657,7 +3539,6 @@
             <a:avLst/>
           </a:prstGeom>
           <a:noFill/>
-          <a:ln/>
         </p:spPr>
         <p:txBody>
           <a:bodyPr wrap="square" lIns="0" tIns="0" rIns="0" bIns="0" rtlCol="0" anchor="t"/>
@@ -3671,9 +3552,9 @@
                 <a:solidFill>
                   <a:schemeClr val="bg1"/>
                 </a:solidFill>
-                <a:latin typeface="Calibri" pitchFamily="34" charset="0"/>
-                <a:ea typeface="Calibri" pitchFamily="34" charset="-122"/>
-                <a:cs typeface="Calibri" pitchFamily="34" charset="-120"/>
+                <a:latin typeface="Calibri" panose="020F0502020204030204" pitchFamily="34" charset="0"/>
+                <a:ea typeface="Calibri" panose="020F0502020204030204" pitchFamily="34" charset="-122"/>
+                <a:cs typeface="Calibri" panose="020F0502020204030204" pitchFamily="34" charset="-120"/>
               </a:rPr>
               <a:t>of 30% and above lose money; keep them near 20% or lower.</a:t>
             </a:r>
@@ -3699,11 +3580,6 @@
           <a:prstGeom prst="rect">
             <a:avLst/>
           </a:prstGeom>
-          <a:extLst>
-            <a:ext uri="{C572A759-6A51-4108-AA02-DFA0A04FC94B}">
-              <ma14:wrappingTextBoxFlag xmlns="" xmlns:ma14="http://schemas.microsoft.com/office/mac/drawingml/2011/main" val="0"/>
-            </a:ext>
-          </a:extLst>
         </p:spPr>
         <p:txBody>
           <a:bodyPr/>
@@ -3720,7 +3596,6 @@
             <a:pPr algn="l"/>
             <a:fld id="{F7021451-1387-4CA6-816F-3879F97B5CBC}" type="slidenum">
               <a:rPr lang="en-US" b="0"/>
-              <a:t>10</a:t>
             </a:fld>
             <a:endParaRPr lang="en-US"/>
           </a:p>
@@ -4261,7 +4136,7 @@
 
 <file path=ppt/slides/slide2.xml><?xml version="1.0" encoding="utf-8"?>
 <p:sld xmlns:a="http://schemas.openxmlformats.org/drawingml/2006/main" xmlns:r="http://schemas.openxmlformats.org/officeDocument/2006/relationships" xmlns:p="http://schemas.openxmlformats.org/presentationml/2006/main">
-  <p:cSld name="Slide 3">
+  <p:cSld>
     <p:spTree>
       <p:nvGrpSpPr>
         <p:cNvPr id="1" name=""/>
@@ -4295,7 +4170,6 @@
             <a:avLst/>
           </a:prstGeom>
           <a:noFill/>
-          <a:ln/>
         </p:spPr>
         <p:txBody>
           <a:bodyPr wrap="square" lIns="0" tIns="0" rIns="0" bIns="0" rtlCol="0" anchor="ctr"/>
@@ -4309,9 +4183,9 @@
                 <a:solidFill>
                   <a:schemeClr val="tx1"/>
                 </a:solidFill>
-                <a:latin typeface="Cambria" pitchFamily="34" charset="0"/>
-                <a:ea typeface="Cambria" pitchFamily="34" charset="-122"/>
-                <a:cs typeface="Cambria" pitchFamily="34" charset="-120"/>
+                <a:latin typeface="Cambria" panose="02040503050406030204" pitchFamily="34" charset="0"/>
+                <a:ea typeface="Cambria" panose="02040503050406030204" pitchFamily="34" charset="-122"/>
+                <a:cs typeface="Cambria" panose="02040503050406030204" pitchFamily="34" charset="-120"/>
               </a:rPr>
               <a:t>Sales vs profit by category</a:t>
             </a:r>
@@ -4362,7 +4236,7 @@
           <p:nvPr/>
         </p:nvPicPr>
         <p:blipFill>
-          <a:blip r:embed="rId3"/>
+          <a:blip r:embed="rId1"/>
           <a:stretch>
             <a:fillRect/>
           </a:stretch>
@@ -4426,7 +4300,6 @@
             <a:avLst/>
           </a:prstGeom>
           <a:noFill/>
-          <a:ln/>
         </p:spPr>
         <p:txBody>
           <a:bodyPr wrap="square" lIns="0" tIns="0" rIns="0" bIns="0" rtlCol="0" anchor="ctr"/>
@@ -4440,9 +4313,9 @@
                 <a:solidFill>
                   <a:schemeClr val="accent5"/>
                 </a:solidFill>
-                <a:latin typeface="Calibri" pitchFamily="34" charset="0"/>
-                <a:ea typeface="Calibri" pitchFamily="34" charset="-122"/>
-                <a:cs typeface="Calibri" pitchFamily="34" charset="-120"/>
+                <a:latin typeface="Calibri" panose="020F0502020204030204" pitchFamily="34" charset="0"/>
+                <a:ea typeface="Calibri" panose="020F0502020204030204" pitchFamily="34" charset="-122"/>
+                <a:cs typeface="Calibri" panose="020F0502020204030204" pitchFamily="34" charset="-120"/>
               </a:rPr>
               <a:t>Highest sales</a:t>
             </a:r>
@@ -4465,7 +4338,6 @@
             <a:avLst/>
           </a:prstGeom>
           <a:noFill/>
-          <a:ln/>
         </p:spPr>
         <p:txBody>
           <a:bodyPr wrap="square" lIns="0" tIns="0" rIns="0" bIns="0" rtlCol="0" anchor="ctr"/>
@@ -4479,9 +4351,9 @@
                 <a:solidFill>
                   <a:schemeClr val="accent3"/>
                 </a:solidFill>
-                <a:latin typeface="Cambria" pitchFamily="34" charset="0"/>
-                <a:ea typeface="Cambria" pitchFamily="34" charset="-122"/>
-                <a:cs typeface="Cambria" pitchFamily="34" charset="-120"/>
+                <a:latin typeface="Cambria" panose="02040503050406030204" pitchFamily="34" charset="0"/>
+                <a:ea typeface="Cambria" panose="02040503050406030204" pitchFamily="34" charset="-122"/>
+                <a:cs typeface="Cambria" panose="02040503050406030204" pitchFamily="34" charset="-120"/>
               </a:rPr>
               <a:t>Furniture</a:t>
             </a:r>
@@ -4497,14 +4369,13 @@
         </p:nvSpPr>
         <p:spPr>
           <a:xfrm>
-            <a:off x="6263640" y="2075688"/>
+            <a:off x="6263640" y="2066163"/>
             <a:ext cx="2240280" cy="640080"/>
           </a:xfrm>
           <a:prstGeom prst="rect">
             <a:avLst/>
           </a:prstGeom>
           <a:noFill/>
-          <a:ln/>
         </p:spPr>
         <p:txBody>
           <a:bodyPr wrap="square" lIns="0" tIns="0" rIns="0" bIns="0" rtlCol="0" anchor="t"/>
@@ -4518,9 +4389,9 @@
                 <a:solidFill>
                   <a:schemeClr val="tx1"/>
                 </a:solidFill>
-                <a:latin typeface="Calibri" pitchFamily="34" charset="0"/>
-                <a:ea typeface="Calibri" pitchFamily="34" charset="-122"/>
-                <a:cs typeface="Calibri" pitchFamily="34" charset="-120"/>
+                <a:latin typeface="Calibri" panose="020F0502020204030204" pitchFamily="34" charset="0"/>
+                <a:ea typeface="Calibri" panose="020F0502020204030204" pitchFamily="34" charset="-122"/>
+                <a:cs typeface="Calibri" panose="020F0502020204030204" pitchFamily="34" charset="-120"/>
               </a:rPr>
               <a:t>$8,965.53 in sales, yet a $1,642.43 loss</a:t>
             </a:r>
@@ -4577,7 +4448,6 @@
             <a:avLst/>
           </a:prstGeom>
           <a:noFill/>
-          <a:ln/>
         </p:spPr>
         <p:txBody>
           <a:bodyPr wrap="square" lIns="0" tIns="0" rIns="0" bIns="0" rtlCol="0" anchor="ctr"/>
@@ -4591,9 +4461,9 @@
                 <a:solidFill>
                   <a:schemeClr val="accent5"/>
                 </a:solidFill>
-                <a:latin typeface="Calibri" pitchFamily="34" charset="0"/>
-                <a:ea typeface="Calibri" pitchFamily="34" charset="-122"/>
-                <a:cs typeface="Calibri" pitchFamily="34" charset="-120"/>
+                <a:latin typeface="Calibri" panose="020F0502020204030204" pitchFamily="34" charset="0"/>
+                <a:ea typeface="Calibri" panose="020F0502020204030204" pitchFamily="34" charset="-122"/>
+                <a:cs typeface="Calibri" panose="020F0502020204030204" pitchFamily="34" charset="-120"/>
               </a:rPr>
               <a:t>Highest profit</a:t>
             </a:r>
@@ -4616,7 +4486,6 @@
             <a:avLst/>
           </a:prstGeom>
           <a:noFill/>
-          <a:ln/>
         </p:spPr>
         <p:txBody>
           <a:bodyPr wrap="square" lIns="0" tIns="0" rIns="0" bIns="0" rtlCol="0" anchor="ctr"/>
@@ -4630,9 +4499,9 @@
                 <a:solidFill>
                   <a:schemeClr val="accent4"/>
                 </a:solidFill>
-                <a:latin typeface="Cambria" pitchFamily="34" charset="0"/>
-                <a:ea typeface="Cambria" pitchFamily="34" charset="-122"/>
-                <a:cs typeface="Cambria" pitchFamily="34" charset="-120"/>
+                <a:latin typeface="Cambria" panose="02040503050406030204" pitchFamily="34" charset="0"/>
+                <a:ea typeface="Cambria" panose="02040503050406030204" pitchFamily="34" charset="-122"/>
+                <a:cs typeface="Cambria" panose="02040503050406030204" pitchFamily="34" charset="-120"/>
               </a:rPr>
               <a:t>Technology</a:t>
             </a:r>
@@ -4655,7 +4524,6 @@
             <a:avLst/>
           </a:prstGeom>
           <a:noFill/>
-          <a:ln/>
         </p:spPr>
         <p:txBody>
           <a:bodyPr wrap="square" lIns="0" tIns="0" rIns="0" bIns="0" rtlCol="0" anchor="t"/>
@@ -4669,9 +4537,9 @@
                 <a:solidFill>
                   <a:schemeClr val="tx1"/>
                 </a:solidFill>
-                <a:latin typeface="Calibri" pitchFamily="34" charset="0"/>
-                <a:ea typeface="Calibri" pitchFamily="34" charset="-122"/>
-                <a:cs typeface="Calibri" pitchFamily="34" charset="-120"/>
+                <a:latin typeface="Calibri" panose="020F0502020204030204" pitchFamily="34" charset="0"/>
+                <a:ea typeface="Calibri" panose="020F0502020204030204" pitchFamily="34" charset="-122"/>
+                <a:cs typeface="Calibri" panose="020F0502020204030204" pitchFamily="34" charset="-120"/>
               </a:rPr>
               <a:t>$310.33 profit on $3,220.17 sales</a:t>
             </a:r>
@@ -4697,11 +4565,6 @@
           <a:prstGeom prst="rect">
             <a:avLst/>
           </a:prstGeom>
-          <a:extLst>
-            <a:ext uri="{C572A759-6A51-4108-AA02-DFA0A04FC94B}">
-              <ma14:wrappingTextBoxFlag xmlns="" xmlns:ma14="http://schemas.microsoft.com/office/mac/drawingml/2011/main" val="0"/>
-            </a:ext>
-          </a:extLst>
         </p:spPr>
         <p:txBody>
           <a:bodyPr/>
@@ -4718,7 +4581,6 @@
             <a:pPr algn="l"/>
             <a:fld id="{F7021451-1387-4CA6-816F-3879F97B5CBC}" type="slidenum">
               <a:rPr lang="en-US" b="0"/>
-              <a:t>2</a:t>
             </a:fld>
             <a:endParaRPr lang="en-US"/>
           </a:p>
@@ -5171,7 +5033,7 @@
 
 <file path=ppt/slides/slide3.xml><?xml version="1.0" encoding="utf-8"?>
 <p:sld xmlns:a="http://schemas.openxmlformats.org/drawingml/2006/main" xmlns:r="http://schemas.openxmlformats.org/officeDocument/2006/relationships" xmlns:p="http://schemas.openxmlformats.org/presentationml/2006/main">
-  <p:cSld name="Slide 2">
+  <p:cSld>
     <p:spTree>
       <p:nvGrpSpPr>
         <p:cNvPr id="1" name=""/>
@@ -5205,7 +5067,6 @@
             <a:avLst/>
           </a:prstGeom>
           <a:noFill/>
-          <a:ln/>
         </p:spPr>
         <p:txBody>
           <a:bodyPr wrap="square" lIns="0" tIns="0" rIns="0" bIns="0" rtlCol="0" anchor="ctr"/>
@@ -5219,9 +5080,9 @@
                 <a:solidFill>
                   <a:schemeClr val="tx1"/>
                 </a:solidFill>
-                <a:latin typeface="Cambria" pitchFamily="34" charset="0"/>
-                <a:ea typeface="Cambria" pitchFamily="34" charset="-122"/>
-                <a:cs typeface="Cambria" pitchFamily="34" charset="-120"/>
+                <a:latin typeface="Cambria" panose="02040503050406030204" pitchFamily="34" charset="0"/>
+                <a:ea typeface="Cambria" panose="02040503050406030204" pitchFamily="34" charset="-122"/>
+                <a:cs typeface="Cambria" panose="02040503050406030204" pitchFamily="34" charset="-120"/>
               </a:rPr>
               <a:t>Profit by category</a:t>
             </a:r>
@@ -5278,7 +5139,6 @@
             <a:avLst/>
           </a:prstGeom>
           <a:noFill/>
-          <a:ln/>
         </p:spPr>
         <p:txBody>
           <a:bodyPr wrap="square" lIns="0" tIns="0" rIns="0" bIns="0" rtlCol="0" anchor="ctr"/>
@@ -5292,9 +5152,9 @@
                 <a:solidFill>
                   <a:schemeClr val="accent1"/>
                 </a:solidFill>
-                <a:latin typeface="Cambria" pitchFamily="34" charset="0"/>
-                <a:ea typeface="Cambria" pitchFamily="34" charset="-122"/>
-                <a:cs typeface="Cambria" pitchFamily="34" charset="-120"/>
+                <a:latin typeface="Cambria" panose="02040503050406030204" pitchFamily="34" charset="0"/>
+                <a:ea typeface="Cambria" panose="02040503050406030204" pitchFamily="34" charset="-122"/>
+                <a:cs typeface="Cambria" panose="02040503050406030204" pitchFamily="34" charset="-120"/>
               </a:rPr>
               <a:t>1. Furniture</a:t>
             </a:r>
@@ -5317,7 +5177,6 @@
             <a:avLst/>
           </a:prstGeom>
           <a:noFill/>
-          <a:ln/>
         </p:spPr>
         <p:txBody>
           <a:bodyPr wrap="square" lIns="0" tIns="0" rIns="0" bIns="0" rtlCol="0" anchor="ctr"/>
@@ -5331,9 +5190,9 @@
                 <a:solidFill>
                   <a:schemeClr val="accent5"/>
                 </a:solidFill>
-                <a:latin typeface="Calibri" pitchFamily="34" charset="0"/>
-                <a:ea typeface="Calibri" pitchFamily="34" charset="-122"/>
-                <a:cs typeface="Calibri" pitchFamily="34" charset="-120"/>
+                <a:latin typeface="Calibri" panose="020F0502020204030204" pitchFamily="34" charset="0"/>
+                <a:ea typeface="Calibri" panose="020F0502020204030204" pitchFamily="34" charset="-122"/>
+                <a:cs typeface="Calibri" panose="020F0502020204030204" pitchFamily="34" charset="-120"/>
               </a:rPr>
               <a:t>Sales</a:t>
             </a:r>
@@ -5356,7 +5215,6 @@
             <a:avLst/>
           </a:prstGeom>
           <a:noFill/>
-          <a:ln/>
         </p:spPr>
         <p:txBody>
           <a:bodyPr wrap="square" lIns="0" tIns="0" rIns="0" bIns="0" rtlCol="0" anchor="ctr"/>
@@ -5370,9 +5228,9 @@
                 <a:solidFill>
                   <a:schemeClr val="tx1"/>
                 </a:solidFill>
-                <a:latin typeface="Cambria" pitchFamily="34" charset="0"/>
-                <a:ea typeface="Cambria" pitchFamily="34" charset="-122"/>
-                <a:cs typeface="Cambria" pitchFamily="34" charset="-120"/>
+                <a:latin typeface="Cambria" panose="02040503050406030204" pitchFamily="34" charset="0"/>
+                <a:ea typeface="Cambria" panose="02040503050406030204" pitchFamily="34" charset="-122"/>
+                <a:cs typeface="Cambria" panose="02040503050406030204" pitchFamily="34" charset="-120"/>
               </a:rPr>
               <a:t>$8,965.53</a:t>
             </a:r>
@@ -5395,7 +5253,6 @@
             <a:avLst/>
           </a:prstGeom>
           <a:noFill/>
-          <a:ln/>
         </p:spPr>
         <p:txBody>
           <a:bodyPr wrap="square" lIns="0" tIns="0" rIns="0" bIns="0" rtlCol="0" anchor="ctr"/>
@@ -5409,9 +5266,9 @@
                 <a:solidFill>
                   <a:schemeClr val="accent5"/>
                 </a:solidFill>
-                <a:latin typeface="Calibri" pitchFamily="34" charset="0"/>
-                <a:ea typeface="Calibri" pitchFamily="34" charset="-122"/>
-                <a:cs typeface="Calibri" pitchFamily="34" charset="-120"/>
+                <a:latin typeface="Calibri" panose="020F0502020204030204" pitchFamily="34" charset="0"/>
+                <a:ea typeface="Calibri" panose="020F0502020204030204" pitchFamily="34" charset="-122"/>
+                <a:cs typeface="Calibri" panose="020F0502020204030204" pitchFamily="34" charset="-120"/>
               </a:rPr>
               <a:t>Profit</a:t>
             </a:r>
@@ -5434,7 +5291,6 @@
             <a:avLst/>
           </a:prstGeom>
           <a:noFill/>
-          <a:ln/>
         </p:spPr>
         <p:txBody>
           <a:bodyPr wrap="square" lIns="0" tIns="0" rIns="0" bIns="0" rtlCol="0" anchor="ctr"/>
@@ -5448,9 +5304,9 @@
                 <a:solidFill>
                   <a:schemeClr val="accent3"/>
                 </a:solidFill>
-                <a:latin typeface="Cambria" pitchFamily="34" charset="0"/>
-                <a:ea typeface="Cambria" pitchFamily="34" charset="-122"/>
-                <a:cs typeface="Cambria" pitchFamily="34" charset="-120"/>
+                <a:latin typeface="Cambria" panose="02040503050406030204" pitchFamily="34" charset="0"/>
+                <a:ea typeface="Cambria" panose="02040503050406030204" pitchFamily="34" charset="-122"/>
+                <a:cs typeface="Cambria" panose="02040503050406030204" pitchFamily="34" charset="-120"/>
               </a:rPr>
               <a:t>-$1,642.43</a:t>
             </a:r>
@@ -5473,7 +5329,6 @@
             <a:avLst/>
           </a:prstGeom>
           <a:noFill/>
-          <a:ln/>
         </p:spPr>
         <p:txBody>
           <a:bodyPr wrap="square" lIns="0" tIns="0" rIns="0" bIns="0" rtlCol="0" anchor="t"/>
@@ -5487,9 +5342,9 @@
                 <a:solidFill>
                   <a:schemeClr val="tx1"/>
                 </a:solidFill>
-                <a:latin typeface="Calibri" pitchFamily="34" charset="0"/>
-                <a:ea typeface="Calibri" pitchFamily="34" charset="-122"/>
-                <a:cs typeface="Calibri" pitchFamily="34" charset="-120"/>
+                <a:latin typeface="Calibri" panose="020F0502020204030204" pitchFamily="34" charset="0"/>
+                <a:ea typeface="Calibri" panose="020F0502020204030204" pitchFamily="34" charset="-122"/>
+                <a:cs typeface="Calibri" panose="020F0502020204030204" pitchFamily="34" charset="-120"/>
               </a:rPr>
               <a:t>Highest sales, but some products are sold with high discounts, resulting in negative profit.</a:t>
             </a:r>
@@ -5539,7 +5394,6 @@
             <a:avLst/>
           </a:prstGeom>
           <a:noFill/>
-          <a:ln/>
         </p:spPr>
         <p:txBody>
           <a:bodyPr wrap="square" lIns="0" tIns="0" rIns="0" bIns="0" rtlCol="0" anchor="ctr"/>
@@ -5553,9 +5407,9 @@
                 <a:solidFill>
                   <a:schemeClr val="accent3"/>
                 </a:solidFill>
-                <a:latin typeface="Calibri" pitchFamily="34" charset="0"/>
-                <a:ea typeface="Calibri" pitchFamily="34" charset="-122"/>
-                <a:cs typeface="Calibri" pitchFamily="34" charset="-120"/>
+                <a:latin typeface="Calibri" panose="020F0502020204030204" pitchFamily="34" charset="0"/>
+                <a:ea typeface="Calibri" panose="020F0502020204030204" pitchFamily="34" charset="-122"/>
+                <a:cs typeface="Calibri" panose="020F0502020204030204" pitchFamily="34" charset="-120"/>
               </a:rPr>
               <a:t>Conclusion: </a:t>
             </a:r>
@@ -5564,9 +5418,9 @@
                 <a:solidFill>
                   <a:schemeClr val="tx1"/>
                 </a:solidFill>
-                <a:latin typeface="Calibri" pitchFamily="34" charset="0"/>
-                <a:ea typeface="Calibri" pitchFamily="34" charset="-122"/>
-                <a:cs typeface="Calibri" pitchFamily="34" charset="-120"/>
+                <a:latin typeface="Calibri" panose="020F0502020204030204" pitchFamily="34" charset="0"/>
+                <a:ea typeface="Calibri" panose="020F0502020204030204" pitchFamily="34" charset="-122"/>
+                <a:cs typeface="Calibri" panose="020F0502020204030204" pitchFamily="34" charset="-120"/>
               </a:rPr>
               <a:t>Strong sales but poor profitability.</a:t>
             </a:r>
@@ -5623,7 +5477,6 @@
             <a:avLst/>
           </a:prstGeom>
           <a:noFill/>
-          <a:ln/>
         </p:spPr>
         <p:txBody>
           <a:bodyPr wrap="square" lIns="0" tIns="0" rIns="0" bIns="0" rtlCol="0" anchor="ctr"/>
@@ -5637,9 +5490,9 @@
                 <a:solidFill>
                   <a:schemeClr val="accent1"/>
                 </a:solidFill>
-                <a:latin typeface="Cambria" pitchFamily="34" charset="0"/>
-                <a:ea typeface="Cambria" pitchFamily="34" charset="-122"/>
-                <a:cs typeface="Cambria" pitchFamily="34" charset="-120"/>
+                <a:latin typeface="Cambria" panose="02040503050406030204" pitchFamily="34" charset="0"/>
+                <a:ea typeface="Cambria" panose="02040503050406030204" pitchFamily="34" charset="-122"/>
+                <a:cs typeface="Cambria" panose="02040503050406030204" pitchFamily="34" charset="-120"/>
               </a:rPr>
               <a:t>2. Office Supplies</a:t>
             </a:r>
@@ -5662,7 +5515,6 @@
             <a:avLst/>
           </a:prstGeom>
           <a:noFill/>
-          <a:ln/>
         </p:spPr>
         <p:txBody>
           <a:bodyPr wrap="square" lIns="0" tIns="0" rIns="0" bIns="0" rtlCol="0" anchor="ctr"/>
@@ -5676,9 +5528,9 @@
                 <a:solidFill>
                   <a:schemeClr val="accent5"/>
                 </a:solidFill>
-                <a:latin typeface="Calibri" pitchFamily="34" charset="0"/>
-                <a:ea typeface="Calibri" pitchFamily="34" charset="-122"/>
-                <a:cs typeface="Calibri" pitchFamily="34" charset="-120"/>
+                <a:latin typeface="Calibri" panose="020F0502020204030204" pitchFamily="34" charset="0"/>
+                <a:ea typeface="Calibri" panose="020F0502020204030204" pitchFamily="34" charset="-122"/>
+                <a:cs typeface="Calibri" panose="020F0502020204030204" pitchFamily="34" charset="-120"/>
               </a:rPr>
               <a:t>Sales</a:t>
             </a:r>
@@ -5701,7 +5553,6 @@
             <a:avLst/>
           </a:prstGeom>
           <a:noFill/>
-          <a:ln/>
         </p:spPr>
         <p:txBody>
           <a:bodyPr wrap="square" lIns="0" tIns="0" rIns="0" bIns="0" rtlCol="0" anchor="ctr"/>
@@ -5715,9 +5566,9 @@
                 <a:solidFill>
                   <a:schemeClr val="tx1"/>
                 </a:solidFill>
-                <a:latin typeface="Cambria" pitchFamily="34" charset="0"/>
-                <a:ea typeface="Cambria" pitchFamily="34" charset="-122"/>
-                <a:cs typeface="Cambria" pitchFamily="34" charset="-120"/>
+                <a:latin typeface="Cambria" panose="02040503050406030204" pitchFamily="34" charset="0"/>
+                <a:ea typeface="Cambria" panose="02040503050406030204" pitchFamily="34" charset="-122"/>
+                <a:cs typeface="Cambria" panose="02040503050406030204" pitchFamily="34" charset="-120"/>
               </a:rPr>
               <a:t>$1,781.27</a:t>
             </a:r>
@@ -5740,7 +5591,6 @@
             <a:avLst/>
           </a:prstGeom>
           <a:noFill/>
-          <a:ln/>
         </p:spPr>
         <p:txBody>
           <a:bodyPr wrap="square" lIns="0" tIns="0" rIns="0" bIns="0" rtlCol="0" anchor="ctr"/>
@@ -5754,9 +5604,9 @@
                 <a:solidFill>
                   <a:schemeClr val="accent5"/>
                 </a:solidFill>
-                <a:latin typeface="Calibri" pitchFamily="34" charset="0"/>
-                <a:ea typeface="Calibri" pitchFamily="34" charset="-122"/>
-                <a:cs typeface="Calibri" pitchFamily="34" charset="-120"/>
+                <a:latin typeface="Calibri" panose="020F0502020204030204" pitchFamily="34" charset="0"/>
+                <a:ea typeface="Calibri" panose="020F0502020204030204" pitchFamily="34" charset="-122"/>
+                <a:cs typeface="Calibri" panose="020F0502020204030204" pitchFamily="34" charset="-120"/>
               </a:rPr>
               <a:t>Profit</a:t>
             </a:r>
@@ -5779,7 +5629,6 @@
             <a:avLst/>
           </a:prstGeom>
           <a:noFill/>
-          <a:ln/>
         </p:spPr>
         <p:txBody>
           <a:bodyPr wrap="square" lIns="0" tIns="0" rIns="0" bIns="0" rtlCol="0" anchor="ctr"/>
@@ -5793,9 +5642,9 @@
                 <a:solidFill>
                   <a:schemeClr val="accent4"/>
                 </a:solidFill>
-                <a:latin typeface="Cambria" pitchFamily="34" charset="0"/>
-                <a:ea typeface="Cambria" pitchFamily="34" charset="-122"/>
-                <a:cs typeface="Cambria" pitchFamily="34" charset="-120"/>
+                <a:latin typeface="Cambria" panose="02040503050406030204" pitchFamily="34" charset="0"/>
+                <a:ea typeface="Cambria" panose="02040503050406030204" pitchFamily="34" charset="-122"/>
+                <a:cs typeface="Cambria" panose="02040503050406030204" pitchFamily="34" charset="-120"/>
               </a:rPr>
               <a:t>$167.06</a:t>
             </a:r>
@@ -5818,7 +5667,6 @@
             <a:avLst/>
           </a:prstGeom>
           <a:noFill/>
-          <a:ln/>
         </p:spPr>
         <p:txBody>
           <a:bodyPr wrap="square" lIns="0" tIns="0" rIns="0" bIns="0" rtlCol="0" anchor="t"/>
@@ -5832,9 +5680,9 @@
                 <a:solidFill>
                   <a:schemeClr val="tx1"/>
                 </a:solidFill>
-                <a:latin typeface="Calibri" pitchFamily="34" charset="0"/>
-                <a:ea typeface="Calibri" pitchFamily="34" charset="-122"/>
-                <a:cs typeface="Calibri" pitchFamily="34" charset="-120"/>
+                <a:latin typeface="Calibri" panose="020F0502020204030204" pitchFamily="34" charset="0"/>
+                <a:ea typeface="Calibri" panose="020F0502020204030204" pitchFamily="34" charset="-122"/>
+                <a:cs typeface="Calibri" panose="020F0502020204030204" pitchFamily="34" charset="-120"/>
               </a:rPr>
               <a:t>Profitable, but both sales and profit are lower than the other categories.</a:t>
             </a:r>
@@ -5884,7 +5732,6 @@
             <a:avLst/>
           </a:prstGeom>
           <a:noFill/>
-          <a:ln/>
         </p:spPr>
         <p:txBody>
           <a:bodyPr wrap="square" lIns="0" tIns="0" rIns="0" bIns="0" rtlCol="0" anchor="ctr"/>
@@ -5898,9 +5745,9 @@
                 <a:solidFill>
                   <a:schemeClr val="accent4"/>
                 </a:solidFill>
-                <a:latin typeface="Calibri" pitchFamily="34" charset="0"/>
-                <a:ea typeface="Calibri" pitchFamily="34" charset="-122"/>
-                <a:cs typeface="Calibri" pitchFamily="34" charset="-120"/>
+                <a:latin typeface="Calibri" panose="020F0502020204030204" pitchFamily="34" charset="0"/>
+                <a:ea typeface="Calibri" panose="020F0502020204030204" pitchFamily="34" charset="-122"/>
+                <a:cs typeface="Calibri" panose="020F0502020204030204" pitchFamily="34" charset="-120"/>
               </a:rPr>
               <a:t>Conclusion: </a:t>
             </a:r>
@@ -5909,9 +5756,9 @@
                 <a:solidFill>
                   <a:schemeClr val="tx1"/>
                 </a:solidFill>
-                <a:latin typeface="Calibri" pitchFamily="34" charset="0"/>
-                <a:ea typeface="Calibri" pitchFamily="34" charset="-122"/>
-                <a:cs typeface="Calibri" pitchFamily="34" charset="-120"/>
+                <a:latin typeface="Calibri" panose="020F0502020204030204" pitchFamily="34" charset="0"/>
+                <a:ea typeface="Calibri" panose="020F0502020204030204" pitchFamily="34" charset="-122"/>
+                <a:cs typeface="Calibri" panose="020F0502020204030204" pitchFamily="34" charset="-120"/>
               </a:rPr>
               <a:t>Provides a stable positive profit.</a:t>
             </a:r>
@@ -5968,7 +5815,6 @@
             <a:avLst/>
           </a:prstGeom>
           <a:noFill/>
-          <a:ln/>
         </p:spPr>
         <p:txBody>
           <a:bodyPr wrap="square" lIns="0" tIns="0" rIns="0" bIns="0" rtlCol="0" anchor="ctr"/>
@@ -5982,9 +5828,9 @@
                 <a:solidFill>
                   <a:schemeClr val="accent1"/>
                 </a:solidFill>
-                <a:latin typeface="Cambria" pitchFamily="34" charset="0"/>
-                <a:ea typeface="Cambria" pitchFamily="34" charset="-122"/>
-                <a:cs typeface="Cambria" pitchFamily="34" charset="-120"/>
+                <a:latin typeface="Cambria" panose="02040503050406030204" pitchFamily="34" charset="0"/>
+                <a:ea typeface="Cambria" panose="02040503050406030204" pitchFamily="34" charset="-122"/>
+                <a:cs typeface="Cambria" panose="02040503050406030204" pitchFamily="34" charset="-120"/>
               </a:rPr>
               <a:t>3. Technology</a:t>
             </a:r>
@@ -6007,7 +5853,6 @@
             <a:avLst/>
           </a:prstGeom>
           <a:noFill/>
-          <a:ln/>
         </p:spPr>
         <p:txBody>
           <a:bodyPr wrap="square" lIns="0" tIns="0" rIns="0" bIns="0" rtlCol="0" anchor="ctr"/>
@@ -6021,9 +5866,9 @@
                 <a:solidFill>
                   <a:schemeClr val="accent5"/>
                 </a:solidFill>
-                <a:latin typeface="Calibri" pitchFamily="34" charset="0"/>
-                <a:ea typeface="Calibri" pitchFamily="34" charset="-122"/>
-                <a:cs typeface="Calibri" pitchFamily="34" charset="-120"/>
+                <a:latin typeface="Calibri" panose="020F0502020204030204" pitchFamily="34" charset="0"/>
+                <a:ea typeface="Calibri" panose="020F0502020204030204" pitchFamily="34" charset="-122"/>
+                <a:cs typeface="Calibri" panose="020F0502020204030204" pitchFamily="34" charset="-120"/>
               </a:rPr>
               <a:t>Sales</a:t>
             </a:r>
@@ -6046,7 +5891,6 @@
             <a:avLst/>
           </a:prstGeom>
           <a:noFill/>
-          <a:ln/>
         </p:spPr>
         <p:txBody>
           <a:bodyPr wrap="square" lIns="0" tIns="0" rIns="0" bIns="0" rtlCol="0" anchor="ctr"/>
@@ -6060,9 +5904,9 @@
                 <a:solidFill>
                   <a:schemeClr val="tx1"/>
                 </a:solidFill>
-                <a:latin typeface="Cambria" pitchFamily="34" charset="0"/>
-                <a:ea typeface="Cambria" pitchFamily="34" charset="-122"/>
-                <a:cs typeface="Cambria" pitchFamily="34" charset="-120"/>
+                <a:latin typeface="Cambria" panose="02040503050406030204" pitchFamily="34" charset="0"/>
+                <a:ea typeface="Cambria" panose="02040503050406030204" pitchFamily="34" charset="-122"/>
+                <a:cs typeface="Cambria" panose="02040503050406030204" pitchFamily="34" charset="-120"/>
               </a:rPr>
               <a:t>$3,220.17</a:t>
             </a:r>
@@ -6085,7 +5929,6 @@
             <a:avLst/>
           </a:prstGeom>
           <a:noFill/>
-          <a:ln/>
         </p:spPr>
         <p:txBody>
           <a:bodyPr wrap="square" lIns="0" tIns="0" rIns="0" bIns="0" rtlCol="0" anchor="ctr"/>
@@ -6099,9 +5942,9 @@
                 <a:solidFill>
                   <a:schemeClr val="accent5"/>
                 </a:solidFill>
-                <a:latin typeface="Calibri" pitchFamily="34" charset="0"/>
-                <a:ea typeface="Calibri" pitchFamily="34" charset="-122"/>
-                <a:cs typeface="Calibri" pitchFamily="34" charset="-120"/>
+                <a:latin typeface="Calibri" panose="020F0502020204030204" pitchFamily="34" charset="0"/>
+                <a:ea typeface="Calibri" panose="020F0502020204030204" pitchFamily="34" charset="-122"/>
+                <a:cs typeface="Calibri" panose="020F0502020204030204" pitchFamily="34" charset="-120"/>
               </a:rPr>
               <a:t>Profit</a:t>
             </a:r>
@@ -6124,7 +5967,6 @@
             <a:avLst/>
           </a:prstGeom>
           <a:noFill/>
-          <a:ln/>
         </p:spPr>
         <p:txBody>
           <a:bodyPr wrap="square" lIns="0" tIns="0" rIns="0" bIns="0" rtlCol="0" anchor="ctr"/>
@@ -6138,9 +5980,9 @@
                 <a:solidFill>
                   <a:schemeClr val="accent4"/>
                 </a:solidFill>
-                <a:latin typeface="Cambria" pitchFamily="34" charset="0"/>
-                <a:ea typeface="Cambria" pitchFamily="34" charset="-122"/>
-                <a:cs typeface="Cambria" pitchFamily="34" charset="-120"/>
+                <a:latin typeface="Cambria" panose="02040503050406030204" pitchFamily="34" charset="0"/>
+                <a:ea typeface="Cambria" panose="02040503050406030204" pitchFamily="34" charset="-122"/>
+                <a:cs typeface="Cambria" panose="02040503050406030204" pitchFamily="34" charset="-120"/>
               </a:rPr>
               <a:t>$310.33</a:t>
             </a:r>
@@ -6163,7 +6005,6 @@
             <a:avLst/>
           </a:prstGeom>
           <a:noFill/>
-          <a:ln/>
         </p:spPr>
         <p:txBody>
           <a:bodyPr wrap="square" lIns="0" tIns="0" rIns="0" bIns="0" rtlCol="0" anchor="t"/>
@@ -6177,9 +6018,9 @@
                 <a:solidFill>
                   <a:schemeClr val="tx1"/>
                 </a:solidFill>
-                <a:latin typeface="Calibri" pitchFamily="34" charset="0"/>
-                <a:ea typeface="Calibri" pitchFamily="34" charset="-122"/>
-                <a:cs typeface="Calibri" pitchFamily="34" charset="-120"/>
+                <a:latin typeface="Calibri" panose="020F0502020204030204" pitchFamily="34" charset="0"/>
+                <a:ea typeface="Calibri" panose="020F0502020204030204" pitchFamily="34" charset="-122"/>
+                <a:cs typeface="Calibri" panose="020F0502020204030204" pitchFamily="34" charset="-120"/>
               </a:rPr>
               <a:t>Sales are much lower than Furniture, but it converts sales into profit more effectively.</a:t>
             </a:r>
@@ -6229,7 +6070,6 @@
             <a:avLst/>
           </a:prstGeom>
           <a:noFill/>
-          <a:ln/>
         </p:spPr>
         <p:txBody>
           <a:bodyPr wrap="square" lIns="0" tIns="0" rIns="0" bIns="0" rtlCol="0" anchor="ctr"/>
@@ -6243,9 +6083,9 @@
                 <a:solidFill>
                   <a:schemeClr val="accent4"/>
                 </a:solidFill>
-                <a:latin typeface="Calibri" pitchFamily="34" charset="0"/>
-                <a:ea typeface="Calibri" pitchFamily="34" charset="-122"/>
-                <a:cs typeface="Calibri" pitchFamily="34" charset="-120"/>
+                <a:latin typeface="Calibri" panose="020F0502020204030204" pitchFamily="34" charset="0"/>
+                <a:ea typeface="Calibri" panose="020F0502020204030204" pitchFamily="34" charset="-122"/>
+                <a:cs typeface="Calibri" panose="020F0502020204030204" pitchFamily="34" charset="-120"/>
               </a:rPr>
               <a:t>Conclusion: </a:t>
             </a:r>
@@ -6254,9 +6094,9 @@
                 <a:solidFill>
                   <a:schemeClr val="tx1"/>
                 </a:solidFill>
-                <a:latin typeface="Calibri" pitchFamily="34" charset="0"/>
-                <a:ea typeface="Calibri" pitchFamily="34" charset="-122"/>
-                <a:cs typeface="Calibri" pitchFamily="34" charset="-120"/>
+                <a:latin typeface="Calibri" panose="020F0502020204030204" pitchFamily="34" charset="0"/>
+                <a:ea typeface="Calibri" panose="020F0502020204030204" pitchFamily="34" charset="-122"/>
+                <a:cs typeface="Calibri" panose="020F0502020204030204" pitchFamily="34" charset="-120"/>
               </a:rPr>
               <a:t>The most profitable category.</a:t>
             </a:r>
@@ -6282,11 +6122,6 @@
           <a:prstGeom prst="rect">
             <a:avLst/>
           </a:prstGeom>
-          <a:extLst>
-            <a:ext uri="{C572A759-6A51-4108-AA02-DFA0A04FC94B}">
-              <ma14:wrappingTextBoxFlag xmlns="" xmlns:ma14="http://schemas.microsoft.com/office/mac/drawingml/2011/main" val="0"/>
-            </a:ext>
-          </a:extLst>
         </p:spPr>
         <p:txBody>
           <a:bodyPr/>
@@ -6303,7 +6138,6 @@
             <a:pPr algn="l"/>
             <a:fld id="{F7021451-1387-4CA6-816F-3879F97B5CBC}" type="slidenum">
               <a:rPr lang="en-US" b="0"/>
-              <a:t>3</a:t>
             </a:fld>
             <a:endParaRPr lang="en-US"/>
           </a:p>
@@ -7351,7 +7185,7 @@
 
 <file path=ppt/slides/slide4.xml><?xml version="1.0" encoding="utf-8"?>
 <p:sld xmlns:a="http://schemas.openxmlformats.org/drawingml/2006/main" xmlns:r="http://schemas.openxmlformats.org/officeDocument/2006/relationships" xmlns:p="http://schemas.openxmlformats.org/presentationml/2006/main">
-  <p:cSld name="Slide 5">
+  <p:cSld>
     <p:spTree>
       <p:nvGrpSpPr>
         <p:cNvPr id="1" name=""/>
@@ -7385,7 +7219,6 @@
             <a:avLst/>
           </a:prstGeom>
           <a:noFill/>
-          <a:ln/>
         </p:spPr>
         <p:txBody>
           <a:bodyPr wrap="square" lIns="0" tIns="0" rIns="0" bIns="0" rtlCol="0" anchor="ctr"/>
@@ -7399,9 +7232,9 @@
                 <a:solidFill>
                   <a:schemeClr val="tx1"/>
                 </a:solidFill>
-                <a:latin typeface="Cambria" pitchFamily="34" charset="0"/>
-                <a:ea typeface="Cambria" pitchFamily="34" charset="-122"/>
-                <a:cs typeface="Cambria" pitchFamily="34" charset="-120"/>
+                <a:latin typeface="Cambria" panose="02040503050406030204" pitchFamily="34" charset="0"/>
+                <a:ea typeface="Cambria" panose="02040503050406030204" pitchFamily="34" charset="-122"/>
+                <a:cs typeface="Cambria" panose="02040503050406030204" pitchFamily="34" charset="-120"/>
               </a:rPr>
               <a:t>Profit by ship mode</a:t>
             </a:r>
@@ -7452,7 +7285,7 @@
           <p:nvPr/>
         </p:nvPicPr>
         <p:blipFill>
-          <a:blip r:embed="rId3"/>
+          <a:blip r:embed="rId1"/>
           <a:stretch>
             <a:fillRect/>
           </a:stretch>
@@ -7516,7 +7349,6 @@
             <a:avLst/>
           </a:prstGeom>
           <a:noFill/>
-          <a:ln/>
         </p:spPr>
         <p:txBody>
           <a:bodyPr wrap="square" lIns="0" tIns="0" rIns="0" bIns="0" rtlCol="0" anchor="ctr"/>
@@ -7530,9 +7362,9 @@
                 <a:solidFill>
                   <a:schemeClr val="accent5"/>
                 </a:solidFill>
-                <a:latin typeface="Calibri" pitchFamily="34" charset="0"/>
-                <a:ea typeface="Calibri" pitchFamily="34" charset="-122"/>
-                <a:cs typeface="Calibri" pitchFamily="34" charset="-120"/>
+                <a:latin typeface="Calibri" panose="020F0502020204030204" pitchFamily="34" charset="0"/>
+                <a:ea typeface="Calibri" panose="020F0502020204030204" pitchFamily="34" charset="-122"/>
+                <a:cs typeface="Calibri" panose="020F0502020204030204" pitchFamily="34" charset="-120"/>
               </a:rPr>
               <a:t>Only profitable mode</a:t>
             </a:r>
@@ -7555,7 +7387,6 @@
             <a:avLst/>
           </a:prstGeom>
           <a:noFill/>
-          <a:ln/>
         </p:spPr>
         <p:txBody>
           <a:bodyPr wrap="square" lIns="0" tIns="0" rIns="0" bIns="0" rtlCol="0" anchor="ctr"/>
@@ -7569,9 +7400,9 @@
                 <a:solidFill>
                   <a:schemeClr val="accent4"/>
                 </a:solidFill>
-                <a:latin typeface="Cambria" pitchFamily="34" charset="0"/>
-                <a:ea typeface="Cambria" pitchFamily="34" charset="-122"/>
-                <a:cs typeface="Cambria" pitchFamily="34" charset="-120"/>
+                <a:latin typeface="Cambria" panose="02040503050406030204" pitchFamily="34" charset="0"/>
+                <a:ea typeface="Cambria" panose="02040503050406030204" pitchFamily="34" charset="-122"/>
+                <a:cs typeface="Cambria" panose="02040503050406030204" pitchFamily="34" charset="-120"/>
               </a:rPr>
               <a:t>Second Class</a:t>
             </a:r>
@@ -7594,7 +7425,6 @@
             <a:avLst/>
           </a:prstGeom>
           <a:noFill/>
-          <a:ln/>
         </p:spPr>
         <p:txBody>
           <a:bodyPr wrap="square" lIns="0" tIns="0" rIns="0" bIns="0" rtlCol="0" anchor="t"/>
@@ -7608,9 +7438,9 @@
                 <a:solidFill>
                   <a:schemeClr val="tx1"/>
                 </a:solidFill>
-                <a:latin typeface="Calibri" pitchFamily="34" charset="0"/>
-                <a:ea typeface="Calibri" pitchFamily="34" charset="-122"/>
-                <a:cs typeface="Calibri" pitchFamily="34" charset="-120"/>
+                <a:latin typeface="Calibri" panose="020F0502020204030204" pitchFamily="34" charset="0"/>
+                <a:ea typeface="Calibri" panose="020F0502020204030204" pitchFamily="34" charset="-122"/>
+                <a:cs typeface="Calibri" panose="020F0502020204030204" pitchFamily="34" charset="-120"/>
               </a:rPr>
               <a:t>$329.16 profit</a:t>
             </a:r>
@@ -7667,7 +7497,6 @@
             <a:avLst/>
           </a:prstGeom>
           <a:noFill/>
-          <a:ln/>
         </p:spPr>
         <p:txBody>
           <a:bodyPr wrap="square" lIns="0" tIns="0" rIns="0" bIns="0" rtlCol="0" anchor="ctr"/>
@@ -7681,9 +7510,9 @@
                 <a:solidFill>
                   <a:schemeClr val="accent5"/>
                 </a:solidFill>
-                <a:latin typeface="Calibri" pitchFamily="34" charset="0"/>
-                <a:ea typeface="Calibri" pitchFamily="34" charset="-122"/>
-                <a:cs typeface="Calibri" pitchFamily="34" charset="-120"/>
+                <a:latin typeface="Calibri" panose="020F0502020204030204" pitchFamily="34" charset="0"/>
+                <a:ea typeface="Calibri" panose="020F0502020204030204" pitchFamily="34" charset="-122"/>
+                <a:cs typeface="Calibri" panose="020F0502020204030204" pitchFamily="34" charset="-120"/>
               </a:rPr>
               <a:t>Biggest loss</a:t>
             </a:r>
@@ -7706,7 +7535,6 @@
             <a:avLst/>
           </a:prstGeom>
           <a:noFill/>
-          <a:ln/>
         </p:spPr>
         <p:txBody>
           <a:bodyPr wrap="square" lIns="0" tIns="0" rIns="0" bIns="0" rtlCol="0" anchor="ctr"/>
@@ -7720,9 +7548,9 @@
                 <a:solidFill>
                   <a:schemeClr val="accent3"/>
                 </a:solidFill>
-                <a:latin typeface="Cambria" pitchFamily="34" charset="0"/>
-                <a:ea typeface="Cambria" pitchFamily="34" charset="-122"/>
-                <a:cs typeface="Cambria" pitchFamily="34" charset="-120"/>
+                <a:latin typeface="Cambria" panose="02040503050406030204" pitchFamily="34" charset="0"/>
+                <a:ea typeface="Cambria" panose="02040503050406030204" pitchFamily="34" charset="-122"/>
+                <a:cs typeface="Cambria" panose="02040503050406030204" pitchFamily="34" charset="-120"/>
               </a:rPr>
               <a:t>Standard Class</a:t>
             </a:r>
@@ -7745,7 +7573,6 @@
             <a:avLst/>
           </a:prstGeom>
           <a:noFill/>
-          <a:ln/>
         </p:spPr>
         <p:txBody>
           <a:bodyPr wrap="square" lIns="0" tIns="0" rIns="0" bIns="0" rtlCol="0" anchor="t"/>
@@ -7759,9 +7586,9 @@
                 <a:solidFill>
                   <a:schemeClr val="tx1"/>
                 </a:solidFill>
-                <a:latin typeface="Calibri" pitchFamily="34" charset="0"/>
-                <a:ea typeface="Calibri" pitchFamily="34" charset="-122"/>
-                <a:cs typeface="Calibri" pitchFamily="34" charset="-120"/>
+                <a:latin typeface="Calibri" panose="020F0502020204030204" pitchFamily="34" charset="0"/>
+                <a:ea typeface="Calibri" panose="020F0502020204030204" pitchFamily="34" charset="-122"/>
+                <a:cs typeface="Calibri" panose="020F0502020204030204" pitchFamily="34" charset="-120"/>
               </a:rPr>
               <a:t>−$1,469.70 loss; First Class loses $24.49</a:t>
             </a:r>
@@ -7787,11 +7614,6 @@
           <a:prstGeom prst="rect">
             <a:avLst/>
           </a:prstGeom>
-          <a:extLst>
-            <a:ext uri="{C572A759-6A51-4108-AA02-DFA0A04FC94B}">
-              <ma14:wrappingTextBoxFlag xmlns="" xmlns:ma14="http://schemas.microsoft.com/office/mac/drawingml/2011/main" val="0"/>
-            </a:ext>
-          </a:extLst>
         </p:spPr>
         <p:txBody>
           <a:bodyPr/>
@@ -7808,7 +7630,6 @@
             <a:pPr algn="l"/>
             <a:fld id="{F7021451-1387-4CA6-816F-3879F97B5CBC}" type="slidenum">
               <a:rPr lang="en-US" b="0"/>
-              <a:t>4</a:t>
             </a:fld>
             <a:endParaRPr lang="en-US"/>
           </a:p>
@@ -8261,7 +8082,7 @@
 
 <file path=ppt/slides/slide5.xml><?xml version="1.0" encoding="utf-8"?>
 <p:sld xmlns:a="http://schemas.openxmlformats.org/drawingml/2006/main" xmlns:r="http://schemas.openxmlformats.org/officeDocument/2006/relationships" xmlns:p="http://schemas.openxmlformats.org/presentationml/2006/main">
-  <p:cSld name="Slide 6">
+  <p:cSld>
     <p:spTree>
       <p:nvGrpSpPr>
         <p:cNvPr id="1" name=""/>
@@ -8295,7 +8116,6 @@
             <a:avLst/>
           </a:prstGeom>
           <a:noFill/>
-          <a:ln/>
         </p:spPr>
         <p:txBody>
           <a:bodyPr wrap="square" lIns="0" tIns="0" rIns="0" bIns="0" rtlCol="0" anchor="ctr"/>
@@ -8309,9 +8129,9 @@
                 <a:solidFill>
                   <a:schemeClr val="tx1"/>
                 </a:solidFill>
-                <a:latin typeface="Cambria" pitchFamily="34" charset="0"/>
-                <a:ea typeface="Cambria" pitchFamily="34" charset="-122"/>
-                <a:cs typeface="Cambria" pitchFamily="34" charset="-120"/>
+                <a:latin typeface="Cambria" panose="02040503050406030204" pitchFamily="34" charset="0"/>
+                <a:ea typeface="Cambria" panose="02040503050406030204" pitchFamily="34" charset="-122"/>
+                <a:cs typeface="Cambria" panose="02040503050406030204" pitchFamily="34" charset="-120"/>
               </a:rPr>
               <a:t>Ship mode chart: the numbers</a:t>
             </a:r>
@@ -8325,13 +8145,7 @@
           <p:cNvGraphicFramePr>
             <a:graphicFrameLocks noGrp="1"/>
           </p:cNvGraphicFramePr>
-          <p:nvPr>
-            <p:extLst>
-              <p:ext uri="{D42A27DB-BD31-4B8C-83A1-F6EECF244321}">
-                <p14:modId xmlns:p14="http://schemas.microsoft.com/office/powerpoint/2010/main" val="1579011935"/>
-              </p:ext>
-            </p:extLst>
-          </p:nvPr>
+          <p:nvPr/>
         </p:nvGraphicFramePr>
         <p:xfrm>
           <a:off x="457200" y="1143000"/>
@@ -8342,27 +8156,9 @@
             <a:tbl>
               <a:tblPr/>
               <a:tblGrid>
-                <a:gridCol w="3200400">
-                  <a:extLst>
-                    <a:ext uri="{9D8B030D-6E8A-4147-A177-3AD203B41FA5}">
-                      <a16:colId xmlns:a16="http://schemas.microsoft.com/office/drawing/2014/main" val="20000"/>
-                    </a:ext>
-                  </a:extLst>
-                </a:gridCol>
-                <a:gridCol w="2560320">
-                  <a:extLst>
-                    <a:ext uri="{9D8B030D-6E8A-4147-A177-3AD203B41FA5}">
-                      <a16:colId xmlns:a16="http://schemas.microsoft.com/office/drawing/2014/main" val="20001"/>
-                    </a:ext>
-                  </a:extLst>
-                </a:gridCol>
-                <a:gridCol w="2468880">
-                  <a:extLst>
-                    <a:ext uri="{9D8B030D-6E8A-4147-A177-3AD203B41FA5}">
-                      <a16:colId xmlns:a16="http://schemas.microsoft.com/office/drawing/2014/main" val="20002"/>
-                    </a:ext>
-                  </a:extLst>
-                </a:gridCol>
+                <a:gridCol w="3200400"/>
+                <a:gridCol w="2560320"/>
+                <a:gridCol w="2468880"/>
               </a:tblGrid>
               <a:tr h="365760">
                 <a:tc>
@@ -8378,16 +8174,16 @@
                           <a:solidFill>
                             <a:srgbClr val="FFFFFF"/>
                           </a:solidFill>
-                          <a:latin typeface="+mn-lt" pitchFamily="34" charset="0"/>
-                          <a:ea typeface="+mn-lt" pitchFamily="34" charset="-122"/>
-                          <a:cs typeface="+mn-lt" pitchFamily="34" charset="-120"/>
+                          <a:latin typeface="+mn-lt"/>
+                          <a:ea typeface="+mn-lt"/>
+                          <a:cs typeface="+mn-lt"/>
                         </a:rPr>
                         <a:t>Ship mode</a:t>
                       </a:r>
                       <a:endParaRPr lang="en-US" sz="1400" dirty="0">
-                        <a:latin typeface="+mn-lt" charset="0"/>
-                        <a:ea typeface="+mn-lt" charset="0"/>
-                        <a:cs typeface="+mn-lt" charset="0"/>
+                        <a:latin typeface="+mn-lt"/>
+                        <a:ea typeface="+mn-lt"/>
+                        <a:cs typeface="+mn-lt"/>
                       </a:endParaRPr>
                     </a:p>
                   </a:txBody>
@@ -8446,16 +8242,16 @@
                           <a:solidFill>
                             <a:srgbClr val="FFFFFF"/>
                           </a:solidFill>
-                          <a:latin typeface="+mn-lt" pitchFamily="34" charset="0"/>
-                          <a:ea typeface="+mn-lt" pitchFamily="34" charset="-122"/>
-                          <a:cs typeface="+mn-lt" pitchFamily="34" charset="-120"/>
+                          <a:latin typeface="+mn-lt"/>
+                          <a:ea typeface="+mn-lt"/>
+                          <a:cs typeface="+mn-lt"/>
                         </a:rPr>
                         <a:t>Profit</a:t>
                       </a:r>
                       <a:endParaRPr lang="en-US" sz="1400" dirty="0">
-                        <a:latin typeface="+mn-lt" charset="0"/>
-                        <a:ea typeface="+mn-lt" charset="0"/>
-                        <a:cs typeface="+mn-lt" charset="0"/>
+                        <a:latin typeface="+mn-lt"/>
+                        <a:ea typeface="+mn-lt"/>
+                        <a:cs typeface="+mn-lt"/>
                       </a:endParaRPr>
                     </a:p>
                   </a:txBody>
@@ -8514,16 +8310,16 @@
                           <a:solidFill>
                             <a:srgbClr val="FFFFFF"/>
                           </a:solidFill>
-                          <a:latin typeface="+mn-lt" pitchFamily="34" charset="0"/>
-                          <a:ea typeface="+mn-lt" pitchFamily="34" charset="-122"/>
-                          <a:cs typeface="+mn-lt" pitchFamily="34" charset="-120"/>
+                          <a:latin typeface="+mn-lt"/>
+                          <a:ea typeface="+mn-lt"/>
+                          <a:cs typeface="+mn-lt"/>
                         </a:rPr>
                         <a:t>Result</a:t>
                       </a:r>
                       <a:endParaRPr lang="en-US" sz="1400" dirty="0">
-                        <a:latin typeface="+mn-lt" charset="0"/>
-                        <a:ea typeface="+mn-lt" charset="0"/>
-                        <a:cs typeface="+mn-lt" charset="0"/>
+                        <a:latin typeface="+mn-lt"/>
+                        <a:ea typeface="+mn-lt"/>
+                        <a:cs typeface="+mn-lt"/>
                       </a:endParaRPr>
                     </a:p>
                   </a:txBody>
@@ -8569,11 +8365,6 @@
                     </a:solidFill>
                   </a:tcPr>
                 </a:tc>
-                <a:extLst>
-                  <a:ext uri="{0D108BD9-81ED-4DB2-BD59-A6C34878D82A}">
-                    <a16:rowId xmlns:a16="http://schemas.microsoft.com/office/drawing/2014/main" val="10000"/>
-                  </a:ext>
-                </a:extLst>
               </a:tr>
               <a:tr h="365760">
                 <a:tc>
@@ -8589,16 +8380,16 @@
                           <a:solidFill>
                             <a:srgbClr val="10222B"/>
                           </a:solidFill>
-                          <a:latin typeface="+mn-lt" pitchFamily="34" charset="0"/>
-                          <a:ea typeface="+mn-lt" pitchFamily="34" charset="-122"/>
-                          <a:cs typeface="+mn-lt" pitchFamily="34" charset="-120"/>
+                          <a:latin typeface="+mn-lt"/>
+                          <a:ea typeface="+mn-lt"/>
+                          <a:cs typeface="+mn-lt"/>
                         </a:rPr>
                         <a:t>Second Class</a:t>
                       </a:r>
                       <a:endParaRPr lang="en-US" sz="1400" dirty="0">
-                        <a:latin typeface="+mn-lt" charset="0"/>
-                        <a:ea typeface="+mn-lt" charset="0"/>
-                        <a:cs typeface="+mn-lt" charset="0"/>
+                        <a:latin typeface="+mn-lt"/>
+                        <a:ea typeface="+mn-lt"/>
+                        <a:cs typeface="+mn-lt"/>
                       </a:endParaRPr>
                     </a:p>
                   </a:txBody>
@@ -8657,16 +8448,16 @@
                           <a:solidFill>
                             <a:srgbClr val="16A34A"/>
                           </a:solidFill>
-                          <a:latin typeface="+mn-lt" pitchFamily="34" charset="0"/>
-                          <a:ea typeface="+mn-lt" pitchFamily="34" charset="-122"/>
-                          <a:cs typeface="+mn-lt" pitchFamily="34" charset="-120"/>
+                          <a:latin typeface="+mn-lt"/>
+                          <a:ea typeface="+mn-lt"/>
+                          <a:cs typeface="+mn-lt"/>
                         </a:rPr>
                         <a:t>$329.16</a:t>
                       </a:r>
                       <a:endParaRPr lang="en-US" sz="1400" dirty="0">
-                        <a:latin typeface="+mn-lt" charset="0"/>
-                        <a:ea typeface="+mn-lt" charset="0"/>
-                        <a:cs typeface="+mn-lt" charset="0"/>
+                        <a:latin typeface="+mn-lt"/>
+                        <a:ea typeface="+mn-lt"/>
+                        <a:cs typeface="+mn-lt"/>
                       </a:endParaRPr>
                     </a:p>
                   </a:txBody>
@@ -8725,16 +8516,16 @@
                           <a:solidFill>
                             <a:srgbClr val="16A34A"/>
                           </a:solidFill>
-                          <a:latin typeface="+mn-lt" pitchFamily="34" charset="0"/>
-                          <a:ea typeface="+mn-lt" pitchFamily="34" charset="-122"/>
-                          <a:cs typeface="+mn-lt" pitchFamily="34" charset="-120"/>
+                          <a:latin typeface="+mn-lt"/>
+                          <a:ea typeface="+mn-lt"/>
+                          <a:cs typeface="+mn-lt"/>
                         </a:rPr>
                         <a:t>Profitable</a:t>
                       </a:r>
                       <a:endParaRPr lang="en-US" sz="1400" dirty="0">
-                        <a:latin typeface="+mn-lt" charset="0"/>
-                        <a:ea typeface="+mn-lt" charset="0"/>
-                        <a:cs typeface="+mn-lt" charset="0"/>
+                        <a:latin typeface="+mn-lt"/>
+                        <a:ea typeface="+mn-lt"/>
+                        <a:cs typeface="+mn-lt"/>
                       </a:endParaRPr>
                     </a:p>
                   </a:txBody>
@@ -8780,11 +8571,6 @@
                     </a:solidFill>
                   </a:tcPr>
                 </a:tc>
-                <a:extLst>
-                  <a:ext uri="{0D108BD9-81ED-4DB2-BD59-A6C34878D82A}">
-                    <a16:rowId xmlns:a16="http://schemas.microsoft.com/office/drawing/2014/main" val="10001"/>
-                  </a:ext>
-                </a:extLst>
               </a:tr>
               <a:tr h="365760">
                 <a:tc>
@@ -8800,16 +8586,16 @@
                           <a:solidFill>
                             <a:srgbClr val="10222B"/>
                           </a:solidFill>
-                          <a:latin typeface="+mn-lt" pitchFamily="34" charset="0"/>
-                          <a:ea typeface="+mn-lt" pitchFamily="34" charset="-122"/>
-                          <a:cs typeface="+mn-lt" pitchFamily="34" charset="-120"/>
+                          <a:latin typeface="+mn-lt"/>
+                          <a:ea typeface="+mn-lt"/>
+                          <a:cs typeface="+mn-lt"/>
                         </a:rPr>
                         <a:t>Standard Class</a:t>
                       </a:r>
                       <a:endParaRPr lang="en-US" sz="1400" dirty="0">
-                        <a:latin typeface="+mn-lt" charset="0"/>
-                        <a:ea typeface="+mn-lt" charset="0"/>
-                        <a:cs typeface="+mn-lt" charset="0"/>
+                        <a:latin typeface="+mn-lt"/>
+                        <a:ea typeface="+mn-lt"/>
+                        <a:cs typeface="+mn-lt"/>
                       </a:endParaRPr>
                     </a:p>
                   </a:txBody>
@@ -8868,16 +8654,16 @@
                           <a:solidFill>
                             <a:srgbClr val="DC2626"/>
                           </a:solidFill>
-                          <a:latin typeface="+mn-lt" pitchFamily="34" charset="0"/>
-                          <a:ea typeface="+mn-lt" pitchFamily="34" charset="-122"/>
-                          <a:cs typeface="+mn-lt" pitchFamily="34" charset="-120"/>
+                          <a:latin typeface="+mn-lt"/>
+                          <a:ea typeface="+mn-lt"/>
+                          <a:cs typeface="+mn-lt"/>
                         </a:rPr>
                         <a:t>−$1,469.70</a:t>
                       </a:r>
                       <a:endParaRPr lang="en-US" sz="1400" dirty="0">
-                        <a:latin typeface="+mn-lt" charset="0"/>
-                        <a:ea typeface="+mn-lt" charset="0"/>
-                        <a:cs typeface="+mn-lt" charset="0"/>
+                        <a:latin typeface="+mn-lt"/>
+                        <a:ea typeface="+mn-lt"/>
+                        <a:cs typeface="+mn-lt"/>
                       </a:endParaRPr>
                     </a:p>
                   </a:txBody>
@@ -8936,16 +8722,16 @@
                           <a:solidFill>
                             <a:srgbClr val="DC2626"/>
                           </a:solidFill>
-                          <a:latin typeface="+mn-lt" pitchFamily="34" charset="0"/>
-                          <a:ea typeface="+mn-lt" pitchFamily="34" charset="-122"/>
-                          <a:cs typeface="+mn-lt" pitchFamily="34" charset="-120"/>
+                          <a:latin typeface="+mn-lt"/>
+                          <a:ea typeface="+mn-lt"/>
+                          <a:cs typeface="+mn-lt"/>
                         </a:rPr>
                         <a:t>Loss</a:t>
                       </a:r>
                       <a:endParaRPr lang="en-US" sz="1400" dirty="0">
-                        <a:latin typeface="+mn-lt" charset="0"/>
-                        <a:ea typeface="+mn-lt" charset="0"/>
-                        <a:cs typeface="+mn-lt" charset="0"/>
+                        <a:latin typeface="+mn-lt"/>
+                        <a:ea typeface="+mn-lt"/>
+                        <a:cs typeface="+mn-lt"/>
                       </a:endParaRPr>
                     </a:p>
                   </a:txBody>
@@ -8991,11 +8777,6 @@
                     </a:solidFill>
                   </a:tcPr>
                 </a:tc>
-                <a:extLst>
-                  <a:ext uri="{0D108BD9-81ED-4DB2-BD59-A6C34878D82A}">
-                    <a16:rowId xmlns:a16="http://schemas.microsoft.com/office/drawing/2014/main" val="10002"/>
-                  </a:ext>
-                </a:extLst>
               </a:tr>
               <a:tr h="365760">
                 <a:tc>
@@ -9011,16 +8792,16 @@
                           <a:solidFill>
                             <a:srgbClr val="10222B"/>
                           </a:solidFill>
-                          <a:latin typeface="+mn-lt" pitchFamily="34" charset="0"/>
-                          <a:ea typeface="+mn-lt" pitchFamily="34" charset="-122"/>
-                          <a:cs typeface="+mn-lt" pitchFamily="34" charset="-120"/>
+                          <a:latin typeface="+mn-lt"/>
+                          <a:ea typeface="+mn-lt"/>
+                          <a:cs typeface="+mn-lt"/>
                         </a:rPr>
                         <a:t>First Class</a:t>
                       </a:r>
                       <a:endParaRPr lang="en-US" sz="1400" dirty="0">
-                        <a:latin typeface="+mn-lt" charset="0"/>
-                        <a:ea typeface="+mn-lt" charset="0"/>
-                        <a:cs typeface="+mn-lt" charset="0"/>
+                        <a:latin typeface="+mn-lt"/>
+                        <a:ea typeface="+mn-lt"/>
+                        <a:cs typeface="+mn-lt"/>
                       </a:endParaRPr>
                     </a:p>
                   </a:txBody>
@@ -9079,16 +8860,16 @@
                           <a:solidFill>
                             <a:srgbClr val="DC2626"/>
                           </a:solidFill>
-                          <a:latin typeface="+mn-lt" pitchFamily="34" charset="0"/>
-                          <a:ea typeface="+mn-lt" pitchFamily="34" charset="-122"/>
-                          <a:cs typeface="+mn-lt" pitchFamily="34" charset="-120"/>
+                          <a:latin typeface="+mn-lt"/>
+                          <a:ea typeface="+mn-lt"/>
+                          <a:cs typeface="+mn-lt"/>
                         </a:rPr>
                         <a:t>−$24.49</a:t>
                       </a:r>
                       <a:endParaRPr lang="en-US" sz="1400" dirty="0">
-                        <a:latin typeface="+mn-lt" charset="0"/>
-                        <a:ea typeface="+mn-lt" charset="0"/>
-                        <a:cs typeface="+mn-lt" charset="0"/>
+                        <a:latin typeface="+mn-lt"/>
+                        <a:ea typeface="+mn-lt"/>
+                        <a:cs typeface="+mn-lt"/>
                       </a:endParaRPr>
                     </a:p>
                   </a:txBody>
@@ -9147,16 +8928,16 @@
                           <a:solidFill>
                             <a:srgbClr val="DC2626"/>
                           </a:solidFill>
-                          <a:latin typeface="+mn-lt" pitchFamily="34" charset="0"/>
-                          <a:ea typeface="+mn-lt" pitchFamily="34" charset="-122"/>
-                          <a:cs typeface="+mn-lt" pitchFamily="34" charset="-120"/>
+                          <a:latin typeface="+mn-lt"/>
+                          <a:ea typeface="+mn-lt"/>
+                          <a:cs typeface="+mn-lt"/>
                         </a:rPr>
                         <a:t>Loss</a:t>
                       </a:r>
                       <a:endParaRPr lang="en-US" sz="1400" dirty="0">
-                        <a:latin typeface="+mn-lt" charset="0"/>
-                        <a:ea typeface="+mn-lt" charset="0"/>
-                        <a:cs typeface="+mn-lt" charset="0"/>
+                        <a:latin typeface="+mn-lt"/>
+                        <a:ea typeface="+mn-lt"/>
+                        <a:cs typeface="+mn-lt"/>
                       </a:endParaRPr>
                     </a:p>
                   </a:txBody>
@@ -9202,11 +8983,6 @@
                     </a:solidFill>
                   </a:tcPr>
                 </a:tc>
-                <a:extLst>
-                  <a:ext uri="{0D108BD9-81ED-4DB2-BD59-A6C34878D82A}">
-                    <a16:rowId xmlns:a16="http://schemas.microsoft.com/office/drawing/2014/main" val="10003"/>
-                  </a:ext>
-                </a:extLst>
               </a:tr>
               <a:tr h="365760">
                 <a:tc>
@@ -9222,16 +8998,16 @@
                           <a:solidFill>
                             <a:srgbClr val="10222B"/>
                           </a:solidFill>
-                          <a:latin typeface="+mn-lt" pitchFamily="34" charset="0"/>
-                          <a:ea typeface="+mn-lt" pitchFamily="34" charset="-122"/>
-                          <a:cs typeface="+mn-lt" pitchFamily="34" charset="-120"/>
+                          <a:latin typeface="+mn-lt"/>
+                          <a:ea typeface="+mn-lt"/>
+                          <a:cs typeface="+mn-lt"/>
                         </a:rPr>
                         <a:t>Total</a:t>
                       </a:r>
                       <a:endParaRPr lang="en-US" sz="1400" dirty="0">
-                        <a:latin typeface="+mn-lt" charset="0"/>
-                        <a:ea typeface="+mn-lt" charset="0"/>
-                        <a:cs typeface="+mn-lt" charset="0"/>
+                        <a:latin typeface="+mn-lt"/>
+                        <a:ea typeface="+mn-lt"/>
+                        <a:cs typeface="+mn-lt"/>
                       </a:endParaRPr>
                     </a:p>
                   </a:txBody>
@@ -9290,16 +9066,16 @@
                           <a:solidFill>
                             <a:srgbClr val="DC2626"/>
                           </a:solidFill>
-                          <a:latin typeface="+mn-lt" pitchFamily="34" charset="0"/>
-                          <a:ea typeface="+mn-lt" pitchFamily="34" charset="-122"/>
-                          <a:cs typeface="+mn-lt" pitchFamily="34" charset="-120"/>
+                          <a:latin typeface="+mn-lt"/>
+                          <a:ea typeface="+mn-lt"/>
+                          <a:cs typeface="+mn-lt"/>
                         </a:rPr>
                         <a:t>−$1,165.04</a:t>
                       </a:r>
                       <a:endParaRPr lang="en-US" sz="1400" dirty="0">
-                        <a:latin typeface="+mn-lt" charset="0"/>
-                        <a:ea typeface="+mn-lt" charset="0"/>
-                        <a:cs typeface="+mn-lt" charset="0"/>
+                        <a:latin typeface="+mn-lt"/>
+                        <a:ea typeface="+mn-lt"/>
+                        <a:cs typeface="+mn-lt"/>
                       </a:endParaRPr>
                     </a:p>
                   </a:txBody>
@@ -9358,16 +9134,16 @@
                           <a:solidFill>
                             <a:srgbClr val="DC2626"/>
                           </a:solidFill>
-                          <a:latin typeface="+mn-lt" pitchFamily="34" charset="0"/>
-                          <a:ea typeface="+mn-lt" pitchFamily="34" charset="-122"/>
-                          <a:cs typeface="+mn-lt" pitchFamily="34" charset="-120"/>
+                          <a:latin typeface="+mn-lt"/>
+                          <a:ea typeface="+mn-lt"/>
+                          <a:cs typeface="+mn-lt"/>
                         </a:rPr>
                         <a:t>Net loss</a:t>
                       </a:r>
                       <a:endParaRPr lang="en-US" sz="1400" dirty="0">
-                        <a:latin typeface="+mn-lt" charset="0"/>
-                        <a:ea typeface="+mn-lt" charset="0"/>
-                        <a:cs typeface="+mn-lt" charset="0"/>
+                        <a:latin typeface="+mn-lt"/>
+                        <a:ea typeface="+mn-lt"/>
+                        <a:cs typeface="+mn-lt"/>
                       </a:endParaRPr>
                     </a:p>
                   </a:txBody>
@@ -9413,11 +9189,6 @@
                     </a:solidFill>
                   </a:tcPr>
                 </a:tc>
-                <a:extLst>
-                  <a:ext uri="{0D108BD9-81ED-4DB2-BD59-A6C34878D82A}">
-                    <a16:rowId xmlns:a16="http://schemas.microsoft.com/office/drawing/2014/main" val="10004"/>
-                  </a:ext>
-                </a:extLst>
               </a:tr>
             </a:tbl>
           </a:graphicData>
@@ -9472,7 +9243,6 @@
             <a:avLst/>
           </a:prstGeom>
           <a:noFill/>
-          <a:ln/>
         </p:spPr>
         <p:txBody>
           <a:bodyPr wrap="square" lIns="0" tIns="0" rIns="0" bIns="0" rtlCol="0" anchor="ctr"/>
@@ -9486,9 +9256,9 @@
                 <a:solidFill>
                   <a:schemeClr val="accent3"/>
                 </a:solidFill>
-                <a:latin typeface="Cambria" pitchFamily="34" charset="0"/>
-                <a:ea typeface="Cambria" pitchFamily="34" charset="-122"/>
-                <a:cs typeface="Cambria" pitchFamily="34" charset="-120"/>
+                <a:latin typeface="Cambria" panose="02040503050406030204" pitchFamily="34" charset="0"/>
+                <a:ea typeface="Cambria" panose="02040503050406030204" pitchFamily="34" charset="-122"/>
+                <a:cs typeface="Cambria" panose="02040503050406030204" pitchFamily="34" charset="-120"/>
               </a:rPr>
               <a:t>−$1,165.04</a:t>
             </a:r>
@@ -9511,7 +9281,6 @@
             <a:avLst/>
           </a:prstGeom>
           <a:noFill/>
-          <a:ln/>
         </p:spPr>
         <p:txBody>
           <a:bodyPr wrap="square" lIns="0" tIns="0" rIns="0" bIns="0" rtlCol="0" anchor="t"/>
@@ -9525,9 +9294,9 @@
                 <a:solidFill>
                   <a:schemeClr val="tx1"/>
                 </a:solidFill>
-                <a:latin typeface="Calibri" pitchFamily="34" charset="0"/>
-                <a:ea typeface="Calibri" pitchFamily="34" charset="-122"/>
-                <a:cs typeface="Calibri" pitchFamily="34" charset="-120"/>
+                <a:latin typeface="Calibri" panose="020F0502020204030204" pitchFamily="34" charset="0"/>
+                <a:ea typeface="Calibri" panose="020F0502020204030204" pitchFamily="34" charset="-122"/>
+                <a:cs typeface="Calibri" panose="020F0502020204030204" pitchFamily="34" charset="-120"/>
               </a:rPr>
               <a:t>Net profit across all ship modes, the same total as the category chart.</a:t>
             </a:r>
@@ -9584,7 +9353,6 @@
             <a:avLst/>
           </a:prstGeom>
           <a:noFill/>
-          <a:ln/>
         </p:spPr>
         <p:txBody>
           <a:bodyPr wrap="square" lIns="0" tIns="0" rIns="0" bIns="0" rtlCol="0" anchor="ctr"/>
@@ -9598,9 +9366,9 @@
                 <a:solidFill>
                   <a:schemeClr val="accent3"/>
                 </a:solidFill>
-                <a:latin typeface="Cambria" pitchFamily="34" charset="0"/>
-                <a:ea typeface="Cambria" pitchFamily="34" charset="-122"/>
-                <a:cs typeface="Cambria" pitchFamily="34" charset="-120"/>
+                <a:latin typeface="Cambria" panose="02040503050406030204" pitchFamily="34" charset="0"/>
+                <a:ea typeface="Cambria" panose="02040503050406030204" pitchFamily="34" charset="-122"/>
+                <a:cs typeface="Cambria" panose="02040503050406030204" pitchFamily="34" charset="-120"/>
               </a:rPr>
               <a:t>4.5×</a:t>
             </a:r>
@@ -9623,7 +9391,6 @@
             <a:avLst/>
           </a:prstGeom>
           <a:noFill/>
-          <a:ln/>
         </p:spPr>
         <p:txBody>
           <a:bodyPr wrap="square" lIns="0" tIns="0" rIns="0" bIns="0" rtlCol="0" anchor="t"/>
@@ -9637,9 +9404,9 @@
                 <a:solidFill>
                   <a:schemeClr val="tx1"/>
                 </a:solidFill>
-                <a:latin typeface="Calibri" pitchFamily="34" charset="0"/>
-                <a:ea typeface="Calibri" pitchFamily="34" charset="-122"/>
-                <a:cs typeface="Calibri" pitchFamily="34" charset="-120"/>
+                <a:latin typeface="Calibri" panose="020F0502020204030204" pitchFamily="34" charset="0"/>
+                <a:ea typeface="Calibri" panose="020F0502020204030204" pitchFamily="34" charset="-122"/>
+                <a:cs typeface="Calibri" panose="020F0502020204030204" pitchFamily="34" charset="-120"/>
               </a:rPr>
               <a:t>Standard Class loses about 4.5 times what Second Class earns.</a:t>
             </a:r>
@@ -9696,7 +9463,6 @@
             <a:avLst/>
           </a:prstGeom>
           <a:noFill/>
-          <a:ln/>
         </p:spPr>
         <p:txBody>
           <a:bodyPr wrap="square" lIns="0" tIns="0" rIns="0" bIns="0" rtlCol="0" anchor="ctr"/>
@@ -9710,9 +9476,9 @@
                 <a:solidFill>
                   <a:schemeClr val="accent5"/>
                 </a:solidFill>
-                <a:latin typeface="Cambria" pitchFamily="34" charset="0"/>
-                <a:ea typeface="Cambria" pitchFamily="34" charset="-122"/>
-                <a:cs typeface="Cambria" pitchFamily="34" charset="-120"/>
+                <a:latin typeface="Cambria" panose="02040503050406030204" pitchFamily="34" charset="0"/>
+                <a:ea typeface="Cambria" panose="02040503050406030204" pitchFamily="34" charset="-122"/>
+                <a:cs typeface="Cambria" panose="02040503050406030204" pitchFamily="34" charset="-120"/>
               </a:rPr>
               <a:t>$24.49</a:t>
             </a:r>
@@ -9735,7 +9501,6 @@
             <a:avLst/>
           </a:prstGeom>
           <a:noFill/>
-          <a:ln/>
         </p:spPr>
         <p:txBody>
           <a:bodyPr wrap="square" lIns="0" tIns="0" rIns="0" bIns="0" rtlCol="0" anchor="t"/>
@@ -9749,9 +9514,9 @@
                 <a:solidFill>
                   <a:schemeClr val="tx1"/>
                 </a:solidFill>
-                <a:latin typeface="Calibri" pitchFamily="34" charset="0"/>
-                <a:ea typeface="Calibri" pitchFamily="34" charset="-122"/>
-                <a:cs typeface="Calibri" pitchFamily="34" charset="-120"/>
+                <a:latin typeface="Calibri" panose="020F0502020204030204" pitchFamily="34" charset="0"/>
+                <a:ea typeface="Calibri" panose="020F0502020204030204" pitchFamily="34" charset="-122"/>
+                <a:cs typeface="Calibri" panose="020F0502020204030204" pitchFamily="34" charset="-120"/>
               </a:rPr>
               <a:t>First Class is close to break-even, with only a small loss.</a:t>
             </a:r>
@@ -9777,11 +9542,6 @@
           <a:prstGeom prst="rect">
             <a:avLst/>
           </a:prstGeom>
-          <a:extLst>
-            <a:ext uri="{C572A759-6A51-4108-AA02-DFA0A04FC94B}">
-              <ma14:wrappingTextBoxFlag xmlns="" xmlns:ma14="http://schemas.microsoft.com/office/mac/drawingml/2011/main" val="0"/>
-            </a:ext>
-          </a:extLst>
         </p:spPr>
         <p:txBody>
           <a:bodyPr/>
@@ -9798,7 +9558,6 @@
             <a:pPr algn="l"/>
             <a:fld id="{F7021451-1387-4CA6-816F-3879F97B5CBC}" type="slidenum">
               <a:rPr lang="en-US" b="0"/>
-              <a:t>5</a:t>
             </a:fld>
             <a:endParaRPr lang="en-US"/>
           </a:p>
@@ -10269,7 +10028,7 @@
 
 <file path=ppt/slides/slide6.xml><?xml version="1.0" encoding="utf-8"?>
 <p:sld xmlns:a="http://schemas.openxmlformats.org/drawingml/2006/main" xmlns:r="http://schemas.openxmlformats.org/officeDocument/2006/relationships" xmlns:p="http://schemas.openxmlformats.org/presentationml/2006/main">
-  <p:cSld name="Slide 7">
+  <p:cSld>
     <p:spTree>
       <p:nvGrpSpPr>
         <p:cNvPr id="1" name=""/>
@@ -10303,7 +10062,6 @@
             <a:avLst/>
           </a:prstGeom>
           <a:noFill/>
-          <a:ln/>
         </p:spPr>
         <p:txBody>
           <a:bodyPr wrap="square" lIns="0" tIns="0" rIns="0" bIns="0" rtlCol="0" anchor="ctr"/>
@@ -10317,9 +10075,9 @@
                 <a:solidFill>
                   <a:schemeClr val="tx1"/>
                 </a:solidFill>
-                <a:latin typeface="Cambria" pitchFamily="34" charset="0"/>
-                <a:ea typeface="Cambria" pitchFamily="34" charset="-122"/>
-                <a:cs typeface="Cambria" pitchFamily="34" charset="-120"/>
+                <a:latin typeface="Cambria" panose="02040503050406030204" pitchFamily="34" charset="0"/>
+                <a:ea typeface="Cambria" panose="02040503050406030204" pitchFamily="34" charset="-122"/>
+                <a:cs typeface="Cambria" panose="02040503050406030204" pitchFamily="34" charset="-120"/>
               </a:rPr>
               <a:t>Which states are most profitable?</a:t>
             </a:r>
@@ -10370,7 +10128,7 @@
           <p:nvPr/>
         </p:nvPicPr>
         <p:blipFill>
-          <a:blip r:embed="rId3"/>
+          <a:blip r:embed="rId1"/>
           <a:stretch>
             <a:fillRect/>
           </a:stretch>
@@ -10434,7 +10192,6 @@
             <a:avLst/>
           </a:prstGeom>
           <a:noFill/>
-          <a:ln/>
         </p:spPr>
         <p:txBody>
           <a:bodyPr wrap="square" lIns="0" tIns="0" rIns="0" bIns="0" rtlCol="0" anchor="ctr"/>
@@ -10448,9 +10205,9 @@
                 <a:solidFill>
                   <a:schemeClr val="bg1"/>
                 </a:solidFill>
-                <a:latin typeface="Calibri" pitchFamily="34" charset="0"/>
-                <a:ea typeface="Calibri" pitchFamily="34" charset="-122"/>
-                <a:cs typeface="Calibri" pitchFamily="34" charset="-120"/>
+                <a:latin typeface="Calibri" panose="020F0502020204030204" pitchFamily="34" charset="0"/>
+                <a:ea typeface="Calibri" panose="020F0502020204030204" pitchFamily="34" charset="-122"/>
+                <a:cs typeface="Calibri" panose="020F0502020204030204" pitchFamily="34" charset="-120"/>
               </a:rPr>
               <a:t>Highest profit</a:t>
             </a:r>
@@ -10473,7 +10230,6 @@
             <a:avLst/>
           </a:prstGeom>
           <a:noFill/>
-          <a:ln/>
         </p:spPr>
         <p:txBody>
           <a:bodyPr wrap="square" lIns="0" tIns="0" rIns="0" bIns="0" rtlCol="0" anchor="ctr"/>
@@ -10487,9 +10243,9 @@
                 <a:solidFill>
                   <a:schemeClr val="bg1"/>
                 </a:solidFill>
-                <a:latin typeface="Cambria" pitchFamily="34" charset="0"/>
-                <a:ea typeface="Cambria" pitchFamily="34" charset="-122"/>
-                <a:cs typeface="Cambria" pitchFamily="34" charset="-120"/>
+                <a:latin typeface="Cambria" panose="02040503050406030204" pitchFamily="34" charset="0"/>
+                <a:ea typeface="Cambria" panose="02040503050406030204" pitchFamily="34" charset="-122"/>
+                <a:cs typeface="Cambria" panose="02040503050406030204" pitchFamily="34" charset="-120"/>
               </a:rPr>
               <a:t>California</a:t>
             </a:r>
@@ -10546,7 +10302,6 @@
             <a:avLst/>
           </a:prstGeom>
           <a:noFill/>
-          <a:ln/>
         </p:spPr>
         <p:txBody>
           <a:bodyPr wrap="square" lIns="0" tIns="0" rIns="0" bIns="0" rtlCol="0" anchor="ctr"/>
@@ -10560,9 +10315,9 @@
                 <a:solidFill>
                   <a:schemeClr val="accent3"/>
                 </a:solidFill>
-                <a:latin typeface="Calibri" pitchFamily="34" charset="0"/>
-                <a:ea typeface="Calibri" pitchFamily="34" charset="-122"/>
-                <a:cs typeface="Calibri" pitchFamily="34" charset="-120"/>
+                <a:latin typeface="Calibri" panose="020F0502020204030204" pitchFamily="34" charset="0"/>
+                <a:ea typeface="Calibri" panose="020F0502020204030204" pitchFamily="34" charset="-122"/>
+                <a:cs typeface="Calibri" panose="020F0502020204030204" pitchFamily="34" charset="-120"/>
               </a:rPr>
               <a:t>Pennsylvania: </a:t>
             </a:r>
@@ -10571,9 +10326,9 @@
                 <a:solidFill>
                   <a:schemeClr val="tx1"/>
                 </a:solidFill>
-                <a:latin typeface="Calibri" pitchFamily="34" charset="0"/>
-                <a:ea typeface="Calibri" pitchFamily="34" charset="-122"/>
-                <a:cs typeface="Calibri" pitchFamily="34" charset="-120"/>
+                <a:latin typeface="Calibri" panose="020F0502020204030204" pitchFamily="34" charset="0"/>
+                <a:ea typeface="Calibri" panose="020F0502020204030204" pitchFamily="34" charset="-122"/>
+                <a:cs typeface="Calibri" panose="020F0502020204030204" pitchFamily="34" charset="-120"/>
               </a:rPr>
               <a:t>is red on the map, the largest loss (down to −$1,648.96).</a:t>
             </a:r>
@@ -10630,7 +10385,6 @@
             <a:avLst/>
           </a:prstGeom>
           <a:noFill/>
-          <a:ln/>
         </p:spPr>
         <p:txBody>
           <a:bodyPr wrap="square" lIns="0" tIns="0" rIns="0" bIns="0" rtlCol="0" anchor="ctr"/>
@@ -10644,9 +10398,9 @@
                 <a:solidFill>
                   <a:schemeClr val="accent1"/>
                 </a:solidFill>
-                <a:latin typeface="Calibri" pitchFamily="34" charset="0"/>
-                <a:ea typeface="Calibri" pitchFamily="34" charset="-122"/>
-                <a:cs typeface="Calibri" pitchFamily="34" charset="-120"/>
+                <a:latin typeface="Calibri" panose="020F0502020204030204" pitchFamily="34" charset="0"/>
+                <a:ea typeface="Calibri" panose="020F0502020204030204" pitchFamily="34" charset="-122"/>
+                <a:cs typeface="Calibri" panose="020F0502020204030204" pitchFamily="34" charset="-120"/>
               </a:rPr>
               <a:t>Why states differ: </a:t>
             </a:r>
@@ -10655,9 +10409,9 @@
                 <a:solidFill>
                   <a:schemeClr val="tx1"/>
                 </a:solidFill>
-                <a:latin typeface="Calibri" pitchFamily="34" charset="0"/>
-                <a:ea typeface="Calibri" pitchFamily="34" charset="-122"/>
-                <a:cs typeface="Calibri" pitchFamily="34" charset="-120"/>
+                <a:latin typeface="Calibri" panose="020F0502020204030204" pitchFamily="34" charset="0"/>
+                <a:ea typeface="Calibri" panose="020F0502020204030204" pitchFamily="34" charset="-122"/>
+                <a:cs typeface="Calibri" panose="020F0502020204030204" pitchFamily="34" charset="-120"/>
               </a:rPr>
               <a:t>sales, discounts, product mix and order volume.</a:t>
             </a:r>
@@ -10707,7 +10461,6 @@
             <a:avLst/>
           </a:prstGeom>
           <a:noFill/>
-          <a:ln/>
         </p:spPr>
         <p:txBody>
           <a:bodyPr wrap="square" lIns="0" tIns="0" rIns="0" bIns="0" rtlCol="0" anchor="ctr"/>
@@ -10721,9 +10474,9 @@
                 <a:solidFill>
                   <a:schemeClr val="accent2"/>
                 </a:solidFill>
-                <a:latin typeface="Calibri" pitchFamily="34" charset="0"/>
-                <a:ea typeface="Calibri" pitchFamily="34" charset="-122"/>
-                <a:cs typeface="Calibri" pitchFamily="34" charset="-120"/>
+                <a:latin typeface="Calibri" panose="020F0502020204030204" pitchFamily="34" charset="0"/>
+                <a:ea typeface="Calibri" panose="020F0502020204030204" pitchFamily="34" charset="-122"/>
+                <a:cs typeface="Calibri" panose="020F0502020204030204" pitchFamily="34" charset="-120"/>
               </a:rPr>
               <a:t>Conclusion: </a:t>
             </a:r>
@@ -10732,9 +10485,9 @@
                 <a:solidFill>
                   <a:schemeClr val="bg1"/>
                 </a:solidFill>
-                <a:latin typeface="Calibri" pitchFamily="34" charset="0"/>
-                <a:ea typeface="Calibri" pitchFamily="34" charset="-122"/>
-                <a:cs typeface="Calibri" pitchFamily="34" charset="-120"/>
+                <a:latin typeface="Calibri" panose="020F0502020204030204" pitchFamily="34" charset="0"/>
+                <a:ea typeface="Calibri" panose="020F0502020204030204" pitchFamily="34" charset="-122"/>
+                <a:cs typeface="Calibri" panose="020F0502020204030204" pitchFamily="34" charset="-120"/>
               </a:rPr>
               <a:t>Darker green means higher profit. A few states contribute a large share, while others have low or negative profit.</a:t>
             </a:r>
@@ -10760,11 +10513,6 @@
           <a:prstGeom prst="rect">
             <a:avLst/>
           </a:prstGeom>
-          <a:extLst>
-            <a:ext uri="{C572A759-6A51-4108-AA02-DFA0A04FC94B}">
-              <ma14:wrappingTextBoxFlag xmlns="" xmlns:ma14="http://schemas.microsoft.com/office/mac/drawingml/2011/main" val="0"/>
-            </a:ext>
-          </a:extLst>
         </p:spPr>
         <p:txBody>
           <a:bodyPr/>
@@ -10781,7 +10529,6 @@
             <a:pPr algn="l"/>
             <a:fld id="{F7021451-1387-4CA6-816F-3879F97B5CBC}" type="slidenum">
               <a:rPr lang="en-US" b="0"/>
-              <a:t>6</a:t>
             </a:fld>
             <a:endParaRPr lang="en-US"/>
           </a:p>
@@ -11305,7 +11052,7 @@
 
 <file path=ppt/slides/slide7.xml><?xml version="1.0" encoding="utf-8"?>
 <p:sld xmlns:a="http://schemas.openxmlformats.org/drawingml/2006/main" xmlns:r="http://schemas.openxmlformats.org/officeDocument/2006/relationships" xmlns:p="http://schemas.openxmlformats.org/presentationml/2006/main">
-  <p:cSld name="Slide 8">
+  <p:cSld>
     <p:spTree>
       <p:nvGrpSpPr>
         <p:cNvPr id="1" name=""/>
@@ -11339,7 +11086,6 @@
             <a:avLst/>
           </a:prstGeom>
           <a:noFill/>
-          <a:ln/>
         </p:spPr>
         <p:txBody>
           <a:bodyPr wrap="square" lIns="0" tIns="0" rIns="0" bIns="0" rtlCol="0" anchor="ctr"/>
@@ -11353,9 +11099,9 @@
                 <a:solidFill>
                   <a:schemeClr val="tx1"/>
                 </a:solidFill>
-                <a:latin typeface="Cambria" pitchFamily="34" charset="0"/>
-                <a:ea typeface="Cambria" pitchFamily="34" charset="-122"/>
-                <a:cs typeface="Cambria" pitchFamily="34" charset="-120"/>
+                <a:latin typeface="Cambria" panose="02040503050406030204" pitchFamily="34" charset="0"/>
+                <a:ea typeface="Cambria" panose="02040503050406030204" pitchFamily="34" charset="-122"/>
+                <a:cs typeface="Cambria" panose="02040503050406030204" pitchFamily="34" charset="-120"/>
               </a:rPr>
               <a:t>Reading the state map</a:t>
             </a:r>
@@ -11412,7 +11158,6 @@
             <a:avLst/>
           </a:prstGeom>
           <a:noFill/>
-          <a:ln/>
         </p:spPr>
         <p:txBody>
           <a:bodyPr wrap="square" lIns="0" tIns="0" rIns="0" bIns="0" rtlCol="0" anchor="ctr"/>
@@ -11426,9 +11171,9 @@
                 <a:solidFill>
                   <a:schemeClr val="accent4"/>
                 </a:solidFill>
-                <a:latin typeface="Cambria" pitchFamily="34" charset="0"/>
-                <a:ea typeface="Cambria" pitchFamily="34" charset="-122"/>
-                <a:cs typeface="Cambria" pitchFamily="34" charset="-120"/>
+                <a:latin typeface="Cambria" panose="02040503050406030204" pitchFamily="34" charset="0"/>
+                <a:ea typeface="Cambria" panose="02040503050406030204" pitchFamily="34" charset="-122"/>
+                <a:cs typeface="Cambria" panose="02040503050406030204" pitchFamily="34" charset="-120"/>
               </a:rPr>
               <a:t>$349.51</a:t>
             </a:r>
@@ -11451,7 +11196,6 @@
             <a:avLst/>
           </a:prstGeom>
           <a:noFill/>
-          <a:ln/>
         </p:spPr>
         <p:txBody>
           <a:bodyPr wrap="square" lIns="0" tIns="0" rIns="0" bIns="0" rtlCol="0" anchor="t"/>
@@ -11465,9 +11209,9 @@
                 <a:solidFill>
                   <a:schemeClr val="tx1"/>
                 </a:solidFill>
-                <a:latin typeface="Calibri" pitchFamily="34" charset="0"/>
-                <a:ea typeface="Calibri" pitchFamily="34" charset="-122"/>
-                <a:cs typeface="Calibri" pitchFamily="34" charset="-120"/>
+                <a:latin typeface="Calibri" panose="020F0502020204030204" pitchFamily="34" charset="0"/>
+                <a:ea typeface="Calibri" panose="020F0502020204030204" pitchFamily="34" charset="-122"/>
+                <a:cs typeface="Calibri" panose="020F0502020204030204" pitchFamily="34" charset="-120"/>
               </a:rPr>
               <a:t>Top of the color scale: the highest state profit shown.</a:t>
             </a:r>
@@ -11524,7 +11268,6 @@
             <a:avLst/>
           </a:prstGeom>
           <a:noFill/>
-          <a:ln/>
         </p:spPr>
         <p:txBody>
           <a:bodyPr wrap="square" lIns="0" tIns="0" rIns="0" bIns="0" rtlCol="0" anchor="ctr"/>
@@ -11538,9 +11281,9 @@
                 <a:solidFill>
                   <a:schemeClr val="accent3"/>
                 </a:solidFill>
-                <a:latin typeface="Cambria" pitchFamily="34" charset="0"/>
-                <a:ea typeface="Cambria" pitchFamily="34" charset="-122"/>
-                <a:cs typeface="Cambria" pitchFamily="34" charset="-120"/>
+                <a:latin typeface="Cambria" panose="02040503050406030204" pitchFamily="34" charset="0"/>
+                <a:ea typeface="Cambria" panose="02040503050406030204" pitchFamily="34" charset="-122"/>
+                <a:cs typeface="Cambria" panose="02040503050406030204" pitchFamily="34" charset="-120"/>
               </a:rPr>
               <a:t>−$1,648.96</a:t>
             </a:r>
@@ -11563,7 +11306,6 @@
             <a:avLst/>
           </a:prstGeom>
           <a:noFill/>
-          <a:ln/>
         </p:spPr>
         <p:txBody>
           <a:bodyPr wrap="square" lIns="0" tIns="0" rIns="0" bIns="0" rtlCol="0" anchor="t"/>
@@ -11577,9 +11319,9 @@
                 <a:solidFill>
                   <a:schemeClr val="tx1"/>
                 </a:solidFill>
-                <a:latin typeface="Calibri" pitchFamily="34" charset="0"/>
-                <a:ea typeface="Calibri" pitchFamily="34" charset="-122"/>
-                <a:cs typeface="Calibri" pitchFamily="34" charset="-120"/>
+                <a:latin typeface="Calibri" panose="020F0502020204030204" pitchFamily="34" charset="0"/>
+                <a:ea typeface="Calibri" panose="020F0502020204030204" pitchFamily="34" charset="-122"/>
+                <a:cs typeface="Calibri" panose="020F0502020204030204" pitchFamily="34" charset="-120"/>
               </a:rPr>
               <a:t>Bottom of the scale: Pennsylvania is shaded red.</a:t>
             </a:r>
@@ -11636,7 +11378,6 @@
             <a:avLst/>
           </a:prstGeom>
           <a:noFill/>
-          <a:ln/>
         </p:spPr>
         <p:txBody>
           <a:bodyPr wrap="square" lIns="0" tIns="0" rIns="0" bIns="0" rtlCol="0" anchor="ctr"/>
@@ -11650,9 +11391,9 @@
                 <a:solidFill>
                   <a:schemeClr val="accent1"/>
                 </a:solidFill>
-                <a:latin typeface="Cambria" pitchFamily="34" charset="0"/>
-                <a:ea typeface="Cambria" pitchFamily="34" charset="-122"/>
-                <a:cs typeface="Cambria" pitchFamily="34" charset="-120"/>
+                <a:latin typeface="Cambria" panose="02040503050406030204" pitchFamily="34" charset="0"/>
+                <a:ea typeface="Cambria" panose="02040503050406030204" pitchFamily="34" charset="-122"/>
+                <a:cs typeface="Cambria" panose="02040503050406030204" pitchFamily="34" charset="-120"/>
               </a:rPr>
               <a:t>10 states</a:t>
             </a:r>
@@ -11675,7 +11416,6 @@
             <a:avLst/>
           </a:prstGeom>
           <a:noFill/>
-          <a:ln/>
         </p:spPr>
         <p:txBody>
           <a:bodyPr wrap="square" lIns="0" tIns="0" rIns="0" bIns="0" rtlCol="0" anchor="t"/>
@@ -11689,9 +11429,9 @@
                 <a:solidFill>
                   <a:schemeClr val="tx1"/>
                 </a:solidFill>
-                <a:latin typeface="Calibri" pitchFamily="34" charset="0"/>
-                <a:ea typeface="Calibri" pitchFamily="34" charset="-122"/>
-                <a:cs typeface="Calibri" pitchFamily="34" charset="-120"/>
+                <a:latin typeface="Calibri" panose="020F0502020204030204" pitchFamily="34" charset="0"/>
+                <a:ea typeface="Calibri" panose="020F0502020204030204" pitchFamily="34" charset="-122"/>
+                <a:cs typeface="Calibri" panose="020F0502020204030204" pitchFamily="34" charset="-120"/>
               </a:rPr>
               <a:t>are shaded: 9 in green (profit) and 1 in red (loss).</a:t>
             </a:r>
@@ -11748,7 +11488,6 @@
             <a:avLst/>
           </a:prstGeom>
           <a:noFill/>
-          <a:ln/>
         </p:spPr>
         <p:txBody>
           <a:bodyPr wrap="square" lIns="0" tIns="0" rIns="0" bIns="0" rtlCol="0" anchor="ctr"/>
@@ -11762,9 +11501,9 @@
                 <a:solidFill>
                   <a:schemeClr val="accent1"/>
                 </a:solidFill>
-                <a:latin typeface="Cambria" pitchFamily="34" charset="0"/>
-                <a:ea typeface="Cambria" pitchFamily="34" charset="-122"/>
-                <a:cs typeface="Cambria" pitchFamily="34" charset="-120"/>
+                <a:latin typeface="Cambria" panose="02040503050406030204" pitchFamily="34" charset="0"/>
+                <a:ea typeface="Cambria" panose="02040503050406030204" pitchFamily="34" charset="-122"/>
+                <a:cs typeface="Cambria" panose="02040503050406030204" pitchFamily="34" charset="-120"/>
               </a:rPr>
               <a:t>How to read the colors</a:t>
             </a:r>
@@ -11781,7 +11520,7 @@
           <p:nvPr/>
         </p:nvPicPr>
         <p:blipFill>
-          <a:blip r:embed="rId3"/>
+          <a:blip r:embed="rId1"/>
           <a:stretch>
             <a:fillRect/>
           </a:stretch>
@@ -11811,7 +11550,6 @@
             <a:avLst/>
           </a:prstGeom>
           <a:noFill/>
-          <a:ln/>
         </p:spPr>
         <p:txBody>
           <a:bodyPr wrap="square" lIns="0" tIns="0" rIns="0" bIns="0" rtlCol="0" anchor="ctr"/>
@@ -11825,9 +11563,9 @@
                 <a:solidFill>
                   <a:schemeClr val="accent3"/>
                 </a:solidFill>
-                <a:latin typeface="Calibri" pitchFamily="34" charset="0"/>
-                <a:ea typeface="Calibri" pitchFamily="34" charset="-122"/>
-                <a:cs typeface="Calibri" pitchFamily="34" charset="-120"/>
+                <a:latin typeface="Calibri" panose="020F0502020204030204" pitchFamily="34" charset="0"/>
+                <a:ea typeface="Calibri" panose="020F0502020204030204" pitchFamily="34" charset="-122"/>
+                <a:cs typeface="Calibri" panose="020F0502020204030204" pitchFamily="34" charset="-120"/>
               </a:rPr>
               <a:t>−$1,648.96 (loss)</a:t>
             </a:r>
@@ -11850,7 +11588,6 @@
             <a:avLst/>
           </a:prstGeom>
           <a:noFill/>
-          <a:ln/>
         </p:spPr>
         <p:txBody>
           <a:bodyPr wrap="square" lIns="0" tIns="0" rIns="0" bIns="0" rtlCol="0" anchor="ctr"/>
@@ -11864,9 +11601,9 @@
                 <a:solidFill>
                   <a:schemeClr val="accent4"/>
                 </a:solidFill>
-                <a:latin typeface="Calibri" pitchFamily="34" charset="0"/>
-                <a:ea typeface="Calibri" pitchFamily="34" charset="-122"/>
-                <a:cs typeface="Calibri" pitchFamily="34" charset="-120"/>
+                <a:latin typeface="Calibri" panose="020F0502020204030204" pitchFamily="34" charset="0"/>
+                <a:ea typeface="Calibri" panose="020F0502020204030204" pitchFamily="34" charset="-122"/>
+                <a:cs typeface="Calibri" panose="020F0502020204030204" pitchFamily="34" charset="-120"/>
               </a:rPr>
               <a:t>$349.51 (profit)</a:t>
             </a:r>
@@ -11889,7 +11626,6 @@
             <a:avLst/>
           </a:prstGeom>
           <a:noFill/>
-          <a:ln/>
         </p:spPr>
         <p:txBody>
           <a:bodyPr wrap="square" lIns="0" tIns="0" rIns="0" bIns="0" rtlCol="0" anchor="t"/>
@@ -11903,9 +11639,9 @@
                 <a:solidFill>
                   <a:schemeClr val="tx1"/>
                 </a:solidFill>
-                <a:latin typeface="Calibri" pitchFamily="34" charset="0"/>
-                <a:ea typeface="Calibri" pitchFamily="34" charset="-122"/>
-                <a:cs typeface="Calibri" pitchFamily="34" charset="-120"/>
+                <a:latin typeface="Calibri" panose="020F0502020204030204" pitchFamily="34" charset="0"/>
+                <a:ea typeface="Calibri" panose="020F0502020204030204" pitchFamily="34" charset="-122"/>
+                <a:cs typeface="Calibri" panose="020F0502020204030204" pitchFamily="34" charset="-120"/>
               </a:rPr>
               <a:t>Darker green means higher profit. White is close to break-even.</a:t>
             </a:r>
@@ -11928,7 +11664,6 @@
             <a:avLst/>
           </a:prstGeom>
           <a:noFill/>
-          <a:ln/>
         </p:spPr>
         <p:txBody>
           <a:bodyPr wrap="square" lIns="0" tIns="0" rIns="0" bIns="0" rtlCol="0" anchor="t"/>
@@ -11945,9 +11680,9 @@
                 <a:solidFill>
                   <a:schemeClr val="accent4"/>
                 </a:solidFill>
-                <a:latin typeface="Calibri" pitchFamily="34" charset="0"/>
-                <a:ea typeface="Calibri" pitchFamily="34" charset="-122"/>
-                <a:cs typeface="Calibri" pitchFamily="34" charset="-120"/>
+                <a:latin typeface="Calibri" panose="020F0502020204030204" pitchFamily="34" charset="0"/>
+                <a:ea typeface="Calibri" panose="020F0502020204030204" pitchFamily="34" charset="-122"/>
+                <a:cs typeface="Calibri" panose="020F0502020204030204" pitchFamily="34" charset="-120"/>
               </a:rPr>
               <a:t>Dark green: </a:t>
             </a:r>
@@ -11956,9 +11691,9 @@
                 <a:solidFill>
                   <a:schemeClr val="tx1"/>
                 </a:solidFill>
-                <a:latin typeface="Calibri" pitchFamily="34" charset="0"/>
-                <a:ea typeface="Calibri" pitchFamily="34" charset="-122"/>
-                <a:cs typeface="Calibri" pitchFamily="34" charset="-120"/>
+                <a:latin typeface="Calibri" panose="020F0502020204030204" pitchFamily="34" charset="0"/>
+                <a:ea typeface="Calibri" panose="020F0502020204030204" pitchFamily="34" charset="-122"/>
+                <a:cs typeface="Calibri" panose="020F0502020204030204" pitchFamily="34" charset="-120"/>
               </a:rPr>
               <a:t>California, Utah, Kentucky</a:t>
             </a:r>
@@ -11976,9 +11711,9 @@
                 <a:solidFill>
                   <a:schemeClr val="accent4"/>
                 </a:solidFill>
-                <a:latin typeface="Calibri" pitchFamily="34" charset="0"/>
-                <a:ea typeface="Calibri" pitchFamily="34" charset="-122"/>
-                <a:cs typeface="Calibri" pitchFamily="34" charset="-120"/>
+                <a:latin typeface="Calibri" panose="020F0502020204030204" pitchFamily="34" charset="0"/>
+                <a:ea typeface="Calibri" panose="020F0502020204030204" pitchFamily="34" charset="-122"/>
+                <a:cs typeface="Calibri" panose="020F0502020204030204" pitchFamily="34" charset="-120"/>
               </a:rPr>
               <a:t>Medium green: </a:t>
             </a:r>
@@ -11987,9 +11722,9 @@
                 <a:solidFill>
                   <a:schemeClr val="tx1"/>
                 </a:solidFill>
-                <a:latin typeface="Calibri" pitchFamily="34" charset="0"/>
-                <a:ea typeface="Calibri" pitchFamily="34" charset="-122"/>
-                <a:cs typeface="Calibri" pitchFamily="34" charset="-120"/>
+                <a:latin typeface="Calibri" panose="020F0502020204030204" pitchFamily="34" charset="0"/>
+                <a:ea typeface="Calibri" panose="020F0502020204030204" pitchFamily="34" charset="-122"/>
+                <a:cs typeface="Calibri" panose="020F0502020204030204" pitchFamily="34" charset="-120"/>
               </a:rPr>
               <a:t>Washington, Wisconsin, Nebraska, North Carolina</a:t>
             </a:r>
@@ -12007,9 +11742,9 @@
                 <a:solidFill>
                   <a:schemeClr val="accent4"/>
                 </a:solidFill>
-                <a:latin typeface="Calibri" pitchFamily="34" charset="0"/>
-                <a:ea typeface="Calibri" pitchFamily="34" charset="-122"/>
-                <a:cs typeface="Calibri" pitchFamily="34" charset="-120"/>
+                <a:latin typeface="Calibri" panose="020F0502020204030204" pitchFamily="34" charset="0"/>
+                <a:ea typeface="Calibri" panose="020F0502020204030204" pitchFamily="34" charset="-122"/>
+                <a:cs typeface="Calibri" panose="020F0502020204030204" pitchFamily="34" charset="-120"/>
               </a:rPr>
               <a:t>Light green: </a:t>
             </a:r>
@@ -12018,9 +11753,9 @@
                 <a:solidFill>
                   <a:schemeClr val="tx1"/>
                 </a:solidFill>
-                <a:latin typeface="Calibri" pitchFamily="34" charset="0"/>
-                <a:ea typeface="Calibri" pitchFamily="34" charset="-122"/>
-                <a:cs typeface="Calibri" pitchFamily="34" charset="-120"/>
+                <a:latin typeface="Calibri" panose="020F0502020204030204" pitchFamily="34" charset="0"/>
+                <a:ea typeface="Calibri" panose="020F0502020204030204" pitchFamily="34" charset="-122"/>
+                <a:cs typeface="Calibri" panose="020F0502020204030204" pitchFamily="34" charset="-120"/>
               </a:rPr>
               <a:t>Texas, Florida (small profit)</a:t>
             </a:r>
@@ -12038,9 +11773,9 @@
                 <a:solidFill>
                   <a:schemeClr val="accent3"/>
                 </a:solidFill>
-                <a:latin typeface="Calibri" pitchFamily="34" charset="0"/>
-                <a:ea typeface="Calibri" pitchFamily="34" charset="-122"/>
-                <a:cs typeface="Calibri" pitchFamily="34" charset="-120"/>
+                <a:latin typeface="Calibri" panose="020F0502020204030204" pitchFamily="34" charset="0"/>
+                <a:ea typeface="Calibri" panose="020F0502020204030204" pitchFamily="34" charset="-122"/>
+                <a:cs typeface="Calibri" panose="020F0502020204030204" pitchFamily="34" charset="-120"/>
               </a:rPr>
               <a:t>Red: </a:t>
             </a:r>
@@ -12049,9 +11784,9 @@
                 <a:solidFill>
                   <a:schemeClr val="tx1"/>
                 </a:solidFill>
-                <a:latin typeface="Calibri" pitchFamily="34" charset="0"/>
-                <a:ea typeface="Calibri" pitchFamily="34" charset="-122"/>
-                <a:cs typeface="Calibri" pitchFamily="34" charset="-120"/>
+                <a:latin typeface="Calibri" panose="020F0502020204030204" pitchFamily="34" charset="0"/>
+                <a:ea typeface="Calibri" panose="020F0502020204030204" pitchFamily="34" charset="-122"/>
+                <a:cs typeface="Calibri" panose="020F0502020204030204" pitchFamily="34" charset="-120"/>
               </a:rPr>
               <a:t>Pennsylvania (loss)</a:t>
             </a:r>
@@ -12077,11 +11812,6 @@
           <a:prstGeom prst="rect">
             <a:avLst/>
           </a:prstGeom>
-          <a:extLst>
-            <a:ext uri="{C572A759-6A51-4108-AA02-DFA0A04FC94B}">
-              <ma14:wrappingTextBoxFlag xmlns="" xmlns:ma14="http://schemas.microsoft.com/office/mac/drawingml/2011/main" val="0"/>
-            </a:ext>
-          </a:extLst>
         </p:spPr>
         <p:txBody>
           <a:bodyPr/>
@@ -12098,7 +11828,6 @@
             <a:pPr algn="l"/>
             <a:fld id="{F7021451-1387-4CA6-816F-3879F97B5CBC}" type="slidenum">
               <a:rPr lang="en-US" b="0"/>
-              <a:t>7</a:t>
             </a:fld>
             <a:endParaRPr lang="en-US"/>
           </a:p>
@@ -12779,7 +12508,7 @@
 
 <file path=ppt/slides/slide8.xml><?xml version="1.0" encoding="utf-8"?>
 <p:sld xmlns:a="http://schemas.openxmlformats.org/drawingml/2006/main" xmlns:r="http://schemas.openxmlformats.org/officeDocument/2006/relationships" xmlns:p="http://schemas.openxmlformats.org/presentationml/2006/main">
-  <p:cSld name="Slide 9">
+  <p:cSld>
     <p:spTree>
       <p:nvGrpSpPr>
         <p:cNvPr id="1" name=""/>
@@ -12813,7 +12542,6 @@
             <a:avLst/>
           </a:prstGeom>
           <a:noFill/>
-          <a:ln/>
         </p:spPr>
         <p:txBody>
           <a:bodyPr wrap="square" lIns="0" tIns="0" rIns="0" bIns="0" rtlCol="0" anchor="ctr"/>
@@ -12827,9 +12555,9 @@
                 <a:solidFill>
                   <a:schemeClr val="tx1"/>
                 </a:solidFill>
-                <a:latin typeface="Cambria" pitchFamily="34" charset="0"/>
-                <a:ea typeface="Cambria" pitchFamily="34" charset="-122"/>
-                <a:cs typeface="Cambria" pitchFamily="34" charset="-120"/>
+                <a:latin typeface="Cambria" panose="02040503050406030204" pitchFamily="34" charset="0"/>
+                <a:ea typeface="Cambria" panose="02040503050406030204" pitchFamily="34" charset="-122"/>
+                <a:cs typeface="Cambria" panose="02040503050406030204" pitchFamily="34" charset="-120"/>
               </a:rPr>
               <a:t>How does discount affect profit?</a:t>
             </a:r>
@@ -12880,7 +12608,7 @@
           <p:nvPr/>
         </p:nvPicPr>
         <p:blipFill>
-          <a:blip r:embed="rId3"/>
+          <a:blip r:embed="rId1"/>
           <a:stretch>
             <a:fillRect/>
           </a:stretch>
@@ -12944,7 +12672,6 @@
             <a:avLst/>
           </a:prstGeom>
           <a:noFill/>
-          <a:ln/>
         </p:spPr>
         <p:txBody>
           <a:bodyPr wrap="square" lIns="0" tIns="0" rIns="0" bIns="0" rtlCol="0" anchor="ctr"/>
@@ -12958,9 +12685,9 @@
                 <a:solidFill>
                   <a:schemeClr val="accent4"/>
                 </a:solidFill>
-                <a:latin typeface="Calibri" pitchFamily="34" charset="0"/>
-                <a:ea typeface="Calibri" pitchFamily="34" charset="-122"/>
-                <a:cs typeface="Calibri" pitchFamily="34" charset="-120"/>
+                <a:latin typeface="Calibri" panose="020F0502020204030204" pitchFamily="34" charset="0"/>
+                <a:ea typeface="Calibri" panose="020F0502020204030204" pitchFamily="34" charset="-122"/>
+                <a:cs typeface="Calibri" panose="020F0502020204030204" pitchFamily="34" charset="-120"/>
               </a:rPr>
               <a:t>0% and 20% discount: </a:t>
             </a:r>
@@ -12969,9 +12696,9 @@
                 <a:solidFill>
                   <a:schemeClr val="tx1"/>
                 </a:solidFill>
-                <a:latin typeface="Calibri" pitchFamily="34" charset="0"/>
-                <a:ea typeface="Calibri" pitchFamily="34" charset="-122"/>
-                <a:cs typeface="Calibri" pitchFamily="34" charset="-120"/>
+                <a:latin typeface="Calibri" panose="020F0502020204030204" pitchFamily="34" charset="0"/>
+                <a:ea typeface="Calibri" panose="020F0502020204030204" pitchFamily="34" charset="-122"/>
+                <a:cs typeface="Calibri" panose="020F0502020204030204" pitchFamily="34" charset="-120"/>
               </a:rPr>
               <a:t>profit stays near $617.</a:t>
             </a:r>
@@ -13028,7 +12755,6 @@
             <a:avLst/>
           </a:prstGeom>
           <a:noFill/>
-          <a:ln/>
         </p:spPr>
         <p:txBody>
           <a:bodyPr wrap="square" lIns="0" tIns="0" rIns="0" bIns="0" rtlCol="0" anchor="ctr"/>
@@ -13042,9 +12768,9 @@
                 <a:solidFill>
                   <a:schemeClr val="accent3"/>
                 </a:solidFill>
-                <a:latin typeface="Calibri" pitchFamily="34" charset="0"/>
-                <a:ea typeface="Calibri" pitchFamily="34" charset="-122"/>
-                <a:cs typeface="Calibri" pitchFamily="34" charset="-120"/>
+                <a:latin typeface="Calibri" panose="020F0502020204030204" pitchFamily="34" charset="0"/>
+                <a:ea typeface="Calibri" panose="020F0502020204030204" pitchFamily="34" charset="-122"/>
+                <a:cs typeface="Calibri" panose="020F0502020204030204" pitchFamily="34" charset="-120"/>
               </a:rPr>
               <a:t>30% and above: </a:t>
             </a:r>
@@ -13053,9 +12779,9 @@
                 <a:solidFill>
                   <a:schemeClr val="tx1"/>
                 </a:solidFill>
-                <a:latin typeface="Calibri" pitchFamily="34" charset="0"/>
-                <a:ea typeface="Calibri" pitchFamily="34" charset="-122"/>
-                <a:cs typeface="Calibri" pitchFamily="34" charset="-120"/>
+                <a:latin typeface="Calibri" panose="020F0502020204030204" pitchFamily="34" charset="0"/>
+                <a:ea typeface="Calibri" panose="020F0502020204030204" pitchFamily="34" charset="-122"/>
+                <a:cs typeface="Calibri" panose="020F0502020204030204" pitchFamily="34" charset="-120"/>
               </a:rPr>
               <a:t>every discount level loses money.</a:t>
             </a:r>
@@ -13112,7 +12838,6 @@
             <a:avLst/>
           </a:prstGeom>
           <a:noFill/>
-          <a:ln/>
         </p:spPr>
         <p:txBody>
           <a:bodyPr wrap="square" lIns="0" tIns="0" rIns="0" bIns="0" rtlCol="0" anchor="ctr"/>
@@ -13126,9 +12851,9 @@
                 <a:solidFill>
                   <a:schemeClr val="accent3"/>
                 </a:solidFill>
-                <a:latin typeface="Calibri" pitchFamily="34" charset="0"/>
-                <a:ea typeface="Calibri" pitchFamily="34" charset="-122"/>
-                <a:cs typeface="Calibri" pitchFamily="34" charset="-120"/>
+                <a:latin typeface="Calibri" panose="020F0502020204030204" pitchFamily="34" charset="0"/>
+                <a:ea typeface="Calibri" panose="020F0502020204030204" pitchFamily="34" charset="-122"/>
+                <a:cs typeface="Calibri" panose="020F0502020204030204" pitchFamily="34" charset="-120"/>
               </a:rPr>
               <a:t>50% discount: </a:t>
             </a:r>
@@ -13137,9 +12862,9 @@
                 <a:solidFill>
                   <a:schemeClr val="tx1"/>
                 </a:solidFill>
-                <a:latin typeface="Calibri" pitchFamily="34" charset="0"/>
-                <a:ea typeface="Calibri" pitchFamily="34" charset="-122"/>
-                <a:cs typeface="Calibri" pitchFamily="34" charset="-120"/>
+                <a:latin typeface="Calibri" panose="020F0502020204030204" pitchFamily="34" charset="0"/>
+                <a:ea typeface="Calibri" panose="020F0502020204030204" pitchFamily="34" charset="-122"/>
+                <a:cs typeface="Calibri" panose="020F0502020204030204" pitchFamily="34" charset="-120"/>
               </a:rPr>
               <a:t>the largest loss, $1,665.05.</a:t>
             </a:r>
@@ -13189,7 +12914,6 @@
             <a:avLst/>
           </a:prstGeom>
           <a:noFill/>
-          <a:ln/>
         </p:spPr>
         <p:txBody>
           <a:bodyPr wrap="square" lIns="0" tIns="0" rIns="0" bIns="0" rtlCol="0" anchor="ctr"/>
@@ -13203,9 +12927,9 @@
                 <a:solidFill>
                   <a:schemeClr val="accent2"/>
                 </a:solidFill>
-                <a:latin typeface="Calibri" pitchFamily="34" charset="0"/>
-                <a:ea typeface="Calibri" pitchFamily="34" charset="-122"/>
-                <a:cs typeface="Calibri" pitchFamily="34" charset="-120"/>
+                <a:latin typeface="Calibri" panose="020F0502020204030204" pitchFamily="34" charset="0"/>
+                <a:ea typeface="Calibri" panose="020F0502020204030204" pitchFamily="34" charset="-122"/>
+                <a:cs typeface="Calibri" panose="020F0502020204030204" pitchFamily="34" charset="-120"/>
               </a:rPr>
               <a:t>Conclusion: </a:t>
             </a:r>
@@ -13214,9 +12938,9 @@
                 <a:solidFill>
                   <a:schemeClr val="bg1"/>
                 </a:solidFill>
-                <a:latin typeface="Calibri" pitchFamily="34" charset="0"/>
-                <a:ea typeface="Calibri" pitchFamily="34" charset="-122"/>
-                <a:cs typeface="Calibri" pitchFamily="34" charset="-120"/>
+                <a:latin typeface="Calibri" panose="020F0502020204030204" pitchFamily="34" charset="0"/>
+                <a:ea typeface="Calibri" panose="020F0502020204030204" pitchFamily="34" charset="-122"/>
+                <a:cs typeface="Calibri" panose="020F0502020204030204" pitchFamily="34" charset="-120"/>
               </a:rPr>
               <a:t>Higher discounts cut revenue and profit. Keep discounts near 20% or lower.</a:t>
             </a:r>
@@ -13242,11 +12966,6 @@
           <a:prstGeom prst="rect">
             <a:avLst/>
           </a:prstGeom>
-          <a:extLst>
-            <a:ext uri="{C572A759-6A51-4108-AA02-DFA0A04FC94B}">
-              <ma14:wrappingTextBoxFlag xmlns="" xmlns:ma14="http://schemas.microsoft.com/office/mac/drawingml/2011/main" val="0"/>
-            </a:ext>
-          </a:extLst>
         </p:spPr>
         <p:txBody>
           <a:bodyPr/>
@@ -13263,7 +12982,6 @@
             <a:pPr algn="l"/>
             <a:fld id="{F7021451-1387-4CA6-816F-3879F97B5CBC}" type="slidenum">
               <a:rPr lang="en-US" b="0"/>
-              <a:t>8</a:t>
             </a:fld>
             <a:endParaRPr lang="en-US"/>
           </a:p>
@@ -13752,7 +13470,7 @@
 
 <file path=ppt/slides/slide9.xml><?xml version="1.0" encoding="utf-8"?>
 <p:sld xmlns:a="http://schemas.openxmlformats.org/drawingml/2006/main" xmlns:r="http://schemas.openxmlformats.org/officeDocument/2006/relationships" xmlns:p="http://schemas.openxmlformats.org/presentationml/2006/main">
-  <p:cSld name="Slide 10">
+  <p:cSld>
     <p:spTree>
       <p:nvGrpSpPr>
         <p:cNvPr id="1" name=""/>
@@ -13786,7 +13504,6 @@
             <a:avLst/>
           </a:prstGeom>
           <a:noFill/>
-          <a:ln/>
         </p:spPr>
         <p:txBody>
           <a:bodyPr wrap="square" lIns="0" tIns="0" rIns="0" bIns="0" rtlCol="0" anchor="ctr"/>
@@ -13800,9 +13517,9 @@
                 <a:solidFill>
                   <a:schemeClr val="tx1"/>
                 </a:solidFill>
-                <a:latin typeface="Cambria" pitchFamily="34" charset="0"/>
-                <a:ea typeface="Cambria" pitchFamily="34" charset="-122"/>
-                <a:cs typeface="Cambria" pitchFamily="34" charset="-120"/>
+                <a:latin typeface="Cambria" panose="02040503050406030204" pitchFamily="34" charset="0"/>
+                <a:ea typeface="Cambria" panose="02040503050406030204" pitchFamily="34" charset="-122"/>
+                <a:cs typeface="Cambria" panose="02040503050406030204" pitchFamily="34" charset="-120"/>
               </a:rPr>
               <a:t>Discount chart: the numbers</a:t>
             </a:r>
@@ -13816,13 +13533,7 @@
           <p:cNvGraphicFramePr>
             <a:graphicFrameLocks noGrp="1"/>
           </p:cNvGraphicFramePr>
-          <p:nvPr>
-            <p:extLst>
-              <p:ext uri="{D42A27DB-BD31-4B8C-83A1-F6EECF244321}">
-                <p14:modId xmlns:p14="http://schemas.microsoft.com/office/powerpoint/2010/main" val="1579011935"/>
-              </p:ext>
-            </p:extLst>
-          </p:nvPr>
+          <p:nvPr/>
         </p:nvGraphicFramePr>
         <p:xfrm>
           <a:off x="457200" y="1143000"/>
@@ -13833,27 +13544,9 @@
             <a:tbl>
               <a:tblPr/>
               <a:tblGrid>
-                <a:gridCol w="1188720">
-                  <a:extLst>
-                    <a:ext uri="{9D8B030D-6E8A-4147-A177-3AD203B41FA5}">
-                      <a16:colId xmlns:a16="http://schemas.microsoft.com/office/drawing/2014/main" val="20000"/>
-                    </a:ext>
-                  </a:extLst>
-                </a:gridCol>
-                <a:gridCol w="1554480">
-                  <a:extLst>
-                    <a:ext uri="{9D8B030D-6E8A-4147-A177-3AD203B41FA5}">
-                      <a16:colId xmlns:a16="http://schemas.microsoft.com/office/drawing/2014/main" val="20001"/>
-                    </a:ext>
-                  </a:extLst>
-                </a:gridCol>
-                <a:gridCol w="1280160">
-                  <a:extLst>
-                    <a:ext uri="{9D8B030D-6E8A-4147-A177-3AD203B41FA5}">
-                      <a16:colId xmlns:a16="http://schemas.microsoft.com/office/drawing/2014/main" val="20002"/>
-                    </a:ext>
-                  </a:extLst>
-                </a:gridCol>
+                <a:gridCol w="1188720"/>
+                <a:gridCol w="1554480"/>
+                <a:gridCol w="1280160"/>
               </a:tblGrid>
               <a:tr h="329184">
                 <a:tc>
@@ -13869,16 +13562,16 @@
                           <a:solidFill>
                             <a:srgbClr val="FFFFFF"/>
                           </a:solidFill>
-                          <a:latin typeface="+mn-lt" pitchFamily="34" charset="0"/>
-                          <a:ea typeface="+mn-lt" pitchFamily="34" charset="-122"/>
-                          <a:cs typeface="+mn-lt" pitchFamily="34" charset="-120"/>
+                          <a:latin typeface="+mn-lt"/>
+                          <a:ea typeface="+mn-lt"/>
+                          <a:cs typeface="+mn-lt"/>
                         </a:rPr>
                         <a:t>Discount</a:t>
                       </a:r>
                       <a:endParaRPr lang="en-US" sz="1400" dirty="0">
-                        <a:latin typeface="+mn-lt" charset="0"/>
-                        <a:ea typeface="+mn-lt" charset="0"/>
-                        <a:cs typeface="+mn-lt" charset="0"/>
+                        <a:latin typeface="+mn-lt"/>
+                        <a:ea typeface="+mn-lt"/>
+                        <a:cs typeface="+mn-lt"/>
                       </a:endParaRPr>
                     </a:p>
                   </a:txBody>
@@ -13937,16 +13630,16 @@
                           <a:solidFill>
                             <a:srgbClr val="FFFFFF"/>
                           </a:solidFill>
-                          <a:latin typeface="+mn-lt" pitchFamily="34" charset="0"/>
-                          <a:ea typeface="+mn-lt" pitchFamily="34" charset="-122"/>
-                          <a:cs typeface="+mn-lt" pitchFamily="34" charset="-120"/>
+                          <a:latin typeface="+mn-lt"/>
+                          <a:ea typeface="+mn-lt"/>
+                          <a:cs typeface="+mn-lt"/>
                         </a:rPr>
                         <a:t>Profit</a:t>
                       </a:r>
                       <a:endParaRPr lang="en-US" sz="1400" dirty="0">
-                        <a:latin typeface="+mn-lt" charset="0"/>
-                        <a:ea typeface="+mn-lt" charset="0"/>
-                        <a:cs typeface="+mn-lt" charset="0"/>
+                        <a:latin typeface="+mn-lt"/>
+                        <a:ea typeface="+mn-lt"/>
+                        <a:cs typeface="+mn-lt"/>
                       </a:endParaRPr>
                     </a:p>
                   </a:txBody>
@@ -14005,16 +13698,16 @@
                           <a:solidFill>
                             <a:srgbClr val="FFFFFF"/>
                           </a:solidFill>
-                          <a:latin typeface="+mn-lt" pitchFamily="34" charset="0"/>
-                          <a:ea typeface="+mn-lt" pitchFamily="34" charset="-122"/>
-                          <a:cs typeface="+mn-lt" pitchFamily="34" charset="-120"/>
+                          <a:latin typeface="+mn-lt"/>
+                          <a:ea typeface="+mn-lt"/>
+                          <a:cs typeface="+mn-lt"/>
                         </a:rPr>
                         <a:t>Result</a:t>
                       </a:r>
                       <a:endParaRPr lang="en-US" sz="1400" dirty="0">
-                        <a:latin typeface="+mn-lt" charset="0"/>
-                        <a:ea typeface="+mn-lt" charset="0"/>
-                        <a:cs typeface="+mn-lt" charset="0"/>
+                        <a:latin typeface="+mn-lt"/>
+                        <a:ea typeface="+mn-lt"/>
+                        <a:cs typeface="+mn-lt"/>
                       </a:endParaRPr>
                     </a:p>
                   </a:txBody>
@@ -14060,11 +13753,6 @@
                     </a:solidFill>
                   </a:tcPr>
                 </a:tc>
-                <a:extLst>
-                  <a:ext uri="{0D108BD9-81ED-4DB2-BD59-A6C34878D82A}">
-                    <a16:rowId xmlns:a16="http://schemas.microsoft.com/office/drawing/2014/main" val="10000"/>
-                  </a:ext>
-                </a:extLst>
               </a:tr>
               <a:tr h="329184">
                 <a:tc>
@@ -14080,16 +13768,16 @@
                           <a:solidFill>
                             <a:srgbClr val="10222B"/>
                           </a:solidFill>
-                          <a:latin typeface="+mn-lt" pitchFamily="34" charset="0"/>
-                          <a:ea typeface="+mn-lt" pitchFamily="34" charset="-122"/>
-                          <a:cs typeface="+mn-lt" pitchFamily="34" charset="-120"/>
+                          <a:latin typeface="+mn-lt"/>
+                          <a:ea typeface="+mn-lt"/>
+                          <a:cs typeface="+mn-lt"/>
                         </a:rPr>
                         <a:t>0%</a:t>
                       </a:r>
                       <a:endParaRPr lang="en-US" sz="1400" dirty="0">
-                        <a:latin typeface="+mn-lt" charset="0"/>
-                        <a:ea typeface="+mn-lt" charset="0"/>
-                        <a:cs typeface="+mn-lt" charset="0"/>
+                        <a:latin typeface="+mn-lt"/>
+                        <a:ea typeface="+mn-lt"/>
+                        <a:cs typeface="+mn-lt"/>
                       </a:endParaRPr>
                     </a:p>
                   </a:txBody>
@@ -14148,16 +13836,16 @@
                           <a:solidFill>
                             <a:srgbClr val="16A34A"/>
                           </a:solidFill>
-                          <a:latin typeface="+mn-lt" pitchFamily="34" charset="0"/>
-                          <a:ea typeface="+mn-lt" pitchFamily="34" charset="-122"/>
-                          <a:cs typeface="+mn-lt" pitchFamily="34" charset="-120"/>
+                          <a:latin typeface="+mn-lt"/>
+                          <a:ea typeface="+mn-lt"/>
+                          <a:cs typeface="+mn-lt"/>
                         </a:rPr>
                         <a:t>$617.55</a:t>
                       </a:r>
                       <a:endParaRPr lang="en-US" sz="1400" dirty="0">
-                        <a:latin typeface="+mn-lt" charset="0"/>
-                        <a:ea typeface="+mn-lt" charset="0"/>
-                        <a:cs typeface="+mn-lt" charset="0"/>
+                        <a:latin typeface="+mn-lt"/>
+                        <a:ea typeface="+mn-lt"/>
+                        <a:cs typeface="+mn-lt"/>
                       </a:endParaRPr>
                     </a:p>
                   </a:txBody>
@@ -14216,16 +13904,16 @@
                           <a:solidFill>
                             <a:srgbClr val="16A34A"/>
                           </a:solidFill>
-                          <a:latin typeface="+mn-lt" pitchFamily="34" charset="0"/>
-                          <a:ea typeface="+mn-lt" pitchFamily="34" charset="-122"/>
-                          <a:cs typeface="+mn-lt" pitchFamily="34" charset="-120"/>
+                          <a:latin typeface="+mn-lt"/>
+                          <a:ea typeface="+mn-lt"/>
+                          <a:cs typeface="+mn-lt"/>
                         </a:rPr>
                         <a:t>Profit</a:t>
                       </a:r>
                       <a:endParaRPr lang="en-US" sz="1400" dirty="0">
-                        <a:latin typeface="+mn-lt" charset="0"/>
-                        <a:ea typeface="+mn-lt" charset="0"/>
-                        <a:cs typeface="+mn-lt" charset="0"/>
+                        <a:latin typeface="+mn-lt"/>
+                        <a:ea typeface="+mn-lt"/>
+                        <a:cs typeface="+mn-lt"/>
                       </a:endParaRPr>
                     </a:p>
                   </a:txBody>
@@ -14271,11 +13959,6 @@
                     </a:solidFill>
                   </a:tcPr>
                 </a:tc>
-                <a:extLst>
-                  <a:ext uri="{0D108BD9-81ED-4DB2-BD59-A6C34878D82A}">
-                    <a16:rowId xmlns:a16="http://schemas.microsoft.com/office/drawing/2014/main" val="10001"/>
-                  </a:ext>
-                </a:extLst>
               </a:tr>
               <a:tr h="329184">
                 <a:tc>
@@ -14291,16 +13974,16 @@
                           <a:solidFill>
                             <a:srgbClr val="10222B"/>
                           </a:solidFill>
-                          <a:latin typeface="+mn-lt" pitchFamily="34" charset="0"/>
-                          <a:ea typeface="+mn-lt" pitchFamily="34" charset="-122"/>
-                          <a:cs typeface="+mn-lt" pitchFamily="34" charset="-120"/>
+                          <a:latin typeface="+mn-lt"/>
+                          <a:ea typeface="+mn-lt"/>
+                          <a:cs typeface="+mn-lt"/>
                         </a:rPr>
                         <a:t>20%</a:t>
                       </a:r>
                       <a:endParaRPr lang="en-US" sz="1400" dirty="0">
-                        <a:latin typeface="+mn-lt" charset="0"/>
-                        <a:ea typeface="+mn-lt" charset="0"/>
-                        <a:cs typeface="+mn-lt" charset="0"/>
+                        <a:latin typeface="+mn-lt"/>
+                        <a:ea typeface="+mn-lt"/>
+                        <a:cs typeface="+mn-lt"/>
                       </a:endParaRPr>
                     </a:p>
                   </a:txBody>
@@ -14359,16 +14042,16 @@
                           <a:solidFill>
                             <a:srgbClr val="16A34A"/>
                           </a:solidFill>
-                          <a:latin typeface="+mn-lt" pitchFamily="34" charset="0"/>
-                          <a:ea typeface="+mn-lt" pitchFamily="34" charset="-122"/>
-                          <a:cs typeface="+mn-lt" pitchFamily="34" charset="-120"/>
+                          <a:latin typeface="+mn-lt"/>
+                          <a:ea typeface="+mn-lt"/>
+                          <a:cs typeface="+mn-lt"/>
                         </a:rPr>
                         <a:t>$617.05</a:t>
                       </a:r>
                       <a:endParaRPr lang="en-US" sz="1400" dirty="0">
-                        <a:latin typeface="+mn-lt" charset="0"/>
-                        <a:ea typeface="+mn-lt" charset="0"/>
-                        <a:cs typeface="+mn-lt" charset="0"/>
+                        <a:latin typeface="+mn-lt"/>
+                        <a:ea typeface="+mn-lt"/>
+                        <a:cs typeface="+mn-lt"/>
                       </a:endParaRPr>
                     </a:p>
                   </a:txBody>
@@ -14427,16 +14110,16 @@
                           <a:solidFill>
                             <a:srgbClr val="16A34A"/>
                           </a:solidFill>
-                          <a:latin typeface="+mn-lt" pitchFamily="34" charset="0"/>
-                          <a:ea typeface="+mn-lt" pitchFamily="34" charset="-122"/>
-                          <a:cs typeface="+mn-lt" pitchFamily="34" charset="-120"/>
+                          <a:latin typeface="+mn-lt"/>
+                          <a:ea typeface="+mn-lt"/>
+                          <a:cs typeface="+mn-lt"/>
                         </a:rPr>
                         <a:t>Profit</a:t>
                       </a:r>
                       <a:endParaRPr lang="en-US" sz="1400" dirty="0">
-                        <a:latin typeface="+mn-lt" charset="0"/>
-                        <a:ea typeface="+mn-lt" charset="0"/>
-                        <a:cs typeface="+mn-lt" charset="0"/>
+                        <a:latin typeface="+mn-lt"/>
+                        <a:ea typeface="+mn-lt"/>
+                        <a:cs typeface="+mn-lt"/>
                       </a:endParaRPr>
                     </a:p>
                   </a:txBody>
@@ -14482,11 +14165,6 @@
                     </a:solidFill>
                   </a:tcPr>
                 </a:tc>
-                <a:extLst>
-                  <a:ext uri="{0D108BD9-81ED-4DB2-BD59-A6C34878D82A}">
-                    <a16:rowId xmlns:a16="http://schemas.microsoft.com/office/drawing/2014/main" val="10002"/>
-                  </a:ext>
-                </a:extLst>
               </a:tr>
               <a:tr h="329184">
                 <a:tc>
@@ -14502,16 +14180,16 @@
                           <a:solidFill>
                             <a:srgbClr val="10222B"/>
                           </a:solidFill>
-                          <a:latin typeface="+mn-lt" pitchFamily="34" charset="0"/>
-                          <a:ea typeface="+mn-lt" pitchFamily="34" charset="-122"/>
-                          <a:cs typeface="+mn-lt" pitchFamily="34" charset="-120"/>
+                          <a:latin typeface="+mn-lt"/>
+                          <a:ea typeface="+mn-lt"/>
+                          <a:cs typeface="+mn-lt"/>
                         </a:rPr>
                         <a:t>30%</a:t>
                       </a:r>
                       <a:endParaRPr lang="en-US" sz="1400" dirty="0">
-                        <a:latin typeface="+mn-lt" charset="0"/>
-                        <a:ea typeface="+mn-lt" charset="0"/>
-                        <a:cs typeface="+mn-lt" charset="0"/>
+                        <a:latin typeface="+mn-lt"/>
+                        <a:ea typeface="+mn-lt"/>
+                        <a:cs typeface="+mn-lt"/>
                       </a:endParaRPr>
                     </a:p>
                   </a:txBody>
@@ -14570,16 +14248,16 @@
                           <a:solidFill>
                             <a:srgbClr val="DC2626"/>
                           </a:solidFill>
-                          <a:latin typeface="+mn-lt" pitchFamily="34" charset="0"/>
-                          <a:ea typeface="+mn-lt" pitchFamily="34" charset="-122"/>
-                          <a:cs typeface="+mn-lt" pitchFamily="34" charset="-120"/>
+                          <a:latin typeface="+mn-lt"/>
+                          <a:ea typeface="+mn-lt"/>
+                          <a:cs typeface="+mn-lt"/>
                         </a:rPr>
                         <a:t>−$16.17</a:t>
                       </a:r>
                       <a:endParaRPr lang="en-US" sz="1400" dirty="0">
-                        <a:latin typeface="+mn-lt" charset="0"/>
-                        <a:ea typeface="+mn-lt" charset="0"/>
-                        <a:cs typeface="+mn-lt" charset="0"/>
+                        <a:latin typeface="+mn-lt"/>
+                        <a:ea typeface="+mn-lt"/>
+                        <a:cs typeface="+mn-lt"/>
                       </a:endParaRPr>
                     </a:p>
                   </a:txBody>
@@ -14638,16 +14316,16 @@
                           <a:solidFill>
                             <a:srgbClr val="DC2626"/>
                           </a:solidFill>
-                          <a:latin typeface="+mn-lt" pitchFamily="34" charset="0"/>
-                          <a:ea typeface="+mn-lt" pitchFamily="34" charset="-122"/>
-                          <a:cs typeface="+mn-lt" pitchFamily="34" charset="-120"/>
+                          <a:latin typeface="+mn-lt"/>
+                          <a:ea typeface="+mn-lt"/>
+                          <a:cs typeface="+mn-lt"/>
                         </a:rPr>
                         <a:t>Loss</a:t>
                       </a:r>
                       <a:endParaRPr lang="en-US" sz="1400" dirty="0">
-                        <a:latin typeface="+mn-lt" charset="0"/>
-                        <a:ea typeface="+mn-lt" charset="0"/>
-                        <a:cs typeface="+mn-lt" charset="0"/>
+                        <a:latin typeface="+mn-lt"/>
+                        <a:ea typeface="+mn-lt"/>
+                        <a:cs typeface="+mn-lt"/>
                       </a:endParaRPr>
                     </a:p>
                   </a:txBody>
@@ -14693,11 +14371,6 @@
                     </a:solidFill>
                   </a:tcPr>
                 </a:tc>
-                <a:extLst>
-                  <a:ext uri="{0D108BD9-81ED-4DB2-BD59-A6C34878D82A}">
-                    <a16:rowId xmlns:a16="http://schemas.microsoft.com/office/drawing/2014/main" val="10003"/>
-                  </a:ext>
-                </a:extLst>
               </a:tr>
               <a:tr h="329184">
                 <a:tc>
@@ -14713,16 +14386,16 @@
                           <a:solidFill>
                             <a:srgbClr val="10222B"/>
                           </a:solidFill>
-                          <a:latin typeface="+mn-lt" pitchFamily="34" charset="0"/>
-                          <a:ea typeface="+mn-lt" pitchFamily="34" charset="-122"/>
-                          <a:cs typeface="+mn-lt" pitchFamily="34" charset="-120"/>
+                          <a:latin typeface="+mn-lt"/>
+                          <a:ea typeface="+mn-lt"/>
+                          <a:cs typeface="+mn-lt"/>
                         </a:rPr>
                         <a:t>32%</a:t>
                       </a:r>
                       <a:endParaRPr lang="en-US" sz="1400" dirty="0">
-                        <a:latin typeface="+mn-lt" charset="0"/>
-                        <a:ea typeface="+mn-lt" charset="0"/>
-                        <a:cs typeface="+mn-lt" charset="0"/>
+                        <a:latin typeface="+mn-lt"/>
+                        <a:ea typeface="+mn-lt"/>
+                        <a:cs typeface="+mn-lt"/>
                       </a:endParaRPr>
                     </a:p>
                   </a:txBody>
@@ -14781,16 +14454,16 @@
                           <a:solidFill>
                             <a:srgbClr val="DC2626"/>
                           </a:solidFill>
-                          <a:latin typeface="+mn-lt" pitchFamily="34" charset="0"/>
-                          <a:ea typeface="+mn-lt" pitchFamily="34" charset="-122"/>
-                          <a:cs typeface="+mn-lt" pitchFamily="34" charset="-120"/>
+                          <a:latin typeface="+mn-lt"/>
+                          <a:ea typeface="+mn-lt"/>
+                          <a:cs typeface="+mn-lt"/>
                         </a:rPr>
                         <a:t>−$46.98</a:t>
                       </a:r>
                       <a:endParaRPr lang="en-US" sz="1400" dirty="0">
-                        <a:latin typeface="+mn-lt" charset="0"/>
-                        <a:ea typeface="+mn-lt" charset="0"/>
-                        <a:cs typeface="+mn-lt" charset="0"/>
+                        <a:latin typeface="+mn-lt"/>
+                        <a:ea typeface="+mn-lt"/>
+                        <a:cs typeface="+mn-lt"/>
                       </a:endParaRPr>
                     </a:p>
                   </a:txBody>
@@ -14849,16 +14522,16 @@
                           <a:solidFill>
                             <a:srgbClr val="DC2626"/>
                           </a:solidFill>
-                          <a:latin typeface="+mn-lt" pitchFamily="34" charset="0"/>
-                          <a:ea typeface="+mn-lt" pitchFamily="34" charset="-122"/>
-                          <a:cs typeface="+mn-lt" pitchFamily="34" charset="-120"/>
+                          <a:latin typeface="+mn-lt"/>
+                          <a:ea typeface="+mn-lt"/>
+                          <a:cs typeface="+mn-lt"/>
                         </a:rPr>
                         <a:t>Loss</a:t>
                       </a:r>
                       <a:endParaRPr lang="en-US" sz="1400" dirty="0">
-                        <a:latin typeface="+mn-lt" charset="0"/>
-                        <a:ea typeface="+mn-lt" charset="0"/>
-                        <a:cs typeface="+mn-lt" charset="0"/>
+                        <a:latin typeface="+mn-lt"/>
+                        <a:ea typeface="+mn-lt"/>
+                        <a:cs typeface="+mn-lt"/>
                       </a:endParaRPr>
                     </a:p>
                   </a:txBody>
@@ -14904,11 +14577,6 @@
                     </a:solidFill>
                   </a:tcPr>
                 </a:tc>
-                <a:extLst>
-                  <a:ext uri="{0D108BD9-81ED-4DB2-BD59-A6C34878D82A}">
-                    <a16:rowId xmlns:a16="http://schemas.microsoft.com/office/drawing/2014/main" val="10004"/>
-                  </a:ext>
-                </a:extLst>
               </a:tr>
               <a:tr h="329184">
                 <a:tc>
@@ -14924,16 +14592,16 @@
                           <a:solidFill>
                             <a:srgbClr val="10222B"/>
                           </a:solidFill>
-                          <a:latin typeface="+mn-lt" pitchFamily="34" charset="0"/>
-                          <a:ea typeface="+mn-lt" pitchFamily="34" charset="-122"/>
-                          <a:cs typeface="+mn-lt" pitchFamily="34" charset="-120"/>
+                          <a:latin typeface="+mn-lt"/>
+                          <a:ea typeface="+mn-lt"/>
+                          <a:cs typeface="+mn-lt"/>
                         </a:rPr>
                         <a:t>45%</a:t>
                       </a:r>
                       <a:endParaRPr lang="en-US" sz="1400" dirty="0">
-                        <a:latin typeface="+mn-lt" charset="0"/>
-                        <a:ea typeface="+mn-lt" charset="0"/>
-                        <a:cs typeface="+mn-lt" charset="0"/>
+                        <a:latin typeface="+mn-lt"/>
+                        <a:ea typeface="+mn-lt"/>
+                        <a:cs typeface="+mn-lt"/>
                       </a:endParaRPr>
                     </a:p>
                   </a:txBody>
@@ -14992,16 +14660,16 @@
                           <a:solidFill>
                             <a:srgbClr val="DC2626"/>
                           </a:solidFill>
-                          <a:latin typeface="+mn-lt" pitchFamily="34" charset="0"/>
-                          <a:ea typeface="+mn-lt" pitchFamily="34" charset="-122"/>
-                          <a:cs typeface="+mn-lt" pitchFamily="34" charset="-120"/>
+                          <a:latin typeface="+mn-lt"/>
+                          <a:ea typeface="+mn-lt"/>
+                          <a:cs typeface="+mn-lt"/>
                         </a:rPr>
                         <a:t>−$383.03</a:t>
                       </a:r>
                       <a:endParaRPr lang="en-US" sz="1400" dirty="0">
-                        <a:latin typeface="+mn-lt" charset="0"/>
-                        <a:ea typeface="+mn-lt" charset="0"/>
-                        <a:cs typeface="+mn-lt" charset="0"/>
+                        <a:latin typeface="+mn-lt"/>
+                        <a:ea typeface="+mn-lt"/>
+                        <a:cs typeface="+mn-lt"/>
                       </a:endParaRPr>
                     </a:p>
                   </a:txBody>
@@ -15060,16 +14728,16 @@
                           <a:solidFill>
                             <a:srgbClr val="DC2626"/>
                           </a:solidFill>
-                          <a:latin typeface="+mn-lt" pitchFamily="34" charset="0"/>
-                          <a:ea typeface="+mn-lt" pitchFamily="34" charset="-122"/>
-                          <a:cs typeface="+mn-lt" pitchFamily="34" charset="-120"/>
+                          <a:latin typeface="+mn-lt"/>
+                          <a:ea typeface="+mn-lt"/>
+                          <a:cs typeface="+mn-lt"/>
                         </a:rPr>
                         <a:t>Loss</a:t>
                       </a:r>
                       <a:endParaRPr lang="en-US" sz="1400" dirty="0">
-                        <a:latin typeface="+mn-lt" charset="0"/>
-                        <a:ea typeface="+mn-lt" charset="0"/>
-                        <a:cs typeface="+mn-lt" charset="0"/>
+                        <a:latin typeface="+mn-lt"/>
+                        <a:ea typeface="+mn-lt"/>
+                        <a:cs typeface="+mn-lt"/>
                       </a:endParaRPr>
                     </a:p>
                   </a:txBody>
@@ -15115,11 +14783,6 @@
                     </a:solidFill>
                   </a:tcPr>
                 </a:tc>
-                <a:extLst>
-                  <a:ext uri="{0D108BD9-81ED-4DB2-BD59-A6C34878D82A}">
-                    <a16:rowId xmlns:a16="http://schemas.microsoft.com/office/drawing/2014/main" val="10005"/>
-                  </a:ext>
-                </a:extLst>
               </a:tr>
               <a:tr h="329184">
                 <a:tc>
@@ -15135,16 +14798,16 @@
                           <a:solidFill>
                             <a:srgbClr val="10222B"/>
                           </a:solidFill>
-                          <a:latin typeface="+mn-lt" pitchFamily="34" charset="0"/>
-                          <a:ea typeface="+mn-lt" pitchFamily="34" charset="-122"/>
-                          <a:cs typeface="+mn-lt" pitchFamily="34" charset="-120"/>
+                          <a:latin typeface="+mn-lt"/>
+                          <a:ea typeface="+mn-lt"/>
+                          <a:cs typeface="+mn-lt"/>
                         </a:rPr>
                         <a:t>50%</a:t>
                       </a:r>
                       <a:endParaRPr lang="en-US" sz="1400" dirty="0">
-                        <a:latin typeface="+mn-lt" charset="0"/>
-                        <a:ea typeface="+mn-lt" charset="0"/>
-                        <a:cs typeface="+mn-lt" charset="0"/>
+                        <a:latin typeface="+mn-lt"/>
+                        <a:ea typeface="+mn-lt"/>
+                        <a:cs typeface="+mn-lt"/>
                       </a:endParaRPr>
                     </a:p>
                   </a:txBody>
@@ -15203,16 +14866,16 @@
                           <a:solidFill>
                             <a:srgbClr val="DC2626"/>
                           </a:solidFill>
-                          <a:latin typeface="+mn-lt" pitchFamily="34" charset="0"/>
-                          <a:ea typeface="+mn-lt" pitchFamily="34" charset="-122"/>
-                          <a:cs typeface="+mn-lt" pitchFamily="34" charset="-120"/>
+                          <a:latin typeface="+mn-lt"/>
+                          <a:ea typeface="+mn-lt"/>
+                          <a:cs typeface="+mn-lt"/>
                         </a:rPr>
                         <a:t>−$1,665.05</a:t>
                       </a:r>
                       <a:endParaRPr lang="en-US" sz="1400" dirty="0">
-                        <a:latin typeface="+mn-lt" charset="0"/>
-                        <a:ea typeface="+mn-lt" charset="0"/>
-                        <a:cs typeface="+mn-lt" charset="0"/>
+                        <a:latin typeface="+mn-lt"/>
+                        <a:ea typeface="+mn-lt"/>
+                        <a:cs typeface="+mn-lt"/>
                       </a:endParaRPr>
                     </a:p>
                   </a:txBody>
@@ -15271,16 +14934,16 @@
                           <a:solidFill>
                             <a:srgbClr val="DC2626"/>
                           </a:solidFill>
-                          <a:latin typeface="+mn-lt" pitchFamily="34" charset="0"/>
-                          <a:ea typeface="+mn-lt" pitchFamily="34" charset="-122"/>
-                          <a:cs typeface="+mn-lt" pitchFamily="34" charset="-120"/>
+                          <a:latin typeface="+mn-lt"/>
+                          <a:ea typeface="+mn-lt"/>
+                          <a:cs typeface="+mn-lt"/>
                         </a:rPr>
                         <a:t>Loss</a:t>
                       </a:r>
                       <a:endParaRPr lang="en-US" sz="1400" dirty="0">
-                        <a:latin typeface="+mn-lt" charset="0"/>
-                        <a:ea typeface="+mn-lt" charset="0"/>
-                        <a:cs typeface="+mn-lt" charset="0"/>
+                        <a:latin typeface="+mn-lt"/>
+                        <a:ea typeface="+mn-lt"/>
+                        <a:cs typeface="+mn-lt"/>
                       </a:endParaRPr>
                     </a:p>
                   </a:txBody>
@@ -15326,11 +14989,6 @@
                     </a:solidFill>
                   </a:tcPr>
                 </a:tc>
-                <a:extLst>
-                  <a:ext uri="{0D108BD9-81ED-4DB2-BD59-A6C34878D82A}">
-                    <a16:rowId xmlns:a16="http://schemas.microsoft.com/office/drawing/2014/main" val="10006"/>
-                  </a:ext>
-                </a:extLst>
               </a:tr>
               <a:tr h="329184">
                 <a:tc>
@@ -15346,16 +15004,16 @@
                           <a:solidFill>
                             <a:srgbClr val="10222B"/>
                           </a:solidFill>
-                          <a:latin typeface="+mn-lt" pitchFamily="34" charset="0"/>
-                          <a:ea typeface="+mn-lt" pitchFamily="34" charset="-122"/>
-                          <a:cs typeface="+mn-lt" pitchFamily="34" charset="-120"/>
+                          <a:latin typeface="+mn-lt"/>
+                          <a:ea typeface="+mn-lt"/>
+                          <a:cs typeface="+mn-lt"/>
                         </a:rPr>
                         <a:t>60%</a:t>
                       </a:r>
                       <a:endParaRPr lang="en-US" sz="1400" dirty="0">
-                        <a:latin typeface="+mn-lt" charset="0"/>
-                        <a:ea typeface="+mn-lt" charset="0"/>
-                        <a:cs typeface="+mn-lt" charset="0"/>
+                        <a:latin typeface="+mn-lt"/>
+                        <a:ea typeface="+mn-lt"/>
+                        <a:cs typeface="+mn-lt"/>
                       </a:endParaRPr>
                     </a:p>
                   </a:txBody>
@@ -15414,16 +15072,16 @@
                           <a:solidFill>
                             <a:srgbClr val="DC2626"/>
                           </a:solidFill>
-                          <a:latin typeface="+mn-lt" pitchFamily="34" charset="0"/>
-                          <a:ea typeface="+mn-lt" pitchFamily="34" charset="-122"/>
-                          <a:cs typeface="+mn-lt" pitchFamily="34" charset="-120"/>
+                          <a:latin typeface="+mn-lt"/>
+                          <a:ea typeface="+mn-lt"/>
+                          <a:cs typeface="+mn-lt"/>
                         </a:rPr>
                         <a:t>−$147.96</a:t>
                       </a:r>
                       <a:endParaRPr lang="en-US" sz="1400" dirty="0">
-                        <a:latin typeface="+mn-lt" charset="0"/>
-                        <a:ea typeface="+mn-lt" charset="0"/>
-                        <a:cs typeface="+mn-lt" charset="0"/>
+                        <a:latin typeface="+mn-lt"/>
+                        <a:ea typeface="+mn-lt"/>
+                        <a:cs typeface="+mn-lt"/>
                       </a:endParaRPr>
                     </a:p>
                   </a:txBody>
@@ -15482,16 +15140,16 @@
                           <a:solidFill>
                             <a:srgbClr val="DC2626"/>
                           </a:solidFill>
-                          <a:latin typeface="+mn-lt" pitchFamily="34" charset="0"/>
-                          <a:ea typeface="+mn-lt" pitchFamily="34" charset="-122"/>
-                          <a:cs typeface="+mn-lt" pitchFamily="34" charset="-120"/>
+                          <a:latin typeface="+mn-lt"/>
+                          <a:ea typeface="+mn-lt"/>
+                          <a:cs typeface="+mn-lt"/>
                         </a:rPr>
                         <a:t>Loss</a:t>
                       </a:r>
                       <a:endParaRPr lang="en-US" sz="1400" dirty="0">
-                        <a:latin typeface="+mn-lt" charset="0"/>
-                        <a:ea typeface="+mn-lt" charset="0"/>
-                        <a:cs typeface="+mn-lt" charset="0"/>
+                        <a:latin typeface="+mn-lt"/>
+                        <a:ea typeface="+mn-lt"/>
+                        <a:cs typeface="+mn-lt"/>
                       </a:endParaRPr>
                     </a:p>
                   </a:txBody>
@@ -15537,11 +15195,6 @@
                     </a:solidFill>
                   </a:tcPr>
                 </a:tc>
-                <a:extLst>
-                  <a:ext uri="{0D108BD9-81ED-4DB2-BD59-A6C34878D82A}">
-                    <a16:rowId xmlns:a16="http://schemas.microsoft.com/office/drawing/2014/main" val="10007"/>
-                  </a:ext>
-                </a:extLst>
               </a:tr>
               <a:tr h="329184">
                 <a:tc>
@@ -15557,16 +15210,16 @@
                           <a:solidFill>
                             <a:srgbClr val="10222B"/>
                           </a:solidFill>
-                          <a:latin typeface="+mn-lt" pitchFamily="34" charset="0"/>
-                          <a:ea typeface="+mn-lt" pitchFamily="34" charset="-122"/>
-                          <a:cs typeface="+mn-lt" pitchFamily="34" charset="-120"/>
+                          <a:latin typeface="+mn-lt"/>
+                          <a:ea typeface="+mn-lt"/>
+                          <a:cs typeface="+mn-lt"/>
                         </a:rPr>
                         <a:t>70%</a:t>
                       </a:r>
                       <a:endParaRPr lang="en-US" sz="1400" dirty="0">
-                        <a:latin typeface="+mn-lt" charset="0"/>
-                        <a:ea typeface="+mn-lt" charset="0"/>
-                        <a:cs typeface="+mn-lt" charset="0"/>
+                        <a:latin typeface="+mn-lt"/>
+                        <a:ea typeface="+mn-lt"/>
+                        <a:cs typeface="+mn-lt"/>
                       </a:endParaRPr>
                     </a:p>
                   </a:txBody>
@@ -15625,16 +15278,16 @@
                           <a:solidFill>
                             <a:srgbClr val="DC2626"/>
                           </a:solidFill>
-                          <a:latin typeface="+mn-lt" pitchFamily="34" charset="0"/>
-                          <a:ea typeface="+mn-lt" pitchFamily="34" charset="-122"/>
-                          <a:cs typeface="+mn-lt" pitchFamily="34" charset="-120"/>
+                          <a:latin typeface="+mn-lt"/>
+                          <a:ea typeface="+mn-lt"/>
+                          <a:cs typeface="+mn-lt"/>
                         </a:rPr>
                         <a:t>−$12.77</a:t>
                       </a:r>
                       <a:endParaRPr lang="en-US" sz="1400" dirty="0">
-                        <a:latin typeface="+mn-lt" charset="0"/>
-                        <a:ea typeface="+mn-lt" charset="0"/>
-                        <a:cs typeface="+mn-lt" charset="0"/>
+                        <a:latin typeface="+mn-lt"/>
+                        <a:ea typeface="+mn-lt"/>
+                        <a:cs typeface="+mn-lt"/>
                       </a:endParaRPr>
                     </a:p>
                   </a:txBody>
@@ -15693,16 +15346,16 @@
                           <a:solidFill>
                             <a:srgbClr val="DC2626"/>
                           </a:solidFill>
-                          <a:latin typeface="+mn-lt" pitchFamily="34" charset="0"/>
-                          <a:ea typeface="+mn-lt" pitchFamily="34" charset="-122"/>
-                          <a:cs typeface="+mn-lt" pitchFamily="34" charset="-120"/>
+                          <a:latin typeface="+mn-lt"/>
+                          <a:ea typeface="+mn-lt"/>
+                          <a:cs typeface="+mn-lt"/>
                         </a:rPr>
                         <a:t>Loss</a:t>
                       </a:r>
                       <a:endParaRPr lang="en-US" sz="1400" dirty="0">
-                        <a:latin typeface="+mn-lt" charset="0"/>
-                        <a:ea typeface="+mn-lt" charset="0"/>
-                        <a:cs typeface="+mn-lt" charset="0"/>
+                        <a:latin typeface="+mn-lt"/>
+                        <a:ea typeface="+mn-lt"/>
+                        <a:cs typeface="+mn-lt"/>
                       </a:endParaRPr>
                     </a:p>
                   </a:txBody>
@@ -15748,11 +15401,6 @@
                     </a:solidFill>
                   </a:tcPr>
                 </a:tc>
-                <a:extLst>
-                  <a:ext uri="{0D108BD9-81ED-4DB2-BD59-A6C34878D82A}">
-                    <a16:rowId xmlns:a16="http://schemas.microsoft.com/office/drawing/2014/main" val="10008"/>
-                  </a:ext>
-                </a:extLst>
               </a:tr>
               <a:tr h="329184">
                 <a:tc>
@@ -15768,16 +15416,16 @@
                           <a:solidFill>
                             <a:srgbClr val="10222B"/>
                           </a:solidFill>
-                          <a:latin typeface="+mn-lt" pitchFamily="34" charset="0"/>
-                          <a:ea typeface="+mn-lt" pitchFamily="34" charset="-122"/>
-                          <a:cs typeface="+mn-lt" pitchFamily="34" charset="-120"/>
+                          <a:latin typeface="+mn-lt"/>
+                          <a:ea typeface="+mn-lt"/>
+                          <a:cs typeface="+mn-lt"/>
                         </a:rPr>
                         <a:t>80%</a:t>
                       </a:r>
                       <a:endParaRPr lang="en-US" sz="1400" dirty="0">
-                        <a:latin typeface="+mn-lt" charset="0"/>
-                        <a:ea typeface="+mn-lt" charset="0"/>
-                        <a:cs typeface="+mn-lt" charset="0"/>
+                        <a:latin typeface="+mn-lt"/>
+                        <a:ea typeface="+mn-lt"/>
+                        <a:cs typeface="+mn-lt"/>
                       </a:endParaRPr>
                     </a:p>
                   </a:txBody>
@@ -15836,16 +15484,16 @@
                           <a:solidFill>
                             <a:srgbClr val="DC2626"/>
                           </a:solidFill>
-                          <a:latin typeface="+mn-lt" pitchFamily="34" charset="0"/>
-                          <a:ea typeface="+mn-lt" pitchFamily="34" charset="-122"/>
-                          <a:cs typeface="+mn-lt" pitchFamily="34" charset="-120"/>
+                          <a:latin typeface="+mn-lt"/>
+                          <a:ea typeface="+mn-lt"/>
+                          <a:cs typeface="+mn-lt"/>
                         </a:rPr>
                         <a:t>−$127.67</a:t>
                       </a:r>
                       <a:endParaRPr lang="en-US" sz="1400" dirty="0">
-                        <a:latin typeface="+mn-lt" charset="0"/>
-                        <a:ea typeface="+mn-lt" charset="0"/>
-                        <a:cs typeface="+mn-lt" charset="0"/>
+                        <a:latin typeface="+mn-lt"/>
+                        <a:ea typeface="+mn-lt"/>
+                        <a:cs typeface="+mn-lt"/>
                       </a:endParaRPr>
                     </a:p>
                   </a:txBody>
@@ -15904,16 +15552,16 @@
                           <a:solidFill>
                             <a:srgbClr val="DC2626"/>
                           </a:solidFill>
-                          <a:latin typeface="+mn-lt" pitchFamily="34" charset="0"/>
-                          <a:ea typeface="+mn-lt" pitchFamily="34" charset="-122"/>
-                          <a:cs typeface="+mn-lt" pitchFamily="34" charset="-120"/>
+                          <a:latin typeface="+mn-lt"/>
+                          <a:ea typeface="+mn-lt"/>
+                          <a:cs typeface="+mn-lt"/>
                         </a:rPr>
                         <a:t>Loss</a:t>
                       </a:r>
                       <a:endParaRPr lang="en-US" sz="1400" dirty="0">
-                        <a:latin typeface="+mn-lt" charset="0"/>
-                        <a:ea typeface="+mn-lt" charset="0"/>
-                        <a:cs typeface="+mn-lt" charset="0"/>
+                        <a:latin typeface="+mn-lt"/>
+                        <a:ea typeface="+mn-lt"/>
+                        <a:cs typeface="+mn-lt"/>
                       </a:endParaRPr>
                     </a:p>
                   </a:txBody>
@@ -15959,11 +15607,6 @@
                     </a:solidFill>
                   </a:tcPr>
                 </a:tc>
-                <a:extLst>
-                  <a:ext uri="{0D108BD9-81ED-4DB2-BD59-A6C34878D82A}">
-                    <a16:rowId xmlns:a16="http://schemas.microsoft.com/office/drawing/2014/main" val="10009"/>
-                  </a:ext>
-                </a:extLst>
               </a:tr>
             </a:tbl>
           </a:graphicData>
@@ -16018,7 +15661,6 @@
             <a:avLst/>
           </a:prstGeom>
           <a:noFill/>
-          <a:ln/>
         </p:spPr>
         <p:txBody>
           <a:bodyPr wrap="square" lIns="0" tIns="0" rIns="0" bIns="0" rtlCol="0" anchor="ctr"/>
@@ -16032,9 +15674,9 @@
                 <a:solidFill>
                   <a:schemeClr val="accent4"/>
                 </a:solidFill>
-                <a:latin typeface="Cambria" pitchFamily="34" charset="0"/>
-                <a:ea typeface="Cambria" pitchFamily="34" charset="-122"/>
-                <a:cs typeface="Cambria" pitchFamily="34" charset="-120"/>
+                <a:latin typeface="Cambria" panose="02040503050406030204" pitchFamily="34" charset="0"/>
+                <a:ea typeface="Cambria" panose="02040503050406030204" pitchFamily="34" charset="-122"/>
+                <a:cs typeface="Cambria" panose="02040503050406030204" pitchFamily="34" charset="-120"/>
               </a:rPr>
               <a:t>$1,234.60</a:t>
             </a:r>
@@ -16057,7 +15699,6 @@
             <a:avLst/>
           </a:prstGeom>
           <a:noFill/>
-          <a:ln/>
         </p:spPr>
         <p:txBody>
           <a:bodyPr wrap="square" lIns="0" tIns="0" rIns="0" bIns="0" rtlCol="0" anchor="t"/>
@@ -16071,9 +15712,9 @@
                 <a:solidFill>
                   <a:schemeClr val="tx1"/>
                 </a:solidFill>
-                <a:latin typeface="Calibri" pitchFamily="34" charset="0"/>
-                <a:ea typeface="Calibri" pitchFamily="34" charset="-122"/>
-                <a:cs typeface="Calibri" pitchFamily="34" charset="-120"/>
+                <a:latin typeface="Calibri" panose="020F0502020204030204" pitchFamily="34" charset="0"/>
+                <a:ea typeface="Calibri" panose="020F0502020204030204" pitchFamily="34" charset="-122"/>
+                <a:cs typeface="Calibri" panose="020F0502020204030204" pitchFamily="34" charset="-120"/>
               </a:rPr>
               <a:t>earned at 0% and 20% discounts combined.</a:t>
             </a:r>
@@ -16130,7 +15771,6 @@
             <a:avLst/>
           </a:prstGeom>
           <a:noFill/>
-          <a:ln/>
         </p:spPr>
         <p:txBody>
           <a:bodyPr wrap="square" lIns="0" tIns="0" rIns="0" bIns="0" rtlCol="0" anchor="ctr"/>
@@ -16144,9 +15784,9 @@
                 <a:solidFill>
                   <a:schemeClr val="accent3"/>
                 </a:solidFill>
-                <a:latin typeface="Cambria" pitchFamily="34" charset="0"/>
-                <a:ea typeface="Cambria" pitchFamily="34" charset="-122"/>
-                <a:cs typeface="Cambria" pitchFamily="34" charset="-120"/>
+                <a:latin typeface="Cambria" panose="02040503050406030204" pitchFamily="34" charset="0"/>
+                <a:ea typeface="Cambria" panose="02040503050406030204" pitchFamily="34" charset="-122"/>
+                <a:cs typeface="Cambria" panose="02040503050406030204" pitchFamily="34" charset="-120"/>
               </a:rPr>
               <a:t>−$2,399.63</a:t>
             </a:r>
@@ -16169,7 +15809,6 @@
             <a:avLst/>
           </a:prstGeom>
           <a:noFill/>
-          <a:ln/>
         </p:spPr>
         <p:txBody>
           <a:bodyPr wrap="square" lIns="0" tIns="0" rIns="0" bIns="0" rtlCol="0" anchor="t"/>
@@ -16183,9 +15822,9 @@
                 <a:solidFill>
                   <a:schemeClr val="tx1"/>
                 </a:solidFill>
-                <a:latin typeface="Calibri" pitchFamily="34" charset="0"/>
-                <a:ea typeface="Calibri" pitchFamily="34" charset="-122"/>
-                <a:cs typeface="Calibri" pitchFamily="34" charset="-120"/>
+                <a:latin typeface="Calibri" panose="020F0502020204030204" pitchFamily="34" charset="0"/>
+                <a:ea typeface="Calibri" panose="020F0502020204030204" pitchFamily="34" charset="-122"/>
+                <a:cs typeface="Calibri" panose="020F0502020204030204" pitchFamily="34" charset="-120"/>
               </a:rPr>
               <a:t>lost across all seven discount levels of 30% and above.</a:t>
             </a:r>
@@ -16242,7 +15881,6 @@
             <a:avLst/>
           </a:prstGeom>
           <a:noFill/>
-          <a:ln/>
         </p:spPr>
         <p:txBody>
           <a:bodyPr wrap="square" lIns="0" tIns="0" rIns="0" bIns="0" rtlCol="0" anchor="ctr"/>
@@ -16256,9 +15894,9 @@
                 <a:solidFill>
                   <a:schemeClr val="accent1"/>
                 </a:solidFill>
-                <a:latin typeface="Cambria" pitchFamily="34" charset="0"/>
-                <a:ea typeface="Cambria" pitchFamily="34" charset="-122"/>
-                <a:cs typeface="Cambria" pitchFamily="34" charset="-120"/>
+                <a:latin typeface="Cambria" panose="02040503050406030204" pitchFamily="34" charset="0"/>
+                <a:ea typeface="Cambria" panose="02040503050406030204" pitchFamily="34" charset="-122"/>
+                <a:cs typeface="Cambria" panose="02040503050406030204" pitchFamily="34" charset="-120"/>
               </a:rPr>
               <a:t>69%</a:t>
             </a:r>
@@ -16281,7 +15919,6 @@
             <a:avLst/>
           </a:prstGeom>
           <a:noFill/>
-          <a:ln/>
         </p:spPr>
         <p:txBody>
           <a:bodyPr wrap="square" lIns="0" tIns="0" rIns="0" bIns="0" rtlCol="0" anchor="t"/>
@@ -16295,9 +15932,9 @@
                 <a:solidFill>
                   <a:schemeClr val="tx1"/>
                 </a:solidFill>
-                <a:latin typeface="Calibri" pitchFamily="34" charset="0"/>
-                <a:ea typeface="Calibri" pitchFamily="34" charset="-122"/>
-                <a:cs typeface="Calibri" pitchFamily="34" charset="-120"/>
+                <a:latin typeface="Calibri" panose="020F0502020204030204" pitchFamily="34" charset="0"/>
+                <a:ea typeface="Calibri" panose="020F0502020204030204" pitchFamily="34" charset="-122"/>
+                <a:cs typeface="Calibri" panose="020F0502020204030204" pitchFamily="34" charset="-120"/>
               </a:rPr>
               <a:t>of those losses come from the 50% discount alone ($1,665.05).</a:t>
             </a:r>
@@ -16323,11 +15960,6 @@
           <a:prstGeom prst="rect">
             <a:avLst/>
           </a:prstGeom>
-          <a:extLst>
-            <a:ext uri="{C572A759-6A51-4108-AA02-DFA0A04FC94B}">
-              <ma14:wrappingTextBoxFlag xmlns="" xmlns:ma14="http://schemas.microsoft.com/office/mac/drawingml/2011/main" val="0"/>
-            </a:ext>
-          </a:extLst>
         </p:spPr>
         <p:txBody>
           <a:bodyPr/>
@@ -16344,7 +15976,6 @@
             <a:pPr algn="l"/>
             <a:fld id="{F7021451-1387-4CA6-816F-3879F97B5CBC}" type="slidenum">
               <a:rPr lang="en-US" b="0"/>
-              <a:t>9</a:t>
             </a:fld>
             <a:endParaRPr lang="en-US"/>
           </a:p>
@@ -16889,23 +16520,6 @@
         <a:font script="Viet" typeface="Times New Roman"/>
         <a:font script="Uigh" typeface="Microsoft Uighur"/>
         <a:font script="Geor" typeface="Sylfaen"/>
-        <a:font script="Armn" typeface="Arial"/>
-        <a:font script="Bugi" typeface="Leelawadee UI"/>
-        <a:font script="Bopo" typeface="Microsoft JhengHei"/>
-        <a:font script="Java" typeface="Javanese Text"/>
-        <a:font script="Lisu" typeface="Segoe UI"/>
-        <a:font script="Mymr" typeface="Myanmar Text"/>
-        <a:font script="Nkoo" typeface="Ebrima"/>
-        <a:font script="Olck" typeface="Nirmala UI"/>
-        <a:font script="Osma" typeface="Ebrima"/>
-        <a:font script="Phag" typeface="Phagspa"/>
-        <a:font script="Syrn" typeface="Estrangelo Edessa"/>
-        <a:font script="Syrj" typeface="Estrangelo Edessa"/>
-        <a:font script="Syre" typeface="Estrangelo Edessa"/>
-        <a:font script="Sora" typeface="Nirmala UI"/>
-        <a:font script="Tale" typeface="Microsoft Tai Le"/>
-        <a:font script="Talu" typeface="Microsoft New Tai Lue"/>
-        <a:font script="Tfng" typeface="Ebrima"/>
       </a:majorFont>
       <a:minorFont>
         <a:latin typeface="Calibri"/>
@@ -16941,23 +16555,6 @@
         <a:font script="Viet" typeface="Arial"/>
         <a:font script="Uigh" typeface="Microsoft Uighur"/>
         <a:font script="Geor" typeface="Sylfaen"/>
-        <a:font script="Armn" typeface="Arial"/>
-        <a:font script="Bugi" typeface="Leelawadee UI"/>
-        <a:font script="Bopo" typeface="Microsoft JhengHei"/>
-        <a:font script="Java" typeface="Javanese Text"/>
-        <a:font script="Lisu" typeface="Segoe UI"/>
-        <a:font script="Mymr" typeface="Myanmar Text"/>
-        <a:font script="Nkoo" typeface="Ebrima"/>
-        <a:font script="Olck" typeface="Nirmala UI"/>
-        <a:font script="Osma" typeface="Ebrima"/>
-        <a:font script="Phag" typeface="Phagspa"/>
-        <a:font script="Syrn" typeface="Estrangelo Edessa"/>
-        <a:font script="Syrj" typeface="Estrangelo Edessa"/>
-        <a:font script="Syre" typeface="Estrangelo Edessa"/>
-        <a:font script="Sora" typeface="Nirmala UI"/>
-        <a:font script="Tale" typeface="Microsoft Tai Le"/>
-        <a:font script="Talu" typeface="Microsoft New Tai Lue"/>
-        <a:font script="Tfng" typeface="Ebrima"/>
       </a:minorFont>
     </a:fontScheme>
     <a:fmtScheme name="Office">
@@ -17098,8 +16695,6 @@
       </a:bgFillStyleLst>
     </a:fmtScheme>
   </a:themeElements>
-  <a:objectDefaults/>
-  <a:extraClrSchemeLst/>
   <a:extLst>
     <a:ext uri="{05A4C25C-085E-4340-85A3-A5531E510DB2}">
       <thm15:themeFamily xmlns:thm15="http://schemas.microsoft.com/office/thememl/2012/main" name="Office Theme" id="{62F939B6-93AF-4DB8-9C6B-D6C7DFDC589F}" vid="{4A3C46E8-61CC-4603-A589-7422A47A8E4A}"/>
@@ -17151,7 +16746,7 @@
     </a:clrScheme>
     <a:fontScheme name="Office">
       <a:majorFont>
-        <a:latin typeface="Aptos Display" panose="02110004020202020204"/>
+        <a:latin typeface="Aptos Display"/>
         <a:ea typeface=""/>
         <a:cs typeface=""/>
         <a:font script="Jpan" typeface="游ゴシック Light"/>
@@ -17184,26 +16779,9 @@
         <a:font script="Viet" typeface="Times New Roman"/>
         <a:font script="Uigh" typeface="Microsoft Uighur"/>
         <a:font script="Geor" typeface="Sylfaen"/>
-        <a:font script="Armn" typeface="Arial"/>
-        <a:font script="Bugi" typeface="Leelawadee UI"/>
-        <a:font script="Bopo" typeface="Microsoft JhengHei"/>
-        <a:font script="Java" typeface="Javanese Text"/>
-        <a:font script="Lisu" typeface="Segoe UI"/>
-        <a:font script="Mymr" typeface="Myanmar Text"/>
-        <a:font script="Nkoo" typeface="Ebrima"/>
-        <a:font script="Olck" typeface="Nirmala UI"/>
-        <a:font script="Osma" typeface="Ebrima"/>
-        <a:font script="Phag" typeface="Phagspa"/>
-        <a:font script="Syrn" typeface="Estrangelo Edessa"/>
-        <a:font script="Syrj" typeface="Estrangelo Edessa"/>
-        <a:font script="Syre" typeface="Estrangelo Edessa"/>
-        <a:font script="Sora" typeface="Nirmala UI"/>
-        <a:font script="Tale" typeface="Microsoft Tai Le"/>
-        <a:font script="Talu" typeface="Microsoft New Tai Lue"/>
-        <a:font script="Tfng" typeface="Ebrima"/>
       </a:majorFont>
       <a:minorFont>
-        <a:latin typeface="Aptos" panose="02110004020202020204"/>
+        <a:latin typeface="Aptos"/>
         <a:ea typeface=""/>
         <a:cs typeface=""/>
         <a:font script="Jpan" typeface="游ゴシック"/>
@@ -17236,23 +16814,6 @@
         <a:font script="Viet" typeface="Arial"/>
         <a:font script="Uigh" typeface="Microsoft Uighur"/>
         <a:font script="Geor" typeface="Sylfaen"/>
-        <a:font script="Armn" typeface="Arial"/>
-        <a:font script="Bugi" typeface="Leelawadee UI"/>
-        <a:font script="Bopo" typeface="Microsoft JhengHei"/>
-        <a:font script="Java" typeface="Javanese Text"/>
-        <a:font script="Lisu" typeface="Segoe UI"/>
-        <a:font script="Mymr" typeface="Myanmar Text"/>
-        <a:font script="Nkoo" typeface="Ebrima"/>
-        <a:font script="Olck" typeface="Nirmala UI"/>
-        <a:font script="Osma" typeface="Ebrima"/>
-        <a:font script="Phag" typeface="Phagspa"/>
-        <a:font script="Syrn" typeface="Estrangelo Edessa"/>
-        <a:font script="Syrj" typeface="Estrangelo Edessa"/>
-        <a:font script="Syre" typeface="Estrangelo Edessa"/>
-        <a:font script="Sora" typeface="Nirmala UI"/>
-        <a:font script="Tale" typeface="Microsoft Tai Le"/>
-        <a:font script="Talu" typeface="Microsoft New Tai Lue"/>
-        <a:font script="Tfng" typeface="Ebrima"/>
       </a:minorFont>
     </a:fontScheme>
     <a:fmtScheme name="Office">
@@ -17414,10 +16975,9 @@
       </a:style>
     </a:lnDef>
   </a:objectDefaults>
-  <a:extraClrSchemeLst/>
   <a:extLst>
     <a:ext uri="{05A4C25C-085E-4340-85A3-A5531E510DB2}">
-      <thm15:themeFamily xmlns:thm15="http://schemas.microsoft.com/office/thememl/2012/main" name="Office Theme" id="{2E142A2C-CD16-42D6-873A-C26D2A0506FA}" vid="{1BDDFF52-6CD6-40A5-AB3C-68EB2F1E4D0A}"/>
+      <thm15:themeFamily xmlns:thm15="http://schemas.microsoft.com/office/thememl/2012/main" name="Office Theme" id="{62F939B6-93AF-4DB8-9C6B-D6C7DFDC589F}" vid="{4A3C46E8-61CC-4603-A589-7422A47A8E4A}"/>
     </a:ext>
   </a:extLst>
 </a:theme>

--- a/Data_Analysis_Project_Report.pptx
+++ b/Data_Analysis_Project_Report.pptx
@@ -8133,7 +8133,7 @@
                 <a:ea typeface="Cambria" panose="02040503050406030204" pitchFamily="34" charset="-122"/>
                 <a:cs typeface="Cambria" panose="02040503050406030204" pitchFamily="34" charset="-120"/>
               </a:rPr>
-              <a:t>Ship mode chart: the numbers</a:t>
+              <a:t>Ship mode chart</a:t>
             </a:r>
             <a:endParaRPr lang="en-US" sz="3400" dirty="0"/>
           </a:p>

--- a/Data_Analysis_Project_Report.pptx
+++ b/Data_Analysis_Project_Report.pptx
@@ -5,19 +5,19 @@
     <p:sldMasterId id="2147483648" r:id="rId1"/>
   </p:sldMasterIdLst>
   <p:notesMasterIdLst>
-    <p:notesMasterId r:id="rId4"/>
+    <p:notesMasterId r:id="rId12"/>
   </p:notesMasterIdLst>
   <p:sldIdLst>
-    <p:sldId id="256" r:id="rId3"/>
-    <p:sldId id="258" r:id="rId5"/>
-    <p:sldId id="257" r:id="rId6"/>
-    <p:sldId id="260" r:id="rId7"/>
-    <p:sldId id="261" r:id="rId8"/>
-    <p:sldId id="262" r:id="rId9"/>
-    <p:sldId id="263" r:id="rId10"/>
-    <p:sldId id="264" r:id="rId11"/>
-    <p:sldId id="265" r:id="rId12"/>
-    <p:sldId id="266" r:id="rId13"/>
+    <p:sldId id="256" r:id="rId2"/>
+    <p:sldId id="258" r:id="rId3"/>
+    <p:sldId id="257" r:id="rId4"/>
+    <p:sldId id="260" r:id="rId5"/>
+    <p:sldId id="261" r:id="rId6"/>
+    <p:sldId id="262" r:id="rId7"/>
+    <p:sldId id="263" r:id="rId8"/>
+    <p:sldId id="264" r:id="rId9"/>
+    <p:sldId id="265" r:id="rId10"/>
+    <p:sldId id="266" r:id="rId11"/>
   </p:sldIdLst>
   <p:sldSz cx="9144000" cy="5143500" type="screen16x9"/>
   <p:notesSz cx="5143500" cy="9144000"/>
@@ -139,6 +139,9 @@
           </p14:sldIdLst>
         </p14:section>
       </p14:sectionLst>
+    </p:ext>
+    <p:ext uri="{EFAFB233-063F-42B5-8137-9DF3F51BA10A}">
+      <p15:sldGuideLst xmlns:p15="http://schemas.microsoft.com/office/powerpoint/2012/main"/>
     </p:ext>
   </p:extLst>
 </p:presentation>
@@ -292,6 +295,13 @@
           </p:nvPr>
         </p:nvSpPr>
         <p:spPr/>
+        <p:txBody>
+          <a:bodyPr/>
+          <a:lstStyle/>
+          <a:p>
+            <a:endParaRPr lang="en-IN"/>
+          </a:p>
+        </p:txBody>
       </p:sp>
       <p:sp>
         <p:nvSpPr>
@@ -329,6 +339,7 @@
           <a:p>
             <a:fld id="{F7021451-1387-4CA6-816F-3879F97B5CBC}" type="slidenum">
               <a:rPr lang="en-US"/>
+              <a:t>1</a:t>
             </a:fld>
             <a:endParaRPr lang="en-US"/>
           </a:p>
@@ -370,6 +381,13 @@
           </p:nvPr>
         </p:nvSpPr>
         <p:spPr/>
+        <p:txBody>
+          <a:bodyPr/>
+          <a:lstStyle/>
+          <a:p>
+            <a:endParaRPr lang="en-IN"/>
+          </a:p>
+        </p:txBody>
       </p:sp>
       <p:sp>
         <p:nvSpPr>
@@ -407,6 +425,7 @@
           <a:p>
             <a:fld id="{F7021451-1387-4CA6-816F-3879F97B5CBC}" type="slidenum">
               <a:rPr lang="en-US"/>
+              <a:t>10</a:t>
             </a:fld>
             <a:endParaRPr lang="en-US"/>
           </a:p>
@@ -448,6 +467,13 @@
           </p:nvPr>
         </p:nvSpPr>
         <p:spPr/>
+        <p:txBody>
+          <a:bodyPr/>
+          <a:lstStyle/>
+          <a:p>
+            <a:endParaRPr lang="en-IN"/>
+          </a:p>
+        </p:txBody>
       </p:sp>
       <p:sp>
         <p:nvSpPr>
@@ -485,6 +511,7 @@
           <a:p>
             <a:fld id="{F7021451-1387-4CA6-816F-3879F97B5CBC}" type="slidenum">
               <a:rPr lang="en-US"/>
+              <a:t>2</a:t>
             </a:fld>
             <a:endParaRPr lang="en-US"/>
           </a:p>
@@ -526,6 +553,13 @@
           </p:nvPr>
         </p:nvSpPr>
         <p:spPr/>
+        <p:txBody>
+          <a:bodyPr/>
+          <a:lstStyle/>
+          <a:p>
+            <a:endParaRPr lang="en-IN"/>
+          </a:p>
+        </p:txBody>
       </p:sp>
       <p:sp>
         <p:nvSpPr>
@@ -563,6 +597,7 @@
           <a:p>
             <a:fld id="{F7021451-1387-4CA6-816F-3879F97B5CBC}" type="slidenum">
               <a:rPr lang="en-US"/>
+              <a:t>3</a:t>
             </a:fld>
             <a:endParaRPr lang="en-US"/>
           </a:p>
@@ -604,6 +639,13 @@
           </p:nvPr>
         </p:nvSpPr>
         <p:spPr/>
+        <p:txBody>
+          <a:bodyPr/>
+          <a:lstStyle/>
+          <a:p>
+            <a:endParaRPr lang="en-IN"/>
+          </a:p>
+        </p:txBody>
       </p:sp>
       <p:sp>
         <p:nvSpPr>
@@ -641,6 +683,7 @@
           <a:p>
             <a:fld id="{F7021451-1387-4CA6-816F-3879F97B5CBC}" type="slidenum">
               <a:rPr lang="en-US"/>
+              <a:t>4</a:t>
             </a:fld>
             <a:endParaRPr lang="en-US"/>
           </a:p>
@@ -682,6 +725,13 @@
           </p:nvPr>
         </p:nvSpPr>
         <p:spPr/>
+        <p:txBody>
+          <a:bodyPr/>
+          <a:lstStyle/>
+          <a:p>
+            <a:endParaRPr lang="en-IN"/>
+          </a:p>
+        </p:txBody>
       </p:sp>
       <p:sp>
         <p:nvSpPr>
@@ -719,6 +769,7 @@
           <a:p>
             <a:fld id="{F7021451-1387-4CA6-816F-3879F97B5CBC}" type="slidenum">
               <a:rPr lang="en-US"/>
+              <a:t>5</a:t>
             </a:fld>
             <a:endParaRPr lang="en-US"/>
           </a:p>
@@ -760,6 +811,13 @@
           </p:nvPr>
         </p:nvSpPr>
         <p:spPr/>
+        <p:txBody>
+          <a:bodyPr/>
+          <a:lstStyle/>
+          <a:p>
+            <a:endParaRPr lang="en-IN"/>
+          </a:p>
+        </p:txBody>
       </p:sp>
       <p:sp>
         <p:nvSpPr>
@@ -797,6 +855,7 @@
           <a:p>
             <a:fld id="{F7021451-1387-4CA6-816F-3879F97B5CBC}" type="slidenum">
               <a:rPr lang="en-US"/>
+              <a:t>6</a:t>
             </a:fld>
             <a:endParaRPr lang="en-US"/>
           </a:p>
@@ -838,6 +897,13 @@
           </p:nvPr>
         </p:nvSpPr>
         <p:spPr/>
+        <p:txBody>
+          <a:bodyPr/>
+          <a:lstStyle/>
+          <a:p>
+            <a:endParaRPr lang="en-IN"/>
+          </a:p>
+        </p:txBody>
       </p:sp>
       <p:sp>
         <p:nvSpPr>
@@ -875,6 +941,7 @@
           <a:p>
             <a:fld id="{F7021451-1387-4CA6-816F-3879F97B5CBC}" type="slidenum">
               <a:rPr lang="en-US"/>
+              <a:t>7</a:t>
             </a:fld>
             <a:endParaRPr lang="en-US"/>
           </a:p>
@@ -916,6 +983,13 @@
           </p:nvPr>
         </p:nvSpPr>
         <p:spPr/>
+        <p:txBody>
+          <a:bodyPr/>
+          <a:lstStyle/>
+          <a:p>
+            <a:endParaRPr lang="en-IN"/>
+          </a:p>
+        </p:txBody>
       </p:sp>
       <p:sp>
         <p:nvSpPr>
@@ -953,6 +1027,7 @@
           <a:p>
             <a:fld id="{F7021451-1387-4CA6-816F-3879F97B5CBC}" type="slidenum">
               <a:rPr lang="en-US"/>
+              <a:t>8</a:t>
             </a:fld>
             <a:endParaRPr lang="en-US"/>
           </a:p>
@@ -994,6 +1069,13 @@
           </p:nvPr>
         </p:nvSpPr>
         <p:spPr/>
+        <p:txBody>
+          <a:bodyPr/>
+          <a:lstStyle/>
+          <a:p>
+            <a:endParaRPr lang="en-IN"/>
+          </a:p>
+        </p:txBody>
       </p:sp>
       <p:sp>
         <p:nvSpPr>
@@ -1031,6 +1113,7 @@
           <a:p>
             <a:fld id="{F7021451-1387-4CA6-816F-3879F97B5CBC}" type="slidenum">
               <a:rPr lang="en-US"/>
+              <a:t>9</a:t>
             </a:fld>
             <a:endParaRPr lang="en-US"/>
           </a:p>
@@ -1217,6 +1300,7 @@
             <a:pPr algn="l"/>
             <a:fld id="{F7021451-1387-4CA6-816F-3879F97B5CBC}" type="slidenum">
               <a:rPr lang="en-US" b="0"/>
+              <a:t>‹#›</a:t>
             </a:fld>
             <a:endParaRPr lang="en-US"/>
           </a:p>
@@ -1373,6 +1457,7 @@
             <a:pPr algn="l"/>
             <a:fld id="{F7021451-1387-4CA6-816F-3879F97B5CBC}" type="slidenum">
               <a:rPr lang="en-US" b="0"/>
+              <a:t>‹#›</a:t>
             </a:fld>
             <a:endParaRPr lang="en-US"/>
           </a:p>
@@ -1442,6 +1527,7 @@
             <a:pPr algn="l"/>
             <a:fld id="{F7021451-1387-4CA6-816F-3879F97B5CBC}" type="slidenum">
               <a:rPr lang="en-US" b="0"/>
+              <a:t>‹#›</a:t>
             </a:fld>
             <a:endParaRPr lang="en-US"/>
           </a:p>
@@ -1738,7 +1824,7 @@
         </p:nvSpPr>
         <p:spPr>
           <a:xfrm>
-            <a:off x="548640" y="502920"/>
+            <a:off x="548640" y="731520"/>
             <a:ext cx="8046720" cy="1097280"/>
           </a:xfrm>
           <a:prstGeom prst="rect">
@@ -1776,7 +1862,7 @@
         </p:nvSpPr>
         <p:spPr>
           <a:xfrm>
-            <a:off x="548640" y="1645920"/>
+            <a:off x="640080" y="1691640"/>
             <a:ext cx="8046720" cy="411480"/>
           </a:xfrm>
           <a:prstGeom prst="rect">
@@ -1836,6 +1922,13 @@
             <a:prstDash val="solid"/>
           </a:ln>
         </p:spPr>
+        <p:txBody>
+          <a:bodyPr/>
+          <a:lstStyle/>
+          <a:p>
+            <a:endParaRPr lang="en-IN"/>
+          </a:p>
+        </p:txBody>
       </p:sp>
       <p:sp>
         <p:nvSpPr>
@@ -1855,6 +1948,13 @@
             <a:schemeClr val="accent2"/>
           </a:solidFill>
         </p:spPr>
+        <p:txBody>
+          <a:bodyPr/>
+          <a:lstStyle/>
+          <a:p>
+            <a:endParaRPr lang="en-IN"/>
+          </a:p>
+        </p:txBody>
       </p:sp>
       <p:sp>
         <p:nvSpPr>
@@ -1962,6 +2062,13 @@
             <a:prstDash val="solid"/>
           </a:ln>
         </p:spPr>
+        <p:txBody>
+          <a:bodyPr/>
+          <a:lstStyle/>
+          <a:p>
+            <a:endParaRPr lang="en-IN"/>
+          </a:p>
+        </p:txBody>
       </p:sp>
       <p:sp>
         <p:nvSpPr>
@@ -1981,6 +2088,13 @@
             <a:schemeClr val="accent2"/>
           </a:solidFill>
         </p:spPr>
+        <p:txBody>
+          <a:bodyPr/>
+          <a:lstStyle/>
+          <a:p>
+            <a:endParaRPr lang="en-IN"/>
+          </a:p>
+        </p:txBody>
       </p:sp>
       <p:sp>
         <p:nvSpPr>
@@ -2088,6 +2202,13 @@
             <a:prstDash val="solid"/>
           </a:ln>
         </p:spPr>
+        <p:txBody>
+          <a:bodyPr/>
+          <a:lstStyle/>
+          <a:p>
+            <a:endParaRPr lang="en-IN"/>
+          </a:p>
+        </p:txBody>
       </p:sp>
       <p:sp>
         <p:nvSpPr>
@@ -2107,6 +2228,13 @@
             <a:schemeClr val="accent2"/>
           </a:solidFill>
         </p:spPr>
+        <p:txBody>
+          <a:bodyPr/>
+          <a:lstStyle/>
+          <a:p>
+            <a:endParaRPr lang="en-IN"/>
+          </a:p>
+        </p:txBody>
       </p:sp>
       <p:sp>
         <p:nvSpPr>
@@ -2214,6 +2342,13 @@
             <a:prstDash val="solid"/>
           </a:ln>
         </p:spPr>
+        <p:txBody>
+          <a:bodyPr/>
+          <a:lstStyle/>
+          <a:p>
+            <a:endParaRPr lang="en-IN"/>
+          </a:p>
+        </p:txBody>
       </p:sp>
       <p:sp>
         <p:nvSpPr>
@@ -2233,6 +2368,13 @@
             <a:schemeClr val="accent2"/>
           </a:solidFill>
         </p:spPr>
+        <p:txBody>
+          <a:bodyPr/>
+          <a:lstStyle/>
+          <a:p>
+            <a:endParaRPr lang="en-IN"/>
+          </a:p>
+        </p:txBody>
       </p:sp>
       <p:sp>
         <p:nvSpPr>
@@ -2344,8 +2486,52 @@
             <a:pPr algn="l"/>
             <a:fld id="{F7021451-1387-4CA6-816F-3879F97B5CBC}" type="slidenum">
               <a:rPr lang="en-US" b="0"/>
+              <a:t>1</a:t>
             </a:fld>
             <a:endParaRPr lang="en-US"/>
+          </a:p>
+        </p:txBody>
+      </p:sp>
+      <p:sp>
+        <p:nvSpPr>
+          <p:cNvPr id="22" name="g1_sub">
+            <a:extLst>
+              <a:ext uri="{FF2B5EF4-FFF2-40B4-BE49-F238E27FC236}">
+                <a16:creationId xmlns:a16="http://schemas.microsoft.com/office/drawing/2014/main" id="{503AD420-AEB5-6CB8-DA57-56287DBDE697}"/>
+              </a:ext>
+            </a:extLst>
+          </p:cNvPr>
+          <p:cNvSpPr txBox="1"/>
+          <p:nvPr/>
+        </p:nvSpPr>
+        <p:spPr>
+          <a:xfrm>
+            <a:off x="640080" y="316523"/>
+            <a:ext cx="8046720" cy="411480"/>
+          </a:xfrm>
+          <a:prstGeom prst="rect">
+            <a:avLst/>
+          </a:prstGeom>
+          <a:noFill/>
+        </p:spPr>
+        <p:txBody>
+          <a:bodyPr wrap="square" lIns="0" tIns="0" rIns="0" bIns="0" rtlCol="0" anchor="ctr"/>
+          <a:lstStyle/>
+          <a:p>
+            <a:pPr marL="0" indent="0">
+              <a:buNone/>
+            </a:pPr>
+            <a:r>
+              <a:rPr lang="en-US" sz="2000" dirty="0">
+                <a:solidFill>
+                  <a:schemeClr val="accent2"/>
+                </a:solidFill>
+                <a:latin typeface="Cambria" panose="02040503050406030204" pitchFamily="34" charset="0"/>
+                <a:ea typeface="Cambria" panose="02040503050406030204" pitchFamily="34" charset="-122"/>
+              </a:rPr>
+              <a:t>Name : Fahim Shahenshah Yadgir</a:t>
+            </a:r>
+            <a:endParaRPr lang="en-US" sz="2000" dirty="0"/>
           </a:p>
         </p:txBody>
       </p:sp>
@@ -3038,6 +3224,59 @@
                                         <p:cTn id="63" dur="500"/>
                                         <p:tgtEl>
                                           <p:spTgt spid="19"/>
+                                        </p:tgtEl>
+                                      </p:cBhvr>
+                                    </p:animEffect>
+                                  </p:childTnLst>
+                                </p:cTn>
+                              </p:par>
+                            </p:childTnLst>
+                          </p:cTn>
+                        </p:par>
+                      </p:childTnLst>
+                    </p:cTn>
+                  </p:par>
+                  <p:par>
+                    <p:cTn id="64" fill="hold">
+                      <p:stCondLst>
+                        <p:cond delay="indefinite"/>
+                      </p:stCondLst>
+                      <p:childTnLst>
+                        <p:par>
+                          <p:cTn id="65" fill="hold">
+                            <p:stCondLst>
+                              <p:cond delay="0"/>
+                            </p:stCondLst>
+                            <p:childTnLst>
+                              <p:par>
+                                <p:cTn id="66" presetID="10" presetClass="entr" presetSubtype="0" fill="hold" nodeType="clickEffect">
+                                  <p:stCondLst>
+                                    <p:cond delay="0"/>
+                                  </p:stCondLst>
+                                  <p:childTnLst>
+                                    <p:set>
+                                      <p:cBhvr>
+                                        <p:cTn id="67" dur="1" fill="hold">
+                                          <p:stCondLst>
+                                            <p:cond delay="0"/>
+                                          </p:stCondLst>
+                                        </p:cTn>
+                                        <p:tgtEl>
+                                          <p:spTgt spid="22"/>
+                                        </p:tgtEl>
+                                        <p:attrNameLst>
+                                          <p:attrName>style.visibility</p:attrName>
+                                        </p:attrNameLst>
+                                      </p:cBhvr>
+                                      <p:to>
+                                        <p:strVal val="visible"/>
+                                      </p:to>
+                                    </p:set>
+                                    <p:animEffect transition="in" filter="fade">
+                                      <p:cBhvr>
+                                        <p:cTn id="68" dur="500"/>
+                                        <p:tgtEl>
+                                          <p:spTgt spid="22"/>
                                         </p:tgtEl>
                                       </p:cBhvr>
                                     </p:animEffect>
@@ -3164,6 +3403,13 @@
             <a:prstDash val="solid"/>
           </a:ln>
         </p:spPr>
+        <p:txBody>
+          <a:bodyPr/>
+          <a:lstStyle/>
+          <a:p>
+            <a:endParaRPr lang="en-IN"/>
+          </a:p>
+        </p:txBody>
       </p:sp>
       <p:sp>
         <p:nvSpPr>
@@ -3271,6 +3517,13 @@
             <a:prstDash val="solid"/>
           </a:ln>
         </p:spPr>
+        <p:txBody>
+          <a:bodyPr/>
+          <a:lstStyle/>
+          <a:p>
+            <a:endParaRPr lang="en-IN"/>
+          </a:p>
+        </p:txBody>
       </p:sp>
       <p:sp>
         <p:nvSpPr>
@@ -3378,6 +3631,13 @@
             <a:prstDash val="solid"/>
           </a:ln>
         </p:spPr>
+        <p:txBody>
+          <a:bodyPr/>
+          <a:lstStyle/>
+          <a:p>
+            <a:endParaRPr lang="en-IN"/>
+          </a:p>
+        </p:txBody>
       </p:sp>
       <p:sp>
         <p:nvSpPr>
@@ -3485,6 +3745,13 @@
             <a:prstDash val="solid"/>
           </a:ln>
         </p:spPr>
+        <p:txBody>
+          <a:bodyPr/>
+          <a:lstStyle/>
+          <a:p>
+            <a:endParaRPr lang="en-IN"/>
+          </a:p>
+        </p:txBody>
       </p:sp>
       <p:sp>
         <p:nvSpPr>
@@ -3596,6 +3863,7 @@
             <a:pPr algn="l"/>
             <a:fld id="{F7021451-1387-4CA6-816F-3879F97B5CBC}" type="slidenum">
               <a:rPr lang="en-US" b="0"/>
+              <a:t>10</a:t>
             </a:fld>
             <a:endParaRPr lang="en-US"/>
           </a:p>
@@ -4226,6 +4494,13 @@
             </a:outerShdw>
           </a:effectLst>
         </p:spPr>
+        <p:txBody>
+          <a:bodyPr/>
+          <a:lstStyle/>
+          <a:p>
+            <a:endParaRPr lang="en-IN"/>
+          </a:p>
+        </p:txBody>
       </p:sp>
       <p:pic>
         <p:nvPicPr>
@@ -4236,7 +4511,7 @@
           <p:nvPr/>
         </p:nvPicPr>
         <p:blipFill>
-          <a:blip r:embed="rId1"/>
+          <a:blip r:embed="rId3"/>
           <a:stretch>
             <a:fillRect/>
           </a:stretch>
@@ -4284,6 +4559,13 @@
             </a:outerShdw>
           </a:effectLst>
         </p:spPr>
+        <p:txBody>
+          <a:bodyPr/>
+          <a:lstStyle/>
+          <a:p>
+            <a:endParaRPr lang="en-IN"/>
+          </a:p>
+        </p:txBody>
       </p:sp>
       <p:sp>
         <p:nvSpPr>
@@ -4432,6 +4714,13 @@
             </a:outerShdw>
           </a:effectLst>
         </p:spPr>
+        <p:txBody>
+          <a:bodyPr/>
+          <a:lstStyle/>
+          <a:p>
+            <a:endParaRPr lang="en-IN"/>
+          </a:p>
+        </p:txBody>
       </p:sp>
       <p:sp>
         <p:nvSpPr>
@@ -4581,6 +4870,7 @@
             <a:pPr algn="l"/>
             <a:fld id="{F7021451-1387-4CA6-816F-3879F97B5CBC}" type="slidenum">
               <a:rPr lang="en-US" b="0"/>
+              <a:t>2</a:t>
             </a:fld>
             <a:endParaRPr lang="en-US"/>
           </a:p>
@@ -5123,6 +5413,13 @@
             </a:outerShdw>
           </a:effectLst>
         </p:spPr>
+        <p:txBody>
+          <a:bodyPr/>
+          <a:lstStyle/>
+          <a:p>
+            <a:endParaRPr lang="en-IN"/>
+          </a:p>
+        </p:txBody>
       </p:sp>
       <p:sp>
         <p:nvSpPr>
@@ -5378,6 +5675,13 @@
             <a:prstDash val="solid"/>
           </a:ln>
         </p:spPr>
+        <p:txBody>
+          <a:bodyPr/>
+          <a:lstStyle/>
+          <a:p>
+            <a:endParaRPr lang="en-IN"/>
+          </a:p>
+        </p:txBody>
       </p:sp>
       <p:sp>
         <p:nvSpPr>
@@ -5461,6 +5765,13 @@
             </a:outerShdw>
           </a:effectLst>
         </p:spPr>
+        <p:txBody>
+          <a:bodyPr/>
+          <a:lstStyle/>
+          <a:p>
+            <a:endParaRPr lang="en-IN"/>
+          </a:p>
+        </p:txBody>
       </p:sp>
       <p:sp>
         <p:nvSpPr>
@@ -5716,6 +6027,13 @@
             <a:prstDash val="solid"/>
           </a:ln>
         </p:spPr>
+        <p:txBody>
+          <a:bodyPr/>
+          <a:lstStyle/>
+          <a:p>
+            <a:endParaRPr lang="en-IN"/>
+          </a:p>
+        </p:txBody>
       </p:sp>
       <p:sp>
         <p:nvSpPr>
@@ -5799,6 +6117,13 @@
             </a:outerShdw>
           </a:effectLst>
         </p:spPr>
+        <p:txBody>
+          <a:bodyPr/>
+          <a:lstStyle/>
+          <a:p>
+            <a:endParaRPr lang="en-IN"/>
+          </a:p>
+        </p:txBody>
       </p:sp>
       <p:sp>
         <p:nvSpPr>
@@ -6054,6 +6379,13 @@
             <a:prstDash val="solid"/>
           </a:ln>
         </p:spPr>
+        <p:txBody>
+          <a:bodyPr/>
+          <a:lstStyle/>
+          <a:p>
+            <a:endParaRPr lang="en-IN"/>
+          </a:p>
+        </p:txBody>
       </p:sp>
       <p:sp>
         <p:nvSpPr>
@@ -6138,6 +6470,7 @@
             <a:pPr algn="l"/>
             <a:fld id="{F7021451-1387-4CA6-816F-3879F97B5CBC}" type="slidenum">
               <a:rPr lang="en-US" b="0"/>
+              <a:t>3</a:t>
             </a:fld>
             <a:endParaRPr lang="en-US"/>
           </a:p>
@@ -7275,6 +7608,13 @@
             </a:outerShdw>
           </a:effectLst>
         </p:spPr>
+        <p:txBody>
+          <a:bodyPr/>
+          <a:lstStyle/>
+          <a:p>
+            <a:endParaRPr lang="en-IN"/>
+          </a:p>
+        </p:txBody>
       </p:sp>
       <p:pic>
         <p:nvPicPr>
@@ -7285,7 +7625,7 @@
           <p:nvPr/>
         </p:nvPicPr>
         <p:blipFill>
-          <a:blip r:embed="rId1"/>
+          <a:blip r:embed="rId3"/>
           <a:stretch>
             <a:fillRect/>
           </a:stretch>
@@ -7333,6 +7673,13 @@
             </a:outerShdw>
           </a:effectLst>
         </p:spPr>
+        <p:txBody>
+          <a:bodyPr/>
+          <a:lstStyle/>
+          <a:p>
+            <a:endParaRPr lang="en-IN"/>
+          </a:p>
+        </p:txBody>
       </p:sp>
       <p:sp>
         <p:nvSpPr>
@@ -7481,6 +7828,13 @@
             </a:outerShdw>
           </a:effectLst>
         </p:spPr>
+        <p:txBody>
+          <a:bodyPr/>
+          <a:lstStyle/>
+          <a:p>
+            <a:endParaRPr lang="en-IN"/>
+          </a:p>
+        </p:txBody>
       </p:sp>
       <p:sp>
         <p:nvSpPr>
@@ -7630,6 +7984,7 @@
             <a:pPr algn="l"/>
             <a:fld id="{F7021451-1387-4CA6-816F-3879F97B5CBC}" type="slidenum">
               <a:rPr lang="en-US" b="0"/>
+              <a:t>4</a:t>
             </a:fld>
             <a:endParaRPr lang="en-US"/>
           </a:p>
@@ -8156,9 +8511,27 @@
             <a:tbl>
               <a:tblPr/>
               <a:tblGrid>
-                <a:gridCol w="3200400"/>
-                <a:gridCol w="2560320"/>
-                <a:gridCol w="2468880"/>
+                <a:gridCol w="3200400">
+                  <a:extLst>
+                    <a:ext uri="{9D8B030D-6E8A-4147-A177-3AD203B41FA5}">
+                      <a16:colId xmlns:a16="http://schemas.microsoft.com/office/drawing/2014/main" val="20000"/>
+                    </a:ext>
+                  </a:extLst>
+                </a:gridCol>
+                <a:gridCol w="2560320">
+                  <a:extLst>
+                    <a:ext uri="{9D8B030D-6E8A-4147-A177-3AD203B41FA5}">
+                      <a16:colId xmlns:a16="http://schemas.microsoft.com/office/drawing/2014/main" val="20001"/>
+                    </a:ext>
+                  </a:extLst>
+                </a:gridCol>
+                <a:gridCol w="2468880">
+                  <a:extLst>
+                    <a:ext uri="{9D8B030D-6E8A-4147-A177-3AD203B41FA5}">
+                      <a16:colId xmlns:a16="http://schemas.microsoft.com/office/drawing/2014/main" val="20002"/>
+                    </a:ext>
+                  </a:extLst>
+                </a:gridCol>
               </a:tblGrid>
               <a:tr h="365760">
                 <a:tc>
@@ -8365,6 +8738,11 @@
                     </a:solidFill>
                   </a:tcPr>
                 </a:tc>
+                <a:extLst>
+                  <a:ext uri="{0D108BD9-81ED-4DB2-BD59-A6C34878D82A}">
+                    <a16:rowId xmlns:a16="http://schemas.microsoft.com/office/drawing/2014/main" val="10000"/>
+                  </a:ext>
+                </a:extLst>
               </a:tr>
               <a:tr h="365760">
                 <a:tc>
@@ -8571,6 +8949,11 @@
                     </a:solidFill>
                   </a:tcPr>
                 </a:tc>
+                <a:extLst>
+                  <a:ext uri="{0D108BD9-81ED-4DB2-BD59-A6C34878D82A}">
+                    <a16:rowId xmlns:a16="http://schemas.microsoft.com/office/drawing/2014/main" val="10001"/>
+                  </a:ext>
+                </a:extLst>
               </a:tr>
               <a:tr h="365760">
                 <a:tc>
@@ -8777,6 +9160,11 @@
                     </a:solidFill>
                   </a:tcPr>
                 </a:tc>
+                <a:extLst>
+                  <a:ext uri="{0D108BD9-81ED-4DB2-BD59-A6C34878D82A}">
+                    <a16:rowId xmlns:a16="http://schemas.microsoft.com/office/drawing/2014/main" val="10002"/>
+                  </a:ext>
+                </a:extLst>
               </a:tr>
               <a:tr h="365760">
                 <a:tc>
@@ -8983,6 +9371,11 @@
                     </a:solidFill>
                   </a:tcPr>
                 </a:tc>
+                <a:extLst>
+                  <a:ext uri="{0D108BD9-81ED-4DB2-BD59-A6C34878D82A}">
+                    <a16:rowId xmlns:a16="http://schemas.microsoft.com/office/drawing/2014/main" val="10003"/>
+                  </a:ext>
+                </a:extLst>
               </a:tr>
               <a:tr h="365760">
                 <a:tc>
@@ -9189,6 +9582,11 @@
                     </a:solidFill>
                   </a:tcPr>
                 </a:tc>
+                <a:extLst>
+                  <a:ext uri="{0D108BD9-81ED-4DB2-BD59-A6C34878D82A}">
+                    <a16:rowId xmlns:a16="http://schemas.microsoft.com/office/drawing/2014/main" val="10004"/>
+                  </a:ext>
+                </a:extLst>
               </a:tr>
             </a:tbl>
           </a:graphicData>
@@ -9227,6 +9625,13 @@
             </a:outerShdw>
           </a:effectLst>
         </p:spPr>
+        <p:txBody>
+          <a:bodyPr/>
+          <a:lstStyle/>
+          <a:p>
+            <a:endParaRPr lang="en-IN"/>
+          </a:p>
+        </p:txBody>
       </p:sp>
       <p:sp>
         <p:nvSpPr>
@@ -9337,6 +9742,13 @@
             </a:outerShdw>
           </a:effectLst>
         </p:spPr>
+        <p:txBody>
+          <a:bodyPr/>
+          <a:lstStyle/>
+          <a:p>
+            <a:endParaRPr lang="en-IN"/>
+          </a:p>
+        </p:txBody>
       </p:sp>
       <p:sp>
         <p:nvSpPr>
@@ -9447,6 +9859,13 @@
             </a:outerShdw>
           </a:effectLst>
         </p:spPr>
+        <p:txBody>
+          <a:bodyPr/>
+          <a:lstStyle/>
+          <a:p>
+            <a:endParaRPr lang="en-IN"/>
+          </a:p>
+        </p:txBody>
       </p:sp>
       <p:sp>
         <p:nvSpPr>
@@ -9558,6 +9977,7 @@
             <a:pPr algn="l"/>
             <a:fld id="{F7021451-1387-4CA6-816F-3879F97B5CBC}" type="slidenum">
               <a:rPr lang="en-US" b="0"/>
+              <a:t>5</a:t>
             </a:fld>
             <a:endParaRPr lang="en-US"/>
           </a:p>
@@ -10118,6 +10538,13 @@
             </a:outerShdw>
           </a:effectLst>
         </p:spPr>
+        <p:txBody>
+          <a:bodyPr/>
+          <a:lstStyle/>
+          <a:p>
+            <a:endParaRPr lang="en-IN"/>
+          </a:p>
+        </p:txBody>
       </p:sp>
       <p:pic>
         <p:nvPicPr>
@@ -10128,7 +10555,7 @@
           <p:nvPr/>
         </p:nvPicPr>
         <p:blipFill>
-          <a:blip r:embed="rId1"/>
+          <a:blip r:embed="rId3"/>
           <a:stretch>
             <a:fillRect/>
           </a:stretch>
@@ -10176,6 +10603,13 @@
             </a:outerShdw>
           </a:effectLst>
         </p:spPr>
+        <p:txBody>
+          <a:bodyPr/>
+          <a:lstStyle/>
+          <a:p>
+            <a:endParaRPr lang="en-IN"/>
+          </a:p>
+        </p:txBody>
       </p:sp>
       <p:sp>
         <p:nvSpPr>
@@ -10286,6 +10720,13 @@
             </a:outerShdw>
           </a:effectLst>
         </p:spPr>
+        <p:txBody>
+          <a:bodyPr/>
+          <a:lstStyle/>
+          <a:p>
+            <a:endParaRPr lang="en-IN"/>
+          </a:p>
+        </p:txBody>
       </p:sp>
       <p:sp>
         <p:nvSpPr>
@@ -10369,6 +10810,13 @@
             </a:outerShdw>
           </a:effectLst>
         </p:spPr>
+        <p:txBody>
+          <a:bodyPr/>
+          <a:lstStyle/>
+          <a:p>
+            <a:endParaRPr lang="en-IN"/>
+          </a:p>
+        </p:txBody>
       </p:sp>
       <p:sp>
         <p:nvSpPr>
@@ -10445,6 +10893,13 @@
             <a:prstDash val="solid"/>
           </a:ln>
         </p:spPr>
+        <p:txBody>
+          <a:bodyPr/>
+          <a:lstStyle/>
+          <a:p>
+            <a:endParaRPr lang="en-IN"/>
+          </a:p>
+        </p:txBody>
       </p:sp>
       <p:sp>
         <p:nvSpPr>
@@ -10529,6 +10984,7 @@
             <a:pPr algn="l"/>
             <a:fld id="{F7021451-1387-4CA6-816F-3879F97B5CBC}" type="slidenum">
               <a:rPr lang="en-US" b="0"/>
+              <a:t>6</a:t>
             </a:fld>
             <a:endParaRPr lang="en-US"/>
           </a:p>
@@ -11142,6 +11598,13 @@
             </a:outerShdw>
           </a:effectLst>
         </p:spPr>
+        <p:txBody>
+          <a:bodyPr/>
+          <a:lstStyle/>
+          <a:p>
+            <a:endParaRPr lang="en-IN"/>
+          </a:p>
+        </p:txBody>
       </p:sp>
       <p:sp>
         <p:nvSpPr>
@@ -11252,6 +11715,13 @@
             </a:outerShdw>
           </a:effectLst>
         </p:spPr>
+        <p:txBody>
+          <a:bodyPr/>
+          <a:lstStyle/>
+          <a:p>
+            <a:endParaRPr lang="en-IN"/>
+          </a:p>
+        </p:txBody>
       </p:sp>
       <p:sp>
         <p:nvSpPr>
@@ -11362,6 +11832,13 @@
             </a:outerShdw>
           </a:effectLst>
         </p:spPr>
+        <p:txBody>
+          <a:bodyPr/>
+          <a:lstStyle/>
+          <a:p>
+            <a:endParaRPr lang="en-IN"/>
+          </a:p>
+        </p:txBody>
       </p:sp>
       <p:sp>
         <p:nvSpPr>
@@ -11472,6 +11949,13 @@
             </a:outerShdw>
           </a:effectLst>
         </p:spPr>
+        <p:txBody>
+          <a:bodyPr/>
+          <a:lstStyle/>
+          <a:p>
+            <a:endParaRPr lang="en-IN"/>
+          </a:p>
+        </p:txBody>
       </p:sp>
       <p:sp>
         <p:nvSpPr>
@@ -11520,7 +12004,7 @@
           <p:nvPr/>
         </p:nvPicPr>
         <p:blipFill>
-          <a:blip r:embed="rId1"/>
+          <a:blip r:embed="rId3"/>
           <a:stretch>
             <a:fillRect/>
           </a:stretch>
@@ -11828,6 +12312,7 @@
             <a:pPr algn="l"/>
             <a:fld id="{F7021451-1387-4CA6-816F-3879F97B5CBC}" type="slidenum">
               <a:rPr lang="en-US" b="0"/>
+              <a:t>7</a:t>
             </a:fld>
             <a:endParaRPr lang="en-US"/>
           </a:p>
@@ -12598,6 +13083,13 @@
             </a:outerShdw>
           </a:effectLst>
         </p:spPr>
+        <p:txBody>
+          <a:bodyPr/>
+          <a:lstStyle/>
+          <a:p>
+            <a:endParaRPr lang="en-IN"/>
+          </a:p>
+        </p:txBody>
       </p:sp>
       <p:pic>
         <p:nvPicPr>
@@ -12608,7 +13100,7 @@
           <p:nvPr/>
         </p:nvPicPr>
         <p:blipFill>
-          <a:blip r:embed="rId1"/>
+          <a:blip r:embed="rId3"/>
           <a:stretch>
             <a:fillRect/>
           </a:stretch>
@@ -12656,6 +13148,13 @@
             </a:outerShdw>
           </a:effectLst>
         </p:spPr>
+        <p:txBody>
+          <a:bodyPr/>
+          <a:lstStyle/>
+          <a:p>
+            <a:endParaRPr lang="en-IN"/>
+          </a:p>
+        </p:txBody>
       </p:sp>
       <p:sp>
         <p:nvSpPr>
@@ -12739,6 +13238,13 @@
             </a:outerShdw>
           </a:effectLst>
         </p:spPr>
+        <p:txBody>
+          <a:bodyPr/>
+          <a:lstStyle/>
+          <a:p>
+            <a:endParaRPr lang="en-IN"/>
+          </a:p>
+        </p:txBody>
       </p:sp>
       <p:sp>
         <p:nvSpPr>
@@ -12822,6 +13328,13 @@
             </a:outerShdw>
           </a:effectLst>
         </p:spPr>
+        <p:txBody>
+          <a:bodyPr/>
+          <a:lstStyle/>
+          <a:p>
+            <a:endParaRPr lang="en-IN"/>
+          </a:p>
+        </p:txBody>
       </p:sp>
       <p:sp>
         <p:nvSpPr>
@@ -12898,6 +13411,13 @@
             <a:prstDash val="solid"/>
           </a:ln>
         </p:spPr>
+        <p:txBody>
+          <a:bodyPr/>
+          <a:lstStyle/>
+          <a:p>
+            <a:endParaRPr lang="en-IN"/>
+          </a:p>
+        </p:txBody>
       </p:sp>
       <p:sp>
         <p:nvSpPr>
@@ -12982,6 +13502,7 @@
             <a:pPr algn="l"/>
             <a:fld id="{F7021451-1387-4CA6-816F-3879F97B5CBC}" type="slidenum">
               <a:rPr lang="en-US" b="0"/>
+              <a:t>8</a:t>
             </a:fld>
             <a:endParaRPr lang="en-US"/>
           </a:p>
@@ -13544,9 +14065,27 @@
             <a:tbl>
               <a:tblPr/>
               <a:tblGrid>
-                <a:gridCol w="1188720"/>
-                <a:gridCol w="1554480"/>
-                <a:gridCol w="1280160"/>
+                <a:gridCol w="1188720">
+                  <a:extLst>
+                    <a:ext uri="{9D8B030D-6E8A-4147-A177-3AD203B41FA5}">
+                      <a16:colId xmlns:a16="http://schemas.microsoft.com/office/drawing/2014/main" val="20000"/>
+                    </a:ext>
+                  </a:extLst>
+                </a:gridCol>
+                <a:gridCol w="1554480">
+                  <a:extLst>
+                    <a:ext uri="{9D8B030D-6E8A-4147-A177-3AD203B41FA5}">
+                      <a16:colId xmlns:a16="http://schemas.microsoft.com/office/drawing/2014/main" val="20001"/>
+                    </a:ext>
+                  </a:extLst>
+                </a:gridCol>
+                <a:gridCol w="1280160">
+                  <a:extLst>
+                    <a:ext uri="{9D8B030D-6E8A-4147-A177-3AD203B41FA5}">
+                      <a16:colId xmlns:a16="http://schemas.microsoft.com/office/drawing/2014/main" val="20002"/>
+                    </a:ext>
+                  </a:extLst>
+                </a:gridCol>
               </a:tblGrid>
               <a:tr h="329184">
                 <a:tc>
@@ -13753,6 +14292,11 @@
                     </a:solidFill>
                   </a:tcPr>
                 </a:tc>
+                <a:extLst>
+                  <a:ext uri="{0D108BD9-81ED-4DB2-BD59-A6C34878D82A}">
+                    <a16:rowId xmlns:a16="http://schemas.microsoft.com/office/drawing/2014/main" val="10000"/>
+                  </a:ext>
+                </a:extLst>
               </a:tr>
               <a:tr h="329184">
                 <a:tc>
@@ -13959,6 +14503,11 @@
                     </a:solidFill>
                   </a:tcPr>
                 </a:tc>
+                <a:extLst>
+                  <a:ext uri="{0D108BD9-81ED-4DB2-BD59-A6C34878D82A}">
+                    <a16:rowId xmlns:a16="http://schemas.microsoft.com/office/drawing/2014/main" val="10001"/>
+                  </a:ext>
+                </a:extLst>
               </a:tr>
               <a:tr h="329184">
                 <a:tc>
@@ -14165,6 +14714,11 @@
                     </a:solidFill>
                   </a:tcPr>
                 </a:tc>
+                <a:extLst>
+                  <a:ext uri="{0D108BD9-81ED-4DB2-BD59-A6C34878D82A}">
+                    <a16:rowId xmlns:a16="http://schemas.microsoft.com/office/drawing/2014/main" val="10002"/>
+                  </a:ext>
+                </a:extLst>
               </a:tr>
               <a:tr h="329184">
                 <a:tc>
@@ -14371,6 +14925,11 @@
                     </a:solidFill>
                   </a:tcPr>
                 </a:tc>
+                <a:extLst>
+                  <a:ext uri="{0D108BD9-81ED-4DB2-BD59-A6C34878D82A}">
+                    <a16:rowId xmlns:a16="http://schemas.microsoft.com/office/drawing/2014/main" val="10003"/>
+                  </a:ext>
+                </a:extLst>
               </a:tr>
               <a:tr h="329184">
                 <a:tc>
@@ -14577,6 +15136,11 @@
                     </a:solidFill>
                   </a:tcPr>
                 </a:tc>
+                <a:extLst>
+                  <a:ext uri="{0D108BD9-81ED-4DB2-BD59-A6C34878D82A}">
+                    <a16:rowId xmlns:a16="http://schemas.microsoft.com/office/drawing/2014/main" val="10004"/>
+                  </a:ext>
+                </a:extLst>
               </a:tr>
               <a:tr h="329184">
                 <a:tc>
@@ -14783,6 +15347,11 @@
                     </a:solidFill>
                   </a:tcPr>
                 </a:tc>
+                <a:extLst>
+                  <a:ext uri="{0D108BD9-81ED-4DB2-BD59-A6C34878D82A}">
+                    <a16:rowId xmlns:a16="http://schemas.microsoft.com/office/drawing/2014/main" val="10005"/>
+                  </a:ext>
+                </a:extLst>
               </a:tr>
               <a:tr h="329184">
                 <a:tc>
@@ -14989,6 +15558,11 @@
                     </a:solidFill>
                   </a:tcPr>
                 </a:tc>
+                <a:extLst>
+                  <a:ext uri="{0D108BD9-81ED-4DB2-BD59-A6C34878D82A}">
+                    <a16:rowId xmlns:a16="http://schemas.microsoft.com/office/drawing/2014/main" val="10006"/>
+                  </a:ext>
+                </a:extLst>
               </a:tr>
               <a:tr h="329184">
                 <a:tc>
@@ -15195,6 +15769,11 @@
                     </a:solidFill>
                   </a:tcPr>
                 </a:tc>
+                <a:extLst>
+                  <a:ext uri="{0D108BD9-81ED-4DB2-BD59-A6C34878D82A}">
+                    <a16:rowId xmlns:a16="http://schemas.microsoft.com/office/drawing/2014/main" val="10007"/>
+                  </a:ext>
+                </a:extLst>
               </a:tr>
               <a:tr h="329184">
                 <a:tc>
@@ -15401,6 +15980,11 @@
                     </a:solidFill>
                   </a:tcPr>
                 </a:tc>
+                <a:extLst>
+                  <a:ext uri="{0D108BD9-81ED-4DB2-BD59-A6C34878D82A}">
+                    <a16:rowId xmlns:a16="http://schemas.microsoft.com/office/drawing/2014/main" val="10008"/>
+                  </a:ext>
+                </a:extLst>
               </a:tr>
               <a:tr h="329184">
                 <a:tc>
@@ -15607,6 +16191,11 @@
                     </a:solidFill>
                   </a:tcPr>
                 </a:tc>
+                <a:extLst>
+                  <a:ext uri="{0D108BD9-81ED-4DB2-BD59-A6C34878D82A}">
+                    <a16:rowId xmlns:a16="http://schemas.microsoft.com/office/drawing/2014/main" val="10009"/>
+                  </a:ext>
+                </a:extLst>
               </a:tr>
             </a:tbl>
           </a:graphicData>
@@ -15645,6 +16234,13 @@
             </a:outerShdw>
           </a:effectLst>
         </p:spPr>
+        <p:txBody>
+          <a:bodyPr/>
+          <a:lstStyle/>
+          <a:p>
+            <a:endParaRPr lang="en-IN"/>
+          </a:p>
+        </p:txBody>
       </p:sp>
       <p:sp>
         <p:nvSpPr>
@@ -15755,6 +16351,13 @@
             </a:outerShdw>
           </a:effectLst>
         </p:spPr>
+        <p:txBody>
+          <a:bodyPr/>
+          <a:lstStyle/>
+          <a:p>
+            <a:endParaRPr lang="en-IN"/>
+          </a:p>
+        </p:txBody>
       </p:sp>
       <p:sp>
         <p:nvSpPr>
@@ -15865,6 +16468,13 @@
             </a:outerShdw>
           </a:effectLst>
         </p:spPr>
+        <p:txBody>
+          <a:bodyPr/>
+          <a:lstStyle/>
+          <a:p>
+            <a:endParaRPr lang="en-IN"/>
+          </a:p>
+        </p:txBody>
       </p:sp>
       <p:sp>
         <p:nvSpPr>
@@ -15976,6 +16586,7 @@
             <a:pPr algn="l"/>
             <a:fld id="{F7021451-1387-4CA6-816F-3879F97B5CBC}" type="slidenum">
               <a:rPr lang="en-US" b="0"/>
+              <a:t>9</a:t>
             </a:fld>
             <a:endParaRPr lang="en-US"/>
           </a:p>
@@ -16695,6 +17306,8 @@
       </a:bgFillStyleLst>
     </a:fmtScheme>
   </a:themeElements>
+  <a:objectDefaults/>
+  <a:extraClrSchemeLst/>
   <a:extLst>
     <a:ext uri="{05A4C25C-085E-4340-85A3-A5531E510DB2}">
       <thm15:themeFamily xmlns:thm15="http://schemas.microsoft.com/office/thememl/2012/main" name="Office Theme" id="{62F939B6-93AF-4DB8-9C6B-D6C7DFDC589F}" vid="{4A3C46E8-61CC-4603-A589-7422A47A8E4A}"/>
@@ -16975,6 +17588,7 @@
       </a:style>
     </a:lnDef>
   </a:objectDefaults>
+  <a:extraClrSchemeLst/>
   <a:extLst>
     <a:ext uri="{05A4C25C-085E-4340-85A3-A5531E510DB2}">
       <thm15:themeFamily xmlns:thm15="http://schemas.microsoft.com/office/thememl/2012/main" name="Office Theme" id="{62F939B6-93AF-4DB8-9C6B-D6C7DFDC589F}" vid="{4A3C46E8-61CC-4603-A589-7422A47A8E4A}"/>
